--- a/presentation/deck.pptx
+++ b/presentation/deck.pptx
@@ -115,39 +115,39 @@
   <p:extLst>
     <p:ext uri="{521415D9-36F7-43E2-AB2F-B90AF26B5E84}">
       <p14:sectionLst xmlns:p14="http://schemas.microsoft.com/office/powerpoint/2010/main">
-        <p14:section name="Hook" id="{0a4487c6-e091-95be-09bc-20561730b73b}">
+        <p14:section name="Hook" id="{cf41dbd3-1f2a-ab8e-f5f4-87b4f5c8a151}">
           <p14:sldIdLst>
             <p14:sldId id="256"/>
           </p14:sldIdLst>
         </p14:section>
-        <p14:section name="Problem" id="{34acb0de-a7b7-515d-b37e-5f5b79c49185}">
+        <p14:section name="Problem" id="{fbed2f60-68c7-c95e-2d02-4bb92a2e71b5}">
           <p14:sldIdLst>
             <p14:sldId id="257"/>
           </p14:sldIdLst>
         </p14:section>
-        <p14:section name="Solution" id="{d5148b95-8f14-7e8b-7e4c-40bca8362257}">
+        <p14:section name="Solution" id="{329aa7a0-e0cd-a07e-b7ab-f2c1fea18c5a}">
           <p14:sldIdLst>
             <p14:sldId id="258"/>
           </p14:sldIdLst>
         </p14:section>
-        <p14:section name="Results" id="{6b9b5ee6-181b-978c-5c7b-a0ae188155bb}">
+        <p14:section name="Results" id="{2b10504a-4311-ba15-ef13-93e8d9535971}">
           <p14:sldIdLst>
             <p14:sldId id="259"/>
             <p14:sldId id="260"/>
             <p14:sldId id="261"/>
           </p14:sldIdLst>
         </p14:section>
-        <p14:section name="Working together" id="{ed819ad2-2745-d39b-7381-6047e3301d3f}">
+        <p14:section name="Working together" id="{1416be45-bc4c-08b6-b06c-68035b5fa0ac}">
           <p14:sldIdLst>
             <p14:sldId id="262"/>
           </p14:sldIdLst>
         </p14:section>
-        <p14:section name="Call to action" id="{a3c9a77d-bf7c-c920-7aeb-f06705fb4053}">
+        <p14:section name="Call to action" id="{7dc12d96-1b22-23ad-73a4-eef88b70c086}">
           <p14:sldIdLst>
             <p14:sldId id="263"/>
           </p14:sldIdLst>
         </p14:section>
-        <p14:section name="Appendix" id="{8f2357f6-d9d1-bfbc-9412-38fbf14cb15a}">
+        <p14:section name="Appendix" id="{c6a91da5-5f65-3a64-6d40-1c9be3ea68b5}">
           <p14:sldIdLst>
             <p14:sldId id="264"/>
           </p14:sldIdLst>
@@ -4964,7 +4964,7 @@
                 <a:ea typeface="Arial" pitchFamily="34" charset="-122"/>
                 <a:cs typeface="Arial" pitchFamily="34" charset="-120"/>
               </a:rPr>
-              <a:t>Representative, not cherry-picked.</a:t>
+              <a:t>Real results on textures it never saw.</a:t>
             </a:r>
             <a:endParaRPr lang="en-US" sz="3400" dirty="0"/>
           </a:p>
@@ -6156,7 +6156,7 @@
                 <a:ea typeface="Arial" pitchFamily="34" charset="-122"/>
                 <a:cs typeface="Arial" pitchFamily="34" charset="-120"/>
               </a:rPr>
-              <a:t>Benchmarked, not guessed.</a:t>
+              <a:t>The numbers behind it.</a:t>
             </a:r>
             <a:endParaRPr lang="en-US" sz="3400" dirty="0"/>
           </a:p>

--- a/presentation/deck.pptx
+++ b/presentation/deck.pptx
@@ -115,39 +115,39 @@
   <p:extLst>
     <p:ext uri="{521415D9-36F7-43E2-AB2F-B90AF26B5E84}">
       <p14:sectionLst xmlns:p14="http://schemas.microsoft.com/office/powerpoint/2010/main">
-        <p14:section name="Hook" id="{cf41dbd3-1f2a-ab8e-f5f4-87b4f5c8a151}">
+        <p14:section name="Hook" id="{df10b5c0-0eba-d61d-3c74-205a784b13cf}">
           <p14:sldIdLst>
             <p14:sldId id="256"/>
           </p14:sldIdLst>
         </p14:section>
-        <p14:section name="Problem" id="{fbed2f60-68c7-c95e-2d02-4bb92a2e71b5}">
+        <p14:section name="Problem" id="{133a19d1-7526-cb53-6ba1-9beac4af8fd2}">
           <p14:sldIdLst>
             <p14:sldId id="257"/>
           </p14:sldIdLst>
         </p14:section>
-        <p14:section name="Solution" id="{329aa7a0-e0cd-a07e-b7ab-f2c1fea18c5a}">
+        <p14:section name="Solution" id="{b677a2f5-ebd0-1cb9-ec23-a65598b77ab6}">
           <p14:sldIdLst>
             <p14:sldId id="258"/>
           </p14:sldIdLst>
         </p14:section>
-        <p14:section name="Results" id="{2b10504a-4311-ba15-ef13-93e8d9535971}">
+        <p14:section name="Results" id="{e12e3ffe-f2fb-4abc-5cd7-1bb9511e3022}">
           <p14:sldIdLst>
             <p14:sldId id="259"/>
             <p14:sldId id="260"/>
             <p14:sldId id="261"/>
           </p14:sldIdLst>
         </p14:section>
-        <p14:section name="Working together" id="{1416be45-bc4c-08b6-b06c-68035b5fa0ac}">
+        <p14:section name="Working together" id="{cdeb3a0d-a88e-2ebc-6516-3beb9a12ba22}">
           <p14:sldIdLst>
             <p14:sldId id="262"/>
           </p14:sldIdLst>
         </p14:section>
-        <p14:section name="Call to action" id="{7dc12d96-1b22-23ad-73a4-eef88b70c086}">
+        <p14:section name="Call to action" id="{7c668e16-4a2d-59b0-6376-91194c38afb3}">
           <p14:sldIdLst>
             <p14:sldId id="263"/>
           </p14:sldIdLst>
         </p14:section>
-        <p14:section name="Appendix" id="{c6a91da5-5f65-3a64-6d40-1c9be3ea68b5}">
+        <p14:section name="Appendix" id="{0f229c10-45c6-68b5-2cec-661683412b08}">
           <p14:sldIdLst>
             <p14:sldId id="264"/>
           </p14:sldIdLst>
@@ -1416,9 +1416,9 @@
                 <a:solidFill>
                   <a:schemeClr val="accent1"/>
                 </a:solidFill>
-                <a:latin typeface="Arial" pitchFamily="34" charset="0"/>
-                <a:ea typeface="Arial" pitchFamily="34" charset="-122"/>
-                <a:cs typeface="Arial" pitchFamily="34" charset="-120"/>
+                <a:latin typeface="Segoe UI" pitchFamily="34" charset="0"/>
+                <a:ea typeface="Segoe UI" pitchFamily="34" charset="-122"/>
+                <a:cs typeface="Segoe UI" pitchFamily="34" charset="-120"/>
               </a:defRPr>
             </a:lvl1pPr>
           </a:lstStyle>
@@ -1454,13 +1454,13 @@
           <a:lstStyle>
             <a:lvl1pPr algn="l" indent="0" marL="0">
               <a:buNone/>
-              <a:defRPr lang="en-US" sz="3400" b="1" dirty="0">
+              <a:defRPr lang="en-US" sz="3000" b="1" dirty="0">
                 <a:solidFill>
                   <a:schemeClr val="tx1"/>
                 </a:solidFill>
-                <a:latin typeface="Arial" pitchFamily="34" charset="0"/>
-                <a:ea typeface="Arial" pitchFamily="34" charset="-122"/>
-                <a:cs typeface="Arial" pitchFamily="34" charset="-120"/>
+                <a:latin typeface="Segoe Script" pitchFamily="34" charset="0"/>
+                <a:ea typeface="Segoe Script" pitchFamily="34" charset="-122"/>
+                <a:cs typeface="Segoe Script" pitchFamily="34" charset="-120"/>
               </a:defRPr>
             </a:lvl1pPr>
           </a:lstStyle>
@@ -1468,7 +1468,7 @@
             <a:pPr algn="l" indent="0" marL="0">
               <a:buNone/>
             </a:pPr>
-            <a:endParaRPr lang="en-US" sz="3400" dirty="0"/>
+            <a:endParaRPr lang="en-US" sz="3000" dirty="0"/>
           </a:p>
         </p:txBody>
       </p:sp>
@@ -1904,7 +1904,7 @@
       </p:grpSpPr>
       <p:pic>
         <p:nvPicPr>
-          <p:cNvPr id="2" name="Before/after hero" descr="A game texture: left half bicubic upscale, right half PixelForge 4x">    </p:cNvPr>
+          <p:cNvPr id="2" name="Comparison grid" descr="Three game textures, before (bicubic) and after PixelForge 4x">    </p:cNvPr>
           <p:cNvPicPr>
             <a:picLocks noChangeAspect="1"/>
           </p:cNvPicPr>
@@ -1918,8 +1918,8 @@
         </p:blipFill>
         <p:spPr>
           <a:xfrm>
-            <a:off x="6613855" y="868680"/>
-            <a:ext cx="5120640" cy="5120640"/>
+            <a:off x="6385255" y="1640453"/>
+            <a:ext cx="5394960" cy="3577093"/>
           </a:xfrm>
           <a:prstGeom prst="rect">
             <a:avLst/>
@@ -1935,7 +1935,7 @@
         <p:spPr>
           <a:xfrm>
             <a:off x="548640" y="1097280"/>
-            <a:ext cx="5745175" cy="411480"/>
+            <a:ext cx="5562295" cy="411480"/>
           </a:xfrm>
           <a:prstGeom prst="rect">
             <a:avLst/>
@@ -1953,11 +1953,11 @@
             <a:r>
               <a:rPr lang="en-US" sz="1800" b="1" spc="300" kern="0" dirty="0">
                 <a:solidFill>
-                  <a:schemeClr val="accent2"/>
-                </a:solidFill>
-                <a:latin typeface="Arial" pitchFamily="34" charset="0"/>
-                <a:ea typeface="Arial" pitchFamily="34" charset="-122"/>
-                <a:cs typeface="Arial" pitchFamily="34" charset="-120"/>
+                  <a:schemeClr val="accent1"/>
+                </a:solidFill>
+                <a:latin typeface="Segoe UI" pitchFamily="34" charset="0"/>
+                <a:ea typeface="Segoe UI" pitchFamily="34" charset="-122"/>
+                <a:cs typeface="Segoe UI" pitchFamily="34" charset="-120"/>
               </a:rPr>
               <a:t>AI FOR GAME ARTISTS &amp; MODDERS</a:t>
             </a:r>
@@ -1974,7 +1974,7 @@
         <p:spPr>
           <a:xfrm>
             <a:off x="548640" y="1600200"/>
-            <a:ext cx="5745175" cy="1051560"/>
+            <a:ext cx="5562295" cy="1051560"/>
           </a:xfrm>
           <a:prstGeom prst="rect">
             <a:avLst/>
@@ -1994,9 +1994,9 @@
                 <a:solidFill>
                   <a:schemeClr val="tx1"/>
                 </a:solidFill>
-                <a:latin typeface="Arial" pitchFamily="34" charset="0"/>
-                <a:ea typeface="Arial" pitchFamily="34" charset="-122"/>
-                <a:cs typeface="Arial" pitchFamily="34" charset="-120"/>
+                <a:latin typeface="Segoe Script" pitchFamily="34" charset="0"/>
+                <a:ea typeface="Segoe Script" pitchFamily="34" charset="-122"/>
+                <a:cs typeface="Segoe Script" pitchFamily="34" charset="-120"/>
               </a:rPr>
               <a:t>PixelForge</a:t>
             </a:r>
@@ -2013,7 +2013,7 @@
         <p:spPr>
           <a:xfrm>
             <a:off x="548640" y="2834640"/>
-            <a:ext cx="5745175" cy="1554480"/>
+            <a:ext cx="5562295" cy="1554480"/>
           </a:xfrm>
           <a:prstGeom prst="rect">
             <a:avLst/>
@@ -2033,9 +2033,9 @@
                 <a:solidFill>
                   <a:schemeClr val="tx1"/>
                 </a:solidFill>
-                <a:latin typeface="Arial" pitchFamily="34" charset="0"/>
-                <a:ea typeface="Arial" pitchFamily="34" charset="-122"/>
-                <a:cs typeface="Arial" pitchFamily="34" charset="-120"/>
+                <a:latin typeface="Segoe Script" pitchFamily="34" charset="0"/>
+                <a:ea typeface="Segoe Script" pitchFamily="34" charset="-122"/>
+                <a:cs typeface="Segoe Script" pitchFamily="34" charset="-120"/>
               </a:rPr>
               <a:t>Old game textures in.</a:t>
             </a:r>
@@ -2050,9 +2050,9 @@
                 <a:solidFill>
                   <a:schemeClr val="accent1"/>
                 </a:solidFill>
-                <a:latin typeface="Arial" pitchFamily="34" charset="0"/>
-                <a:ea typeface="Arial" pitchFamily="34" charset="-122"/>
-                <a:cs typeface="Arial" pitchFamily="34" charset="-120"/>
+                <a:latin typeface="Segoe Script" pitchFamily="34" charset="0"/>
+                <a:ea typeface="Segoe Script" pitchFamily="34" charset="-122"/>
+                <a:cs typeface="Segoe Script" pitchFamily="34" charset="-120"/>
               </a:rPr>
               <a:t>4× HD out.</a:t>
             </a:r>
@@ -2069,7 +2069,7 @@
         <p:spPr>
           <a:xfrm>
             <a:off x="548640" y="4572000"/>
-            <a:ext cx="1371600" cy="502920"/>
+            <a:ext cx="1280160" cy="502920"/>
           </a:xfrm>
           <a:prstGeom prst="roundRect">
             <a:avLst>
@@ -2079,9 +2079,9 @@
           <a:solidFill>
             <a:schemeClr val="bg2"/>
           </a:solidFill>
-          <a:ln w="15875">
+          <a:ln w="25400">
             <a:solidFill>
-              <a:schemeClr val="accent1"/>
+              <a:schemeClr val="accent2"/>
             </a:solidFill>
             <a:prstDash val="solid"/>
           </a:ln>
@@ -2096,7 +2096,7 @@
         <p:spPr>
           <a:xfrm>
             <a:off x="548640" y="4572000"/>
-            <a:ext cx="1371600" cy="502920"/>
+            <a:ext cx="1280160" cy="502920"/>
           </a:xfrm>
           <a:prstGeom prst="rect">
             <a:avLst/>
@@ -2112,14 +2112,14 @@
               <a:buNone/>
             </a:pPr>
             <a:r>
-              <a:rPr lang="en-US" sz="1700" b="1" dirty="0">
+              <a:rPr lang="en-US" sz="1500" b="1" dirty="0">
                 <a:solidFill>
                   <a:schemeClr val="tx1"/>
                 </a:solidFill>
               </a:rPr>
               <a:t>4× upscale</a:t>
             </a:r>
-            <a:endParaRPr lang="en-US" sz="1700" dirty="0"/>
+            <a:endParaRPr lang="en-US" sz="1500" dirty="0"/>
           </a:p>
         </p:txBody>
       </p:sp>
@@ -2131,8 +2131,8 @@
         </p:nvSpPr>
         <p:spPr>
           <a:xfrm>
-            <a:off x="2057400" y="4572000"/>
-            <a:ext cx="2194560" cy="502920"/>
+            <a:off x="1938528" y="4572000"/>
+            <a:ext cx="2061972" cy="502920"/>
           </a:xfrm>
           <a:prstGeom prst="roundRect">
             <a:avLst>
@@ -2142,9 +2142,9 @@
           <a:solidFill>
             <a:schemeClr val="bg2"/>
           </a:solidFill>
-          <a:ln w="15875">
+          <a:ln w="25400">
             <a:solidFill>
-              <a:schemeClr val="accent1"/>
+              <a:schemeClr val="accent2"/>
             </a:solidFill>
             <a:prstDash val="solid"/>
           </a:ln>
@@ -2158,8 +2158,8 @@
         </p:nvSpPr>
         <p:spPr>
           <a:xfrm>
-            <a:off x="2057400" y="4572000"/>
-            <a:ext cx="2194560" cy="502920"/>
+            <a:off x="1938528" y="4572000"/>
+            <a:ext cx="2061972" cy="502920"/>
           </a:xfrm>
           <a:prstGeom prst="rect">
             <a:avLst/>
@@ -2175,14 +2175,14 @@
               <a:buNone/>
             </a:pPr>
             <a:r>
-              <a:rPr lang="en-US" sz="1700" b="1" dirty="0">
+              <a:rPr lang="en-US" sz="1500" b="1" dirty="0">
                 <a:solidFill>
                   <a:schemeClr val="tx1"/>
                 </a:solidFill>
               </a:rPr>
               <a:t>Trained on game art</a:t>
             </a:r>
-            <a:endParaRPr lang="en-US" sz="1700" dirty="0"/>
+            <a:endParaRPr lang="en-US" sz="1500" dirty="0"/>
           </a:p>
         </p:txBody>
       </p:sp>
@@ -2194,8 +2194,8 @@
         </p:nvSpPr>
         <p:spPr>
           <a:xfrm>
-            <a:off x="4389120" y="4572000"/>
-            <a:ext cx="1828800" cy="502920"/>
+            <a:off x="4110228" y="4572000"/>
+            <a:ext cx="1714500" cy="502920"/>
           </a:xfrm>
           <a:prstGeom prst="roundRect">
             <a:avLst>
@@ -2205,9 +2205,9 @@
           <a:solidFill>
             <a:schemeClr val="bg2"/>
           </a:solidFill>
-          <a:ln w="15875">
+          <a:ln w="25400">
             <a:solidFill>
-              <a:schemeClr val="accent1"/>
+              <a:schemeClr val="accent2"/>
             </a:solidFill>
             <a:prstDash val="solid"/>
           </a:ln>
@@ -2221,8 +2221,8 @@
         </p:nvSpPr>
         <p:spPr>
           <a:xfrm>
-            <a:off x="4389120" y="4572000"/>
-            <a:ext cx="1828800" cy="502920"/>
+            <a:off x="4110228" y="4572000"/>
+            <a:ext cx="1714500" cy="502920"/>
           </a:xfrm>
           <a:prstGeom prst="rect">
             <a:avLst/>
@@ -2238,14 +2238,14 @@
               <a:buNone/>
             </a:pPr>
             <a:r>
-              <a:rPr lang="en-US" sz="1700" b="1" dirty="0">
+              <a:rPr lang="en-US" sz="1500" b="1" dirty="0">
                 <a:solidFill>
                   <a:schemeClr val="tx1"/>
                 </a:solidFill>
               </a:rPr>
               <a:t>Runs in browser</a:t>
             </a:r>
-            <a:endParaRPr lang="en-US" sz="1700" dirty="0"/>
+            <a:endParaRPr lang="en-US" sz="1500" dirty="0"/>
           </a:p>
         </p:txBody>
       </p:sp>
@@ -2305,9 +2305,9 @@
                 <a:solidFill>
                   <a:schemeClr val="accent1"/>
                 </a:solidFill>
-                <a:latin typeface="Arial" pitchFamily="34" charset="0"/>
-                <a:ea typeface="Arial" pitchFamily="34" charset="-122"/>
-                <a:cs typeface="Arial" pitchFamily="34" charset="-120"/>
+                <a:latin typeface="Segoe UI" pitchFamily="34" charset="0"/>
+                <a:ea typeface="Segoe UI" pitchFamily="34" charset="-122"/>
+                <a:cs typeface="Segoe UI" pitchFamily="34" charset="-120"/>
               </a:rPr>
               <a:t>THE PROBLEM</a:t>
             </a:r>
@@ -2342,17 +2342,17 @@
               <a:buNone/>
             </a:pPr>
             <a:r>
-              <a:rPr lang="en-US" sz="3400" b="1" dirty="0">
+              <a:rPr lang="en-US" sz="3000" b="1" dirty="0">
                 <a:solidFill>
                   <a:schemeClr val="tx1"/>
                 </a:solidFill>
-                <a:latin typeface="Arial" pitchFamily="34" charset="0"/>
-                <a:ea typeface="Arial" pitchFamily="34" charset="-122"/>
-                <a:cs typeface="Arial" pitchFamily="34" charset="-120"/>
+                <a:latin typeface="Segoe Script" pitchFamily="34" charset="0"/>
+                <a:ea typeface="Segoe Script" pitchFamily="34" charset="-122"/>
+                <a:cs typeface="Segoe Script" pitchFamily="34" charset="-120"/>
               </a:rPr>
               <a:t>HD screens expose every old texture.</a:t>
             </a:r>
-            <a:endParaRPr lang="en-US" sz="3400" dirty="0"/>
+            <a:endParaRPr lang="en-US" sz="3000" dirty="0"/>
           </a:p>
         </p:txBody>
       </p:sp>
@@ -2369,13 +2369,13 @@
           </a:xfrm>
           <a:prstGeom prst="roundRect">
             <a:avLst>
-              <a:gd name="adj" fmla="val 3810"/>
+              <a:gd name="adj" fmla="val 10159"/>
             </a:avLst>
           </a:prstGeom>
           <a:solidFill>
             <a:schemeClr val="bg2"/>
           </a:solidFill>
-          <a:ln w="12700">
+          <a:ln w="15875">
             <a:solidFill>
               <a:schemeClr val="accent6"/>
             </a:solidFill>
@@ -2398,9 +2398,14 @@
             <a:avLst/>
           </a:prstGeom>
           <a:solidFill>
-            <a:schemeClr val="accent1"/>
+            <a:schemeClr val="accent4"/>
           </a:solidFill>
-          <a:ln/>
+          <a:ln w="25400">
+            <a:solidFill>
+              <a:schemeClr val="accent2"/>
+            </a:solidFill>
+            <a:prstDash val="solid"/>
+          </a:ln>
         </p:spPr>
       </p:sp>
       <p:sp>
@@ -2468,9 +2473,9 @@
                 <a:solidFill>
                   <a:schemeClr val="tx1"/>
                 </a:solidFill>
-                <a:latin typeface="Arial" pitchFamily="34" charset="0"/>
-                <a:ea typeface="Arial" pitchFamily="34" charset="-122"/>
-                <a:cs typeface="Arial" pitchFamily="34" charset="-120"/>
+                <a:latin typeface="Segoe Script" pitchFamily="34" charset="0"/>
+                <a:ea typeface="Segoe Script" pitchFamily="34" charset="-122"/>
+                <a:cs typeface="Segoe Script" pitchFamily="34" charset="-120"/>
               </a:rPr>
               <a:t>Remasters need thousands of textures</a:t>
             </a:r>
@@ -2527,13 +2532,13 @@
           </a:xfrm>
           <a:prstGeom prst="roundRect">
             <a:avLst>
-              <a:gd name="adj" fmla="val 3810"/>
+              <a:gd name="adj" fmla="val 10159"/>
             </a:avLst>
           </a:prstGeom>
           <a:solidFill>
             <a:schemeClr val="bg2"/>
           </a:solidFill>
-          <a:ln w="12700">
+          <a:ln w="15875">
             <a:solidFill>
               <a:schemeClr val="accent6"/>
             </a:solidFill>
@@ -2556,9 +2561,14 @@
             <a:avLst/>
           </a:prstGeom>
           <a:solidFill>
-            <a:schemeClr val="accent1"/>
+            <a:schemeClr val="accent4"/>
           </a:solidFill>
-          <a:ln/>
+          <a:ln w="25400">
+            <a:solidFill>
+              <a:schemeClr val="accent2"/>
+            </a:solidFill>
+            <a:prstDash val="solid"/>
+          </a:ln>
         </p:spPr>
       </p:sp>
       <p:sp>
@@ -2626,9 +2636,9 @@
                 <a:solidFill>
                   <a:schemeClr val="tx1"/>
                 </a:solidFill>
-                <a:latin typeface="Arial" pitchFamily="34" charset="0"/>
-                <a:ea typeface="Arial" pitchFamily="34" charset="-122"/>
-                <a:cs typeface="Arial" pitchFamily="34" charset="-120"/>
+                <a:latin typeface="Segoe Script" pitchFamily="34" charset="0"/>
+                <a:ea typeface="Segoe Script" pitchFamily="34" charset="-122"/>
+                <a:cs typeface="Segoe Script" pitchFamily="34" charset="-120"/>
               </a:rPr>
               <a:t>Simple resizing just blurs</a:t>
             </a:r>
@@ -2685,13 +2695,13 @@
           </a:xfrm>
           <a:prstGeom prst="roundRect">
             <a:avLst>
-              <a:gd name="adj" fmla="val 3810"/>
+              <a:gd name="adj" fmla="val 10159"/>
             </a:avLst>
           </a:prstGeom>
           <a:solidFill>
             <a:schemeClr val="bg2"/>
           </a:solidFill>
-          <a:ln w="12700">
+          <a:ln w="15875">
             <a:solidFill>
               <a:schemeClr val="accent6"/>
             </a:solidFill>
@@ -2714,9 +2724,14 @@
             <a:avLst/>
           </a:prstGeom>
           <a:solidFill>
-            <a:schemeClr val="accent1"/>
+            <a:schemeClr val="accent4"/>
           </a:solidFill>
-          <a:ln/>
+          <a:ln w="25400">
+            <a:solidFill>
+              <a:schemeClr val="accent2"/>
+            </a:solidFill>
+            <a:prstDash val="solid"/>
+          </a:ln>
         </p:spPr>
       </p:sp>
       <p:sp>
@@ -2784,9 +2799,9 @@
                 <a:solidFill>
                   <a:schemeClr val="tx1"/>
                 </a:solidFill>
-                <a:latin typeface="Arial" pitchFamily="34" charset="0"/>
-                <a:ea typeface="Arial" pitchFamily="34" charset="-122"/>
-                <a:cs typeface="Arial" pitchFamily="34" charset="-120"/>
+                <a:latin typeface="Segoe Script" pitchFamily="34" charset="0"/>
+                <a:ea typeface="Segoe Script" pitchFamily="34" charset="-122"/>
+                <a:cs typeface="Segoe Script" pitchFamily="34" charset="-120"/>
               </a:rPr>
               <a:t>Generic AI upscalers aren't tuned for games</a:t>
             </a:r>
@@ -2978,9 +2993,9 @@
                 <a:solidFill>
                   <a:schemeClr val="accent1"/>
                 </a:solidFill>
-                <a:latin typeface="Arial" pitchFamily="34" charset="0"/>
-                <a:ea typeface="Arial" pitchFamily="34" charset="-122"/>
-                <a:cs typeface="Arial" pitchFamily="34" charset="-120"/>
+                <a:latin typeface="Segoe UI" pitchFamily="34" charset="0"/>
+                <a:ea typeface="Segoe UI" pitchFamily="34" charset="-122"/>
+                <a:cs typeface="Segoe UI" pitchFamily="34" charset="-120"/>
               </a:rPr>
               <a:t>TRY IT YOURSELF</a:t>
             </a:r>
@@ -3015,17 +3030,17 @@
               <a:buNone/>
             </a:pPr>
             <a:r>
-              <a:rPr lang="en-US" sz="3400" b="1" dirty="0">
+              <a:rPr lang="en-US" sz="3000" b="1" dirty="0">
                 <a:solidFill>
                   <a:schemeClr val="tx1"/>
                 </a:solidFill>
-                <a:latin typeface="Arial" pitchFamily="34" charset="0"/>
-                <a:ea typeface="Arial" pitchFamily="34" charset="-122"/>
-                <a:cs typeface="Arial" pitchFamily="34" charset="-120"/>
+                <a:latin typeface="Segoe Script" pitchFamily="34" charset="0"/>
+                <a:ea typeface="Segoe Script" pitchFamily="34" charset="-122"/>
+                <a:cs typeface="Segoe Script" pitchFamily="34" charset="-120"/>
               </a:rPr>
               <a:t>Drop in a texture. Drag the slider.</a:t>
             </a:r>
-            <a:endParaRPr lang="en-US" sz="3400" dirty="0"/>
+            <a:endParaRPr lang="en-US" sz="3000" dirty="0"/>
           </a:p>
         </p:txBody>
       </p:sp>
@@ -3042,13 +3057,13 @@
           </a:xfrm>
           <a:prstGeom prst="roundRect">
             <a:avLst>
-              <a:gd name="adj" fmla="val 2474"/>
+              <a:gd name="adj" fmla="val 6598"/>
             </a:avLst>
           </a:prstGeom>
           <a:solidFill>
             <a:schemeClr val="bg2"/>
           </a:solidFill>
-          <a:ln w="12700">
+          <a:ln w="15875">
             <a:solidFill>
               <a:schemeClr val="accent6"/>
             </a:solidFill>
@@ -3093,13 +3108,13 @@
           </a:xfrm>
           <a:prstGeom prst="roundRect">
             <a:avLst>
-              <a:gd name="adj" fmla="val 8276"/>
+              <a:gd name="adj" fmla="val 22069"/>
             </a:avLst>
           </a:prstGeom>
           <a:solidFill>
             <a:schemeClr val="bg2"/>
           </a:solidFill>
-          <a:ln w="12700">
+          <a:ln w="15875">
             <a:solidFill>
               <a:schemeClr val="accent6"/>
             </a:solidFill>
@@ -3122,9 +3137,14 @@
             <a:avLst/>
           </a:prstGeom>
           <a:solidFill>
-            <a:schemeClr val="accent1"/>
+            <a:schemeClr val="accent4"/>
           </a:solidFill>
-          <a:ln/>
+          <a:ln w="25400">
+            <a:solidFill>
+              <a:schemeClr val="accent2"/>
+            </a:solidFill>
+            <a:prstDash val="solid"/>
+          </a:ln>
         </p:spPr>
       </p:sp>
       <p:sp>
@@ -3192,9 +3212,9 @@
                 <a:solidFill>
                   <a:schemeClr val="tx1"/>
                 </a:solidFill>
-                <a:latin typeface="Arial" pitchFamily="34" charset="0"/>
-                <a:ea typeface="Arial" pitchFamily="34" charset="-122"/>
-                <a:cs typeface="Arial" pitchFamily="34" charset="-120"/>
+                <a:latin typeface="Segoe Script" pitchFamily="34" charset="0"/>
+                <a:ea typeface="Segoe Script" pitchFamily="34" charset="-122"/>
+                <a:cs typeface="Segoe Script" pitchFamily="34" charset="-120"/>
               </a:rPr>
               <a:t>Before/after slider</a:t>
             </a:r>
@@ -3251,13 +3271,13 @@
           </a:xfrm>
           <a:prstGeom prst="roundRect">
             <a:avLst>
-              <a:gd name="adj" fmla="val 8276"/>
+              <a:gd name="adj" fmla="val 22069"/>
             </a:avLst>
           </a:prstGeom>
           <a:solidFill>
             <a:schemeClr val="bg2"/>
           </a:solidFill>
-          <a:ln w="12700">
+          <a:ln w="15875">
             <a:solidFill>
               <a:schemeClr val="accent6"/>
             </a:solidFill>
@@ -3280,9 +3300,14 @@
             <a:avLst/>
           </a:prstGeom>
           <a:solidFill>
-            <a:schemeClr val="accent1"/>
+            <a:schemeClr val="accent4"/>
           </a:solidFill>
-          <a:ln/>
+          <a:ln w="25400">
+            <a:solidFill>
+              <a:schemeClr val="accent2"/>
+            </a:solidFill>
+            <a:prstDash val="solid"/>
+          </a:ln>
         </p:spPr>
       </p:sp>
       <p:sp>
@@ -3350,9 +3375,9 @@
                 <a:solidFill>
                   <a:schemeClr val="tx1"/>
                 </a:solidFill>
-                <a:latin typeface="Arial" pitchFamily="34" charset="0"/>
-                <a:ea typeface="Arial" pitchFamily="34" charset="-122"/>
-                <a:cs typeface="Arial" pitchFamily="34" charset="-120"/>
+                <a:latin typeface="Segoe Script" pitchFamily="34" charset="0"/>
+                <a:ea typeface="Segoe Script" pitchFamily="34" charset="-122"/>
+                <a:cs typeface="Segoe Script" pitchFamily="34" charset="-120"/>
               </a:rPr>
               <a:t>Runs in your browser</a:t>
             </a:r>
@@ -3409,13 +3434,13 @@
           </a:xfrm>
           <a:prstGeom prst="roundRect">
             <a:avLst>
-              <a:gd name="adj" fmla="val 8276"/>
+              <a:gd name="adj" fmla="val 22069"/>
             </a:avLst>
           </a:prstGeom>
           <a:solidFill>
             <a:schemeClr val="bg2"/>
           </a:solidFill>
-          <a:ln w="12700">
+          <a:ln w="15875">
             <a:solidFill>
               <a:schemeClr val="accent6"/>
             </a:solidFill>
@@ -3438,9 +3463,14 @@
             <a:avLst/>
           </a:prstGeom>
           <a:solidFill>
-            <a:schemeClr val="accent1"/>
+            <a:schemeClr val="accent4"/>
           </a:solidFill>
-          <a:ln/>
+          <a:ln w="25400">
+            <a:solidFill>
+              <a:schemeClr val="accent2"/>
+            </a:solidFill>
+            <a:prstDash val="solid"/>
+          </a:ln>
         </p:spPr>
       </p:sp>
       <p:sp>
@@ -3508,9 +3538,9 @@
                 <a:solidFill>
                   <a:schemeClr val="tx1"/>
                 </a:solidFill>
-                <a:latin typeface="Arial" pitchFamily="34" charset="0"/>
-                <a:ea typeface="Arial" pitchFamily="34" charset="-122"/>
-                <a:cs typeface="Arial" pitchFamily="34" charset="-120"/>
+                <a:latin typeface="Segoe Script" pitchFamily="34" charset="0"/>
+                <a:ea typeface="Segoe Script" pitchFamily="34" charset="-122"/>
+                <a:cs typeface="Segoe Script" pitchFamily="34" charset="-120"/>
               </a:rPr>
               <a:t>Download the HD file</a:t>
             </a:r>
@@ -3655,9 +3685,9 @@
                 <a:solidFill>
                   <a:schemeClr val="accent1"/>
                 </a:solidFill>
-                <a:latin typeface="Arial" pitchFamily="34" charset="0"/>
-                <a:ea typeface="Arial" pitchFamily="34" charset="-122"/>
-                <a:cs typeface="Arial" pitchFamily="34" charset="-120"/>
+                <a:latin typeface="Segoe UI" pitchFamily="34" charset="0"/>
+                <a:ea typeface="Segoe UI" pitchFamily="34" charset="-122"/>
+                <a:cs typeface="Segoe UI" pitchFamily="34" charset="-120"/>
               </a:rPr>
               <a:t>RESULTS</a:t>
             </a:r>
@@ -3692,17 +3722,17 @@
               <a:buNone/>
             </a:pPr>
             <a:r>
-              <a:rPr lang="en-US" sz="3400" b="1" dirty="0">
+              <a:rPr lang="en-US" sz="3000" b="1" dirty="0">
                 <a:solidFill>
                   <a:schemeClr val="tx1"/>
                 </a:solidFill>
-                <a:latin typeface="Arial" pitchFamily="34" charset="0"/>
-                <a:ea typeface="Arial" pitchFamily="34" charset="-122"/>
-                <a:cs typeface="Arial" pitchFamily="34" charset="-120"/>
+                <a:latin typeface="Segoe Script" pitchFamily="34" charset="0"/>
+                <a:ea typeface="Segoe Script" pitchFamily="34" charset="-122"/>
+                <a:cs typeface="Segoe Script" pitchFamily="34" charset="-120"/>
               </a:rPr>
               <a:t>Looks like real HD. Small enough for a browser.</a:t>
             </a:r>
-            <a:endParaRPr lang="en-US" sz="3400" dirty="0"/>
+            <a:endParaRPr lang="en-US" sz="3000" dirty="0"/>
           </a:p>
         </p:txBody>
       </p:sp>
@@ -3714,18 +3744,18 @@
         </p:nvSpPr>
         <p:spPr>
           <a:xfrm>
-            <a:off x="548640" y="1783080"/>
-            <a:ext cx="3483864" cy="1783080"/>
+            <a:off x="548640" y="1691640"/>
+            <a:ext cx="3483864" cy="2103120"/>
           </a:xfrm>
           <a:prstGeom prst="roundRect">
             <a:avLst>
-              <a:gd name="adj" fmla="val 6154"/>
+              <a:gd name="adj" fmla="val 13913"/>
             </a:avLst>
           </a:prstGeom>
           <a:solidFill>
             <a:schemeClr val="bg2"/>
           </a:solidFill>
-          <a:ln w="12700">
+          <a:ln w="15875">
             <a:solidFill>
               <a:schemeClr val="accent6"/>
             </a:solidFill>
@@ -3741,7 +3771,7 @@
         </p:nvSpPr>
         <p:spPr>
           <a:xfrm>
-            <a:off x="822960" y="1965960"/>
+            <a:off x="822960" y="1828800"/>
             <a:ext cx="2935224" cy="777240"/>
           </a:xfrm>
           <a:prstGeom prst="rect">
@@ -3758,17 +3788,17 @@
               <a:buNone/>
             </a:pPr>
             <a:r>
-              <a:rPr lang="en-US" sz="3800" b="1" dirty="0">
+              <a:rPr lang="en-US" sz="4000" b="1" dirty="0">
                 <a:solidFill>
                   <a:schemeClr val="accent1"/>
                 </a:solidFill>
-                <a:latin typeface="Arial" pitchFamily="34" charset="0"/>
-                <a:ea typeface="Arial" pitchFamily="34" charset="-122"/>
-                <a:cs typeface="Arial" pitchFamily="34" charset="-120"/>
+                <a:latin typeface="Segoe UI" pitchFamily="34" charset="0"/>
+                <a:ea typeface="Segoe UI" pitchFamily="34" charset="-122"/>
+                <a:cs typeface="Segoe UI" pitchFamily="34" charset="-120"/>
               </a:rPr>
               <a:t>41%</a:t>
             </a:r>
-            <a:endParaRPr lang="en-US" sz="3800" dirty="0"/>
+            <a:endParaRPr lang="en-US" sz="4000" dirty="0"/>
           </a:p>
         </p:txBody>
       </p:sp>
@@ -3780,8 +3810,8 @@
         </p:nvSpPr>
         <p:spPr>
           <a:xfrm>
-            <a:off x="822960" y="2770632"/>
-            <a:ext cx="2935224" cy="731520"/>
+            <a:off x="822960" y="2651760"/>
+            <a:ext cx="2935224" cy="1005840"/>
           </a:xfrm>
           <a:prstGeom prst="rect">
             <a:avLst/>
@@ -3797,28 +3827,28 @@
               <a:buNone/>
             </a:pPr>
             <a:r>
-              <a:rPr lang="en-US" sz="1350" b="1" dirty="0">
+              <a:rPr lang="en-US" sz="1300" b="1" dirty="0">
                 <a:solidFill>
                   <a:schemeClr val="tx1"/>
                 </a:solidFill>
               </a:rPr>
               <a:t>closer to the real HD look than bicubic</a:t>
             </a:r>
-            <a:endParaRPr lang="en-US" sz="1350" dirty="0"/>
+            <a:endParaRPr lang="en-US" sz="1300" dirty="0"/>
           </a:p>
           <a:p>
             <a:pPr indent="0" marL="0">
               <a:buNone/>
             </a:pPr>
             <a:r>
-              <a:rPr lang="en-US" sz="1350" dirty="0">
+              <a:rPr lang="en-US" sz="1300" dirty="0">
                 <a:solidFill>
                   <a:schemeClr val="accent5"/>
                 </a:solidFill>
               </a:rPr>
               <a:t>LPIPS perceptual distance, 60 unseen game textures</a:t>
             </a:r>
-            <a:endParaRPr lang="en-US" sz="1350" dirty="0"/>
+            <a:endParaRPr lang="en-US" sz="1300" dirty="0"/>
           </a:p>
         </p:txBody>
       </p:sp>
@@ -3830,18 +3860,18 @@
         </p:nvSpPr>
         <p:spPr>
           <a:xfrm>
-            <a:off x="4352544" y="1783080"/>
-            <a:ext cx="3483864" cy="1783080"/>
+            <a:off x="4352544" y="1691640"/>
+            <a:ext cx="3483864" cy="2103120"/>
           </a:xfrm>
           <a:prstGeom prst="roundRect">
             <a:avLst>
-              <a:gd name="adj" fmla="val 6154"/>
+              <a:gd name="adj" fmla="val 13913"/>
             </a:avLst>
           </a:prstGeom>
           <a:solidFill>
             <a:schemeClr val="bg2"/>
           </a:solidFill>
-          <a:ln w="12700">
+          <a:ln w="15875">
             <a:solidFill>
               <a:schemeClr val="accent6"/>
             </a:solidFill>
@@ -3857,7 +3887,7 @@
         </p:nvSpPr>
         <p:spPr>
           <a:xfrm>
-            <a:off x="4626864" y="1965960"/>
+            <a:off x="4626864" y="1828800"/>
             <a:ext cx="2935224" cy="777240"/>
           </a:xfrm>
           <a:prstGeom prst="rect">
@@ -3874,17 +3904,17 @@
               <a:buNone/>
             </a:pPr>
             <a:r>
-              <a:rPr lang="en-US" sz="3800" b="1" dirty="0">
+              <a:rPr lang="en-US" sz="4000" b="1" dirty="0">
                 <a:solidFill>
                   <a:schemeClr val="accent1"/>
                 </a:solidFill>
-                <a:latin typeface="Arial" pitchFamily="34" charset="0"/>
-                <a:ea typeface="Arial" pitchFamily="34" charset="-122"/>
-                <a:cs typeface="Arial" pitchFamily="34" charset="-120"/>
+                <a:latin typeface="Segoe UI" pitchFamily="34" charset="0"/>
+                <a:ea typeface="Segoe UI" pitchFamily="34" charset="-122"/>
+                <a:cs typeface="Segoe UI" pitchFamily="34" charset="-120"/>
               </a:rPr>
-              <a:t>15× smaller</a:t>
-            </a:r>
-            <a:endParaRPr lang="en-US" sz="3800" dirty="0"/>
+              <a:t>15×</a:t>
+            </a:r>
+            <a:endParaRPr lang="en-US" sz="4000" dirty="0"/>
           </a:p>
         </p:txBody>
       </p:sp>
@@ -3896,8 +3926,8 @@
         </p:nvSpPr>
         <p:spPr>
           <a:xfrm>
-            <a:off x="4626864" y="2770632"/>
-            <a:ext cx="2935224" cy="731520"/>
+            <a:off x="4626864" y="2651760"/>
+            <a:ext cx="2935224" cy="1005840"/>
           </a:xfrm>
           <a:prstGeom prst="rect">
             <a:avLst/>
@@ -3913,28 +3943,28 @@
               <a:buNone/>
             </a:pPr>
             <a:r>
-              <a:rPr lang="en-US" sz="1350" b="1" dirty="0">
+              <a:rPr lang="en-US" sz="1300" b="1" dirty="0">
                 <a:solidFill>
                   <a:schemeClr val="tx1"/>
                 </a:solidFill>
               </a:rPr>
-              <a:t>than Real-ESRGAN (1.1M vs 16.7M parameters)</a:t>
-            </a:r>
-            <a:endParaRPr lang="en-US" sz="1350" dirty="0"/>
+              <a:t>smaller than Real-ESRGAN (1.1M vs 16.7M parameters)</a:t>
+            </a:r>
+            <a:endParaRPr lang="en-US" sz="1300" dirty="0"/>
           </a:p>
           <a:p>
             <a:pPr indent="0" marL="0">
               <a:buNone/>
             </a:pPr>
             <a:r>
-              <a:rPr lang="en-US" sz="1350" dirty="0">
+              <a:rPr lang="en-US" sz="1300" dirty="0">
                 <a:solidFill>
                   <a:schemeClr val="accent5"/>
                 </a:solidFill>
               </a:rPr>
               <a:t>LPIPS 0.414 vs 0.454 (lower is better)</a:t>
             </a:r>
-            <a:endParaRPr lang="en-US" sz="1350" dirty="0"/>
+            <a:endParaRPr lang="en-US" sz="1300" dirty="0"/>
           </a:p>
         </p:txBody>
       </p:sp>
@@ -3946,18 +3976,18 @@
         </p:nvSpPr>
         <p:spPr>
           <a:xfrm>
-            <a:off x="8156448" y="1783080"/>
-            <a:ext cx="3483864" cy="1783080"/>
+            <a:off x="8156448" y="1691640"/>
+            <a:ext cx="3483864" cy="2103120"/>
           </a:xfrm>
           <a:prstGeom prst="roundRect">
             <a:avLst>
-              <a:gd name="adj" fmla="val 6154"/>
+              <a:gd name="adj" fmla="val 13913"/>
             </a:avLst>
           </a:prstGeom>
           <a:solidFill>
             <a:schemeClr val="bg2"/>
           </a:solidFill>
-          <a:ln w="12700">
+          <a:ln w="15875">
             <a:solidFill>
               <a:schemeClr val="accent6"/>
             </a:solidFill>
@@ -3973,7 +4003,7 @@
         </p:nvSpPr>
         <p:spPr>
           <a:xfrm>
-            <a:off x="8430768" y="1965960"/>
+            <a:off x="8430768" y="1828800"/>
             <a:ext cx="2935224" cy="777240"/>
           </a:xfrm>
           <a:prstGeom prst="rect">
@@ -3990,17 +4020,17 @@
               <a:buNone/>
             </a:pPr>
             <a:r>
-              <a:rPr lang="en-US" sz="3800" b="1" dirty="0">
+              <a:rPr lang="en-US" sz="4000" b="1" dirty="0">
                 <a:solidFill>
                   <a:schemeClr val="accent1"/>
                 </a:solidFill>
-                <a:latin typeface="Arial" pitchFamily="34" charset="0"/>
-                <a:ea typeface="Arial" pitchFamily="34" charset="-122"/>
-                <a:cs typeface="Arial" pitchFamily="34" charset="-120"/>
+                <a:latin typeface="Segoe UI" pitchFamily="34" charset="0"/>
+                <a:ea typeface="Segoe UI" pitchFamily="34" charset="-122"/>
+                <a:cs typeface="Segoe UI" pitchFamily="34" charset="-120"/>
               </a:rPr>
               <a:t>2.3 s</a:t>
             </a:r>
-            <a:endParaRPr lang="en-US" sz="3800" dirty="0"/>
+            <a:endParaRPr lang="en-US" sz="4000" dirty="0"/>
           </a:p>
         </p:txBody>
       </p:sp>
@@ -4012,8 +4042,8 @@
         </p:nvSpPr>
         <p:spPr>
           <a:xfrm>
-            <a:off x="8430768" y="2770632"/>
-            <a:ext cx="2935224" cy="731520"/>
+            <a:off x="8430768" y="2651760"/>
+            <a:ext cx="2935224" cy="1005840"/>
           </a:xfrm>
           <a:prstGeom prst="rect">
             <a:avLst/>
@@ -4029,28 +4059,28 @@
               <a:buNone/>
             </a:pPr>
             <a:r>
-              <a:rPr lang="en-US" sz="1350" b="1" dirty="0">
+              <a:rPr lang="en-US" sz="1300" b="1" dirty="0">
                 <a:solidFill>
                   <a:schemeClr val="tx1"/>
                 </a:solidFill>
               </a:rPr>
               <a:t>to upscale a texture 4× in a laptop browser</a:t>
             </a:r>
-            <a:endParaRPr lang="en-US" sz="1350" dirty="0"/>
+            <a:endParaRPr lang="en-US" sz="1300" dirty="0"/>
           </a:p>
           <a:p>
             <a:pPr indent="0" marL="0">
               <a:buNone/>
             </a:pPr>
             <a:r>
-              <a:rPr lang="en-US" sz="1350" dirty="0">
+              <a:rPr lang="en-US" sz="1300" dirty="0">
                 <a:solidFill>
                   <a:schemeClr val="accent5"/>
                 </a:solidFill>
               </a:rPr>
               <a:t>128×128 → 512×512, no GPU, no upload</a:t>
             </a:r>
-            <a:endParaRPr lang="en-US" sz="1350" dirty="0"/>
+            <a:endParaRPr lang="en-US" sz="1300" dirty="0"/>
           </a:p>
         </p:txBody>
       </p:sp>
@@ -4062,20 +4092,20 @@
         </p:nvSpPr>
         <p:spPr>
           <a:xfrm>
-            <a:off x="548640" y="3794760"/>
-            <a:ext cx="11091672" cy="2423160"/>
+            <a:off x="548640" y="3977640"/>
+            <a:ext cx="11091672" cy="2286000"/>
           </a:xfrm>
           <a:prstGeom prst="roundRect">
             <a:avLst>
-              <a:gd name="adj" fmla="val 4528"/>
+              <a:gd name="adj" fmla="val 12800"/>
             </a:avLst>
           </a:prstGeom>
           <a:solidFill>
             <a:srgbClr val="FFFFFF"/>
           </a:solidFill>
-          <a:ln w="12700">
+          <a:ln w="22225">
             <a:solidFill>
-              <a:schemeClr val="accent6"/>
+              <a:schemeClr val="accent2"/>
             </a:solidFill>
             <a:prstDash val="solid"/>
           </a:ln>
@@ -4097,8 +4127,8 @@
         </p:blipFill>
         <p:spPr>
           <a:xfrm>
-            <a:off x="640080" y="3915461"/>
-            <a:ext cx="10908792" cy="2181758"/>
+            <a:off x="699516" y="4041648"/>
+            <a:ext cx="10789920" cy="2157984"/>
           </a:xfrm>
           <a:prstGeom prst="rect">
             <a:avLst/>
@@ -4206,9 +4236,9 @@
                 <a:solidFill>
                   <a:schemeClr val="accent1"/>
                 </a:solidFill>
-                <a:latin typeface="Arial" pitchFamily="34" charset="0"/>
-                <a:ea typeface="Arial" pitchFamily="34" charset="-122"/>
-                <a:cs typeface="Arial" pitchFamily="34" charset="-120"/>
+                <a:latin typeface="Segoe UI" pitchFamily="34" charset="0"/>
+                <a:ea typeface="Segoe UI" pitchFamily="34" charset="-122"/>
+                <a:cs typeface="Segoe UI" pitchFamily="34" charset="-120"/>
               </a:rPr>
               <a:t>HOW IT WORKS</a:t>
             </a:r>
@@ -4243,17 +4273,17 @@
               <a:buNone/>
             </a:pPr>
             <a:r>
-              <a:rPr lang="en-US" sz="3400" b="1" dirty="0">
+              <a:rPr lang="en-US" sz="3000" b="1" dirty="0">
                 <a:solidFill>
                   <a:schemeClr val="tx1"/>
                 </a:solidFill>
-                <a:latin typeface="Arial" pitchFamily="34" charset="0"/>
-                <a:ea typeface="Arial" pitchFamily="34" charset="-122"/>
-                <a:cs typeface="Arial" pitchFamily="34" charset="-120"/>
+                <a:latin typeface="Segoe Script" pitchFamily="34" charset="0"/>
+                <a:ea typeface="Segoe Script" pitchFamily="34" charset="-122"/>
+                <a:cs typeface="Segoe Script" pitchFamily="34" charset="-120"/>
               </a:rPr>
               <a:t>Trained to undo old-texture damage.</a:t>
             </a:r>
-            <a:endParaRPr lang="en-US" sz="3400" dirty="0"/>
+            <a:endParaRPr lang="en-US" sz="3000" dirty="0"/>
           </a:p>
         </p:txBody>
       </p:sp>
@@ -4270,13 +4300,13 @@
           </a:xfrm>
           <a:prstGeom prst="roundRect">
             <a:avLst>
-              <a:gd name="adj" fmla="val 4138"/>
+              <a:gd name="adj" fmla="val 11034"/>
             </a:avLst>
           </a:prstGeom>
           <a:solidFill>
             <a:schemeClr val="bg2"/>
           </a:solidFill>
-          <a:ln w="12700">
+          <a:ln w="15875">
             <a:solidFill>
               <a:schemeClr val="accent6"/>
             </a:solidFill>
@@ -4299,9 +4329,14 @@
             <a:avLst/>
           </a:prstGeom>
           <a:solidFill>
-            <a:schemeClr val="accent1"/>
+            <a:schemeClr val="accent4"/>
           </a:solidFill>
-          <a:ln/>
+          <a:ln w="25400">
+            <a:solidFill>
+              <a:schemeClr val="accent2"/>
+            </a:solidFill>
+            <a:prstDash val="solid"/>
+          </a:ln>
         </p:spPr>
       </p:sp>
       <p:sp>
@@ -4348,8 +4383,8 @@
         </p:nvSpPr>
         <p:spPr>
           <a:xfrm>
-            <a:off x="822960" y="2971800"/>
-            <a:ext cx="2813304" cy="457200"/>
+            <a:off x="822960" y="2926080"/>
+            <a:ext cx="2813304" cy="777240"/>
           </a:xfrm>
           <a:prstGeom prst="rect">
             <a:avLst/>
@@ -4358,24 +4393,24 @@
           <a:ln/>
         </p:spPr>
         <p:txBody>
-          <a:bodyPr wrap="square" lIns="0" tIns="0" rIns="0" bIns="0" rtlCol="0" anchor="ctr"/>
+          <a:bodyPr wrap="square" lIns="0" tIns="0" rIns="0" bIns="0" rtlCol="0" anchor="t"/>
           <a:lstStyle/>
           <a:p>
             <a:pPr indent="0" marL="0">
               <a:buNone/>
             </a:pPr>
             <a:r>
-              <a:rPr lang="en-US" sz="2000" b="1" dirty="0">
+              <a:rPr lang="en-US" sz="1800" b="1" dirty="0">
                 <a:solidFill>
                   <a:schemeClr val="tx1"/>
                 </a:solidFill>
-                <a:latin typeface="Arial" pitchFamily="34" charset="0"/>
-                <a:ea typeface="Arial" pitchFamily="34" charset="-122"/>
-                <a:cs typeface="Arial" pitchFamily="34" charset="-120"/>
+                <a:latin typeface="Segoe Script" pitchFamily="34" charset="0"/>
+                <a:ea typeface="Segoe Script" pitchFamily="34" charset="-122"/>
+                <a:cs typeface="Segoe Script" pitchFamily="34" charset="-120"/>
               </a:rPr>
               <a:t>Collect game textures</a:t>
             </a:r>
-            <a:endParaRPr lang="en-US" sz="2000" dirty="0"/>
+            <a:endParaRPr lang="en-US" sz="1800" dirty="0"/>
           </a:p>
         </p:txBody>
       </p:sp>
@@ -4387,8 +4422,8 @@
         </p:nvSpPr>
         <p:spPr>
           <a:xfrm>
-            <a:off x="822960" y="3520440"/>
-            <a:ext cx="2813304" cy="1097280"/>
+            <a:off x="822960" y="3749040"/>
+            <a:ext cx="2813304" cy="914400"/>
           </a:xfrm>
           <a:prstGeom prst="rect">
             <a:avLst/>
@@ -4404,14 +4439,14 @@
               <a:buNone/>
             </a:pPr>
             <a:r>
-              <a:rPr lang="en-US" sz="1500" dirty="0">
+              <a:rPr lang="en-US" sz="1400" dirty="0">
                 <a:solidFill>
                   <a:schemeClr val="tx2"/>
                 </a:solidFill>
               </a:rPr>
               <a:t>738 free (CC0) textures: bricks, wood, metal, ground, fabric, stone.</a:t>
             </a:r>
-            <a:endParaRPr lang="en-US" sz="1500" dirty="0"/>
+            <a:endParaRPr lang="en-US" sz="1400" dirty="0"/>
           </a:p>
         </p:txBody>
       </p:sp>
@@ -4448,13 +4483,13 @@
           </a:xfrm>
           <a:prstGeom prst="roundRect">
             <a:avLst>
-              <a:gd name="adj" fmla="val 4138"/>
+              <a:gd name="adj" fmla="val 11034"/>
             </a:avLst>
           </a:prstGeom>
           <a:solidFill>
             <a:schemeClr val="bg2"/>
           </a:solidFill>
-          <a:ln w="12700">
+          <a:ln w="15875">
             <a:solidFill>
               <a:schemeClr val="accent6"/>
             </a:solidFill>
@@ -4477,9 +4512,14 @@
             <a:avLst/>
           </a:prstGeom>
           <a:solidFill>
-            <a:schemeClr val="accent1"/>
+            <a:schemeClr val="accent4"/>
           </a:solidFill>
-          <a:ln/>
+          <a:ln w="25400">
+            <a:solidFill>
+              <a:schemeClr val="accent2"/>
+            </a:solidFill>
+            <a:prstDash val="solid"/>
+          </a:ln>
         </p:spPr>
       </p:sp>
       <p:sp>
@@ -4526,8 +4566,8 @@
         </p:nvSpPr>
         <p:spPr>
           <a:xfrm>
-            <a:off x="4687824" y="2971800"/>
-            <a:ext cx="2813304" cy="457200"/>
+            <a:off x="4687824" y="2926080"/>
+            <a:ext cx="2813304" cy="777240"/>
           </a:xfrm>
           <a:prstGeom prst="rect">
             <a:avLst/>
@@ -4536,24 +4576,24 @@
           <a:ln/>
         </p:spPr>
         <p:txBody>
-          <a:bodyPr wrap="square" lIns="0" tIns="0" rIns="0" bIns="0" rtlCol="0" anchor="ctr"/>
+          <a:bodyPr wrap="square" lIns="0" tIns="0" rIns="0" bIns="0" rtlCol="0" anchor="t"/>
           <a:lstStyle/>
           <a:p>
             <a:pPr indent="0" marL="0">
               <a:buNone/>
             </a:pPr>
             <a:r>
-              <a:rPr lang="en-US" sz="2000" b="1" dirty="0">
+              <a:rPr lang="en-US" sz="1800" b="1" dirty="0">
                 <a:solidFill>
                   <a:schemeClr val="tx1"/>
                 </a:solidFill>
-                <a:latin typeface="Arial" pitchFamily="34" charset="0"/>
-                <a:ea typeface="Arial" pitchFamily="34" charset="-122"/>
-                <a:cs typeface="Arial" pitchFamily="34" charset="-120"/>
+                <a:latin typeface="Segoe Script" pitchFamily="34" charset="0"/>
+                <a:ea typeface="Segoe Script" pitchFamily="34" charset="-122"/>
+                <a:cs typeface="Segoe Script" pitchFamily="34" charset="-120"/>
               </a:rPr>
               <a:t>Damage them on purpose</a:t>
             </a:r>
-            <a:endParaRPr lang="en-US" sz="2000" dirty="0"/>
+            <a:endParaRPr lang="en-US" sz="1800" dirty="0"/>
           </a:p>
         </p:txBody>
       </p:sp>
@@ -4565,8 +4605,8 @@
         </p:nvSpPr>
         <p:spPr>
           <a:xfrm>
-            <a:off x="4687824" y="3520440"/>
-            <a:ext cx="2813304" cy="1097280"/>
+            <a:off x="4687824" y="3749040"/>
+            <a:ext cx="2813304" cy="914400"/>
           </a:xfrm>
           <a:prstGeom prst="rect">
             <a:avLst/>
@@ -4582,14 +4622,14 @@
               <a:buNone/>
             </a:pPr>
             <a:r>
-              <a:rPr lang="en-US" sz="1500" dirty="0">
+              <a:rPr lang="en-US" sz="1400" dirty="0">
                 <a:solidFill>
                   <a:schemeClr val="tx2"/>
                 </a:solidFill>
               </a:rPr>
               <a:t>Blur, downscale, noise and JPEG compression, applied at random, the way old assets get degraded.</a:t>
             </a:r>
-            <a:endParaRPr lang="en-US" sz="1500" dirty="0"/>
+            <a:endParaRPr lang="en-US" sz="1400" dirty="0"/>
           </a:p>
         </p:txBody>
       </p:sp>
@@ -4626,15 +4666,15 @@
           </a:xfrm>
           <a:prstGeom prst="roundRect">
             <a:avLst>
-              <a:gd name="adj" fmla="val 4138"/>
+              <a:gd name="adj" fmla="val 11034"/>
             </a:avLst>
           </a:prstGeom>
           <a:solidFill>
             <a:schemeClr val="bg2"/>
           </a:solidFill>
-          <a:ln w="25400">
+          <a:ln w="31750">
             <a:solidFill>
-              <a:schemeClr val="accent1"/>
+              <a:schemeClr val="accent2"/>
             </a:solidFill>
             <a:prstDash val="solid"/>
           </a:ln>
@@ -4655,9 +4695,14 @@
             <a:avLst/>
           </a:prstGeom>
           <a:solidFill>
-            <a:schemeClr val="accent1"/>
+            <a:schemeClr val="accent4"/>
           </a:solidFill>
-          <a:ln/>
+          <a:ln w="25400">
+            <a:solidFill>
+              <a:schemeClr val="accent2"/>
+            </a:solidFill>
+            <a:prstDash val="solid"/>
+          </a:ln>
         </p:spPr>
       </p:sp>
       <p:sp>
@@ -4704,8 +4749,8 @@
         </p:nvSpPr>
         <p:spPr>
           <a:xfrm>
-            <a:off x="8552688" y="2971800"/>
-            <a:ext cx="2813304" cy="457200"/>
+            <a:off x="8552688" y="2926080"/>
+            <a:ext cx="2813304" cy="777240"/>
           </a:xfrm>
           <a:prstGeom prst="rect">
             <a:avLst/>
@@ -4714,24 +4759,24 @@
           <a:ln/>
         </p:spPr>
         <p:txBody>
-          <a:bodyPr wrap="square" lIns="0" tIns="0" rIns="0" bIns="0" rtlCol="0" anchor="ctr"/>
+          <a:bodyPr wrap="square" lIns="0" tIns="0" rIns="0" bIns="0" rtlCol="0" anchor="t"/>
           <a:lstStyle/>
           <a:p>
             <a:pPr indent="0" marL="0">
               <a:buNone/>
             </a:pPr>
             <a:r>
-              <a:rPr lang="en-US" sz="2000" b="1" dirty="0">
+              <a:rPr lang="en-US" sz="1800" b="1" dirty="0">
                 <a:solidFill>
                   <a:schemeClr val="tx1"/>
                 </a:solidFill>
-                <a:latin typeface="Arial" pitchFamily="34" charset="0"/>
-                <a:ea typeface="Arial" pitchFamily="34" charset="-122"/>
-                <a:cs typeface="Arial" pitchFamily="34" charset="-120"/>
+                <a:latin typeface="Segoe Script" pitchFamily="34" charset="0"/>
+                <a:ea typeface="Segoe Script" pitchFamily="34" charset="-122"/>
+                <a:cs typeface="Segoe Script" pitchFamily="34" charset="-120"/>
               </a:rPr>
               <a:t>Learn to undo it</a:t>
             </a:r>
-            <a:endParaRPr lang="en-US" sz="2000" dirty="0"/>
+            <a:endParaRPr lang="en-US" sz="1800" dirty="0"/>
           </a:p>
         </p:txBody>
       </p:sp>
@@ -4743,8 +4788,8 @@
         </p:nvSpPr>
         <p:spPr>
           <a:xfrm>
-            <a:off x="8552688" y="3520440"/>
-            <a:ext cx="2813304" cy="1097280"/>
+            <a:off x="8552688" y="3749040"/>
+            <a:ext cx="2813304" cy="914400"/>
           </a:xfrm>
           <a:prstGeom prst="rect">
             <a:avLst/>
@@ -4760,14 +4805,14 @@
               <a:buNone/>
             </a:pPr>
             <a:r>
-              <a:rPr lang="en-US" sz="1500" dirty="0">
+              <a:rPr lang="en-US" sz="1400" dirty="0">
                 <a:solidFill>
                   <a:schemeClr val="tx2"/>
                 </a:solidFill>
               </a:rPr>
               <a:t>A compact generator learns to rebuild the missing detail at 4×, sharpened with a GAN stage.</a:t>
             </a:r>
-            <a:endParaRPr lang="en-US" sz="1500" dirty="0"/>
+            <a:endParaRPr lang="en-US" sz="1400" dirty="0"/>
           </a:p>
         </p:txBody>
       </p:sp>
@@ -4919,9 +4964,9 @@
                 <a:solidFill>
                   <a:schemeClr val="accent1"/>
                 </a:solidFill>
-                <a:latin typeface="Arial" pitchFamily="34" charset="0"/>
-                <a:ea typeface="Arial" pitchFamily="34" charset="-122"/>
-                <a:cs typeface="Arial" pitchFamily="34" charset="-120"/>
+                <a:latin typeface="Segoe UI" pitchFamily="34" charset="0"/>
+                <a:ea typeface="Segoe UI" pitchFamily="34" charset="-122"/>
+                <a:cs typeface="Segoe UI" pitchFamily="34" charset="-120"/>
               </a:rPr>
               <a:t>REAL RESULTS</a:t>
             </a:r>
@@ -4956,17 +5001,17 @@
               <a:buNone/>
             </a:pPr>
             <a:r>
-              <a:rPr lang="en-US" sz="3400" b="1" dirty="0">
+              <a:rPr lang="en-US" sz="3000" b="1" dirty="0">
                 <a:solidFill>
                   <a:schemeClr val="tx1"/>
                 </a:solidFill>
-                <a:latin typeface="Arial" pitchFamily="34" charset="0"/>
-                <a:ea typeface="Arial" pitchFamily="34" charset="-122"/>
-                <a:cs typeface="Arial" pitchFamily="34" charset="-120"/>
+                <a:latin typeface="Segoe Script" pitchFamily="34" charset="0"/>
+                <a:ea typeface="Segoe Script" pitchFamily="34" charset="-122"/>
+                <a:cs typeface="Segoe Script" pitchFamily="34" charset="-120"/>
               </a:rPr>
               <a:t>Real results on textures it never saw.</a:t>
             </a:r>
-            <a:endParaRPr lang="en-US" sz="3400" dirty="0"/>
+            <a:endParaRPr lang="en-US" sz="3000" dirty="0"/>
           </a:p>
         </p:txBody>
       </p:sp>
@@ -5019,15 +5064,15 @@
           </a:xfrm>
           <a:prstGeom prst="roundRect">
             <a:avLst>
-              <a:gd name="adj" fmla="val 2609"/>
+              <a:gd name="adj" fmla="val 6957"/>
             </a:avLst>
           </a:prstGeom>
           <a:solidFill>
             <a:srgbClr val="FFFFFF"/>
           </a:solidFill>
-          <a:ln w="12700">
+          <a:ln w="22225">
             <a:solidFill>
-              <a:schemeClr val="accent6"/>
+              <a:schemeClr val="accent2"/>
             </a:solidFill>
             <a:prstDash val="solid"/>
           </a:ln>
@@ -5158,9 +5203,9 @@
                 <a:solidFill>
                   <a:schemeClr val="accent1"/>
                 </a:solidFill>
-                <a:latin typeface="Arial" pitchFamily="34" charset="0"/>
-                <a:ea typeface="Arial" pitchFamily="34" charset="-122"/>
-                <a:cs typeface="Arial" pitchFamily="34" charset="-120"/>
+                <a:latin typeface="Segoe UI" pitchFamily="34" charset="0"/>
+                <a:ea typeface="Segoe UI" pitchFamily="34" charset="-122"/>
+                <a:cs typeface="Segoe UI" pitchFamily="34" charset="-120"/>
               </a:rPr>
               <a:t>HOW WE'D WORK TOGETHER</a:t>
             </a:r>
@@ -5195,17 +5240,17 @@
               <a:buNone/>
             </a:pPr>
             <a:r>
-              <a:rPr lang="en-US" sz="3400" b="1" dirty="0">
+              <a:rPr lang="en-US" sz="3000" b="1" dirty="0">
                 <a:solidFill>
                   <a:schemeClr val="tx1"/>
                 </a:solidFill>
-                <a:latin typeface="Arial" pitchFamily="34" charset="0"/>
-                <a:ea typeface="Arial" pitchFamily="34" charset="-122"/>
-                <a:cs typeface="Arial" pitchFamily="34" charset="-120"/>
+                <a:latin typeface="Segoe Script" pitchFamily="34" charset="0"/>
+                <a:ea typeface="Segoe Script" pitchFamily="34" charset="-122"/>
+                <a:cs typeface="Segoe Script" pitchFamily="34" charset="-120"/>
               </a:rPr>
               <a:t>Start with a test pack. Scale to the whole library.</a:t>
             </a:r>
-            <a:endParaRPr lang="en-US" sz="3400" dirty="0"/>
+            <a:endParaRPr lang="en-US" sz="3000" dirty="0"/>
           </a:p>
         </p:txBody>
       </p:sp>
@@ -5222,13 +5267,13 @@
           </a:xfrm>
           <a:prstGeom prst="roundRect">
             <a:avLst>
-              <a:gd name="adj" fmla="val 4364"/>
+              <a:gd name="adj" fmla="val 11636"/>
             </a:avLst>
           </a:prstGeom>
           <a:solidFill>
             <a:schemeClr val="bg2"/>
           </a:solidFill>
-          <a:ln w="12700">
+          <a:ln w="15875">
             <a:solidFill>
               <a:schemeClr val="accent6"/>
             </a:solidFill>
@@ -5281,7 +5326,7 @@
         <p:spPr>
           <a:xfrm>
             <a:off x="868680" y="2651760"/>
-            <a:ext cx="2843784" cy="457200"/>
+            <a:ext cx="2843784" cy="777240"/>
           </a:xfrm>
           <a:prstGeom prst="rect">
             <a:avLst/>
@@ -5290,24 +5335,24 @@
           <a:ln/>
         </p:spPr>
         <p:txBody>
-          <a:bodyPr wrap="square" lIns="0" tIns="0" rIns="0" bIns="0" rtlCol="0" anchor="ctr"/>
+          <a:bodyPr wrap="square" lIns="0" tIns="0" rIns="0" bIns="0" rtlCol="0" anchor="t"/>
           <a:lstStyle/>
           <a:p>
             <a:pPr indent="0" marL="0">
               <a:buNone/>
             </a:pPr>
             <a:r>
-              <a:rPr lang="en-US" sz="2000" b="1" dirty="0">
+              <a:rPr lang="en-US" sz="1800" b="1" dirty="0">
                 <a:solidFill>
                   <a:schemeClr val="tx1"/>
                 </a:solidFill>
-                <a:latin typeface="Arial" pitchFamily="34" charset="0"/>
-                <a:ea typeface="Arial" pitchFamily="34" charset="-122"/>
-                <a:cs typeface="Arial" pitchFamily="34" charset="-120"/>
+                <a:latin typeface="Segoe Script" pitchFamily="34" charset="0"/>
+                <a:ea typeface="Segoe Script" pitchFamily="34" charset="-122"/>
+                <a:cs typeface="Segoe Script" pitchFamily="34" charset="-120"/>
               </a:rPr>
               <a:t>Send 10–20 textures</a:t>
             </a:r>
-            <a:endParaRPr lang="en-US" sz="2000" dirty="0"/>
+            <a:endParaRPr lang="en-US" sz="1800" dirty="0"/>
           </a:p>
         </p:txBody>
       </p:sp>
@@ -5319,8 +5364,8 @@
         </p:nvSpPr>
         <p:spPr>
           <a:xfrm>
-            <a:off x="868680" y="3200400"/>
-            <a:ext cx="2843784" cy="1234440"/>
+            <a:off x="868680" y="3474720"/>
+            <a:ext cx="2843784" cy="960120"/>
           </a:xfrm>
           <a:prstGeom prst="rect">
             <a:avLst/>
@@ -5336,14 +5381,14 @@
               <a:buNone/>
             </a:pPr>
             <a:r>
-              <a:rPr lang="en-US" sz="1500" dirty="0">
+              <a:rPr lang="en-US" sz="1400" dirty="0">
                 <a:solidFill>
                   <a:schemeClr val="tx2"/>
                 </a:solidFill>
               </a:rPr>
               <a:t>A representative sample of your game's textures or asset pack.</a:t>
             </a:r>
-            <a:endParaRPr lang="en-US" sz="1500" dirty="0"/>
+            <a:endParaRPr lang="en-US" sz="1400" dirty="0"/>
           </a:p>
         </p:txBody>
       </p:sp>
@@ -5360,13 +5405,13 @@
           </a:xfrm>
           <a:prstGeom prst="roundRect">
             <a:avLst>
-              <a:gd name="adj" fmla="val 4364"/>
+              <a:gd name="adj" fmla="val 11636"/>
             </a:avLst>
           </a:prstGeom>
           <a:solidFill>
             <a:schemeClr val="bg2"/>
           </a:solidFill>
-          <a:ln w="12700">
+          <a:ln w="15875">
             <a:solidFill>
               <a:schemeClr val="accent6"/>
             </a:solidFill>
@@ -5419,7 +5464,7 @@
         <p:spPr>
           <a:xfrm>
             <a:off x="4672584" y="2651760"/>
-            <a:ext cx="2843784" cy="457200"/>
+            <a:ext cx="2843784" cy="777240"/>
           </a:xfrm>
           <a:prstGeom prst="rect">
             <a:avLst/>
@@ -5428,24 +5473,24 @@
           <a:ln/>
         </p:spPr>
         <p:txBody>
-          <a:bodyPr wrap="square" lIns="0" tIns="0" rIns="0" bIns="0" rtlCol="0" anchor="ctr"/>
+          <a:bodyPr wrap="square" lIns="0" tIns="0" rIns="0" bIns="0" rtlCol="0" anchor="t"/>
           <a:lstStyle/>
           <a:p>
             <a:pPr indent="0" marL="0">
               <a:buNone/>
             </a:pPr>
             <a:r>
-              <a:rPr lang="en-US" sz="2000" b="1" dirty="0">
+              <a:rPr lang="en-US" sz="1800" b="1" dirty="0">
                 <a:solidFill>
                   <a:schemeClr val="tx1"/>
                 </a:solidFill>
-                <a:latin typeface="Arial" pitchFamily="34" charset="0"/>
-                <a:ea typeface="Arial" pitchFamily="34" charset="-122"/>
-                <a:cs typeface="Arial" pitchFamily="34" charset="-120"/>
+                <a:latin typeface="Segoe Script" pitchFamily="34" charset="0"/>
+                <a:ea typeface="Segoe Script" pitchFamily="34" charset="-122"/>
+                <a:cs typeface="Segoe Script" pitchFamily="34" charset="-120"/>
               </a:rPr>
               <a:t>Test pack back</a:t>
             </a:r>
-            <a:endParaRPr lang="en-US" sz="2000" dirty="0"/>
+            <a:endParaRPr lang="en-US" sz="1800" dirty="0"/>
           </a:p>
         </p:txBody>
       </p:sp>
@@ -5457,8 +5502,8 @@
         </p:nvSpPr>
         <p:spPr>
           <a:xfrm>
-            <a:off x="4672584" y="3200400"/>
-            <a:ext cx="2843784" cy="1234440"/>
+            <a:off x="4672584" y="3474720"/>
+            <a:ext cx="2843784" cy="960120"/>
           </a:xfrm>
           <a:prstGeom prst="rect">
             <a:avLst/>
@@ -5474,14 +5519,14 @@
               <a:buNone/>
             </a:pPr>
             <a:r>
-              <a:rPr lang="en-US" sz="1500" dirty="0">
+              <a:rPr lang="en-US" sz="1400" dirty="0">
                 <a:solidFill>
                   <a:schemeClr val="tx2"/>
                 </a:solidFill>
               </a:rPr>
               <a:t>I upscale them, optionally fine-tune on your art style, and send before/after comparisons.</a:t>
             </a:r>
-            <a:endParaRPr lang="en-US" sz="1500" dirty="0"/>
+            <a:endParaRPr lang="en-US" sz="1400" dirty="0"/>
           </a:p>
         </p:txBody>
       </p:sp>
@@ -5498,13 +5543,13 @@
           </a:xfrm>
           <a:prstGeom prst="roundRect">
             <a:avLst>
-              <a:gd name="adj" fmla="val 4364"/>
+              <a:gd name="adj" fmla="val 11636"/>
             </a:avLst>
           </a:prstGeom>
           <a:solidFill>
             <a:schemeClr val="bg2"/>
           </a:solidFill>
-          <a:ln w="12700">
+          <a:ln w="15875">
             <a:solidFill>
               <a:schemeClr val="accent6"/>
             </a:solidFill>
@@ -5557,7 +5602,7 @@
         <p:spPr>
           <a:xfrm>
             <a:off x="8476488" y="2651760"/>
-            <a:ext cx="2843784" cy="457200"/>
+            <a:ext cx="2843784" cy="777240"/>
           </a:xfrm>
           <a:prstGeom prst="rect">
             <a:avLst/>
@@ -5566,24 +5611,24 @@
           <a:ln/>
         </p:spPr>
         <p:txBody>
-          <a:bodyPr wrap="square" lIns="0" tIns="0" rIns="0" bIns="0" rtlCol="0" anchor="ctr"/>
+          <a:bodyPr wrap="square" lIns="0" tIns="0" rIns="0" bIns="0" rtlCol="0" anchor="t"/>
           <a:lstStyle/>
           <a:p>
             <a:pPr indent="0" marL="0">
               <a:buNone/>
             </a:pPr>
             <a:r>
-              <a:rPr lang="en-US" sz="2000" b="1" dirty="0">
+              <a:rPr lang="en-US" sz="1800" b="1" dirty="0">
                 <a:solidFill>
                   <a:schemeClr val="tx1"/>
                 </a:solidFill>
-                <a:latin typeface="Arial" pitchFamily="34" charset="0"/>
-                <a:ea typeface="Arial" pitchFamily="34" charset="-122"/>
-                <a:cs typeface="Arial" pitchFamily="34" charset="-120"/>
+                <a:latin typeface="Segoe Script" pitchFamily="34" charset="0"/>
+                <a:ea typeface="Segoe Script" pitchFamily="34" charset="-122"/>
+                <a:cs typeface="Segoe Script" pitchFamily="34" charset="-120"/>
               </a:rPr>
               <a:t>Batch the library</a:t>
             </a:r>
-            <a:endParaRPr lang="en-US" sz="2000" dirty="0"/>
+            <a:endParaRPr lang="en-US" sz="1800" dirty="0"/>
           </a:p>
         </p:txBody>
       </p:sp>
@@ -5595,8 +5640,8 @@
         </p:nvSpPr>
         <p:spPr>
           <a:xfrm>
-            <a:off x="8476488" y="3200400"/>
-            <a:ext cx="2843784" cy="1234440"/>
+            <a:off x="8476488" y="3474720"/>
+            <a:ext cx="2843784" cy="960120"/>
           </a:xfrm>
           <a:prstGeom prst="rect">
             <a:avLst/>
@@ -5612,14 +5657,14 @@
               <a:buNone/>
             </a:pPr>
             <a:r>
-              <a:rPr lang="en-US" sz="1500" dirty="0">
+              <a:rPr lang="en-US" sz="1400" dirty="0">
                 <a:solidFill>
                   <a:schemeClr val="tx2"/>
                 </a:solidFill>
               </a:rPr>
               <a:t>Folder in, folder out, file names kept, ready to drop into your mod or engine.</a:t>
             </a:r>
-            <a:endParaRPr lang="en-US" sz="1500" dirty="0"/>
+            <a:endParaRPr lang="en-US" sz="1400" dirty="0"/>
           </a:p>
         </p:txBody>
       </p:sp>
@@ -5636,13 +5681,13 @@
           </a:xfrm>
           <a:prstGeom prst="roundRect">
             <a:avLst>
-              <a:gd name="adj" fmla="val 8276"/>
+              <a:gd name="adj" fmla="val 22069"/>
             </a:avLst>
           </a:prstGeom>
           <a:solidFill>
             <a:schemeClr val="bg2"/>
           </a:solidFill>
-          <a:ln w="12700">
+          <a:ln w="15875">
             <a:solidFill>
               <a:schemeClr val="accent6"/>
             </a:solidFill>
@@ -5794,11 +5839,11 @@
             <a:r>
               <a:rPr lang="en-US" sz="1400" b="1" spc="200" kern="0" dirty="0">
                 <a:solidFill>
-                  <a:schemeClr val="accent2"/>
-                </a:solidFill>
-                <a:latin typeface="Arial" pitchFamily="34" charset="0"/>
-                <a:ea typeface="Arial" pitchFamily="34" charset="-122"/>
-                <a:cs typeface="Arial" pitchFamily="34" charset="-120"/>
+                  <a:schemeClr val="accent1"/>
+                </a:solidFill>
+                <a:latin typeface="Segoe UI" pitchFamily="34" charset="0"/>
+                <a:ea typeface="Segoe UI" pitchFamily="34" charset="-122"/>
+                <a:cs typeface="Segoe UI" pitchFamily="34" charset="-120"/>
               </a:rPr>
               <a:t>NEXT STEP</a:t>
             </a:r>
@@ -5835,9 +5880,9 @@
                 <a:solidFill>
                   <a:schemeClr val="tx1"/>
                 </a:solidFill>
-                <a:latin typeface="Arial" pitchFamily="34" charset="0"/>
-                <a:ea typeface="Arial" pitchFamily="34" charset="-122"/>
-                <a:cs typeface="Arial" pitchFamily="34" charset="-120"/>
+                <a:latin typeface="Segoe Script" pitchFamily="34" charset="0"/>
+                <a:ea typeface="Segoe Script" pitchFamily="34" charset="-122"/>
+                <a:cs typeface="Segoe Script" pitchFamily="34" charset="-120"/>
               </a:rPr>
               <a:t>Send me 10 of your textures.</a:t>
             </a:r>
@@ -5852,9 +5897,9 @@
                 <a:solidFill>
                   <a:schemeClr val="accent1"/>
                 </a:solidFill>
-                <a:latin typeface="Arial" pitchFamily="34" charset="0"/>
-                <a:ea typeface="Arial" pitchFamily="34" charset="-122"/>
-                <a:cs typeface="Arial" pitchFamily="34" charset="-120"/>
+                <a:latin typeface="Segoe Script" pitchFamily="34" charset="0"/>
+                <a:ea typeface="Segoe Script" pitchFamily="34" charset="-122"/>
+                <a:cs typeface="Segoe Script" pitchFamily="34" charset="-120"/>
               </a:rPr>
               <a:t>I'll send them back in HD.</a:t>
             </a:r>
@@ -5875,15 +5920,15 @@
           </a:xfrm>
           <a:prstGeom prst="roundRect">
             <a:avLst>
-              <a:gd name="adj" fmla="val 4138"/>
+              <a:gd name="adj" fmla="val 11034"/>
             </a:avLst>
           </a:prstGeom>
           <a:solidFill>
             <a:srgbClr val="FFFFFF"/>
           </a:solidFill>
-          <a:ln w="12700">
+          <a:ln w="22225">
             <a:solidFill>
-              <a:schemeClr val="accent6"/>
+              <a:schemeClr val="accent2"/>
             </a:solidFill>
             <a:prstDash val="solid"/>
           </a:ln>
@@ -6111,9 +6156,9 @@
                 <a:solidFill>
                   <a:schemeClr val="accent1"/>
                 </a:solidFill>
-                <a:latin typeface="Arial" pitchFamily="34" charset="0"/>
-                <a:ea typeface="Arial" pitchFamily="34" charset="-122"/>
-                <a:cs typeface="Arial" pitchFamily="34" charset="-120"/>
+                <a:latin typeface="Segoe UI" pitchFamily="34" charset="0"/>
+                <a:ea typeface="Segoe UI" pitchFamily="34" charset="-122"/>
+                <a:cs typeface="Segoe UI" pitchFamily="34" charset="-120"/>
               </a:rPr>
               <a:t>APPENDIX · FOR ENGINEERS</a:t>
             </a:r>
@@ -6148,17 +6193,17 @@
               <a:buNone/>
             </a:pPr>
             <a:r>
-              <a:rPr lang="en-US" sz="3400" b="1" dirty="0">
+              <a:rPr lang="en-US" sz="3000" b="1" dirty="0">
                 <a:solidFill>
                   <a:schemeClr val="tx1"/>
                 </a:solidFill>
-                <a:latin typeface="Arial" pitchFamily="34" charset="0"/>
-                <a:ea typeface="Arial" pitchFamily="34" charset="-122"/>
-                <a:cs typeface="Arial" pitchFamily="34" charset="-120"/>
+                <a:latin typeface="Segoe Script" pitchFamily="34" charset="0"/>
+                <a:ea typeface="Segoe Script" pitchFamily="34" charset="-122"/>
+                <a:cs typeface="Segoe Script" pitchFamily="34" charset="-120"/>
               </a:rPr>
               <a:t>The numbers behind it.</a:t>
             </a:r>
-            <a:endParaRPr lang="en-US" sz="3400" dirty="0"/>
+            <a:endParaRPr lang="en-US" sz="3000" dirty="0"/>
           </a:p>
         </p:txBody>
       </p:sp>
@@ -6197,6 +6242,33 @@
             <a:endParaRPr lang="en-US" sz="1300" dirty="0"/>
           </a:p>
         </p:txBody>
+      </p:sp>
+      <p:sp>
+        <p:nvSpPr>
+          <p:cNvPr id="5" name="Table frame"/>
+          <p:cNvSpPr/>
+          <p:nvPr/>
+        </p:nvSpPr>
+        <p:spPr>
+          <a:xfrm>
+            <a:off x="502920" y="1938528"/>
+            <a:ext cx="11183112" cy="2761488"/>
+          </a:xfrm>
+          <a:prstGeom prst="roundRect">
+            <a:avLst>
+              <a:gd name="adj" fmla="val 9934"/>
+            </a:avLst>
+          </a:prstGeom>
+          <a:solidFill>
+            <a:schemeClr val="bg1"/>
+          </a:solidFill>
+          <a:ln w="25400">
+            <a:solidFill>
+              <a:schemeClr val="accent2"/>
+            </a:solidFill>
+            <a:prstDash val="solid"/>
+          </a:ln>
+        </p:spPr>
       </p:sp>
       <p:graphicFrame>
         <p:nvGraphicFramePr>
@@ -6213,15 +6285,15 @@
           </p:nvPr>
         </p:nvGraphicFramePr>
         <p:xfrm>
-          <a:off x="548640" y="1965960"/>
-          <a:ext cx="11091672" cy="914400"/>
+          <a:off x="731520" y="2075688"/>
+          <a:ext cx="10725912" cy="914400"/>
         </p:xfrm>
         <a:graphic>
           <a:graphicData uri="http://schemas.openxmlformats.org/drawingml/2006/table">
             <a:tbl>
               <a:tblPr/>
               <a:tblGrid>
-                <a:gridCol w="4873752"/>
+                <a:gridCol w="4507992"/>
                 <a:gridCol w="1188720"/>
                 <a:gridCol w="1188720"/>
                 <a:gridCol w="1188720"/>
@@ -6242,55 +6314,31 @@
                           <a:solidFill>
                             <a:schemeClr val="accent1"/>
                           </a:solidFill>
-                          <a:latin typeface="Calibri" pitchFamily="34" charset="0"/>
-                          <a:ea typeface="Calibri" pitchFamily="34" charset="-122"/>
-                          <a:cs typeface="Calibri" pitchFamily="34" charset="-120"/>
+                          <a:latin typeface="Segoe UI" pitchFamily="34" charset="0"/>
+                          <a:ea typeface="Segoe UI" pitchFamily="34" charset="-122"/>
+                          <a:cs typeface="Segoe UI" pitchFamily="34" charset="-120"/>
                         </a:rPr>
                         <a:t>Method</a:t>
                       </a:r>
                       <a:endParaRPr lang="en-US" sz="1250" dirty="0">
-                        <a:latin typeface="Calibri" charset="0"/>
-                        <a:ea typeface="Calibri" charset="0"/>
-                        <a:cs typeface="Calibri" charset="0"/>
+                        <a:latin typeface="Segoe UI" charset="0"/>
+                        <a:ea typeface="Segoe UI" charset="0"/>
+                        <a:cs typeface="Segoe UI" charset="0"/>
                       </a:endParaRPr>
                     </a:p>
                   </a:txBody>
                   <a:tcPr marL="54864" marR="54864" marT="54864" marB="54864">
-                    <a:lnL w="9525" cap="flat" cmpd="sng" algn="ctr">
-                      <a:solidFill>
-                        <a:srgbClr val="E5E7EB"/>
-                      </a:solidFill>
-                      <a:prstDash val="solid"/>
-                      <a:round/>
-                      <a:headEnd type="none" w="med" len="med"/>
-                      <a:tailEnd type="none" w="med" len="med"/>
+                    <a:lnL w="0" cap="flat" cmpd="sng" algn="ctr">
+                      <a:noFill/>
                     </a:lnL>
-                    <a:lnR w="9525" cap="flat" cmpd="sng" algn="ctr">
-                      <a:solidFill>
-                        <a:srgbClr val="E5E7EB"/>
-                      </a:solidFill>
-                      <a:prstDash val="solid"/>
-                      <a:round/>
-                      <a:headEnd type="none" w="med" len="med"/>
-                      <a:tailEnd type="none" w="med" len="med"/>
+                    <a:lnR w="0" cap="flat" cmpd="sng" algn="ctr">
+                      <a:noFill/>
                     </a:lnR>
-                    <a:lnT w="9525" cap="flat" cmpd="sng" algn="ctr">
-                      <a:solidFill>
-                        <a:srgbClr val="E5E7EB"/>
-                      </a:solidFill>
-                      <a:prstDash val="solid"/>
-                      <a:round/>
-                      <a:headEnd type="none" w="med" len="med"/>
-                      <a:tailEnd type="none" w="med" len="med"/>
+                    <a:lnT w="0" cap="flat" cmpd="sng" algn="ctr">
+                      <a:noFill/>
                     </a:lnT>
-                    <a:lnB w="9525" cap="flat" cmpd="sng" algn="ctr">
-                      <a:solidFill>
-                        <a:srgbClr val="E5E7EB"/>
-                      </a:solidFill>
-                      <a:prstDash val="solid"/>
-                      <a:round/>
-                      <a:headEnd type="none" w="med" len="med"/>
-                      <a:tailEnd type="none" w="med" len="med"/>
+                    <a:lnB w="0" cap="flat" cmpd="sng" algn="ctr">
+                      <a:noFill/>
                     </a:lnB>
                     <a:solidFill>
                       <a:schemeClr val="bg2"/>
@@ -6310,55 +6358,31 @@
                           <a:solidFill>
                             <a:schemeClr val="accent1"/>
                           </a:solidFill>
-                          <a:latin typeface="Calibri" pitchFamily="34" charset="0"/>
-                          <a:ea typeface="Calibri" pitchFamily="34" charset="-122"/>
-                          <a:cs typeface="Calibri" pitchFamily="34" charset="-120"/>
+                          <a:latin typeface="Segoe UI" pitchFamily="34" charset="0"/>
+                          <a:ea typeface="Segoe UI" pitchFamily="34" charset="-122"/>
+                          <a:cs typeface="Segoe UI" pitchFamily="34" charset="-120"/>
                         </a:rPr>
                         <a:t>Params</a:t>
                       </a:r>
                       <a:endParaRPr lang="en-US" sz="1250" dirty="0">
-                        <a:latin typeface="Calibri" charset="0"/>
-                        <a:ea typeface="Calibri" charset="0"/>
-                        <a:cs typeface="Calibri" charset="0"/>
+                        <a:latin typeface="Segoe UI" charset="0"/>
+                        <a:ea typeface="Segoe UI" charset="0"/>
+                        <a:cs typeface="Segoe UI" charset="0"/>
                       </a:endParaRPr>
                     </a:p>
                   </a:txBody>
                   <a:tcPr marL="54864" marR="54864" marT="54864" marB="54864">
-                    <a:lnL w="9525" cap="flat" cmpd="sng" algn="ctr">
-                      <a:solidFill>
-                        <a:srgbClr val="E5E7EB"/>
-                      </a:solidFill>
-                      <a:prstDash val="solid"/>
-                      <a:round/>
-                      <a:headEnd type="none" w="med" len="med"/>
-                      <a:tailEnd type="none" w="med" len="med"/>
+                    <a:lnL w="0" cap="flat" cmpd="sng" algn="ctr">
+                      <a:noFill/>
                     </a:lnL>
-                    <a:lnR w="9525" cap="flat" cmpd="sng" algn="ctr">
-                      <a:solidFill>
-                        <a:srgbClr val="E5E7EB"/>
-                      </a:solidFill>
-                      <a:prstDash val="solid"/>
-                      <a:round/>
-                      <a:headEnd type="none" w="med" len="med"/>
-                      <a:tailEnd type="none" w="med" len="med"/>
+                    <a:lnR w="0" cap="flat" cmpd="sng" algn="ctr">
+                      <a:noFill/>
                     </a:lnR>
-                    <a:lnT w="9525" cap="flat" cmpd="sng" algn="ctr">
-                      <a:solidFill>
-                        <a:srgbClr val="E5E7EB"/>
-                      </a:solidFill>
-                      <a:prstDash val="solid"/>
-                      <a:round/>
-                      <a:headEnd type="none" w="med" len="med"/>
-                      <a:tailEnd type="none" w="med" len="med"/>
+                    <a:lnT w="0" cap="flat" cmpd="sng" algn="ctr">
+                      <a:noFill/>
                     </a:lnT>
-                    <a:lnB w="9525" cap="flat" cmpd="sng" algn="ctr">
-                      <a:solidFill>
-                        <a:srgbClr val="E5E7EB"/>
-                      </a:solidFill>
-                      <a:prstDash val="solid"/>
-                      <a:round/>
-                      <a:headEnd type="none" w="med" len="med"/>
-                      <a:tailEnd type="none" w="med" len="med"/>
+                    <a:lnB w="0" cap="flat" cmpd="sng" algn="ctr">
+                      <a:noFill/>
                     </a:lnB>
                     <a:solidFill>
                       <a:schemeClr val="bg2"/>
@@ -6378,55 +6402,31 @@
                           <a:solidFill>
                             <a:schemeClr val="accent1"/>
                           </a:solidFill>
-                          <a:latin typeface="Calibri" pitchFamily="34" charset="0"/>
-                          <a:ea typeface="Calibri" pitchFamily="34" charset="-122"/>
-                          <a:cs typeface="Calibri" pitchFamily="34" charset="-120"/>
+                          <a:latin typeface="Segoe UI" pitchFamily="34" charset="0"/>
+                          <a:ea typeface="Segoe UI" pitchFamily="34" charset="-122"/>
+                          <a:cs typeface="Segoe UI" pitchFamily="34" charset="-120"/>
                         </a:rPr>
                         <a:t>PSNR ↑</a:t>
                       </a:r>
                       <a:endParaRPr lang="en-US" sz="1250" dirty="0">
-                        <a:latin typeface="Calibri" charset="0"/>
-                        <a:ea typeface="Calibri" charset="0"/>
-                        <a:cs typeface="Calibri" charset="0"/>
+                        <a:latin typeface="Segoe UI" charset="0"/>
+                        <a:ea typeface="Segoe UI" charset="0"/>
+                        <a:cs typeface="Segoe UI" charset="0"/>
                       </a:endParaRPr>
                     </a:p>
                   </a:txBody>
                   <a:tcPr marL="54864" marR="54864" marT="54864" marB="54864">
-                    <a:lnL w="9525" cap="flat" cmpd="sng" algn="ctr">
-                      <a:solidFill>
-                        <a:srgbClr val="E5E7EB"/>
-                      </a:solidFill>
-                      <a:prstDash val="solid"/>
-                      <a:round/>
-                      <a:headEnd type="none" w="med" len="med"/>
-                      <a:tailEnd type="none" w="med" len="med"/>
+                    <a:lnL w="0" cap="flat" cmpd="sng" algn="ctr">
+                      <a:noFill/>
                     </a:lnL>
-                    <a:lnR w="9525" cap="flat" cmpd="sng" algn="ctr">
-                      <a:solidFill>
-                        <a:srgbClr val="E5E7EB"/>
-                      </a:solidFill>
-                      <a:prstDash val="solid"/>
-                      <a:round/>
-                      <a:headEnd type="none" w="med" len="med"/>
-                      <a:tailEnd type="none" w="med" len="med"/>
+                    <a:lnR w="0" cap="flat" cmpd="sng" algn="ctr">
+                      <a:noFill/>
                     </a:lnR>
-                    <a:lnT w="9525" cap="flat" cmpd="sng" algn="ctr">
-                      <a:solidFill>
-                        <a:srgbClr val="E5E7EB"/>
-                      </a:solidFill>
-                      <a:prstDash val="solid"/>
-                      <a:round/>
-                      <a:headEnd type="none" w="med" len="med"/>
-                      <a:tailEnd type="none" w="med" len="med"/>
+                    <a:lnT w="0" cap="flat" cmpd="sng" algn="ctr">
+                      <a:noFill/>
                     </a:lnT>
-                    <a:lnB w="9525" cap="flat" cmpd="sng" algn="ctr">
-                      <a:solidFill>
-                        <a:srgbClr val="E5E7EB"/>
-                      </a:solidFill>
-                      <a:prstDash val="solid"/>
-                      <a:round/>
-                      <a:headEnd type="none" w="med" len="med"/>
-                      <a:tailEnd type="none" w="med" len="med"/>
+                    <a:lnB w="0" cap="flat" cmpd="sng" algn="ctr">
+                      <a:noFill/>
                     </a:lnB>
                     <a:solidFill>
                       <a:schemeClr val="bg2"/>
@@ -6446,55 +6446,31 @@
                           <a:solidFill>
                             <a:schemeClr val="accent1"/>
                           </a:solidFill>
-                          <a:latin typeface="Calibri" pitchFamily="34" charset="0"/>
-                          <a:ea typeface="Calibri" pitchFamily="34" charset="-122"/>
-                          <a:cs typeface="Calibri" pitchFamily="34" charset="-120"/>
+                          <a:latin typeface="Segoe UI" pitchFamily="34" charset="0"/>
+                          <a:ea typeface="Segoe UI" pitchFamily="34" charset="-122"/>
+                          <a:cs typeface="Segoe UI" pitchFamily="34" charset="-120"/>
                         </a:rPr>
                         <a:t>SSIM ↑</a:t>
                       </a:r>
                       <a:endParaRPr lang="en-US" sz="1250" dirty="0">
-                        <a:latin typeface="Calibri" charset="0"/>
-                        <a:ea typeface="Calibri" charset="0"/>
-                        <a:cs typeface="Calibri" charset="0"/>
+                        <a:latin typeface="Segoe UI" charset="0"/>
+                        <a:ea typeface="Segoe UI" charset="0"/>
+                        <a:cs typeface="Segoe UI" charset="0"/>
                       </a:endParaRPr>
                     </a:p>
                   </a:txBody>
                   <a:tcPr marL="54864" marR="54864" marT="54864" marB="54864">
-                    <a:lnL w="9525" cap="flat" cmpd="sng" algn="ctr">
-                      <a:solidFill>
-                        <a:srgbClr val="E5E7EB"/>
-                      </a:solidFill>
-                      <a:prstDash val="solid"/>
-                      <a:round/>
-                      <a:headEnd type="none" w="med" len="med"/>
-                      <a:tailEnd type="none" w="med" len="med"/>
+                    <a:lnL w="0" cap="flat" cmpd="sng" algn="ctr">
+                      <a:noFill/>
                     </a:lnL>
-                    <a:lnR w="9525" cap="flat" cmpd="sng" algn="ctr">
-                      <a:solidFill>
-                        <a:srgbClr val="E5E7EB"/>
-                      </a:solidFill>
-                      <a:prstDash val="solid"/>
-                      <a:round/>
-                      <a:headEnd type="none" w="med" len="med"/>
-                      <a:tailEnd type="none" w="med" len="med"/>
+                    <a:lnR w="0" cap="flat" cmpd="sng" algn="ctr">
+                      <a:noFill/>
                     </a:lnR>
-                    <a:lnT w="9525" cap="flat" cmpd="sng" algn="ctr">
-                      <a:solidFill>
-                        <a:srgbClr val="E5E7EB"/>
-                      </a:solidFill>
-                      <a:prstDash val="solid"/>
-                      <a:round/>
-                      <a:headEnd type="none" w="med" len="med"/>
-                      <a:tailEnd type="none" w="med" len="med"/>
+                    <a:lnT w="0" cap="flat" cmpd="sng" algn="ctr">
+                      <a:noFill/>
                     </a:lnT>
-                    <a:lnB w="9525" cap="flat" cmpd="sng" algn="ctr">
-                      <a:solidFill>
-                        <a:srgbClr val="E5E7EB"/>
-                      </a:solidFill>
-                      <a:prstDash val="solid"/>
-                      <a:round/>
-                      <a:headEnd type="none" w="med" len="med"/>
-                      <a:tailEnd type="none" w="med" len="med"/>
+                    <a:lnB w="0" cap="flat" cmpd="sng" algn="ctr">
+                      <a:noFill/>
                     </a:lnB>
                     <a:solidFill>
                       <a:schemeClr val="bg2"/>
@@ -6514,55 +6490,31 @@
                           <a:solidFill>
                             <a:schemeClr val="accent1"/>
                           </a:solidFill>
-                          <a:latin typeface="Calibri" pitchFamily="34" charset="0"/>
-                          <a:ea typeface="Calibri" pitchFamily="34" charset="-122"/>
-                          <a:cs typeface="Calibri" pitchFamily="34" charset="-120"/>
+                          <a:latin typeface="Segoe UI" pitchFamily="34" charset="0"/>
+                          <a:ea typeface="Segoe UI" pitchFamily="34" charset="-122"/>
+                          <a:cs typeface="Segoe UI" pitchFamily="34" charset="-120"/>
                         </a:rPr>
                         <a:t>LPIPS ↓</a:t>
                       </a:r>
                       <a:endParaRPr lang="en-US" sz="1250" dirty="0">
-                        <a:latin typeface="Calibri" charset="0"/>
-                        <a:ea typeface="Calibri" charset="0"/>
-                        <a:cs typeface="Calibri" charset="0"/>
+                        <a:latin typeface="Segoe UI" charset="0"/>
+                        <a:ea typeface="Segoe UI" charset="0"/>
+                        <a:cs typeface="Segoe UI" charset="0"/>
                       </a:endParaRPr>
                     </a:p>
                   </a:txBody>
                   <a:tcPr marL="54864" marR="54864" marT="54864" marB="54864">
-                    <a:lnL w="9525" cap="flat" cmpd="sng" algn="ctr">
-                      <a:solidFill>
-                        <a:srgbClr val="E5E7EB"/>
-                      </a:solidFill>
-                      <a:prstDash val="solid"/>
-                      <a:round/>
-                      <a:headEnd type="none" w="med" len="med"/>
-                      <a:tailEnd type="none" w="med" len="med"/>
+                    <a:lnL w="0" cap="flat" cmpd="sng" algn="ctr">
+                      <a:noFill/>
                     </a:lnL>
-                    <a:lnR w="9525" cap="flat" cmpd="sng" algn="ctr">
-                      <a:solidFill>
-                        <a:srgbClr val="E5E7EB"/>
-                      </a:solidFill>
-                      <a:prstDash val="solid"/>
-                      <a:round/>
-                      <a:headEnd type="none" w="med" len="med"/>
-                      <a:tailEnd type="none" w="med" len="med"/>
+                    <a:lnR w="0" cap="flat" cmpd="sng" algn="ctr">
+                      <a:noFill/>
                     </a:lnR>
-                    <a:lnT w="9525" cap="flat" cmpd="sng" algn="ctr">
-                      <a:solidFill>
-                        <a:srgbClr val="E5E7EB"/>
-                      </a:solidFill>
-                      <a:prstDash val="solid"/>
-                      <a:round/>
-                      <a:headEnd type="none" w="med" len="med"/>
-                      <a:tailEnd type="none" w="med" len="med"/>
+                    <a:lnT w="0" cap="flat" cmpd="sng" algn="ctr">
+                      <a:noFill/>
                     </a:lnT>
-                    <a:lnB w="9525" cap="flat" cmpd="sng" algn="ctr">
-                      <a:solidFill>
-                        <a:srgbClr val="E5E7EB"/>
-                      </a:solidFill>
-                      <a:prstDash val="solid"/>
-                      <a:round/>
-                      <a:headEnd type="none" w="med" len="med"/>
-                      <a:tailEnd type="none" w="med" len="med"/>
+                    <a:lnB w="0" cap="flat" cmpd="sng" algn="ctr">
+                      <a:noFill/>
                     </a:lnB>
                     <a:solidFill>
                       <a:schemeClr val="bg2"/>
@@ -6582,55 +6534,31 @@
                           <a:solidFill>
                             <a:schemeClr val="accent1"/>
                           </a:solidFill>
-                          <a:latin typeface="Calibri" pitchFamily="34" charset="0"/>
-                          <a:ea typeface="Calibri" pitchFamily="34" charset="-122"/>
-                          <a:cs typeface="Calibri" pitchFamily="34" charset="-120"/>
+                          <a:latin typeface="Segoe UI" pitchFamily="34" charset="0"/>
+                          <a:ea typeface="Segoe UI" pitchFamily="34" charset="-122"/>
+                          <a:cs typeface="Segoe UI" pitchFamily="34" charset="-120"/>
                         </a:rPr>
                         <a:t>GPU ms</a:t>
                       </a:r>
                       <a:endParaRPr lang="en-US" sz="1250" dirty="0">
-                        <a:latin typeface="Calibri" charset="0"/>
-                        <a:ea typeface="Calibri" charset="0"/>
-                        <a:cs typeface="Calibri" charset="0"/>
+                        <a:latin typeface="Segoe UI" charset="0"/>
+                        <a:ea typeface="Segoe UI" charset="0"/>
+                        <a:cs typeface="Segoe UI" charset="0"/>
                       </a:endParaRPr>
                     </a:p>
                   </a:txBody>
                   <a:tcPr marL="54864" marR="54864" marT="54864" marB="54864">
-                    <a:lnL w="9525" cap="flat" cmpd="sng" algn="ctr">
-                      <a:solidFill>
-                        <a:srgbClr val="E5E7EB"/>
-                      </a:solidFill>
-                      <a:prstDash val="solid"/>
-                      <a:round/>
-                      <a:headEnd type="none" w="med" len="med"/>
-                      <a:tailEnd type="none" w="med" len="med"/>
+                    <a:lnL w="0" cap="flat" cmpd="sng" algn="ctr">
+                      <a:noFill/>
                     </a:lnL>
-                    <a:lnR w="9525" cap="flat" cmpd="sng" algn="ctr">
-                      <a:solidFill>
-                        <a:srgbClr val="E5E7EB"/>
-                      </a:solidFill>
-                      <a:prstDash val="solid"/>
-                      <a:round/>
-                      <a:headEnd type="none" w="med" len="med"/>
-                      <a:tailEnd type="none" w="med" len="med"/>
+                    <a:lnR w="0" cap="flat" cmpd="sng" algn="ctr">
+                      <a:noFill/>
                     </a:lnR>
-                    <a:lnT w="9525" cap="flat" cmpd="sng" algn="ctr">
-                      <a:solidFill>
-                        <a:srgbClr val="E5E7EB"/>
-                      </a:solidFill>
-                      <a:prstDash val="solid"/>
-                      <a:round/>
-                      <a:headEnd type="none" w="med" len="med"/>
-                      <a:tailEnd type="none" w="med" len="med"/>
+                    <a:lnT w="0" cap="flat" cmpd="sng" algn="ctr">
+                      <a:noFill/>
                     </a:lnT>
-                    <a:lnB w="9525" cap="flat" cmpd="sng" algn="ctr">
-                      <a:solidFill>
-                        <a:srgbClr val="E5E7EB"/>
-                      </a:solidFill>
-                      <a:prstDash val="solid"/>
-                      <a:round/>
-                      <a:headEnd type="none" w="med" len="med"/>
-                      <a:tailEnd type="none" w="med" len="med"/>
+                    <a:lnB w="0" cap="flat" cmpd="sng" algn="ctr">
+                      <a:noFill/>
                     </a:lnB>
                     <a:solidFill>
                       <a:schemeClr val="bg2"/>
@@ -6652,55 +6580,31 @@
                           <a:solidFill>
                             <a:schemeClr val="tx2"/>
                           </a:solidFill>
-                          <a:latin typeface="Calibri" pitchFamily="34" charset="0"/>
-                          <a:ea typeface="Calibri" pitchFamily="34" charset="-122"/>
-                          <a:cs typeface="Calibri" pitchFamily="34" charset="-120"/>
+                          <a:latin typeface="Segoe UI" pitchFamily="34" charset="0"/>
+                          <a:ea typeface="Segoe UI" pitchFamily="34" charset="-122"/>
+                          <a:cs typeface="Segoe UI" pitchFamily="34" charset="-120"/>
                         </a:rPr>
                         <a:t>Bicubic</a:t>
                       </a:r>
                       <a:endParaRPr lang="en-US" sz="1250" dirty="0">
-                        <a:latin typeface="Calibri" charset="0"/>
-                        <a:ea typeface="Calibri" charset="0"/>
-                        <a:cs typeface="Calibri" charset="0"/>
+                        <a:latin typeface="Segoe UI" charset="0"/>
+                        <a:ea typeface="Segoe UI" charset="0"/>
+                        <a:cs typeface="Segoe UI" charset="0"/>
                       </a:endParaRPr>
                     </a:p>
                   </a:txBody>
                   <a:tcPr marL="54864" marR="54864" marT="54864" marB="54864">
-                    <a:lnL w="9525" cap="flat" cmpd="sng" algn="ctr">
-                      <a:solidFill>
-                        <a:srgbClr val="E5E7EB"/>
-                      </a:solidFill>
-                      <a:prstDash val="solid"/>
-                      <a:round/>
-                      <a:headEnd type="none" w="med" len="med"/>
-                      <a:tailEnd type="none" w="med" len="med"/>
+                    <a:lnL w="0" cap="flat" cmpd="sng" algn="ctr">
+                      <a:noFill/>
                     </a:lnL>
-                    <a:lnR w="9525" cap="flat" cmpd="sng" algn="ctr">
-                      <a:solidFill>
-                        <a:srgbClr val="E5E7EB"/>
-                      </a:solidFill>
-                      <a:prstDash val="solid"/>
-                      <a:round/>
-                      <a:headEnd type="none" w="med" len="med"/>
-                      <a:tailEnd type="none" w="med" len="med"/>
+                    <a:lnR w="0" cap="flat" cmpd="sng" algn="ctr">
+                      <a:noFill/>
                     </a:lnR>
-                    <a:lnT w="9525" cap="flat" cmpd="sng" algn="ctr">
-                      <a:solidFill>
-                        <a:srgbClr val="E5E7EB"/>
-                      </a:solidFill>
-                      <a:prstDash val="solid"/>
-                      <a:round/>
-                      <a:headEnd type="none" w="med" len="med"/>
-                      <a:tailEnd type="none" w="med" len="med"/>
+                    <a:lnT w="0" cap="flat" cmpd="sng" algn="ctr">
+                      <a:noFill/>
                     </a:lnT>
-                    <a:lnB w="9525" cap="flat" cmpd="sng" algn="ctr">
-                      <a:solidFill>
-                        <a:srgbClr val="E5E7EB"/>
-                      </a:solidFill>
-                      <a:prstDash val="solid"/>
-                      <a:round/>
-                      <a:headEnd type="none" w="med" len="med"/>
-                      <a:tailEnd type="none" w="med" len="med"/>
+                    <a:lnB w="0" cap="flat" cmpd="sng" algn="ctr">
+                      <a:noFill/>
                     </a:lnB>
                     <a:solidFill>
                       <a:schemeClr val="bg1"/>
@@ -6720,55 +6624,31 @@
                           <a:solidFill>
                             <a:schemeClr val="tx2"/>
                           </a:solidFill>
-                          <a:latin typeface="Calibri" pitchFamily="34" charset="0"/>
-                          <a:ea typeface="Calibri" pitchFamily="34" charset="-122"/>
-                          <a:cs typeface="Calibri" pitchFamily="34" charset="-120"/>
+                          <a:latin typeface="Segoe UI" pitchFamily="34" charset="0"/>
+                          <a:ea typeface="Segoe UI" pitchFamily="34" charset="-122"/>
+                          <a:cs typeface="Segoe UI" pitchFamily="34" charset="-120"/>
                         </a:rPr>
                         <a:t>–</a:t>
                       </a:r>
                       <a:endParaRPr lang="en-US" sz="1250" dirty="0">
-                        <a:latin typeface="Calibri" charset="0"/>
-                        <a:ea typeface="Calibri" charset="0"/>
-                        <a:cs typeface="Calibri" charset="0"/>
+                        <a:latin typeface="Segoe UI" charset="0"/>
+                        <a:ea typeface="Segoe UI" charset="0"/>
+                        <a:cs typeface="Segoe UI" charset="0"/>
                       </a:endParaRPr>
                     </a:p>
                   </a:txBody>
                   <a:tcPr marL="54864" marR="54864" marT="54864" marB="54864">
-                    <a:lnL w="9525" cap="flat" cmpd="sng" algn="ctr">
-                      <a:solidFill>
-                        <a:srgbClr val="E5E7EB"/>
-                      </a:solidFill>
-                      <a:prstDash val="solid"/>
-                      <a:round/>
-                      <a:headEnd type="none" w="med" len="med"/>
-                      <a:tailEnd type="none" w="med" len="med"/>
+                    <a:lnL w="0" cap="flat" cmpd="sng" algn="ctr">
+                      <a:noFill/>
                     </a:lnL>
-                    <a:lnR w="9525" cap="flat" cmpd="sng" algn="ctr">
-                      <a:solidFill>
-                        <a:srgbClr val="E5E7EB"/>
-                      </a:solidFill>
-                      <a:prstDash val="solid"/>
-                      <a:round/>
-                      <a:headEnd type="none" w="med" len="med"/>
-                      <a:tailEnd type="none" w="med" len="med"/>
+                    <a:lnR w="0" cap="flat" cmpd="sng" algn="ctr">
+                      <a:noFill/>
                     </a:lnR>
-                    <a:lnT w="9525" cap="flat" cmpd="sng" algn="ctr">
-                      <a:solidFill>
-                        <a:srgbClr val="E5E7EB"/>
-                      </a:solidFill>
-                      <a:prstDash val="solid"/>
-                      <a:round/>
-                      <a:headEnd type="none" w="med" len="med"/>
-                      <a:tailEnd type="none" w="med" len="med"/>
+                    <a:lnT w="0" cap="flat" cmpd="sng" algn="ctr">
+                      <a:noFill/>
                     </a:lnT>
-                    <a:lnB w="9525" cap="flat" cmpd="sng" algn="ctr">
-                      <a:solidFill>
-                        <a:srgbClr val="E5E7EB"/>
-                      </a:solidFill>
-                      <a:prstDash val="solid"/>
-                      <a:round/>
-                      <a:headEnd type="none" w="med" len="med"/>
-                      <a:tailEnd type="none" w="med" len="med"/>
+                    <a:lnB w="0" cap="flat" cmpd="sng" algn="ctr">
+                      <a:noFill/>
                     </a:lnB>
                     <a:solidFill>
                       <a:schemeClr val="bg1"/>
@@ -6788,55 +6668,31 @@
                           <a:solidFill>
                             <a:schemeClr val="tx2"/>
                           </a:solidFill>
-                          <a:latin typeface="Calibri" pitchFamily="34" charset="0"/>
-                          <a:ea typeface="Calibri" pitchFamily="34" charset="-122"/>
-                          <a:cs typeface="Calibri" pitchFamily="34" charset="-120"/>
+                          <a:latin typeface="Segoe UI" pitchFamily="34" charset="0"/>
+                          <a:ea typeface="Segoe UI" pitchFamily="34" charset="-122"/>
+                          <a:cs typeface="Segoe UI" pitchFamily="34" charset="-120"/>
                         </a:rPr>
                         <a:t>29.31</a:t>
                       </a:r>
                       <a:endParaRPr lang="en-US" sz="1250" dirty="0">
-                        <a:latin typeface="Calibri" charset="0"/>
-                        <a:ea typeface="Calibri" charset="0"/>
-                        <a:cs typeface="Calibri" charset="0"/>
+                        <a:latin typeface="Segoe UI" charset="0"/>
+                        <a:ea typeface="Segoe UI" charset="0"/>
+                        <a:cs typeface="Segoe UI" charset="0"/>
                       </a:endParaRPr>
                     </a:p>
                   </a:txBody>
                   <a:tcPr marL="54864" marR="54864" marT="54864" marB="54864">
-                    <a:lnL w="9525" cap="flat" cmpd="sng" algn="ctr">
-                      <a:solidFill>
-                        <a:srgbClr val="E5E7EB"/>
-                      </a:solidFill>
-                      <a:prstDash val="solid"/>
-                      <a:round/>
-                      <a:headEnd type="none" w="med" len="med"/>
-                      <a:tailEnd type="none" w="med" len="med"/>
+                    <a:lnL w="0" cap="flat" cmpd="sng" algn="ctr">
+                      <a:noFill/>
                     </a:lnL>
-                    <a:lnR w="9525" cap="flat" cmpd="sng" algn="ctr">
-                      <a:solidFill>
-                        <a:srgbClr val="E5E7EB"/>
-                      </a:solidFill>
-                      <a:prstDash val="solid"/>
-                      <a:round/>
-                      <a:headEnd type="none" w="med" len="med"/>
-                      <a:tailEnd type="none" w="med" len="med"/>
+                    <a:lnR w="0" cap="flat" cmpd="sng" algn="ctr">
+                      <a:noFill/>
                     </a:lnR>
-                    <a:lnT w="9525" cap="flat" cmpd="sng" algn="ctr">
-                      <a:solidFill>
-                        <a:srgbClr val="E5E7EB"/>
-                      </a:solidFill>
-                      <a:prstDash val="solid"/>
-                      <a:round/>
-                      <a:headEnd type="none" w="med" len="med"/>
-                      <a:tailEnd type="none" w="med" len="med"/>
+                    <a:lnT w="0" cap="flat" cmpd="sng" algn="ctr">
+                      <a:noFill/>
                     </a:lnT>
-                    <a:lnB w="9525" cap="flat" cmpd="sng" algn="ctr">
-                      <a:solidFill>
-                        <a:srgbClr val="E5E7EB"/>
-                      </a:solidFill>
-                      <a:prstDash val="solid"/>
-                      <a:round/>
-                      <a:headEnd type="none" w="med" len="med"/>
-                      <a:tailEnd type="none" w="med" len="med"/>
+                    <a:lnB w="0" cap="flat" cmpd="sng" algn="ctr">
+                      <a:noFill/>
                     </a:lnB>
                     <a:solidFill>
                       <a:schemeClr val="bg1"/>
@@ -6856,55 +6712,31 @@
                           <a:solidFill>
                             <a:schemeClr val="tx2"/>
                           </a:solidFill>
-                          <a:latin typeface="Calibri" pitchFamily="34" charset="0"/>
-                          <a:ea typeface="Calibri" pitchFamily="34" charset="-122"/>
-                          <a:cs typeface="Calibri" pitchFamily="34" charset="-120"/>
+                          <a:latin typeface="Segoe UI" pitchFamily="34" charset="0"/>
+                          <a:ea typeface="Segoe UI" pitchFamily="34" charset="-122"/>
+                          <a:cs typeface="Segoe UI" pitchFamily="34" charset="-120"/>
                         </a:rPr>
                         <a:t>0.612</a:t>
                       </a:r>
                       <a:endParaRPr lang="en-US" sz="1250" dirty="0">
-                        <a:latin typeface="Calibri" charset="0"/>
-                        <a:ea typeface="Calibri" charset="0"/>
-                        <a:cs typeface="Calibri" charset="0"/>
+                        <a:latin typeface="Segoe UI" charset="0"/>
+                        <a:ea typeface="Segoe UI" charset="0"/>
+                        <a:cs typeface="Segoe UI" charset="0"/>
                       </a:endParaRPr>
                     </a:p>
                   </a:txBody>
                   <a:tcPr marL="54864" marR="54864" marT="54864" marB="54864">
-                    <a:lnL w="9525" cap="flat" cmpd="sng" algn="ctr">
-                      <a:solidFill>
-                        <a:srgbClr val="E5E7EB"/>
-                      </a:solidFill>
-                      <a:prstDash val="solid"/>
-                      <a:round/>
-                      <a:headEnd type="none" w="med" len="med"/>
-                      <a:tailEnd type="none" w="med" len="med"/>
+                    <a:lnL w="0" cap="flat" cmpd="sng" algn="ctr">
+                      <a:noFill/>
                     </a:lnL>
-                    <a:lnR w="9525" cap="flat" cmpd="sng" algn="ctr">
-                      <a:solidFill>
-                        <a:srgbClr val="E5E7EB"/>
-                      </a:solidFill>
-                      <a:prstDash val="solid"/>
-                      <a:round/>
-                      <a:headEnd type="none" w="med" len="med"/>
-                      <a:tailEnd type="none" w="med" len="med"/>
+                    <a:lnR w="0" cap="flat" cmpd="sng" algn="ctr">
+                      <a:noFill/>
                     </a:lnR>
-                    <a:lnT w="9525" cap="flat" cmpd="sng" algn="ctr">
-                      <a:solidFill>
-                        <a:srgbClr val="E5E7EB"/>
-                      </a:solidFill>
-                      <a:prstDash val="solid"/>
-                      <a:round/>
-                      <a:headEnd type="none" w="med" len="med"/>
-                      <a:tailEnd type="none" w="med" len="med"/>
+                    <a:lnT w="0" cap="flat" cmpd="sng" algn="ctr">
+                      <a:noFill/>
                     </a:lnT>
-                    <a:lnB w="9525" cap="flat" cmpd="sng" algn="ctr">
-                      <a:solidFill>
-                        <a:srgbClr val="E5E7EB"/>
-                      </a:solidFill>
-                      <a:prstDash val="solid"/>
-                      <a:round/>
-                      <a:headEnd type="none" w="med" len="med"/>
-                      <a:tailEnd type="none" w="med" len="med"/>
+                    <a:lnB w="0" cap="flat" cmpd="sng" algn="ctr">
+                      <a:noFill/>
                     </a:lnB>
                     <a:solidFill>
                       <a:schemeClr val="bg1"/>
@@ -6924,55 +6756,31 @@
                           <a:solidFill>
                             <a:schemeClr val="tx2"/>
                           </a:solidFill>
-                          <a:latin typeface="Calibri" pitchFamily="34" charset="0"/>
-                          <a:ea typeface="Calibri" pitchFamily="34" charset="-122"/>
-                          <a:cs typeface="Calibri" pitchFamily="34" charset="-120"/>
+                          <a:latin typeface="Segoe UI" pitchFamily="34" charset="0"/>
+                          <a:ea typeface="Segoe UI" pitchFamily="34" charset="-122"/>
+                          <a:cs typeface="Segoe UI" pitchFamily="34" charset="-120"/>
                         </a:rPr>
                         <a:t>0.707</a:t>
                       </a:r>
                       <a:endParaRPr lang="en-US" sz="1250" dirty="0">
-                        <a:latin typeface="Calibri" charset="0"/>
-                        <a:ea typeface="Calibri" charset="0"/>
-                        <a:cs typeface="Calibri" charset="0"/>
+                        <a:latin typeface="Segoe UI" charset="0"/>
+                        <a:ea typeface="Segoe UI" charset="0"/>
+                        <a:cs typeface="Segoe UI" charset="0"/>
                       </a:endParaRPr>
                     </a:p>
                   </a:txBody>
                   <a:tcPr marL="54864" marR="54864" marT="54864" marB="54864">
-                    <a:lnL w="9525" cap="flat" cmpd="sng" algn="ctr">
-                      <a:solidFill>
-                        <a:srgbClr val="E5E7EB"/>
-                      </a:solidFill>
-                      <a:prstDash val="solid"/>
-                      <a:round/>
-                      <a:headEnd type="none" w="med" len="med"/>
-                      <a:tailEnd type="none" w="med" len="med"/>
+                    <a:lnL w="0" cap="flat" cmpd="sng" algn="ctr">
+                      <a:noFill/>
                     </a:lnL>
-                    <a:lnR w="9525" cap="flat" cmpd="sng" algn="ctr">
-                      <a:solidFill>
-                        <a:srgbClr val="E5E7EB"/>
-                      </a:solidFill>
-                      <a:prstDash val="solid"/>
-                      <a:round/>
-                      <a:headEnd type="none" w="med" len="med"/>
-                      <a:tailEnd type="none" w="med" len="med"/>
+                    <a:lnR w="0" cap="flat" cmpd="sng" algn="ctr">
+                      <a:noFill/>
                     </a:lnR>
-                    <a:lnT w="9525" cap="flat" cmpd="sng" algn="ctr">
-                      <a:solidFill>
-                        <a:srgbClr val="E5E7EB"/>
-                      </a:solidFill>
-                      <a:prstDash val="solid"/>
-                      <a:round/>
-                      <a:headEnd type="none" w="med" len="med"/>
-                      <a:tailEnd type="none" w="med" len="med"/>
+                    <a:lnT w="0" cap="flat" cmpd="sng" algn="ctr">
+                      <a:noFill/>
                     </a:lnT>
-                    <a:lnB w="9525" cap="flat" cmpd="sng" algn="ctr">
-                      <a:solidFill>
-                        <a:srgbClr val="E5E7EB"/>
-                      </a:solidFill>
-                      <a:prstDash val="solid"/>
-                      <a:round/>
-                      <a:headEnd type="none" w="med" len="med"/>
-                      <a:tailEnd type="none" w="med" len="med"/>
+                    <a:lnB w="0" cap="flat" cmpd="sng" algn="ctr">
+                      <a:noFill/>
                     </a:lnB>
                     <a:solidFill>
                       <a:schemeClr val="bg1"/>
@@ -6992,55 +6800,31 @@
                           <a:solidFill>
                             <a:schemeClr val="tx2"/>
                           </a:solidFill>
-                          <a:latin typeface="Calibri" pitchFamily="34" charset="0"/>
-                          <a:ea typeface="Calibri" pitchFamily="34" charset="-122"/>
-                          <a:cs typeface="Calibri" pitchFamily="34" charset="-120"/>
+                          <a:latin typeface="Segoe UI" pitchFamily="34" charset="0"/>
+                          <a:ea typeface="Segoe UI" pitchFamily="34" charset="-122"/>
+                          <a:cs typeface="Segoe UI" pitchFamily="34" charset="-120"/>
                         </a:rPr>
                         <a:t>–</a:t>
                       </a:r>
                       <a:endParaRPr lang="en-US" sz="1250" dirty="0">
-                        <a:latin typeface="Calibri" charset="0"/>
-                        <a:ea typeface="Calibri" charset="0"/>
-                        <a:cs typeface="Calibri" charset="0"/>
+                        <a:latin typeface="Segoe UI" charset="0"/>
+                        <a:ea typeface="Segoe UI" charset="0"/>
+                        <a:cs typeface="Segoe UI" charset="0"/>
                       </a:endParaRPr>
                     </a:p>
                   </a:txBody>
                   <a:tcPr marL="54864" marR="54864" marT="54864" marB="54864">
-                    <a:lnL w="9525" cap="flat" cmpd="sng" algn="ctr">
-                      <a:solidFill>
-                        <a:srgbClr val="E5E7EB"/>
-                      </a:solidFill>
-                      <a:prstDash val="solid"/>
-                      <a:round/>
-                      <a:headEnd type="none" w="med" len="med"/>
-                      <a:tailEnd type="none" w="med" len="med"/>
+                    <a:lnL w="0" cap="flat" cmpd="sng" algn="ctr">
+                      <a:noFill/>
                     </a:lnL>
-                    <a:lnR w="9525" cap="flat" cmpd="sng" algn="ctr">
-                      <a:solidFill>
-                        <a:srgbClr val="E5E7EB"/>
-                      </a:solidFill>
-                      <a:prstDash val="solid"/>
-                      <a:round/>
-                      <a:headEnd type="none" w="med" len="med"/>
-                      <a:tailEnd type="none" w="med" len="med"/>
+                    <a:lnR w="0" cap="flat" cmpd="sng" algn="ctr">
+                      <a:noFill/>
                     </a:lnR>
-                    <a:lnT w="9525" cap="flat" cmpd="sng" algn="ctr">
-                      <a:solidFill>
-                        <a:srgbClr val="E5E7EB"/>
-                      </a:solidFill>
-                      <a:prstDash val="solid"/>
-                      <a:round/>
-                      <a:headEnd type="none" w="med" len="med"/>
-                      <a:tailEnd type="none" w="med" len="med"/>
+                    <a:lnT w="0" cap="flat" cmpd="sng" algn="ctr">
+                      <a:noFill/>
                     </a:lnT>
-                    <a:lnB w="9525" cap="flat" cmpd="sng" algn="ctr">
-                      <a:solidFill>
-                        <a:srgbClr val="E5E7EB"/>
-                      </a:solidFill>
-                      <a:prstDash val="solid"/>
-                      <a:round/>
-                      <a:headEnd type="none" w="med" len="med"/>
-                      <a:tailEnd type="none" w="med" len="med"/>
+                    <a:lnB w="0" cap="flat" cmpd="sng" algn="ctr">
+                      <a:noFill/>
                     </a:lnB>
                     <a:solidFill>
                       <a:schemeClr val="bg1"/>
@@ -7062,55 +6846,297 @@
                           <a:solidFill>
                             <a:schemeClr val="tx2"/>
                           </a:solidFill>
-                          <a:latin typeface="Calibri" pitchFamily="34" charset="0"/>
-                          <a:ea typeface="Calibri" pitchFamily="34" charset="-122"/>
-                          <a:cs typeface="Calibri" pitchFamily="34" charset="-120"/>
+                          <a:latin typeface="Segoe UI" pitchFamily="34" charset="0"/>
+                          <a:ea typeface="Segoe UI" pitchFamily="34" charset="-122"/>
+                          <a:cs typeface="Segoe UI" pitchFamily="34" charset="-120"/>
                         </a:rPr>
                         <a:t>Lanczos</a:t>
                       </a:r>
                       <a:endParaRPr lang="en-US" sz="1250" dirty="0">
-                        <a:latin typeface="Calibri" charset="0"/>
-                        <a:ea typeface="Calibri" charset="0"/>
-                        <a:cs typeface="Calibri" charset="0"/>
+                        <a:latin typeface="Segoe UI" charset="0"/>
+                        <a:ea typeface="Segoe UI" charset="0"/>
+                        <a:cs typeface="Segoe UI" charset="0"/>
                       </a:endParaRPr>
                     </a:p>
                   </a:txBody>
                   <a:tcPr marL="54864" marR="54864" marT="54864" marB="54864">
-                    <a:lnL w="9525" cap="flat" cmpd="sng" algn="ctr">
-                      <a:solidFill>
-                        <a:srgbClr val="E5E7EB"/>
-                      </a:solidFill>
-                      <a:prstDash val="solid"/>
-                      <a:round/>
-                      <a:headEnd type="none" w="med" len="med"/>
-                      <a:tailEnd type="none" w="med" len="med"/>
+                    <a:lnL w="0" cap="flat" cmpd="sng" algn="ctr">
+                      <a:noFill/>
                     </a:lnL>
-                    <a:lnR w="9525" cap="flat" cmpd="sng" algn="ctr">
-                      <a:solidFill>
-                        <a:srgbClr val="E5E7EB"/>
-                      </a:solidFill>
-                      <a:prstDash val="solid"/>
-                      <a:round/>
-                      <a:headEnd type="none" w="med" len="med"/>
-                      <a:tailEnd type="none" w="med" len="med"/>
+                    <a:lnR w="0" cap="flat" cmpd="sng" algn="ctr">
+                      <a:noFill/>
                     </a:lnR>
-                    <a:lnT w="9525" cap="flat" cmpd="sng" algn="ctr">
-                      <a:solidFill>
-                        <a:srgbClr val="E5E7EB"/>
-                      </a:solidFill>
-                      <a:prstDash val="solid"/>
-                      <a:round/>
-                      <a:headEnd type="none" w="med" len="med"/>
-                      <a:tailEnd type="none" w="med" len="med"/>
+                    <a:lnT w="0" cap="flat" cmpd="sng" algn="ctr">
+                      <a:noFill/>
                     </a:lnT>
-                    <a:lnB w="9525" cap="flat" cmpd="sng" algn="ctr">
-                      <a:solidFill>
-                        <a:srgbClr val="E5E7EB"/>
-                      </a:solidFill>
-                      <a:prstDash val="solid"/>
-                      <a:round/>
-                      <a:headEnd type="none" w="med" len="med"/>
-                      <a:tailEnd type="none" w="med" len="med"/>
+                    <a:lnB w="0" cap="flat" cmpd="sng" algn="ctr">
+                      <a:noFill/>
+                    </a:lnB>
+                    <a:solidFill>
+                      <a:schemeClr val="bg2"/>
+                    </a:solidFill>
+                  </a:tcPr>
+                </a:tc>
+                <a:tc>
+                  <a:txBody>
+                    <a:bodyPr/>
+                    <a:lstStyle/>
+                    <a:p>
+                      <a:pPr indent="0" marL="0">
+                        <a:buNone/>
+                      </a:pPr>
+                      <a:r>
+                        <a:rPr lang="en-US" sz="1250" dirty="0">
+                          <a:solidFill>
+                            <a:schemeClr val="tx2"/>
+                          </a:solidFill>
+                          <a:latin typeface="Segoe UI" pitchFamily="34" charset="0"/>
+                          <a:ea typeface="Segoe UI" pitchFamily="34" charset="-122"/>
+                          <a:cs typeface="Segoe UI" pitchFamily="34" charset="-120"/>
+                        </a:rPr>
+                        <a:t>–</a:t>
+                      </a:r>
+                      <a:endParaRPr lang="en-US" sz="1250" dirty="0">
+                        <a:latin typeface="Segoe UI" charset="0"/>
+                        <a:ea typeface="Segoe UI" charset="0"/>
+                        <a:cs typeface="Segoe UI" charset="0"/>
+                      </a:endParaRPr>
+                    </a:p>
+                  </a:txBody>
+                  <a:tcPr marL="54864" marR="54864" marT="54864" marB="54864">
+                    <a:lnL w="0" cap="flat" cmpd="sng" algn="ctr">
+                      <a:noFill/>
+                    </a:lnL>
+                    <a:lnR w="0" cap="flat" cmpd="sng" algn="ctr">
+                      <a:noFill/>
+                    </a:lnR>
+                    <a:lnT w="0" cap="flat" cmpd="sng" algn="ctr">
+                      <a:noFill/>
+                    </a:lnT>
+                    <a:lnB w="0" cap="flat" cmpd="sng" algn="ctr">
+                      <a:noFill/>
+                    </a:lnB>
+                    <a:solidFill>
+                      <a:schemeClr val="bg2"/>
+                    </a:solidFill>
+                  </a:tcPr>
+                </a:tc>
+                <a:tc>
+                  <a:txBody>
+                    <a:bodyPr/>
+                    <a:lstStyle/>
+                    <a:p>
+                      <a:pPr indent="0" marL="0">
+                        <a:buNone/>
+                      </a:pPr>
+                      <a:r>
+                        <a:rPr lang="en-US" sz="1250" dirty="0">
+                          <a:solidFill>
+                            <a:schemeClr val="tx2"/>
+                          </a:solidFill>
+                          <a:latin typeface="Segoe UI" pitchFamily="34" charset="0"/>
+                          <a:ea typeface="Segoe UI" pitchFamily="34" charset="-122"/>
+                          <a:cs typeface="Segoe UI" pitchFamily="34" charset="-120"/>
+                        </a:rPr>
+                        <a:t>29.24</a:t>
+                      </a:r>
+                      <a:endParaRPr lang="en-US" sz="1250" dirty="0">
+                        <a:latin typeface="Segoe UI" charset="0"/>
+                        <a:ea typeface="Segoe UI" charset="0"/>
+                        <a:cs typeface="Segoe UI" charset="0"/>
+                      </a:endParaRPr>
+                    </a:p>
+                  </a:txBody>
+                  <a:tcPr marL="54864" marR="54864" marT="54864" marB="54864">
+                    <a:lnL w="0" cap="flat" cmpd="sng" algn="ctr">
+                      <a:noFill/>
+                    </a:lnL>
+                    <a:lnR w="0" cap="flat" cmpd="sng" algn="ctr">
+                      <a:noFill/>
+                    </a:lnR>
+                    <a:lnT w="0" cap="flat" cmpd="sng" algn="ctr">
+                      <a:noFill/>
+                    </a:lnT>
+                    <a:lnB w="0" cap="flat" cmpd="sng" algn="ctr">
+                      <a:noFill/>
+                    </a:lnB>
+                    <a:solidFill>
+                      <a:schemeClr val="bg2"/>
+                    </a:solidFill>
+                  </a:tcPr>
+                </a:tc>
+                <a:tc>
+                  <a:txBody>
+                    <a:bodyPr/>
+                    <a:lstStyle/>
+                    <a:p>
+                      <a:pPr indent="0" marL="0">
+                        <a:buNone/>
+                      </a:pPr>
+                      <a:r>
+                        <a:rPr lang="en-US" sz="1250" dirty="0">
+                          <a:solidFill>
+                            <a:schemeClr val="tx2"/>
+                          </a:solidFill>
+                          <a:latin typeface="Segoe UI" pitchFamily="34" charset="0"/>
+                          <a:ea typeface="Segoe UI" pitchFamily="34" charset="-122"/>
+                          <a:cs typeface="Segoe UI" pitchFamily="34" charset="-120"/>
+                        </a:rPr>
+                        <a:t>0.608</a:t>
+                      </a:r>
+                      <a:endParaRPr lang="en-US" sz="1250" dirty="0">
+                        <a:latin typeface="Segoe UI" charset="0"/>
+                        <a:ea typeface="Segoe UI" charset="0"/>
+                        <a:cs typeface="Segoe UI" charset="0"/>
+                      </a:endParaRPr>
+                    </a:p>
+                  </a:txBody>
+                  <a:tcPr marL="54864" marR="54864" marT="54864" marB="54864">
+                    <a:lnL w="0" cap="flat" cmpd="sng" algn="ctr">
+                      <a:noFill/>
+                    </a:lnL>
+                    <a:lnR w="0" cap="flat" cmpd="sng" algn="ctr">
+                      <a:noFill/>
+                    </a:lnR>
+                    <a:lnT w="0" cap="flat" cmpd="sng" algn="ctr">
+                      <a:noFill/>
+                    </a:lnT>
+                    <a:lnB w="0" cap="flat" cmpd="sng" algn="ctr">
+                      <a:noFill/>
+                    </a:lnB>
+                    <a:solidFill>
+                      <a:schemeClr val="bg2"/>
+                    </a:solidFill>
+                  </a:tcPr>
+                </a:tc>
+                <a:tc>
+                  <a:txBody>
+                    <a:bodyPr/>
+                    <a:lstStyle/>
+                    <a:p>
+                      <a:pPr indent="0" marL="0">
+                        <a:buNone/>
+                      </a:pPr>
+                      <a:r>
+                        <a:rPr lang="en-US" sz="1250" dirty="0">
+                          <a:solidFill>
+                            <a:schemeClr val="tx2"/>
+                          </a:solidFill>
+                          <a:latin typeface="Segoe UI" pitchFamily="34" charset="0"/>
+                          <a:ea typeface="Segoe UI" pitchFamily="34" charset="-122"/>
+                          <a:cs typeface="Segoe UI" pitchFamily="34" charset="-120"/>
+                        </a:rPr>
+                        <a:t>0.711</a:t>
+                      </a:r>
+                      <a:endParaRPr lang="en-US" sz="1250" dirty="0">
+                        <a:latin typeface="Segoe UI" charset="0"/>
+                        <a:ea typeface="Segoe UI" charset="0"/>
+                        <a:cs typeface="Segoe UI" charset="0"/>
+                      </a:endParaRPr>
+                    </a:p>
+                  </a:txBody>
+                  <a:tcPr marL="54864" marR="54864" marT="54864" marB="54864">
+                    <a:lnL w="0" cap="flat" cmpd="sng" algn="ctr">
+                      <a:noFill/>
+                    </a:lnL>
+                    <a:lnR w="0" cap="flat" cmpd="sng" algn="ctr">
+                      <a:noFill/>
+                    </a:lnR>
+                    <a:lnT w="0" cap="flat" cmpd="sng" algn="ctr">
+                      <a:noFill/>
+                    </a:lnT>
+                    <a:lnB w="0" cap="flat" cmpd="sng" algn="ctr">
+                      <a:noFill/>
+                    </a:lnB>
+                    <a:solidFill>
+                      <a:schemeClr val="bg2"/>
+                    </a:solidFill>
+                  </a:tcPr>
+                </a:tc>
+                <a:tc>
+                  <a:txBody>
+                    <a:bodyPr/>
+                    <a:lstStyle/>
+                    <a:p>
+                      <a:pPr indent="0" marL="0">
+                        <a:buNone/>
+                      </a:pPr>
+                      <a:r>
+                        <a:rPr lang="en-US" sz="1250" dirty="0">
+                          <a:solidFill>
+                            <a:schemeClr val="tx2"/>
+                          </a:solidFill>
+                          <a:latin typeface="Segoe UI" pitchFamily="34" charset="0"/>
+                          <a:ea typeface="Segoe UI" pitchFamily="34" charset="-122"/>
+                          <a:cs typeface="Segoe UI" pitchFamily="34" charset="-120"/>
+                        </a:rPr>
+                        <a:t>–</a:t>
+                      </a:r>
+                      <a:endParaRPr lang="en-US" sz="1250" dirty="0">
+                        <a:latin typeface="Segoe UI" charset="0"/>
+                        <a:ea typeface="Segoe UI" charset="0"/>
+                        <a:cs typeface="Segoe UI" charset="0"/>
+                      </a:endParaRPr>
+                    </a:p>
+                  </a:txBody>
+                  <a:tcPr marL="54864" marR="54864" marT="54864" marB="54864">
+                    <a:lnL w="0" cap="flat" cmpd="sng" algn="ctr">
+                      <a:noFill/>
+                    </a:lnL>
+                    <a:lnR w="0" cap="flat" cmpd="sng" algn="ctr">
+                      <a:noFill/>
+                    </a:lnR>
+                    <a:lnT w="0" cap="flat" cmpd="sng" algn="ctr">
+                      <a:noFill/>
+                    </a:lnT>
+                    <a:lnB w="0" cap="flat" cmpd="sng" algn="ctr">
+                      <a:noFill/>
+                    </a:lnB>
+                    <a:solidFill>
+                      <a:schemeClr val="bg2"/>
+                    </a:solidFill>
+                  </a:tcPr>
+                </a:tc>
+              </a:tr>
+              <a:tr h="310896">
+                <a:tc>
+                  <a:txBody>
+                    <a:bodyPr/>
+                    <a:lstStyle/>
+                    <a:p>
+                      <a:pPr indent="0" marL="0">
+                        <a:buNone/>
+                      </a:pPr>
+                      <a:r>
+                        <a:rPr lang="en-US" sz="1250" dirty="0">
+                          <a:solidFill>
+                            <a:schemeClr val="tx2"/>
+                          </a:solidFill>
+                          <a:latin typeface="Segoe UI" pitchFamily="34" charset="0"/>
+                          <a:ea typeface="Segoe UI" pitchFamily="34" charset="-122"/>
+                          <a:cs typeface="Segoe UI" pitchFamily="34" charset="-120"/>
+                        </a:rPr>
+                        <a:t>Real-ESRGAN x4plus (pretrained)</a:t>
+                      </a:r>
+                      <a:endParaRPr lang="en-US" sz="1250" dirty="0">
+                        <a:latin typeface="Segoe UI" charset="0"/>
+                        <a:ea typeface="Segoe UI" charset="0"/>
+                        <a:cs typeface="Segoe UI" charset="0"/>
+                      </a:endParaRPr>
+                    </a:p>
+                  </a:txBody>
+                  <a:tcPr marL="54864" marR="54864" marT="54864" marB="54864">
+                    <a:lnL w="0" cap="flat" cmpd="sng" algn="ctr">
+                      <a:noFill/>
+                    </a:lnL>
+                    <a:lnR w="0" cap="flat" cmpd="sng" algn="ctr">
+                      <a:noFill/>
+                    </a:lnR>
+                    <a:lnT w="0" cap="flat" cmpd="sng" algn="ctr">
+                      <a:noFill/>
+                    </a:lnT>
+                    <a:lnB w="0" cap="flat" cmpd="sng" algn="ctr">
+                      <a:noFill/>
                     </a:lnB>
                     <a:solidFill>
                       <a:schemeClr val="bg1"/>
@@ -7130,55 +7156,31 @@
                           <a:solidFill>
                             <a:schemeClr val="tx2"/>
                           </a:solidFill>
-                          <a:latin typeface="Calibri" pitchFamily="34" charset="0"/>
-                          <a:ea typeface="Calibri" pitchFamily="34" charset="-122"/>
-                          <a:cs typeface="Calibri" pitchFamily="34" charset="-120"/>
+                          <a:latin typeface="Segoe UI" pitchFamily="34" charset="0"/>
+                          <a:ea typeface="Segoe UI" pitchFamily="34" charset="-122"/>
+                          <a:cs typeface="Segoe UI" pitchFamily="34" charset="-120"/>
                         </a:rPr>
-                        <a:t>–</a:t>
+                        <a:t>16.70M</a:t>
                       </a:r>
                       <a:endParaRPr lang="en-US" sz="1250" dirty="0">
-                        <a:latin typeface="Calibri" charset="0"/>
-                        <a:ea typeface="Calibri" charset="0"/>
-                        <a:cs typeface="Calibri" charset="0"/>
+                        <a:latin typeface="Segoe UI" charset="0"/>
+                        <a:ea typeface="Segoe UI" charset="0"/>
+                        <a:cs typeface="Segoe UI" charset="0"/>
                       </a:endParaRPr>
                     </a:p>
                   </a:txBody>
                   <a:tcPr marL="54864" marR="54864" marT="54864" marB="54864">
-                    <a:lnL w="9525" cap="flat" cmpd="sng" algn="ctr">
-                      <a:solidFill>
-                        <a:srgbClr val="E5E7EB"/>
-                      </a:solidFill>
-                      <a:prstDash val="solid"/>
-                      <a:round/>
-                      <a:headEnd type="none" w="med" len="med"/>
-                      <a:tailEnd type="none" w="med" len="med"/>
+                    <a:lnL w="0" cap="flat" cmpd="sng" algn="ctr">
+                      <a:noFill/>
                     </a:lnL>
-                    <a:lnR w="9525" cap="flat" cmpd="sng" algn="ctr">
-                      <a:solidFill>
-                        <a:srgbClr val="E5E7EB"/>
-                      </a:solidFill>
-                      <a:prstDash val="solid"/>
-                      <a:round/>
-                      <a:headEnd type="none" w="med" len="med"/>
-                      <a:tailEnd type="none" w="med" len="med"/>
+                    <a:lnR w="0" cap="flat" cmpd="sng" algn="ctr">
+                      <a:noFill/>
                     </a:lnR>
-                    <a:lnT w="9525" cap="flat" cmpd="sng" algn="ctr">
-                      <a:solidFill>
-                        <a:srgbClr val="E5E7EB"/>
-                      </a:solidFill>
-                      <a:prstDash val="solid"/>
-                      <a:round/>
-                      <a:headEnd type="none" w="med" len="med"/>
-                      <a:tailEnd type="none" w="med" len="med"/>
+                    <a:lnT w="0" cap="flat" cmpd="sng" algn="ctr">
+                      <a:noFill/>
                     </a:lnT>
-                    <a:lnB w="9525" cap="flat" cmpd="sng" algn="ctr">
-                      <a:solidFill>
-                        <a:srgbClr val="E5E7EB"/>
-                      </a:solidFill>
-                      <a:prstDash val="solid"/>
-                      <a:round/>
-                      <a:headEnd type="none" w="med" len="med"/>
-                      <a:tailEnd type="none" w="med" len="med"/>
+                    <a:lnB w="0" cap="flat" cmpd="sng" algn="ctr">
+                      <a:noFill/>
                     </a:lnB>
                     <a:solidFill>
                       <a:schemeClr val="bg1"/>
@@ -7198,55 +7200,31 @@
                           <a:solidFill>
                             <a:schemeClr val="tx2"/>
                           </a:solidFill>
-                          <a:latin typeface="Calibri" pitchFamily="34" charset="0"/>
-                          <a:ea typeface="Calibri" pitchFamily="34" charset="-122"/>
-                          <a:cs typeface="Calibri" pitchFamily="34" charset="-120"/>
+                          <a:latin typeface="Segoe UI" pitchFamily="34" charset="0"/>
+                          <a:ea typeface="Segoe UI" pitchFamily="34" charset="-122"/>
+                          <a:cs typeface="Segoe UI" pitchFamily="34" charset="-120"/>
                         </a:rPr>
-                        <a:t>29.24</a:t>
+                        <a:t>27.76</a:t>
                       </a:r>
                       <a:endParaRPr lang="en-US" sz="1250" dirty="0">
-                        <a:latin typeface="Calibri" charset="0"/>
-                        <a:ea typeface="Calibri" charset="0"/>
-                        <a:cs typeface="Calibri" charset="0"/>
+                        <a:latin typeface="Segoe UI" charset="0"/>
+                        <a:ea typeface="Segoe UI" charset="0"/>
+                        <a:cs typeface="Segoe UI" charset="0"/>
                       </a:endParaRPr>
                     </a:p>
                   </a:txBody>
                   <a:tcPr marL="54864" marR="54864" marT="54864" marB="54864">
-                    <a:lnL w="9525" cap="flat" cmpd="sng" algn="ctr">
-                      <a:solidFill>
-                        <a:srgbClr val="E5E7EB"/>
-                      </a:solidFill>
-                      <a:prstDash val="solid"/>
-                      <a:round/>
-                      <a:headEnd type="none" w="med" len="med"/>
-                      <a:tailEnd type="none" w="med" len="med"/>
+                    <a:lnL w="0" cap="flat" cmpd="sng" algn="ctr">
+                      <a:noFill/>
                     </a:lnL>
-                    <a:lnR w="9525" cap="flat" cmpd="sng" algn="ctr">
-                      <a:solidFill>
-                        <a:srgbClr val="E5E7EB"/>
-                      </a:solidFill>
-                      <a:prstDash val="solid"/>
-                      <a:round/>
-                      <a:headEnd type="none" w="med" len="med"/>
-                      <a:tailEnd type="none" w="med" len="med"/>
+                    <a:lnR w="0" cap="flat" cmpd="sng" algn="ctr">
+                      <a:noFill/>
                     </a:lnR>
-                    <a:lnT w="9525" cap="flat" cmpd="sng" algn="ctr">
-                      <a:solidFill>
-                        <a:srgbClr val="E5E7EB"/>
-                      </a:solidFill>
-                      <a:prstDash val="solid"/>
-                      <a:round/>
-                      <a:headEnd type="none" w="med" len="med"/>
-                      <a:tailEnd type="none" w="med" len="med"/>
+                    <a:lnT w="0" cap="flat" cmpd="sng" algn="ctr">
+                      <a:noFill/>
                     </a:lnT>
-                    <a:lnB w="9525" cap="flat" cmpd="sng" algn="ctr">
-                      <a:solidFill>
-                        <a:srgbClr val="E5E7EB"/>
-                      </a:solidFill>
-                      <a:prstDash val="solid"/>
-                      <a:round/>
-                      <a:headEnd type="none" w="med" len="med"/>
-                      <a:tailEnd type="none" w="med" len="med"/>
+                    <a:lnB w="0" cap="flat" cmpd="sng" algn="ctr">
+                      <a:noFill/>
                     </a:lnB>
                     <a:solidFill>
                       <a:schemeClr val="bg1"/>
@@ -7266,55 +7244,31 @@
                           <a:solidFill>
                             <a:schemeClr val="tx2"/>
                           </a:solidFill>
-                          <a:latin typeface="Calibri" pitchFamily="34" charset="0"/>
-                          <a:ea typeface="Calibri" pitchFamily="34" charset="-122"/>
-                          <a:cs typeface="Calibri" pitchFamily="34" charset="-120"/>
+                          <a:latin typeface="Segoe UI" pitchFamily="34" charset="0"/>
+                          <a:ea typeface="Segoe UI" pitchFamily="34" charset="-122"/>
+                          <a:cs typeface="Segoe UI" pitchFamily="34" charset="-120"/>
                         </a:rPr>
-                        <a:t>0.608</a:t>
+                        <a:t>0.545</a:t>
                       </a:r>
                       <a:endParaRPr lang="en-US" sz="1250" dirty="0">
-                        <a:latin typeface="Calibri" charset="0"/>
-                        <a:ea typeface="Calibri" charset="0"/>
-                        <a:cs typeface="Calibri" charset="0"/>
+                        <a:latin typeface="Segoe UI" charset="0"/>
+                        <a:ea typeface="Segoe UI" charset="0"/>
+                        <a:cs typeface="Segoe UI" charset="0"/>
                       </a:endParaRPr>
                     </a:p>
                   </a:txBody>
                   <a:tcPr marL="54864" marR="54864" marT="54864" marB="54864">
-                    <a:lnL w="9525" cap="flat" cmpd="sng" algn="ctr">
-                      <a:solidFill>
-                        <a:srgbClr val="E5E7EB"/>
-                      </a:solidFill>
-                      <a:prstDash val="solid"/>
-                      <a:round/>
-                      <a:headEnd type="none" w="med" len="med"/>
-                      <a:tailEnd type="none" w="med" len="med"/>
+                    <a:lnL w="0" cap="flat" cmpd="sng" algn="ctr">
+                      <a:noFill/>
                     </a:lnL>
-                    <a:lnR w="9525" cap="flat" cmpd="sng" algn="ctr">
-                      <a:solidFill>
-                        <a:srgbClr val="E5E7EB"/>
-                      </a:solidFill>
-                      <a:prstDash val="solid"/>
-                      <a:round/>
-                      <a:headEnd type="none" w="med" len="med"/>
-                      <a:tailEnd type="none" w="med" len="med"/>
+                    <a:lnR w="0" cap="flat" cmpd="sng" algn="ctr">
+                      <a:noFill/>
                     </a:lnR>
-                    <a:lnT w="9525" cap="flat" cmpd="sng" algn="ctr">
-                      <a:solidFill>
-                        <a:srgbClr val="E5E7EB"/>
-                      </a:solidFill>
-                      <a:prstDash val="solid"/>
-                      <a:round/>
-                      <a:headEnd type="none" w="med" len="med"/>
-                      <a:tailEnd type="none" w="med" len="med"/>
+                    <a:lnT w="0" cap="flat" cmpd="sng" algn="ctr">
+                      <a:noFill/>
                     </a:lnT>
-                    <a:lnB w="9525" cap="flat" cmpd="sng" algn="ctr">
-                      <a:solidFill>
-                        <a:srgbClr val="E5E7EB"/>
-                      </a:solidFill>
-                      <a:prstDash val="solid"/>
-                      <a:round/>
-                      <a:headEnd type="none" w="med" len="med"/>
-                      <a:tailEnd type="none" w="med" len="med"/>
+                    <a:lnB w="0" cap="flat" cmpd="sng" algn="ctr">
+                      <a:noFill/>
                     </a:lnB>
                     <a:solidFill>
                       <a:schemeClr val="bg1"/>
@@ -7334,55 +7288,31 @@
                           <a:solidFill>
                             <a:schemeClr val="tx2"/>
                           </a:solidFill>
-                          <a:latin typeface="Calibri" pitchFamily="34" charset="0"/>
-                          <a:ea typeface="Calibri" pitchFamily="34" charset="-122"/>
-                          <a:cs typeface="Calibri" pitchFamily="34" charset="-120"/>
+                          <a:latin typeface="Segoe UI" pitchFamily="34" charset="0"/>
+                          <a:ea typeface="Segoe UI" pitchFamily="34" charset="-122"/>
+                          <a:cs typeface="Segoe UI" pitchFamily="34" charset="-120"/>
                         </a:rPr>
-                        <a:t>0.711</a:t>
+                        <a:t>0.454</a:t>
                       </a:r>
                       <a:endParaRPr lang="en-US" sz="1250" dirty="0">
-                        <a:latin typeface="Calibri" charset="0"/>
-                        <a:ea typeface="Calibri" charset="0"/>
-                        <a:cs typeface="Calibri" charset="0"/>
+                        <a:latin typeface="Segoe UI" charset="0"/>
+                        <a:ea typeface="Segoe UI" charset="0"/>
+                        <a:cs typeface="Segoe UI" charset="0"/>
                       </a:endParaRPr>
                     </a:p>
                   </a:txBody>
                   <a:tcPr marL="54864" marR="54864" marT="54864" marB="54864">
-                    <a:lnL w="9525" cap="flat" cmpd="sng" algn="ctr">
-                      <a:solidFill>
-                        <a:srgbClr val="E5E7EB"/>
-                      </a:solidFill>
-                      <a:prstDash val="solid"/>
-                      <a:round/>
-                      <a:headEnd type="none" w="med" len="med"/>
-                      <a:tailEnd type="none" w="med" len="med"/>
+                    <a:lnL w="0" cap="flat" cmpd="sng" algn="ctr">
+                      <a:noFill/>
                     </a:lnL>
-                    <a:lnR w="9525" cap="flat" cmpd="sng" algn="ctr">
-                      <a:solidFill>
-                        <a:srgbClr val="E5E7EB"/>
-                      </a:solidFill>
-                      <a:prstDash val="solid"/>
-                      <a:round/>
-                      <a:headEnd type="none" w="med" len="med"/>
-                      <a:tailEnd type="none" w="med" len="med"/>
+                    <a:lnR w="0" cap="flat" cmpd="sng" algn="ctr">
+                      <a:noFill/>
                     </a:lnR>
-                    <a:lnT w="9525" cap="flat" cmpd="sng" algn="ctr">
-                      <a:solidFill>
-                        <a:srgbClr val="E5E7EB"/>
-                      </a:solidFill>
-                      <a:prstDash val="solid"/>
-                      <a:round/>
-                      <a:headEnd type="none" w="med" len="med"/>
-                      <a:tailEnd type="none" w="med" len="med"/>
+                    <a:lnT w="0" cap="flat" cmpd="sng" algn="ctr">
+                      <a:noFill/>
                     </a:lnT>
-                    <a:lnB w="9525" cap="flat" cmpd="sng" algn="ctr">
-                      <a:solidFill>
-                        <a:srgbClr val="E5E7EB"/>
-                      </a:solidFill>
-                      <a:prstDash val="solid"/>
-                      <a:round/>
-                      <a:headEnd type="none" w="med" len="med"/>
-                      <a:tailEnd type="none" w="med" len="med"/>
+                    <a:lnB w="0" cap="flat" cmpd="sng" algn="ctr">
+                      <a:noFill/>
                     </a:lnB>
                     <a:solidFill>
                       <a:schemeClr val="bg1"/>
@@ -7402,55 +7332,31 @@
                           <a:solidFill>
                             <a:schemeClr val="tx2"/>
                           </a:solidFill>
-                          <a:latin typeface="Calibri" pitchFamily="34" charset="0"/>
-                          <a:ea typeface="Calibri" pitchFamily="34" charset="-122"/>
-                          <a:cs typeface="Calibri" pitchFamily="34" charset="-120"/>
+                          <a:latin typeface="Segoe UI" pitchFamily="34" charset="0"/>
+                          <a:ea typeface="Segoe UI" pitchFamily="34" charset="-122"/>
+                          <a:cs typeface="Segoe UI" pitchFamily="34" charset="-120"/>
                         </a:rPr>
-                        <a:t>–</a:t>
+                        <a:t>185.4</a:t>
                       </a:r>
                       <a:endParaRPr lang="en-US" sz="1250" dirty="0">
-                        <a:latin typeface="Calibri" charset="0"/>
-                        <a:ea typeface="Calibri" charset="0"/>
-                        <a:cs typeface="Calibri" charset="0"/>
+                        <a:latin typeface="Segoe UI" charset="0"/>
+                        <a:ea typeface="Segoe UI" charset="0"/>
+                        <a:cs typeface="Segoe UI" charset="0"/>
                       </a:endParaRPr>
                     </a:p>
                   </a:txBody>
                   <a:tcPr marL="54864" marR="54864" marT="54864" marB="54864">
-                    <a:lnL w="9525" cap="flat" cmpd="sng" algn="ctr">
-                      <a:solidFill>
-                        <a:srgbClr val="E5E7EB"/>
-                      </a:solidFill>
-                      <a:prstDash val="solid"/>
-                      <a:round/>
-                      <a:headEnd type="none" w="med" len="med"/>
-                      <a:tailEnd type="none" w="med" len="med"/>
+                    <a:lnL w="0" cap="flat" cmpd="sng" algn="ctr">
+                      <a:noFill/>
                     </a:lnL>
-                    <a:lnR w="9525" cap="flat" cmpd="sng" algn="ctr">
-                      <a:solidFill>
-                        <a:srgbClr val="E5E7EB"/>
-                      </a:solidFill>
-                      <a:prstDash val="solid"/>
-                      <a:round/>
-                      <a:headEnd type="none" w="med" len="med"/>
-                      <a:tailEnd type="none" w="med" len="med"/>
+                    <a:lnR w="0" cap="flat" cmpd="sng" algn="ctr">
+                      <a:noFill/>
                     </a:lnR>
-                    <a:lnT w="9525" cap="flat" cmpd="sng" algn="ctr">
-                      <a:solidFill>
-                        <a:srgbClr val="E5E7EB"/>
-                      </a:solidFill>
-                      <a:prstDash val="solid"/>
-                      <a:round/>
-                      <a:headEnd type="none" w="med" len="med"/>
-                      <a:tailEnd type="none" w="med" len="med"/>
+                    <a:lnT w="0" cap="flat" cmpd="sng" algn="ctr">
+                      <a:noFill/>
                     </a:lnT>
-                    <a:lnB w="9525" cap="flat" cmpd="sng" algn="ctr">
-                      <a:solidFill>
-                        <a:srgbClr val="E5E7EB"/>
-                      </a:solidFill>
-                      <a:prstDash val="solid"/>
-                      <a:round/>
-                      <a:headEnd type="none" w="med" len="med"/>
-                      <a:tailEnd type="none" w="med" len="med"/>
+                    <a:lnB w="0" cap="flat" cmpd="sng" algn="ctr">
+                      <a:noFill/>
                     </a:lnB>
                     <a:solidFill>
                       <a:schemeClr val="bg1"/>
@@ -7472,58 +7378,34 @@
                           <a:solidFill>
                             <a:schemeClr val="tx2"/>
                           </a:solidFill>
-                          <a:latin typeface="Calibri" pitchFamily="34" charset="0"/>
-                          <a:ea typeface="Calibri" pitchFamily="34" charset="-122"/>
-                          <a:cs typeface="Calibri" pitchFamily="34" charset="-120"/>
+                          <a:latin typeface="Segoe UI" pitchFamily="34" charset="0"/>
+                          <a:ea typeface="Segoe UI" pitchFamily="34" charset="-122"/>
+                          <a:cs typeface="Segoe UI" pitchFamily="34" charset="-120"/>
                         </a:rPr>
-                        <a:t>Real-ESRGAN x4plus (pretrained)</a:t>
+                        <a:t>Real-ESRGAN general-v3 (pretrained)</a:t>
                       </a:r>
                       <a:endParaRPr lang="en-US" sz="1250" dirty="0">
-                        <a:latin typeface="Calibri" charset="0"/>
-                        <a:ea typeface="Calibri" charset="0"/>
-                        <a:cs typeface="Calibri" charset="0"/>
+                        <a:latin typeface="Segoe UI" charset="0"/>
+                        <a:ea typeface="Segoe UI" charset="0"/>
+                        <a:cs typeface="Segoe UI" charset="0"/>
                       </a:endParaRPr>
                     </a:p>
                   </a:txBody>
                   <a:tcPr marL="54864" marR="54864" marT="54864" marB="54864">
-                    <a:lnL w="9525" cap="flat" cmpd="sng" algn="ctr">
-                      <a:solidFill>
-                        <a:srgbClr val="E5E7EB"/>
-                      </a:solidFill>
-                      <a:prstDash val="solid"/>
-                      <a:round/>
-                      <a:headEnd type="none" w="med" len="med"/>
-                      <a:tailEnd type="none" w="med" len="med"/>
+                    <a:lnL w="0" cap="flat" cmpd="sng" algn="ctr">
+                      <a:noFill/>
                     </a:lnL>
-                    <a:lnR w="9525" cap="flat" cmpd="sng" algn="ctr">
-                      <a:solidFill>
-                        <a:srgbClr val="E5E7EB"/>
-                      </a:solidFill>
-                      <a:prstDash val="solid"/>
-                      <a:round/>
-                      <a:headEnd type="none" w="med" len="med"/>
-                      <a:tailEnd type="none" w="med" len="med"/>
+                    <a:lnR w="0" cap="flat" cmpd="sng" algn="ctr">
+                      <a:noFill/>
                     </a:lnR>
-                    <a:lnT w="9525" cap="flat" cmpd="sng" algn="ctr">
-                      <a:solidFill>
-                        <a:srgbClr val="E5E7EB"/>
-                      </a:solidFill>
-                      <a:prstDash val="solid"/>
-                      <a:round/>
-                      <a:headEnd type="none" w="med" len="med"/>
-                      <a:tailEnd type="none" w="med" len="med"/>
+                    <a:lnT w="0" cap="flat" cmpd="sng" algn="ctr">
+                      <a:noFill/>
                     </a:lnT>
-                    <a:lnB w="9525" cap="flat" cmpd="sng" algn="ctr">
-                      <a:solidFill>
-                        <a:srgbClr val="E5E7EB"/>
-                      </a:solidFill>
-                      <a:prstDash val="solid"/>
-                      <a:round/>
-                      <a:headEnd type="none" w="med" len="med"/>
-                      <a:tailEnd type="none" w="med" len="med"/>
+                    <a:lnB w="0" cap="flat" cmpd="sng" algn="ctr">
+                      <a:noFill/>
                     </a:lnB>
                     <a:solidFill>
-                      <a:schemeClr val="bg1"/>
+                      <a:schemeClr val="bg2"/>
                     </a:solidFill>
                   </a:tcPr>
                 </a:tc>
@@ -7540,58 +7422,34 @@
                           <a:solidFill>
                             <a:schemeClr val="tx2"/>
                           </a:solidFill>
-                          <a:latin typeface="Calibri" pitchFamily="34" charset="0"/>
-                          <a:ea typeface="Calibri" pitchFamily="34" charset="-122"/>
-                          <a:cs typeface="Calibri" pitchFamily="34" charset="-120"/>
+                          <a:latin typeface="Segoe UI" pitchFamily="34" charset="0"/>
+                          <a:ea typeface="Segoe UI" pitchFamily="34" charset="-122"/>
+                          <a:cs typeface="Segoe UI" pitchFamily="34" charset="-120"/>
                         </a:rPr>
-                        <a:t>16.70M</a:t>
+                        <a:t>1.21M</a:t>
                       </a:r>
                       <a:endParaRPr lang="en-US" sz="1250" dirty="0">
-                        <a:latin typeface="Calibri" charset="0"/>
-                        <a:ea typeface="Calibri" charset="0"/>
-                        <a:cs typeface="Calibri" charset="0"/>
+                        <a:latin typeface="Segoe UI" charset="0"/>
+                        <a:ea typeface="Segoe UI" charset="0"/>
+                        <a:cs typeface="Segoe UI" charset="0"/>
                       </a:endParaRPr>
                     </a:p>
                   </a:txBody>
                   <a:tcPr marL="54864" marR="54864" marT="54864" marB="54864">
-                    <a:lnL w="9525" cap="flat" cmpd="sng" algn="ctr">
-                      <a:solidFill>
-                        <a:srgbClr val="E5E7EB"/>
-                      </a:solidFill>
-                      <a:prstDash val="solid"/>
-                      <a:round/>
-                      <a:headEnd type="none" w="med" len="med"/>
-                      <a:tailEnd type="none" w="med" len="med"/>
+                    <a:lnL w="0" cap="flat" cmpd="sng" algn="ctr">
+                      <a:noFill/>
                     </a:lnL>
-                    <a:lnR w="9525" cap="flat" cmpd="sng" algn="ctr">
-                      <a:solidFill>
-                        <a:srgbClr val="E5E7EB"/>
-                      </a:solidFill>
-                      <a:prstDash val="solid"/>
-                      <a:round/>
-                      <a:headEnd type="none" w="med" len="med"/>
-                      <a:tailEnd type="none" w="med" len="med"/>
+                    <a:lnR w="0" cap="flat" cmpd="sng" algn="ctr">
+                      <a:noFill/>
                     </a:lnR>
-                    <a:lnT w="9525" cap="flat" cmpd="sng" algn="ctr">
-                      <a:solidFill>
-                        <a:srgbClr val="E5E7EB"/>
-                      </a:solidFill>
-                      <a:prstDash val="solid"/>
-                      <a:round/>
-                      <a:headEnd type="none" w="med" len="med"/>
-                      <a:tailEnd type="none" w="med" len="med"/>
+                    <a:lnT w="0" cap="flat" cmpd="sng" algn="ctr">
+                      <a:noFill/>
                     </a:lnT>
-                    <a:lnB w="9525" cap="flat" cmpd="sng" algn="ctr">
-                      <a:solidFill>
-                        <a:srgbClr val="E5E7EB"/>
-                      </a:solidFill>
-                      <a:prstDash val="solid"/>
-                      <a:round/>
-                      <a:headEnd type="none" w="med" len="med"/>
-                      <a:tailEnd type="none" w="med" len="med"/>
+                    <a:lnB w="0" cap="flat" cmpd="sng" algn="ctr">
+                      <a:noFill/>
                     </a:lnB>
                     <a:solidFill>
-                      <a:schemeClr val="bg1"/>
+                      <a:schemeClr val="bg2"/>
                     </a:solidFill>
                   </a:tcPr>
                 </a:tc>
@@ -7608,58 +7466,34 @@
                           <a:solidFill>
                             <a:schemeClr val="tx2"/>
                           </a:solidFill>
-                          <a:latin typeface="Calibri" pitchFamily="34" charset="0"/>
-                          <a:ea typeface="Calibri" pitchFamily="34" charset="-122"/>
-                          <a:cs typeface="Calibri" pitchFamily="34" charset="-120"/>
+                          <a:latin typeface="Segoe UI" pitchFamily="34" charset="0"/>
+                          <a:ea typeface="Segoe UI" pitchFamily="34" charset="-122"/>
+                          <a:cs typeface="Segoe UI" pitchFamily="34" charset="-120"/>
                         </a:rPr>
-                        <a:t>27.76</a:t>
+                        <a:t>28.93</a:t>
                       </a:r>
                       <a:endParaRPr lang="en-US" sz="1250" dirty="0">
-                        <a:latin typeface="Calibri" charset="0"/>
-                        <a:ea typeface="Calibri" charset="0"/>
-                        <a:cs typeface="Calibri" charset="0"/>
+                        <a:latin typeface="Segoe UI" charset="0"/>
+                        <a:ea typeface="Segoe UI" charset="0"/>
+                        <a:cs typeface="Segoe UI" charset="0"/>
                       </a:endParaRPr>
                     </a:p>
                   </a:txBody>
                   <a:tcPr marL="54864" marR="54864" marT="54864" marB="54864">
-                    <a:lnL w="9525" cap="flat" cmpd="sng" algn="ctr">
-                      <a:solidFill>
-                        <a:srgbClr val="E5E7EB"/>
-                      </a:solidFill>
-                      <a:prstDash val="solid"/>
-                      <a:round/>
-                      <a:headEnd type="none" w="med" len="med"/>
-                      <a:tailEnd type="none" w="med" len="med"/>
+                    <a:lnL w="0" cap="flat" cmpd="sng" algn="ctr">
+                      <a:noFill/>
                     </a:lnL>
-                    <a:lnR w="9525" cap="flat" cmpd="sng" algn="ctr">
-                      <a:solidFill>
-                        <a:srgbClr val="E5E7EB"/>
-                      </a:solidFill>
-                      <a:prstDash val="solid"/>
-                      <a:round/>
-                      <a:headEnd type="none" w="med" len="med"/>
-                      <a:tailEnd type="none" w="med" len="med"/>
+                    <a:lnR w="0" cap="flat" cmpd="sng" algn="ctr">
+                      <a:noFill/>
                     </a:lnR>
-                    <a:lnT w="9525" cap="flat" cmpd="sng" algn="ctr">
-                      <a:solidFill>
-                        <a:srgbClr val="E5E7EB"/>
-                      </a:solidFill>
-                      <a:prstDash val="solid"/>
-                      <a:round/>
-                      <a:headEnd type="none" w="med" len="med"/>
-                      <a:tailEnd type="none" w="med" len="med"/>
+                    <a:lnT w="0" cap="flat" cmpd="sng" algn="ctr">
+                      <a:noFill/>
                     </a:lnT>
-                    <a:lnB w="9525" cap="flat" cmpd="sng" algn="ctr">
-                      <a:solidFill>
-                        <a:srgbClr val="E5E7EB"/>
-                      </a:solidFill>
-                      <a:prstDash val="solid"/>
-                      <a:round/>
-                      <a:headEnd type="none" w="med" len="med"/>
-                      <a:tailEnd type="none" w="med" len="med"/>
+                    <a:lnB w="0" cap="flat" cmpd="sng" algn="ctr">
+                      <a:noFill/>
                     </a:lnB>
                     <a:solidFill>
-                      <a:schemeClr val="bg1"/>
+                      <a:schemeClr val="bg2"/>
                     </a:solidFill>
                   </a:tcPr>
                 </a:tc>
@@ -7676,58 +7510,34 @@
                           <a:solidFill>
                             <a:schemeClr val="tx2"/>
                           </a:solidFill>
-                          <a:latin typeface="Calibri" pitchFamily="34" charset="0"/>
-                          <a:ea typeface="Calibri" pitchFamily="34" charset="-122"/>
-                          <a:cs typeface="Calibri" pitchFamily="34" charset="-120"/>
+                          <a:latin typeface="Segoe UI" pitchFamily="34" charset="0"/>
+                          <a:ea typeface="Segoe UI" pitchFamily="34" charset="-122"/>
+                          <a:cs typeface="Segoe UI" pitchFamily="34" charset="-120"/>
                         </a:rPr>
-                        <a:t>0.545</a:t>
+                        <a:t>0.597</a:t>
                       </a:r>
                       <a:endParaRPr lang="en-US" sz="1250" dirty="0">
-                        <a:latin typeface="Calibri" charset="0"/>
-                        <a:ea typeface="Calibri" charset="0"/>
-                        <a:cs typeface="Calibri" charset="0"/>
+                        <a:latin typeface="Segoe UI" charset="0"/>
+                        <a:ea typeface="Segoe UI" charset="0"/>
+                        <a:cs typeface="Segoe UI" charset="0"/>
                       </a:endParaRPr>
                     </a:p>
                   </a:txBody>
                   <a:tcPr marL="54864" marR="54864" marT="54864" marB="54864">
-                    <a:lnL w="9525" cap="flat" cmpd="sng" algn="ctr">
-                      <a:solidFill>
-                        <a:srgbClr val="E5E7EB"/>
-                      </a:solidFill>
-                      <a:prstDash val="solid"/>
-                      <a:round/>
-                      <a:headEnd type="none" w="med" len="med"/>
-                      <a:tailEnd type="none" w="med" len="med"/>
+                    <a:lnL w="0" cap="flat" cmpd="sng" algn="ctr">
+                      <a:noFill/>
                     </a:lnL>
-                    <a:lnR w="9525" cap="flat" cmpd="sng" algn="ctr">
-                      <a:solidFill>
-                        <a:srgbClr val="E5E7EB"/>
-                      </a:solidFill>
-                      <a:prstDash val="solid"/>
-                      <a:round/>
-                      <a:headEnd type="none" w="med" len="med"/>
-                      <a:tailEnd type="none" w="med" len="med"/>
+                    <a:lnR w="0" cap="flat" cmpd="sng" algn="ctr">
+                      <a:noFill/>
                     </a:lnR>
-                    <a:lnT w="9525" cap="flat" cmpd="sng" algn="ctr">
-                      <a:solidFill>
-                        <a:srgbClr val="E5E7EB"/>
-                      </a:solidFill>
-                      <a:prstDash val="solid"/>
-                      <a:round/>
-                      <a:headEnd type="none" w="med" len="med"/>
-                      <a:tailEnd type="none" w="med" len="med"/>
+                    <a:lnT w="0" cap="flat" cmpd="sng" algn="ctr">
+                      <a:noFill/>
                     </a:lnT>
-                    <a:lnB w="9525" cap="flat" cmpd="sng" algn="ctr">
-                      <a:solidFill>
-                        <a:srgbClr val="E5E7EB"/>
-                      </a:solidFill>
-                      <a:prstDash val="solid"/>
-                      <a:round/>
-                      <a:headEnd type="none" w="med" len="med"/>
-                      <a:tailEnd type="none" w="med" len="med"/>
+                    <a:lnB w="0" cap="flat" cmpd="sng" algn="ctr">
+                      <a:noFill/>
                     </a:lnB>
                     <a:solidFill>
-                      <a:schemeClr val="bg1"/>
+                      <a:schemeClr val="bg2"/>
                     </a:solidFill>
                   </a:tcPr>
                 </a:tc>
@@ -7744,58 +7554,34 @@
                           <a:solidFill>
                             <a:schemeClr val="tx2"/>
                           </a:solidFill>
-                          <a:latin typeface="Calibri" pitchFamily="34" charset="0"/>
-                          <a:ea typeface="Calibri" pitchFamily="34" charset="-122"/>
-                          <a:cs typeface="Calibri" pitchFamily="34" charset="-120"/>
+                          <a:latin typeface="Segoe UI" pitchFamily="34" charset="0"/>
+                          <a:ea typeface="Segoe UI" pitchFamily="34" charset="-122"/>
+                          <a:cs typeface="Segoe UI" pitchFamily="34" charset="-120"/>
                         </a:rPr>
-                        <a:t>0.454</a:t>
+                        <a:t>0.547</a:t>
                       </a:r>
                       <a:endParaRPr lang="en-US" sz="1250" dirty="0">
-                        <a:latin typeface="Calibri" charset="0"/>
-                        <a:ea typeface="Calibri" charset="0"/>
-                        <a:cs typeface="Calibri" charset="0"/>
+                        <a:latin typeface="Segoe UI" charset="0"/>
+                        <a:ea typeface="Segoe UI" charset="0"/>
+                        <a:cs typeface="Segoe UI" charset="0"/>
                       </a:endParaRPr>
                     </a:p>
                   </a:txBody>
                   <a:tcPr marL="54864" marR="54864" marT="54864" marB="54864">
-                    <a:lnL w="9525" cap="flat" cmpd="sng" algn="ctr">
-                      <a:solidFill>
-                        <a:srgbClr val="E5E7EB"/>
-                      </a:solidFill>
-                      <a:prstDash val="solid"/>
-                      <a:round/>
-                      <a:headEnd type="none" w="med" len="med"/>
-                      <a:tailEnd type="none" w="med" len="med"/>
+                    <a:lnL w="0" cap="flat" cmpd="sng" algn="ctr">
+                      <a:noFill/>
                     </a:lnL>
-                    <a:lnR w="9525" cap="flat" cmpd="sng" algn="ctr">
-                      <a:solidFill>
-                        <a:srgbClr val="E5E7EB"/>
-                      </a:solidFill>
-                      <a:prstDash val="solid"/>
-                      <a:round/>
-                      <a:headEnd type="none" w="med" len="med"/>
-                      <a:tailEnd type="none" w="med" len="med"/>
+                    <a:lnR w="0" cap="flat" cmpd="sng" algn="ctr">
+                      <a:noFill/>
                     </a:lnR>
-                    <a:lnT w="9525" cap="flat" cmpd="sng" algn="ctr">
-                      <a:solidFill>
-                        <a:srgbClr val="E5E7EB"/>
-                      </a:solidFill>
-                      <a:prstDash val="solid"/>
-                      <a:round/>
-                      <a:headEnd type="none" w="med" len="med"/>
-                      <a:tailEnd type="none" w="med" len="med"/>
+                    <a:lnT w="0" cap="flat" cmpd="sng" algn="ctr">
+                      <a:noFill/>
                     </a:lnT>
-                    <a:lnB w="9525" cap="flat" cmpd="sng" algn="ctr">
-                      <a:solidFill>
-                        <a:srgbClr val="E5E7EB"/>
-                      </a:solidFill>
-                      <a:prstDash val="solid"/>
-                      <a:round/>
-                      <a:headEnd type="none" w="med" len="med"/>
-                      <a:tailEnd type="none" w="med" len="med"/>
+                    <a:lnB w="0" cap="flat" cmpd="sng" algn="ctr">
+                      <a:noFill/>
                     </a:lnB>
                     <a:solidFill>
-                      <a:schemeClr val="bg1"/>
+                      <a:schemeClr val="bg2"/>
                     </a:solidFill>
                   </a:tcPr>
                 </a:tc>
@@ -7812,58 +7598,34 @@
                           <a:solidFill>
                             <a:schemeClr val="tx2"/>
                           </a:solidFill>
-                          <a:latin typeface="Calibri" pitchFamily="34" charset="0"/>
-                          <a:ea typeface="Calibri" pitchFamily="34" charset="-122"/>
-                          <a:cs typeface="Calibri" pitchFamily="34" charset="-120"/>
+                          <a:latin typeface="Segoe UI" pitchFamily="34" charset="0"/>
+                          <a:ea typeface="Segoe UI" pitchFamily="34" charset="-122"/>
+                          <a:cs typeface="Segoe UI" pitchFamily="34" charset="-120"/>
                         </a:rPr>
-                        <a:t>185.4</a:t>
+                        <a:t>26.9</a:t>
                       </a:r>
                       <a:endParaRPr lang="en-US" sz="1250" dirty="0">
-                        <a:latin typeface="Calibri" charset="0"/>
-                        <a:ea typeface="Calibri" charset="0"/>
-                        <a:cs typeface="Calibri" charset="0"/>
+                        <a:latin typeface="Segoe UI" charset="0"/>
+                        <a:ea typeface="Segoe UI" charset="0"/>
+                        <a:cs typeface="Segoe UI" charset="0"/>
                       </a:endParaRPr>
                     </a:p>
                   </a:txBody>
                   <a:tcPr marL="54864" marR="54864" marT="54864" marB="54864">
-                    <a:lnL w="9525" cap="flat" cmpd="sng" algn="ctr">
-                      <a:solidFill>
-                        <a:srgbClr val="E5E7EB"/>
-                      </a:solidFill>
-                      <a:prstDash val="solid"/>
-                      <a:round/>
-                      <a:headEnd type="none" w="med" len="med"/>
-                      <a:tailEnd type="none" w="med" len="med"/>
+                    <a:lnL w="0" cap="flat" cmpd="sng" algn="ctr">
+                      <a:noFill/>
                     </a:lnL>
-                    <a:lnR w="9525" cap="flat" cmpd="sng" algn="ctr">
-                      <a:solidFill>
-                        <a:srgbClr val="E5E7EB"/>
-                      </a:solidFill>
-                      <a:prstDash val="solid"/>
-                      <a:round/>
-                      <a:headEnd type="none" w="med" len="med"/>
-                      <a:tailEnd type="none" w="med" len="med"/>
+                    <a:lnR w="0" cap="flat" cmpd="sng" algn="ctr">
+                      <a:noFill/>
                     </a:lnR>
-                    <a:lnT w="9525" cap="flat" cmpd="sng" algn="ctr">
-                      <a:solidFill>
-                        <a:srgbClr val="E5E7EB"/>
-                      </a:solidFill>
-                      <a:prstDash val="solid"/>
-                      <a:round/>
-                      <a:headEnd type="none" w="med" len="med"/>
-                      <a:tailEnd type="none" w="med" len="med"/>
+                    <a:lnT w="0" cap="flat" cmpd="sng" algn="ctr">
+                      <a:noFill/>
                     </a:lnT>
-                    <a:lnB w="9525" cap="flat" cmpd="sng" algn="ctr">
-                      <a:solidFill>
-                        <a:srgbClr val="E5E7EB"/>
-                      </a:solidFill>
-                      <a:prstDash val="solid"/>
-                      <a:round/>
-                      <a:headEnd type="none" w="med" len="med"/>
-                      <a:tailEnd type="none" w="med" len="med"/>
+                    <a:lnB w="0" cap="flat" cmpd="sng" algn="ctr">
+                      <a:noFill/>
                     </a:lnB>
                     <a:solidFill>
-                      <a:schemeClr val="bg1"/>
+                      <a:schemeClr val="bg2"/>
                     </a:solidFill>
                   </a:tcPr>
                 </a:tc>
@@ -7878,59 +7640,35 @@
                         <a:buNone/>
                       </a:pPr>
                       <a:r>
-                        <a:rPr lang="en-US" sz="1250" dirty="0">
+                        <a:rPr lang="en-US" sz="1250" b="1" dirty="0">
                           <a:solidFill>
-                            <a:schemeClr val="tx2"/>
+                            <a:schemeClr val="tx1"/>
                           </a:solidFill>
-                          <a:latin typeface="Calibri" pitchFamily="34" charset="0"/>
-                          <a:ea typeface="Calibri" pitchFamily="34" charset="-122"/>
-                          <a:cs typeface="Calibri" pitchFamily="34" charset="-120"/>
+                          <a:latin typeface="Segoe UI" pitchFamily="34" charset="0"/>
+                          <a:ea typeface="Segoe UI" pitchFamily="34" charset="-122"/>
+                          <a:cs typeface="Segoe UI" pitchFamily="34" charset="-120"/>
                         </a:rPr>
-                        <a:t>Real-ESRGAN general-v3 (pretrained)</a:t>
+                        <a:t>PixelForge SRVGG-S, L1 ★</a:t>
                       </a:r>
                       <a:endParaRPr lang="en-US" sz="1250" dirty="0">
-                        <a:latin typeface="Calibri" charset="0"/>
-                        <a:ea typeface="Calibri" charset="0"/>
-                        <a:cs typeface="Calibri" charset="0"/>
+                        <a:latin typeface="Segoe UI" charset="0"/>
+                        <a:ea typeface="Segoe UI" charset="0"/>
+                        <a:cs typeface="Segoe UI" charset="0"/>
                       </a:endParaRPr>
                     </a:p>
                   </a:txBody>
                   <a:tcPr marL="54864" marR="54864" marT="54864" marB="54864">
-                    <a:lnL w="9525" cap="flat" cmpd="sng" algn="ctr">
-                      <a:solidFill>
-                        <a:srgbClr val="E5E7EB"/>
-                      </a:solidFill>
-                      <a:prstDash val="solid"/>
-                      <a:round/>
-                      <a:headEnd type="none" w="med" len="med"/>
-                      <a:tailEnd type="none" w="med" len="med"/>
+                    <a:lnL w="0" cap="flat" cmpd="sng" algn="ctr">
+                      <a:noFill/>
                     </a:lnL>
-                    <a:lnR w="9525" cap="flat" cmpd="sng" algn="ctr">
-                      <a:solidFill>
-                        <a:srgbClr val="E5E7EB"/>
-                      </a:solidFill>
-                      <a:prstDash val="solid"/>
-                      <a:round/>
-                      <a:headEnd type="none" w="med" len="med"/>
-                      <a:tailEnd type="none" w="med" len="med"/>
+                    <a:lnR w="0" cap="flat" cmpd="sng" algn="ctr">
+                      <a:noFill/>
                     </a:lnR>
-                    <a:lnT w="9525" cap="flat" cmpd="sng" algn="ctr">
-                      <a:solidFill>
-                        <a:srgbClr val="E5E7EB"/>
-                      </a:solidFill>
-                      <a:prstDash val="solid"/>
-                      <a:round/>
-                      <a:headEnd type="none" w="med" len="med"/>
-                      <a:tailEnd type="none" w="med" len="med"/>
+                    <a:lnT w="0" cap="flat" cmpd="sng" algn="ctr">
+                      <a:noFill/>
                     </a:lnT>
-                    <a:lnB w="9525" cap="flat" cmpd="sng" algn="ctr">
-                      <a:solidFill>
-                        <a:srgbClr val="E5E7EB"/>
-                      </a:solidFill>
-                      <a:prstDash val="solid"/>
-                      <a:round/>
-                      <a:headEnd type="none" w="med" len="med"/>
-                      <a:tailEnd type="none" w="med" len="med"/>
+                    <a:lnB w="0" cap="flat" cmpd="sng" algn="ctr">
+                      <a:noFill/>
                     </a:lnB>
                     <a:solidFill>
                       <a:schemeClr val="bg1"/>
@@ -7946,59 +7684,35 @@
                         <a:buNone/>
                       </a:pPr>
                       <a:r>
-                        <a:rPr lang="en-US" sz="1250" dirty="0">
+                        <a:rPr lang="en-US" sz="1250" b="1" dirty="0">
                           <a:solidFill>
-                            <a:schemeClr val="tx2"/>
+                            <a:schemeClr val="tx1"/>
                           </a:solidFill>
-                          <a:latin typeface="Calibri" pitchFamily="34" charset="0"/>
-                          <a:ea typeface="Calibri" pitchFamily="34" charset="-122"/>
-                          <a:cs typeface="Calibri" pitchFamily="34" charset="-120"/>
+                          <a:latin typeface="Segoe UI" pitchFamily="34" charset="0"/>
+                          <a:ea typeface="Segoe UI" pitchFamily="34" charset="-122"/>
+                          <a:cs typeface="Segoe UI" pitchFamily="34" charset="-120"/>
                         </a:rPr>
-                        <a:t>1.21M</a:t>
+                        <a:t>0.16M</a:t>
                       </a:r>
                       <a:endParaRPr lang="en-US" sz="1250" dirty="0">
-                        <a:latin typeface="Calibri" charset="0"/>
-                        <a:ea typeface="Calibri" charset="0"/>
-                        <a:cs typeface="Calibri" charset="0"/>
+                        <a:latin typeface="Segoe UI" charset="0"/>
+                        <a:ea typeface="Segoe UI" charset="0"/>
+                        <a:cs typeface="Segoe UI" charset="0"/>
                       </a:endParaRPr>
                     </a:p>
                   </a:txBody>
                   <a:tcPr marL="54864" marR="54864" marT="54864" marB="54864">
-                    <a:lnL w="9525" cap="flat" cmpd="sng" algn="ctr">
-                      <a:solidFill>
-                        <a:srgbClr val="E5E7EB"/>
-                      </a:solidFill>
-                      <a:prstDash val="solid"/>
-                      <a:round/>
-                      <a:headEnd type="none" w="med" len="med"/>
-                      <a:tailEnd type="none" w="med" len="med"/>
+                    <a:lnL w="0" cap="flat" cmpd="sng" algn="ctr">
+                      <a:noFill/>
                     </a:lnL>
-                    <a:lnR w="9525" cap="flat" cmpd="sng" algn="ctr">
-                      <a:solidFill>
-                        <a:srgbClr val="E5E7EB"/>
-                      </a:solidFill>
-                      <a:prstDash val="solid"/>
-                      <a:round/>
-                      <a:headEnd type="none" w="med" len="med"/>
-                      <a:tailEnd type="none" w="med" len="med"/>
+                    <a:lnR w="0" cap="flat" cmpd="sng" algn="ctr">
+                      <a:noFill/>
                     </a:lnR>
-                    <a:lnT w="9525" cap="flat" cmpd="sng" algn="ctr">
-                      <a:solidFill>
-                        <a:srgbClr val="E5E7EB"/>
-                      </a:solidFill>
-                      <a:prstDash val="solid"/>
-                      <a:round/>
-                      <a:headEnd type="none" w="med" len="med"/>
-                      <a:tailEnd type="none" w="med" len="med"/>
+                    <a:lnT w="0" cap="flat" cmpd="sng" algn="ctr">
+                      <a:noFill/>
                     </a:lnT>
-                    <a:lnB w="9525" cap="flat" cmpd="sng" algn="ctr">
-                      <a:solidFill>
-                        <a:srgbClr val="E5E7EB"/>
-                      </a:solidFill>
-                      <a:prstDash val="solid"/>
-                      <a:round/>
-                      <a:headEnd type="none" w="med" len="med"/>
-                      <a:tailEnd type="none" w="med" len="med"/>
+                    <a:lnB w="0" cap="flat" cmpd="sng" algn="ctr">
+                      <a:noFill/>
                     </a:lnB>
                     <a:solidFill>
                       <a:schemeClr val="bg1"/>
@@ -8014,59 +7728,35 @@
                         <a:buNone/>
                       </a:pPr>
                       <a:r>
-                        <a:rPr lang="en-US" sz="1250" dirty="0">
+                        <a:rPr lang="en-US" sz="1250" b="1" dirty="0">
                           <a:solidFill>
-                            <a:schemeClr val="tx2"/>
+                            <a:schemeClr val="tx1"/>
                           </a:solidFill>
-                          <a:latin typeface="Calibri" pitchFamily="34" charset="0"/>
-                          <a:ea typeface="Calibri" pitchFamily="34" charset="-122"/>
-                          <a:cs typeface="Calibri" pitchFamily="34" charset="-120"/>
+                          <a:latin typeface="Segoe UI" pitchFamily="34" charset="0"/>
+                          <a:ea typeface="Segoe UI" pitchFamily="34" charset="-122"/>
+                          <a:cs typeface="Segoe UI" pitchFamily="34" charset="-120"/>
                         </a:rPr>
-                        <a:t>28.93</a:t>
+                        <a:t>29.66</a:t>
                       </a:r>
                       <a:endParaRPr lang="en-US" sz="1250" dirty="0">
-                        <a:latin typeface="Calibri" charset="0"/>
-                        <a:ea typeface="Calibri" charset="0"/>
-                        <a:cs typeface="Calibri" charset="0"/>
+                        <a:latin typeface="Segoe UI" charset="0"/>
+                        <a:ea typeface="Segoe UI" charset="0"/>
+                        <a:cs typeface="Segoe UI" charset="0"/>
                       </a:endParaRPr>
                     </a:p>
                   </a:txBody>
                   <a:tcPr marL="54864" marR="54864" marT="54864" marB="54864">
-                    <a:lnL w="9525" cap="flat" cmpd="sng" algn="ctr">
-                      <a:solidFill>
-                        <a:srgbClr val="E5E7EB"/>
-                      </a:solidFill>
-                      <a:prstDash val="solid"/>
-                      <a:round/>
-                      <a:headEnd type="none" w="med" len="med"/>
-                      <a:tailEnd type="none" w="med" len="med"/>
+                    <a:lnL w="0" cap="flat" cmpd="sng" algn="ctr">
+                      <a:noFill/>
                     </a:lnL>
-                    <a:lnR w="9525" cap="flat" cmpd="sng" algn="ctr">
-                      <a:solidFill>
-                        <a:srgbClr val="E5E7EB"/>
-                      </a:solidFill>
-                      <a:prstDash val="solid"/>
-                      <a:round/>
-                      <a:headEnd type="none" w="med" len="med"/>
-                      <a:tailEnd type="none" w="med" len="med"/>
+                    <a:lnR w="0" cap="flat" cmpd="sng" algn="ctr">
+                      <a:noFill/>
                     </a:lnR>
-                    <a:lnT w="9525" cap="flat" cmpd="sng" algn="ctr">
-                      <a:solidFill>
-                        <a:srgbClr val="E5E7EB"/>
-                      </a:solidFill>
-                      <a:prstDash val="solid"/>
-                      <a:round/>
-                      <a:headEnd type="none" w="med" len="med"/>
-                      <a:tailEnd type="none" w="med" len="med"/>
+                    <a:lnT w="0" cap="flat" cmpd="sng" algn="ctr">
+                      <a:noFill/>
                     </a:lnT>
-                    <a:lnB w="9525" cap="flat" cmpd="sng" algn="ctr">
-                      <a:solidFill>
-                        <a:srgbClr val="E5E7EB"/>
-                      </a:solidFill>
-                      <a:prstDash val="solid"/>
-                      <a:round/>
-                      <a:headEnd type="none" w="med" len="med"/>
-                      <a:tailEnd type="none" w="med" len="med"/>
+                    <a:lnB w="0" cap="flat" cmpd="sng" algn="ctr">
+                      <a:noFill/>
                     </a:lnB>
                     <a:solidFill>
                       <a:schemeClr val="bg1"/>
@@ -8082,59 +7772,35 @@
                         <a:buNone/>
                       </a:pPr>
                       <a:r>
-                        <a:rPr lang="en-US" sz="1250" dirty="0">
+                        <a:rPr lang="en-US" sz="1250" b="1" dirty="0">
                           <a:solidFill>
-                            <a:schemeClr val="tx2"/>
+                            <a:schemeClr val="tx1"/>
                           </a:solidFill>
-                          <a:latin typeface="Calibri" pitchFamily="34" charset="0"/>
-                          <a:ea typeface="Calibri" pitchFamily="34" charset="-122"/>
-                          <a:cs typeface="Calibri" pitchFamily="34" charset="-120"/>
+                          <a:latin typeface="Segoe UI" pitchFamily="34" charset="0"/>
+                          <a:ea typeface="Segoe UI" pitchFamily="34" charset="-122"/>
+                          <a:cs typeface="Segoe UI" pitchFamily="34" charset="-120"/>
                         </a:rPr>
-                        <a:t>0.597</a:t>
+                        <a:t>0.617</a:t>
                       </a:r>
                       <a:endParaRPr lang="en-US" sz="1250" dirty="0">
-                        <a:latin typeface="Calibri" charset="0"/>
-                        <a:ea typeface="Calibri" charset="0"/>
-                        <a:cs typeface="Calibri" charset="0"/>
+                        <a:latin typeface="Segoe UI" charset="0"/>
+                        <a:ea typeface="Segoe UI" charset="0"/>
+                        <a:cs typeface="Segoe UI" charset="0"/>
                       </a:endParaRPr>
                     </a:p>
                   </a:txBody>
                   <a:tcPr marL="54864" marR="54864" marT="54864" marB="54864">
-                    <a:lnL w="9525" cap="flat" cmpd="sng" algn="ctr">
-                      <a:solidFill>
-                        <a:srgbClr val="E5E7EB"/>
-                      </a:solidFill>
-                      <a:prstDash val="solid"/>
-                      <a:round/>
-                      <a:headEnd type="none" w="med" len="med"/>
-                      <a:tailEnd type="none" w="med" len="med"/>
+                    <a:lnL w="0" cap="flat" cmpd="sng" algn="ctr">
+                      <a:noFill/>
                     </a:lnL>
-                    <a:lnR w="9525" cap="flat" cmpd="sng" algn="ctr">
-                      <a:solidFill>
-                        <a:srgbClr val="E5E7EB"/>
-                      </a:solidFill>
-                      <a:prstDash val="solid"/>
-                      <a:round/>
-                      <a:headEnd type="none" w="med" len="med"/>
-                      <a:tailEnd type="none" w="med" len="med"/>
+                    <a:lnR w="0" cap="flat" cmpd="sng" algn="ctr">
+                      <a:noFill/>
                     </a:lnR>
-                    <a:lnT w="9525" cap="flat" cmpd="sng" algn="ctr">
-                      <a:solidFill>
-                        <a:srgbClr val="E5E7EB"/>
-                      </a:solidFill>
-                      <a:prstDash val="solid"/>
-                      <a:round/>
-                      <a:headEnd type="none" w="med" len="med"/>
-                      <a:tailEnd type="none" w="med" len="med"/>
+                    <a:lnT w="0" cap="flat" cmpd="sng" algn="ctr">
+                      <a:noFill/>
                     </a:lnT>
-                    <a:lnB w="9525" cap="flat" cmpd="sng" algn="ctr">
-                      <a:solidFill>
-                        <a:srgbClr val="E5E7EB"/>
-                      </a:solidFill>
-                      <a:prstDash val="solid"/>
-                      <a:round/>
-                      <a:headEnd type="none" w="med" len="med"/>
-                      <a:tailEnd type="none" w="med" len="med"/>
+                    <a:lnB w="0" cap="flat" cmpd="sng" algn="ctr">
+                      <a:noFill/>
                     </a:lnB>
                     <a:solidFill>
                       <a:schemeClr val="bg1"/>
@@ -8150,59 +7816,35 @@
                         <a:buNone/>
                       </a:pPr>
                       <a:r>
-                        <a:rPr lang="en-US" sz="1250" dirty="0">
+                        <a:rPr lang="en-US" sz="1250" b="1" dirty="0">
                           <a:solidFill>
-                            <a:schemeClr val="tx2"/>
+                            <a:schemeClr val="tx1"/>
                           </a:solidFill>
-                          <a:latin typeface="Calibri" pitchFamily="34" charset="0"/>
-                          <a:ea typeface="Calibri" pitchFamily="34" charset="-122"/>
-                          <a:cs typeface="Calibri" pitchFamily="34" charset="-120"/>
+                          <a:latin typeface="Segoe UI" pitchFamily="34" charset="0"/>
+                          <a:ea typeface="Segoe UI" pitchFamily="34" charset="-122"/>
+                          <a:cs typeface="Segoe UI" pitchFamily="34" charset="-120"/>
                         </a:rPr>
-                        <a:t>0.547</a:t>
+                        <a:t>0.636</a:t>
                       </a:r>
                       <a:endParaRPr lang="en-US" sz="1250" dirty="0">
-                        <a:latin typeface="Calibri" charset="0"/>
-                        <a:ea typeface="Calibri" charset="0"/>
-                        <a:cs typeface="Calibri" charset="0"/>
+                        <a:latin typeface="Segoe UI" charset="0"/>
+                        <a:ea typeface="Segoe UI" charset="0"/>
+                        <a:cs typeface="Segoe UI" charset="0"/>
                       </a:endParaRPr>
                     </a:p>
                   </a:txBody>
                   <a:tcPr marL="54864" marR="54864" marT="54864" marB="54864">
-                    <a:lnL w="9525" cap="flat" cmpd="sng" algn="ctr">
-                      <a:solidFill>
-                        <a:srgbClr val="E5E7EB"/>
-                      </a:solidFill>
-                      <a:prstDash val="solid"/>
-                      <a:round/>
-                      <a:headEnd type="none" w="med" len="med"/>
-                      <a:tailEnd type="none" w="med" len="med"/>
+                    <a:lnL w="0" cap="flat" cmpd="sng" algn="ctr">
+                      <a:noFill/>
                     </a:lnL>
-                    <a:lnR w="9525" cap="flat" cmpd="sng" algn="ctr">
-                      <a:solidFill>
-                        <a:srgbClr val="E5E7EB"/>
-                      </a:solidFill>
-                      <a:prstDash val="solid"/>
-                      <a:round/>
-                      <a:headEnd type="none" w="med" len="med"/>
-                      <a:tailEnd type="none" w="med" len="med"/>
+                    <a:lnR w="0" cap="flat" cmpd="sng" algn="ctr">
+                      <a:noFill/>
                     </a:lnR>
-                    <a:lnT w="9525" cap="flat" cmpd="sng" algn="ctr">
-                      <a:solidFill>
-                        <a:srgbClr val="E5E7EB"/>
-                      </a:solidFill>
-                      <a:prstDash val="solid"/>
-                      <a:round/>
-                      <a:headEnd type="none" w="med" len="med"/>
-                      <a:tailEnd type="none" w="med" len="med"/>
+                    <a:lnT w="0" cap="flat" cmpd="sng" algn="ctr">
+                      <a:noFill/>
                     </a:lnT>
-                    <a:lnB w="9525" cap="flat" cmpd="sng" algn="ctr">
-                      <a:solidFill>
-                        <a:srgbClr val="E5E7EB"/>
-                      </a:solidFill>
-                      <a:prstDash val="solid"/>
-                      <a:round/>
-                      <a:headEnd type="none" w="med" len="med"/>
-                      <a:tailEnd type="none" w="med" len="med"/>
+                    <a:lnB w="0" cap="flat" cmpd="sng" algn="ctr">
+                      <a:noFill/>
                     </a:lnB>
                     <a:solidFill>
                       <a:schemeClr val="bg1"/>
@@ -8218,59 +7860,35 @@
                         <a:buNone/>
                       </a:pPr>
                       <a:r>
-                        <a:rPr lang="en-US" sz="1250" dirty="0">
+                        <a:rPr lang="en-US" sz="1250" b="1" dirty="0">
                           <a:solidFill>
-                            <a:schemeClr val="tx2"/>
+                            <a:schemeClr val="tx1"/>
                           </a:solidFill>
-                          <a:latin typeface="Calibri" pitchFamily="34" charset="0"/>
-                          <a:ea typeface="Calibri" pitchFamily="34" charset="-122"/>
-                          <a:cs typeface="Calibri" pitchFamily="34" charset="-120"/>
+                          <a:latin typeface="Segoe UI" pitchFamily="34" charset="0"/>
+                          <a:ea typeface="Segoe UI" pitchFamily="34" charset="-122"/>
+                          <a:cs typeface="Segoe UI" pitchFamily="34" charset="-120"/>
                         </a:rPr>
-                        <a:t>26.9</a:t>
+                        <a:t>15.2</a:t>
                       </a:r>
                       <a:endParaRPr lang="en-US" sz="1250" dirty="0">
-                        <a:latin typeface="Calibri" charset="0"/>
-                        <a:ea typeface="Calibri" charset="0"/>
-                        <a:cs typeface="Calibri" charset="0"/>
+                        <a:latin typeface="Segoe UI" charset="0"/>
+                        <a:ea typeface="Segoe UI" charset="0"/>
+                        <a:cs typeface="Segoe UI" charset="0"/>
                       </a:endParaRPr>
                     </a:p>
                   </a:txBody>
                   <a:tcPr marL="54864" marR="54864" marT="54864" marB="54864">
-                    <a:lnL w="9525" cap="flat" cmpd="sng" algn="ctr">
-                      <a:solidFill>
-                        <a:srgbClr val="E5E7EB"/>
-                      </a:solidFill>
-                      <a:prstDash val="solid"/>
-                      <a:round/>
-                      <a:headEnd type="none" w="med" len="med"/>
-                      <a:tailEnd type="none" w="med" len="med"/>
+                    <a:lnL w="0" cap="flat" cmpd="sng" algn="ctr">
+                      <a:noFill/>
                     </a:lnL>
-                    <a:lnR w="9525" cap="flat" cmpd="sng" algn="ctr">
-                      <a:solidFill>
-                        <a:srgbClr val="E5E7EB"/>
-                      </a:solidFill>
-                      <a:prstDash val="solid"/>
-                      <a:round/>
-                      <a:headEnd type="none" w="med" len="med"/>
-                      <a:tailEnd type="none" w="med" len="med"/>
+                    <a:lnR w="0" cap="flat" cmpd="sng" algn="ctr">
+                      <a:noFill/>
                     </a:lnR>
-                    <a:lnT w="9525" cap="flat" cmpd="sng" algn="ctr">
-                      <a:solidFill>
-                        <a:srgbClr val="E5E7EB"/>
-                      </a:solidFill>
-                      <a:prstDash val="solid"/>
-                      <a:round/>
-                      <a:headEnd type="none" w="med" len="med"/>
-                      <a:tailEnd type="none" w="med" len="med"/>
+                    <a:lnT w="0" cap="flat" cmpd="sng" algn="ctr">
+                      <a:noFill/>
                     </a:lnT>
-                    <a:lnB w="9525" cap="flat" cmpd="sng" algn="ctr">
-                      <a:solidFill>
-                        <a:srgbClr val="E5E7EB"/>
-                      </a:solidFill>
-                      <a:prstDash val="solid"/>
-                      <a:round/>
-                      <a:headEnd type="none" w="med" len="med"/>
-                      <a:tailEnd type="none" w="med" len="med"/>
+                    <a:lnB w="0" cap="flat" cmpd="sng" algn="ctr">
+                      <a:noFill/>
                     </a:lnB>
                     <a:solidFill>
                       <a:schemeClr val="bg1"/>
@@ -8292,55 +7910,297 @@
                           <a:solidFill>
                             <a:schemeClr val="tx1"/>
                           </a:solidFill>
-                          <a:latin typeface="Calibri" pitchFamily="34" charset="0"/>
-                          <a:ea typeface="Calibri" pitchFamily="34" charset="-122"/>
-                          <a:cs typeface="Calibri" pitchFamily="34" charset="-120"/>
+                          <a:latin typeface="Segoe UI" pitchFamily="34" charset="0"/>
+                          <a:ea typeface="Segoe UI" pitchFamily="34" charset="-122"/>
+                          <a:cs typeface="Segoe UI" pitchFamily="34" charset="-120"/>
                         </a:rPr>
-                        <a:t>PixelForge SRVGG-S, L1 ★</a:t>
+                        <a:t>PixelForge RRDB-S, L1 ★</a:t>
                       </a:r>
                       <a:endParaRPr lang="en-US" sz="1250" dirty="0">
-                        <a:latin typeface="Calibri" charset="0"/>
-                        <a:ea typeface="Calibri" charset="0"/>
-                        <a:cs typeface="Calibri" charset="0"/>
+                        <a:latin typeface="Segoe UI" charset="0"/>
+                        <a:ea typeface="Segoe UI" charset="0"/>
+                        <a:cs typeface="Segoe UI" charset="0"/>
                       </a:endParaRPr>
                     </a:p>
                   </a:txBody>
                   <a:tcPr marL="54864" marR="54864" marT="54864" marB="54864">
-                    <a:lnL w="9525" cap="flat" cmpd="sng" algn="ctr">
-                      <a:solidFill>
-                        <a:srgbClr val="E5E7EB"/>
-                      </a:solidFill>
-                      <a:prstDash val="solid"/>
-                      <a:round/>
-                      <a:headEnd type="none" w="med" len="med"/>
-                      <a:tailEnd type="none" w="med" len="med"/>
+                    <a:lnL w="0" cap="flat" cmpd="sng" algn="ctr">
+                      <a:noFill/>
                     </a:lnL>
-                    <a:lnR w="9525" cap="flat" cmpd="sng" algn="ctr">
-                      <a:solidFill>
-                        <a:srgbClr val="E5E7EB"/>
-                      </a:solidFill>
-                      <a:prstDash val="solid"/>
-                      <a:round/>
-                      <a:headEnd type="none" w="med" len="med"/>
-                      <a:tailEnd type="none" w="med" len="med"/>
+                    <a:lnR w="0" cap="flat" cmpd="sng" algn="ctr">
+                      <a:noFill/>
                     </a:lnR>
-                    <a:lnT w="9525" cap="flat" cmpd="sng" algn="ctr">
-                      <a:solidFill>
-                        <a:srgbClr val="E5E7EB"/>
-                      </a:solidFill>
-                      <a:prstDash val="solid"/>
-                      <a:round/>
-                      <a:headEnd type="none" w="med" len="med"/>
-                      <a:tailEnd type="none" w="med" len="med"/>
+                    <a:lnT w="0" cap="flat" cmpd="sng" algn="ctr">
+                      <a:noFill/>
                     </a:lnT>
-                    <a:lnB w="9525" cap="flat" cmpd="sng" algn="ctr">
-                      <a:solidFill>
-                        <a:srgbClr val="E5E7EB"/>
-                      </a:solidFill>
-                      <a:prstDash val="solid"/>
-                      <a:round/>
-                      <a:headEnd type="none" w="med" len="med"/>
-                      <a:tailEnd type="none" w="med" len="med"/>
+                    <a:lnB w="0" cap="flat" cmpd="sng" algn="ctr">
+                      <a:noFill/>
+                    </a:lnB>
+                    <a:solidFill>
+                      <a:schemeClr val="bg2"/>
+                    </a:solidFill>
+                  </a:tcPr>
+                </a:tc>
+                <a:tc>
+                  <a:txBody>
+                    <a:bodyPr/>
+                    <a:lstStyle/>
+                    <a:p>
+                      <a:pPr indent="0" marL="0">
+                        <a:buNone/>
+                      </a:pPr>
+                      <a:r>
+                        <a:rPr lang="en-US" sz="1250" b="1" dirty="0">
+                          <a:solidFill>
+                            <a:schemeClr val="tx1"/>
+                          </a:solidFill>
+                          <a:latin typeface="Segoe UI" pitchFamily="34" charset="0"/>
+                          <a:ea typeface="Segoe UI" pitchFamily="34" charset="-122"/>
+                          <a:cs typeface="Segoe UI" pitchFamily="34" charset="-120"/>
+                        </a:rPr>
+                        <a:t>1.12M</a:t>
+                      </a:r>
+                      <a:endParaRPr lang="en-US" sz="1250" dirty="0">
+                        <a:latin typeface="Segoe UI" charset="0"/>
+                        <a:ea typeface="Segoe UI" charset="0"/>
+                        <a:cs typeface="Segoe UI" charset="0"/>
+                      </a:endParaRPr>
+                    </a:p>
+                  </a:txBody>
+                  <a:tcPr marL="54864" marR="54864" marT="54864" marB="54864">
+                    <a:lnL w="0" cap="flat" cmpd="sng" algn="ctr">
+                      <a:noFill/>
+                    </a:lnL>
+                    <a:lnR w="0" cap="flat" cmpd="sng" algn="ctr">
+                      <a:noFill/>
+                    </a:lnR>
+                    <a:lnT w="0" cap="flat" cmpd="sng" algn="ctr">
+                      <a:noFill/>
+                    </a:lnT>
+                    <a:lnB w="0" cap="flat" cmpd="sng" algn="ctr">
+                      <a:noFill/>
+                    </a:lnB>
+                    <a:solidFill>
+                      <a:schemeClr val="bg2"/>
+                    </a:solidFill>
+                  </a:tcPr>
+                </a:tc>
+                <a:tc>
+                  <a:txBody>
+                    <a:bodyPr/>
+                    <a:lstStyle/>
+                    <a:p>
+                      <a:pPr indent="0" marL="0">
+                        <a:buNone/>
+                      </a:pPr>
+                      <a:r>
+                        <a:rPr lang="en-US" sz="1250" b="1" dirty="0">
+                          <a:solidFill>
+                            <a:schemeClr val="tx1"/>
+                          </a:solidFill>
+                          <a:latin typeface="Segoe UI" pitchFamily="34" charset="0"/>
+                          <a:ea typeface="Segoe UI" pitchFamily="34" charset="-122"/>
+                          <a:cs typeface="Segoe UI" pitchFamily="34" charset="-120"/>
+                        </a:rPr>
+                        <a:t>29.73</a:t>
+                      </a:r>
+                      <a:endParaRPr lang="en-US" sz="1250" dirty="0">
+                        <a:latin typeface="Segoe UI" charset="0"/>
+                        <a:ea typeface="Segoe UI" charset="0"/>
+                        <a:cs typeface="Segoe UI" charset="0"/>
+                      </a:endParaRPr>
+                    </a:p>
+                  </a:txBody>
+                  <a:tcPr marL="54864" marR="54864" marT="54864" marB="54864">
+                    <a:lnL w="0" cap="flat" cmpd="sng" algn="ctr">
+                      <a:noFill/>
+                    </a:lnL>
+                    <a:lnR w="0" cap="flat" cmpd="sng" algn="ctr">
+                      <a:noFill/>
+                    </a:lnR>
+                    <a:lnT w="0" cap="flat" cmpd="sng" algn="ctr">
+                      <a:noFill/>
+                    </a:lnT>
+                    <a:lnB w="0" cap="flat" cmpd="sng" algn="ctr">
+                      <a:noFill/>
+                    </a:lnB>
+                    <a:solidFill>
+                      <a:schemeClr val="bg2"/>
+                    </a:solidFill>
+                  </a:tcPr>
+                </a:tc>
+                <a:tc>
+                  <a:txBody>
+                    <a:bodyPr/>
+                    <a:lstStyle/>
+                    <a:p>
+                      <a:pPr indent="0" marL="0">
+                        <a:buNone/>
+                      </a:pPr>
+                      <a:r>
+                        <a:rPr lang="en-US" sz="1250" b="1" dirty="0">
+                          <a:solidFill>
+                            <a:schemeClr val="tx1"/>
+                          </a:solidFill>
+                          <a:latin typeface="Segoe UI" pitchFamily="34" charset="0"/>
+                          <a:ea typeface="Segoe UI" pitchFamily="34" charset="-122"/>
+                          <a:cs typeface="Segoe UI" pitchFamily="34" charset="-120"/>
+                        </a:rPr>
+                        <a:t>0.620</a:t>
+                      </a:r>
+                      <a:endParaRPr lang="en-US" sz="1250" dirty="0">
+                        <a:latin typeface="Segoe UI" charset="0"/>
+                        <a:ea typeface="Segoe UI" charset="0"/>
+                        <a:cs typeface="Segoe UI" charset="0"/>
+                      </a:endParaRPr>
+                    </a:p>
+                  </a:txBody>
+                  <a:tcPr marL="54864" marR="54864" marT="54864" marB="54864">
+                    <a:lnL w="0" cap="flat" cmpd="sng" algn="ctr">
+                      <a:noFill/>
+                    </a:lnL>
+                    <a:lnR w="0" cap="flat" cmpd="sng" algn="ctr">
+                      <a:noFill/>
+                    </a:lnR>
+                    <a:lnT w="0" cap="flat" cmpd="sng" algn="ctr">
+                      <a:noFill/>
+                    </a:lnT>
+                    <a:lnB w="0" cap="flat" cmpd="sng" algn="ctr">
+                      <a:noFill/>
+                    </a:lnB>
+                    <a:solidFill>
+                      <a:schemeClr val="bg2"/>
+                    </a:solidFill>
+                  </a:tcPr>
+                </a:tc>
+                <a:tc>
+                  <a:txBody>
+                    <a:bodyPr/>
+                    <a:lstStyle/>
+                    <a:p>
+                      <a:pPr indent="0" marL="0">
+                        <a:buNone/>
+                      </a:pPr>
+                      <a:r>
+                        <a:rPr lang="en-US" sz="1250" b="1" dirty="0">
+                          <a:solidFill>
+                            <a:schemeClr val="tx1"/>
+                          </a:solidFill>
+                          <a:latin typeface="Segoe UI" pitchFamily="34" charset="0"/>
+                          <a:ea typeface="Segoe UI" pitchFamily="34" charset="-122"/>
+                          <a:cs typeface="Segoe UI" pitchFamily="34" charset="-120"/>
+                        </a:rPr>
+                        <a:t>0.659</a:t>
+                      </a:r>
+                      <a:endParaRPr lang="en-US" sz="1250" dirty="0">
+                        <a:latin typeface="Segoe UI" charset="0"/>
+                        <a:ea typeface="Segoe UI" charset="0"/>
+                        <a:cs typeface="Segoe UI" charset="0"/>
+                      </a:endParaRPr>
+                    </a:p>
+                  </a:txBody>
+                  <a:tcPr marL="54864" marR="54864" marT="54864" marB="54864">
+                    <a:lnL w="0" cap="flat" cmpd="sng" algn="ctr">
+                      <a:noFill/>
+                    </a:lnL>
+                    <a:lnR w="0" cap="flat" cmpd="sng" algn="ctr">
+                      <a:noFill/>
+                    </a:lnR>
+                    <a:lnT w="0" cap="flat" cmpd="sng" algn="ctr">
+                      <a:noFill/>
+                    </a:lnT>
+                    <a:lnB w="0" cap="flat" cmpd="sng" algn="ctr">
+                      <a:noFill/>
+                    </a:lnB>
+                    <a:solidFill>
+                      <a:schemeClr val="bg2"/>
+                    </a:solidFill>
+                  </a:tcPr>
+                </a:tc>
+                <a:tc>
+                  <a:txBody>
+                    <a:bodyPr/>
+                    <a:lstStyle/>
+                    <a:p>
+                      <a:pPr indent="0" marL="0">
+                        <a:buNone/>
+                      </a:pPr>
+                      <a:r>
+                        <a:rPr lang="en-US" sz="1250" b="1" dirty="0">
+                          <a:solidFill>
+                            <a:schemeClr val="tx1"/>
+                          </a:solidFill>
+                          <a:latin typeface="Segoe UI" pitchFamily="34" charset="0"/>
+                          <a:ea typeface="Segoe UI" pitchFamily="34" charset="-122"/>
+                          <a:cs typeface="Segoe UI" pitchFamily="34" charset="-120"/>
+                        </a:rPr>
+                        <a:t>39.0</a:t>
+                      </a:r>
+                      <a:endParaRPr lang="en-US" sz="1250" dirty="0">
+                        <a:latin typeface="Segoe UI" charset="0"/>
+                        <a:ea typeface="Segoe UI" charset="0"/>
+                        <a:cs typeface="Segoe UI" charset="0"/>
+                      </a:endParaRPr>
+                    </a:p>
+                  </a:txBody>
+                  <a:tcPr marL="54864" marR="54864" marT="54864" marB="54864">
+                    <a:lnL w="0" cap="flat" cmpd="sng" algn="ctr">
+                      <a:noFill/>
+                    </a:lnL>
+                    <a:lnR w="0" cap="flat" cmpd="sng" algn="ctr">
+                      <a:noFill/>
+                    </a:lnR>
+                    <a:lnT w="0" cap="flat" cmpd="sng" algn="ctr">
+                      <a:noFill/>
+                    </a:lnT>
+                    <a:lnB w="0" cap="flat" cmpd="sng" algn="ctr">
+                      <a:noFill/>
+                    </a:lnB>
+                    <a:solidFill>
+                      <a:schemeClr val="bg2"/>
+                    </a:solidFill>
+                  </a:tcPr>
+                </a:tc>
+              </a:tr>
+              <a:tr h="310896">
+                <a:tc>
+                  <a:txBody>
+                    <a:bodyPr/>
+                    <a:lstStyle/>
+                    <a:p>
+                      <a:pPr indent="0" marL="0">
+                        <a:buNone/>
+                      </a:pPr>
+                      <a:r>
+                        <a:rPr lang="en-US" sz="1250" b="1" dirty="0">
+                          <a:solidFill>
+                            <a:schemeClr val="tx1"/>
+                          </a:solidFill>
+                          <a:latin typeface="Segoe UI" pitchFamily="34" charset="0"/>
+                          <a:ea typeface="Segoe UI" pitchFamily="34" charset="-122"/>
+                          <a:cs typeface="Segoe UI" pitchFamily="34" charset="-120"/>
+                        </a:rPr>
+                        <a:t>PixelForge RRDB-S, GAN ★</a:t>
+                      </a:r>
+                      <a:endParaRPr lang="en-US" sz="1250" dirty="0">
+                        <a:latin typeface="Segoe UI" charset="0"/>
+                        <a:ea typeface="Segoe UI" charset="0"/>
+                        <a:cs typeface="Segoe UI" charset="0"/>
+                      </a:endParaRPr>
+                    </a:p>
+                  </a:txBody>
+                  <a:tcPr marL="54864" marR="54864" marT="54864" marB="54864">
+                    <a:lnL w="0" cap="flat" cmpd="sng" algn="ctr">
+                      <a:noFill/>
+                    </a:lnL>
+                    <a:lnR w="0" cap="flat" cmpd="sng" algn="ctr">
+                      <a:noFill/>
+                    </a:lnR>
+                    <a:lnT w="0" cap="flat" cmpd="sng" algn="ctr">
+                      <a:noFill/>
+                    </a:lnT>
+                    <a:lnB w="0" cap="flat" cmpd="sng" algn="ctr">
+                      <a:noFill/>
                     </a:lnB>
                     <a:solidFill>
                       <a:schemeClr val="bg1"/>
@@ -8360,55 +8220,31 @@
                           <a:solidFill>
                             <a:schemeClr val="tx1"/>
                           </a:solidFill>
-                          <a:latin typeface="Calibri" pitchFamily="34" charset="0"/>
-                          <a:ea typeface="Calibri" pitchFamily="34" charset="-122"/>
-                          <a:cs typeface="Calibri" pitchFamily="34" charset="-120"/>
+                          <a:latin typeface="Segoe UI" pitchFamily="34" charset="0"/>
+                          <a:ea typeface="Segoe UI" pitchFamily="34" charset="-122"/>
+                          <a:cs typeface="Segoe UI" pitchFamily="34" charset="-120"/>
                         </a:rPr>
-                        <a:t>0.16M</a:t>
+                        <a:t>1.12M</a:t>
                       </a:r>
                       <a:endParaRPr lang="en-US" sz="1250" dirty="0">
-                        <a:latin typeface="Calibri" charset="0"/>
-                        <a:ea typeface="Calibri" charset="0"/>
-                        <a:cs typeface="Calibri" charset="0"/>
+                        <a:latin typeface="Segoe UI" charset="0"/>
+                        <a:ea typeface="Segoe UI" charset="0"/>
+                        <a:cs typeface="Segoe UI" charset="0"/>
                       </a:endParaRPr>
                     </a:p>
                   </a:txBody>
                   <a:tcPr marL="54864" marR="54864" marT="54864" marB="54864">
-                    <a:lnL w="9525" cap="flat" cmpd="sng" algn="ctr">
-                      <a:solidFill>
-                        <a:srgbClr val="E5E7EB"/>
-                      </a:solidFill>
-                      <a:prstDash val="solid"/>
-                      <a:round/>
-                      <a:headEnd type="none" w="med" len="med"/>
-                      <a:tailEnd type="none" w="med" len="med"/>
+                    <a:lnL w="0" cap="flat" cmpd="sng" algn="ctr">
+                      <a:noFill/>
                     </a:lnL>
-                    <a:lnR w="9525" cap="flat" cmpd="sng" algn="ctr">
-                      <a:solidFill>
-                        <a:srgbClr val="E5E7EB"/>
-                      </a:solidFill>
-                      <a:prstDash val="solid"/>
-                      <a:round/>
-                      <a:headEnd type="none" w="med" len="med"/>
-                      <a:tailEnd type="none" w="med" len="med"/>
+                    <a:lnR w="0" cap="flat" cmpd="sng" algn="ctr">
+                      <a:noFill/>
                     </a:lnR>
-                    <a:lnT w="9525" cap="flat" cmpd="sng" algn="ctr">
-                      <a:solidFill>
-                        <a:srgbClr val="E5E7EB"/>
-                      </a:solidFill>
-                      <a:prstDash val="solid"/>
-                      <a:round/>
-                      <a:headEnd type="none" w="med" len="med"/>
-                      <a:tailEnd type="none" w="med" len="med"/>
+                    <a:lnT w="0" cap="flat" cmpd="sng" algn="ctr">
+                      <a:noFill/>
                     </a:lnT>
-                    <a:lnB w="9525" cap="flat" cmpd="sng" algn="ctr">
-                      <a:solidFill>
-                        <a:srgbClr val="E5E7EB"/>
-                      </a:solidFill>
-                      <a:prstDash val="solid"/>
-                      <a:round/>
-                      <a:headEnd type="none" w="med" len="med"/>
-                      <a:tailEnd type="none" w="med" len="med"/>
+                    <a:lnB w="0" cap="flat" cmpd="sng" algn="ctr">
+                      <a:noFill/>
                     </a:lnB>
                     <a:solidFill>
                       <a:schemeClr val="bg1"/>
@@ -8428,55 +8264,31 @@
                           <a:solidFill>
                             <a:schemeClr val="tx1"/>
                           </a:solidFill>
-                          <a:latin typeface="Calibri" pitchFamily="34" charset="0"/>
-                          <a:ea typeface="Calibri" pitchFamily="34" charset="-122"/>
-                          <a:cs typeface="Calibri" pitchFamily="34" charset="-120"/>
+                          <a:latin typeface="Segoe UI" pitchFamily="34" charset="0"/>
+                          <a:ea typeface="Segoe UI" pitchFamily="34" charset="-122"/>
+                          <a:cs typeface="Segoe UI" pitchFamily="34" charset="-120"/>
                         </a:rPr>
-                        <a:t>29.66</a:t>
+                        <a:t>28.76</a:t>
                       </a:r>
                       <a:endParaRPr lang="en-US" sz="1250" dirty="0">
-                        <a:latin typeface="Calibri" charset="0"/>
-                        <a:ea typeface="Calibri" charset="0"/>
-                        <a:cs typeface="Calibri" charset="0"/>
+                        <a:latin typeface="Segoe UI" charset="0"/>
+                        <a:ea typeface="Segoe UI" charset="0"/>
+                        <a:cs typeface="Segoe UI" charset="0"/>
                       </a:endParaRPr>
                     </a:p>
                   </a:txBody>
                   <a:tcPr marL="54864" marR="54864" marT="54864" marB="54864">
-                    <a:lnL w="9525" cap="flat" cmpd="sng" algn="ctr">
-                      <a:solidFill>
-                        <a:srgbClr val="E5E7EB"/>
-                      </a:solidFill>
-                      <a:prstDash val="solid"/>
-                      <a:round/>
-                      <a:headEnd type="none" w="med" len="med"/>
-                      <a:tailEnd type="none" w="med" len="med"/>
+                    <a:lnL w="0" cap="flat" cmpd="sng" algn="ctr">
+                      <a:noFill/>
                     </a:lnL>
-                    <a:lnR w="9525" cap="flat" cmpd="sng" algn="ctr">
-                      <a:solidFill>
-                        <a:srgbClr val="E5E7EB"/>
-                      </a:solidFill>
-                      <a:prstDash val="solid"/>
-                      <a:round/>
-                      <a:headEnd type="none" w="med" len="med"/>
-                      <a:tailEnd type="none" w="med" len="med"/>
+                    <a:lnR w="0" cap="flat" cmpd="sng" algn="ctr">
+                      <a:noFill/>
                     </a:lnR>
-                    <a:lnT w="9525" cap="flat" cmpd="sng" algn="ctr">
-                      <a:solidFill>
-                        <a:srgbClr val="E5E7EB"/>
-                      </a:solidFill>
-                      <a:prstDash val="solid"/>
-                      <a:round/>
-                      <a:headEnd type="none" w="med" len="med"/>
-                      <a:tailEnd type="none" w="med" len="med"/>
+                    <a:lnT w="0" cap="flat" cmpd="sng" algn="ctr">
+                      <a:noFill/>
                     </a:lnT>
-                    <a:lnB w="9525" cap="flat" cmpd="sng" algn="ctr">
-                      <a:solidFill>
-                        <a:srgbClr val="E5E7EB"/>
-                      </a:solidFill>
-                      <a:prstDash val="solid"/>
-                      <a:round/>
-                      <a:headEnd type="none" w="med" len="med"/>
-                      <a:tailEnd type="none" w="med" len="med"/>
+                    <a:lnB w="0" cap="flat" cmpd="sng" algn="ctr">
+                      <a:noFill/>
                     </a:lnB>
                     <a:solidFill>
                       <a:schemeClr val="bg1"/>
@@ -8496,55 +8308,31 @@
                           <a:solidFill>
                             <a:schemeClr val="tx1"/>
                           </a:solidFill>
-                          <a:latin typeface="Calibri" pitchFamily="34" charset="0"/>
-                          <a:ea typeface="Calibri" pitchFamily="34" charset="-122"/>
-                          <a:cs typeface="Calibri" pitchFamily="34" charset="-120"/>
+                          <a:latin typeface="Segoe UI" pitchFamily="34" charset="0"/>
+                          <a:ea typeface="Segoe UI" pitchFamily="34" charset="-122"/>
+                          <a:cs typeface="Segoe UI" pitchFamily="34" charset="-120"/>
                         </a:rPr>
-                        <a:t>0.617</a:t>
+                        <a:t>0.571</a:t>
                       </a:r>
                       <a:endParaRPr lang="en-US" sz="1250" dirty="0">
-                        <a:latin typeface="Calibri" charset="0"/>
-                        <a:ea typeface="Calibri" charset="0"/>
-                        <a:cs typeface="Calibri" charset="0"/>
+                        <a:latin typeface="Segoe UI" charset="0"/>
+                        <a:ea typeface="Segoe UI" charset="0"/>
+                        <a:cs typeface="Segoe UI" charset="0"/>
                       </a:endParaRPr>
                     </a:p>
                   </a:txBody>
                   <a:tcPr marL="54864" marR="54864" marT="54864" marB="54864">
-                    <a:lnL w="9525" cap="flat" cmpd="sng" algn="ctr">
-                      <a:solidFill>
-                        <a:srgbClr val="E5E7EB"/>
-                      </a:solidFill>
-                      <a:prstDash val="solid"/>
-                      <a:round/>
-                      <a:headEnd type="none" w="med" len="med"/>
-                      <a:tailEnd type="none" w="med" len="med"/>
+                    <a:lnL w="0" cap="flat" cmpd="sng" algn="ctr">
+                      <a:noFill/>
                     </a:lnL>
-                    <a:lnR w="9525" cap="flat" cmpd="sng" algn="ctr">
-                      <a:solidFill>
-                        <a:srgbClr val="E5E7EB"/>
-                      </a:solidFill>
-                      <a:prstDash val="solid"/>
-                      <a:round/>
-                      <a:headEnd type="none" w="med" len="med"/>
-                      <a:tailEnd type="none" w="med" len="med"/>
+                    <a:lnR w="0" cap="flat" cmpd="sng" algn="ctr">
+                      <a:noFill/>
                     </a:lnR>
-                    <a:lnT w="9525" cap="flat" cmpd="sng" algn="ctr">
-                      <a:solidFill>
-                        <a:srgbClr val="E5E7EB"/>
-                      </a:solidFill>
-                      <a:prstDash val="solid"/>
-                      <a:round/>
-                      <a:headEnd type="none" w="med" len="med"/>
-                      <a:tailEnd type="none" w="med" len="med"/>
+                    <a:lnT w="0" cap="flat" cmpd="sng" algn="ctr">
+                      <a:noFill/>
                     </a:lnT>
-                    <a:lnB w="9525" cap="flat" cmpd="sng" algn="ctr">
-                      <a:solidFill>
-                        <a:srgbClr val="E5E7EB"/>
-                      </a:solidFill>
-                      <a:prstDash val="solid"/>
-                      <a:round/>
-                      <a:headEnd type="none" w="med" len="med"/>
-                      <a:tailEnd type="none" w="med" len="med"/>
+                    <a:lnB w="0" cap="flat" cmpd="sng" algn="ctr">
+                      <a:noFill/>
                     </a:lnB>
                     <a:solidFill>
                       <a:schemeClr val="bg1"/>
@@ -8564,55 +8352,31 @@
                           <a:solidFill>
                             <a:schemeClr val="tx1"/>
                           </a:solidFill>
-                          <a:latin typeface="Calibri" pitchFamily="34" charset="0"/>
-                          <a:ea typeface="Calibri" pitchFamily="34" charset="-122"/>
-                          <a:cs typeface="Calibri" pitchFamily="34" charset="-120"/>
+                          <a:latin typeface="Segoe UI" pitchFamily="34" charset="0"/>
+                          <a:ea typeface="Segoe UI" pitchFamily="34" charset="-122"/>
+                          <a:cs typeface="Segoe UI" pitchFamily="34" charset="-120"/>
                         </a:rPr>
-                        <a:t>0.636</a:t>
+                        <a:t>0.414</a:t>
                       </a:r>
                       <a:endParaRPr lang="en-US" sz="1250" dirty="0">
-                        <a:latin typeface="Calibri" charset="0"/>
-                        <a:ea typeface="Calibri" charset="0"/>
-                        <a:cs typeface="Calibri" charset="0"/>
+                        <a:latin typeface="Segoe UI" charset="0"/>
+                        <a:ea typeface="Segoe UI" charset="0"/>
+                        <a:cs typeface="Segoe UI" charset="0"/>
                       </a:endParaRPr>
                     </a:p>
                   </a:txBody>
                   <a:tcPr marL="54864" marR="54864" marT="54864" marB="54864">
-                    <a:lnL w="9525" cap="flat" cmpd="sng" algn="ctr">
-                      <a:solidFill>
-                        <a:srgbClr val="E5E7EB"/>
-                      </a:solidFill>
-                      <a:prstDash val="solid"/>
-                      <a:round/>
-                      <a:headEnd type="none" w="med" len="med"/>
-                      <a:tailEnd type="none" w="med" len="med"/>
+                    <a:lnL w="0" cap="flat" cmpd="sng" algn="ctr">
+                      <a:noFill/>
                     </a:lnL>
-                    <a:lnR w="9525" cap="flat" cmpd="sng" algn="ctr">
-                      <a:solidFill>
-                        <a:srgbClr val="E5E7EB"/>
-                      </a:solidFill>
-                      <a:prstDash val="solid"/>
-                      <a:round/>
-                      <a:headEnd type="none" w="med" len="med"/>
-                      <a:tailEnd type="none" w="med" len="med"/>
+                    <a:lnR w="0" cap="flat" cmpd="sng" algn="ctr">
+                      <a:noFill/>
                     </a:lnR>
-                    <a:lnT w="9525" cap="flat" cmpd="sng" algn="ctr">
-                      <a:solidFill>
-                        <a:srgbClr val="E5E7EB"/>
-                      </a:solidFill>
-                      <a:prstDash val="solid"/>
-                      <a:round/>
-                      <a:headEnd type="none" w="med" len="med"/>
-                      <a:tailEnd type="none" w="med" len="med"/>
+                    <a:lnT w="0" cap="flat" cmpd="sng" algn="ctr">
+                      <a:noFill/>
                     </a:lnT>
-                    <a:lnB w="9525" cap="flat" cmpd="sng" algn="ctr">
-                      <a:solidFill>
-                        <a:srgbClr val="E5E7EB"/>
-                      </a:solidFill>
-                      <a:prstDash val="solid"/>
-                      <a:round/>
-                      <a:headEnd type="none" w="med" len="med"/>
-                      <a:tailEnd type="none" w="med" len="med"/>
+                    <a:lnB w="0" cap="flat" cmpd="sng" algn="ctr">
+                      <a:noFill/>
                     </a:lnB>
                     <a:solidFill>
                       <a:schemeClr val="bg1"/>
@@ -8632,875 +8396,31 @@
                           <a:solidFill>
                             <a:schemeClr val="tx1"/>
                           </a:solidFill>
-                          <a:latin typeface="Calibri" pitchFamily="34" charset="0"/>
-                          <a:ea typeface="Calibri" pitchFamily="34" charset="-122"/>
-                          <a:cs typeface="Calibri" pitchFamily="34" charset="-120"/>
+                          <a:latin typeface="Segoe UI" pitchFamily="34" charset="0"/>
+                          <a:ea typeface="Segoe UI" pitchFamily="34" charset="-122"/>
+                          <a:cs typeface="Segoe UI" pitchFamily="34" charset="-120"/>
                         </a:rPr>
-                        <a:t>15.2</a:t>
+                        <a:t>36.0</a:t>
                       </a:r>
                       <a:endParaRPr lang="en-US" sz="1250" dirty="0">
-                        <a:latin typeface="Calibri" charset="0"/>
-                        <a:ea typeface="Calibri" charset="0"/>
-                        <a:cs typeface="Calibri" charset="0"/>
+                        <a:latin typeface="Segoe UI" charset="0"/>
+                        <a:ea typeface="Segoe UI" charset="0"/>
+                        <a:cs typeface="Segoe UI" charset="0"/>
                       </a:endParaRPr>
                     </a:p>
                   </a:txBody>
                   <a:tcPr marL="54864" marR="54864" marT="54864" marB="54864">
-                    <a:lnL w="9525" cap="flat" cmpd="sng" algn="ctr">
-                      <a:solidFill>
-                        <a:srgbClr val="E5E7EB"/>
-                      </a:solidFill>
-                      <a:prstDash val="solid"/>
-                      <a:round/>
-                      <a:headEnd type="none" w="med" len="med"/>
-                      <a:tailEnd type="none" w="med" len="med"/>
+                    <a:lnL w="0" cap="flat" cmpd="sng" algn="ctr">
+                      <a:noFill/>
                     </a:lnL>
-                    <a:lnR w="9525" cap="flat" cmpd="sng" algn="ctr">
-                      <a:solidFill>
-                        <a:srgbClr val="E5E7EB"/>
-                      </a:solidFill>
-                      <a:prstDash val="solid"/>
-                      <a:round/>
-                      <a:headEnd type="none" w="med" len="med"/>
-                      <a:tailEnd type="none" w="med" len="med"/>
+                    <a:lnR w="0" cap="flat" cmpd="sng" algn="ctr">
+                      <a:noFill/>
                     </a:lnR>
-                    <a:lnT w="9525" cap="flat" cmpd="sng" algn="ctr">
-                      <a:solidFill>
-                        <a:srgbClr val="E5E7EB"/>
-                      </a:solidFill>
-                      <a:prstDash val="solid"/>
-                      <a:round/>
-                      <a:headEnd type="none" w="med" len="med"/>
-                      <a:tailEnd type="none" w="med" len="med"/>
+                    <a:lnT w="0" cap="flat" cmpd="sng" algn="ctr">
+                      <a:noFill/>
                     </a:lnT>
-                    <a:lnB w="9525" cap="flat" cmpd="sng" algn="ctr">
-                      <a:solidFill>
-                        <a:srgbClr val="E5E7EB"/>
-                      </a:solidFill>
-                      <a:prstDash val="solid"/>
-                      <a:round/>
-                      <a:headEnd type="none" w="med" len="med"/>
-                      <a:tailEnd type="none" w="med" len="med"/>
-                    </a:lnB>
-                    <a:solidFill>
-                      <a:schemeClr val="bg1"/>
-                    </a:solidFill>
-                  </a:tcPr>
-                </a:tc>
-              </a:tr>
-              <a:tr h="310896">
-                <a:tc>
-                  <a:txBody>
-                    <a:bodyPr/>
-                    <a:lstStyle/>
-                    <a:p>
-                      <a:pPr indent="0" marL="0">
-                        <a:buNone/>
-                      </a:pPr>
-                      <a:r>
-                        <a:rPr lang="en-US" sz="1250" b="1" dirty="0">
-                          <a:solidFill>
-                            <a:schemeClr val="tx1"/>
-                          </a:solidFill>
-                          <a:latin typeface="Calibri" pitchFamily="34" charset="0"/>
-                          <a:ea typeface="Calibri" pitchFamily="34" charset="-122"/>
-                          <a:cs typeface="Calibri" pitchFamily="34" charset="-120"/>
-                        </a:rPr>
-                        <a:t>PixelForge RRDB-S, L1 ★</a:t>
-                      </a:r>
-                      <a:endParaRPr lang="en-US" sz="1250" dirty="0">
-                        <a:latin typeface="Calibri" charset="0"/>
-                        <a:ea typeface="Calibri" charset="0"/>
-                        <a:cs typeface="Calibri" charset="0"/>
-                      </a:endParaRPr>
-                    </a:p>
-                  </a:txBody>
-                  <a:tcPr marL="54864" marR="54864" marT="54864" marB="54864">
-                    <a:lnL w="9525" cap="flat" cmpd="sng" algn="ctr">
-                      <a:solidFill>
-                        <a:srgbClr val="E5E7EB"/>
-                      </a:solidFill>
-                      <a:prstDash val="solid"/>
-                      <a:round/>
-                      <a:headEnd type="none" w="med" len="med"/>
-                      <a:tailEnd type="none" w="med" len="med"/>
-                    </a:lnL>
-                    <a:lnR w="9525" cap="flat" cmpd="sng" algn="ctr">
-                      <a:solidFill>
-                        <a:srgbClr val="E5E7EB"/>
-                      </a:solidFill>
-                      <a:prstDash val="solid"/>
-                      <a:round/>
-                      <a:headEnd type="none" w="med" len="med"/>
-                      <a:tailEnd type="none" w="med" len="med"/>
-                    </a:lnR>
-                    <a:lnT w="9525" cap="flat" cmpd="sng" algn="ctr">
-                      <a:solidFill>
-                        <a:srgbClr val="E5E7EB"/>
-                      </a:solidFill>
-                      <a:prstDash val="solid"/>
-                      <a:round/>
-                      <a:headEnd type="none" w="med" len="med"/>
-                      <a:tailEnd type="none" w="med" len="med"/>
-                    </a:lnT>
-                    <a:lnB w="9525" cap="flat" cmpd="sng" algn="ctr">
-                      <a:solidFill>
-                        <a:srgbClr val="E5E7EB"/>
-                      </a:solidFill>
-                      <a:prstDash val="solid"/>
-                      <a:round/>
-                      <a:headEnd type="none" w="med" len="med"/>
-                      <a:tailEnd type="none" w="med" len="med"/>
-                    </a:lnB>
-                    <a:solidFill>
-                      <a:schemeClr val="bg1"/>
-                    </a:solidFill>
-                  </a:tcPr>
-                </a:tc>
-                <a:tc>
-                  <a:txBody>
-                    <a:bodyPr/>
-                    <a:lstStyle/>
-                    <a:p>
-                      <a:pPr indent="0" marL="0">
-                        <a:buNone/>
-                      </a:pPr>
-                      <a:r>
-                        <a:rPr lang="en-US" sz="1250" b="1" dirty="0">
-                          <a:solidFill>
-                            <a:schemeClr val="tx1"/>
-                          </a:solidFill>
-                          <a:latin typeface="Calibri" pitchFamily="34" charset="0"/>
-                          <a:ea typeface="Calibri" pitchFamily="34" charset="-122"/>
-                          <a:cs typeface="Calibri" pitchFamily="34" charset="-120"/>
-                        </a:rPr>
-                        <a:t>1.12M</a:t>
-                      </a:r>
-                      <a:endParaRPr lang="en-US" sz="1250" dirty="0">
-                        <a:latin typeface="Calibri" charset="0"/>
-                        <a:ea typeface="Calibri" charset="0"/>
-                        <a:cs typeface="Calibri" charset="0"/>
-                      </a:endParaRPr>
-                    </a:p>
-                  </a:txBody>
-                  <a:tcPr marL="54864" marR="54864" marT="54864" marB="54864">
-                    <a:lnL w="9525" cap="flat" cmpd="sng" algn="ctr">
-                      <a:solidFill>
-                        <a:srgbClr val="E5E7EB"/>
-                      </a:solidFill>
-                      <a:prstDash val="solid"/>
-                      <a:round/>
-                      <a:headEnd type="none" w="med" len="med"/>
-                      <a:tailEnd type="none" w="med" len="med"/>
-                    </a:lnL>
-                    <a:lnR w="9525" cap="flat" cmpd="sng" algn="ctr">
-                      <a:solidFill>
-                        <a:srgbClr val="E5E7EB"/>
-                      </a:solidFill>
-                      <a:prstDash val="solid"/>
-                      <a:round/>
-                      <a:headEnd type="none" w="med" len="med"/>
-                      <a:tailEnd type="none" w="med" len="med"/>
-                    </a:lnR>
-                    <a:lnT w="9525" cap="flat" cmpd="sng" algn="ctr">
-                      <a:solidFill>
-                        <a:srgbClr val="E5E7EB"/>
-                      </a:solidFill>
-                      <a:prstDash val="solid"/>
-                      <a:round/>
-                      <a:headEnd type="none" w="med" len="med"/>
-                      <a:tailEnd type="none" w="med" len="med"/>
-                    </a:lnT>
-                    <a:lnB w="9525" cap="flat" cmpd="sng" algn="ctr">
-                      <a:solidFill>
-                        <a:srgbClr val="E5E7EB"/>
-                      </a:solidFill>
-                      <a:prstDash val="solid"/>
-                      <a:round/>
-                      <a:headEnd type="none" w="med" len="med"/>
-                      <a:tailEnd type="none" w="med" len="med"/>
-                    </a:lnB>
-                    <a:solidFill>
-                      <a:schemeClr val="bg1"/>
-                    </a:solidFill>
-                  </a:tcPr>
-                </a:tc>
-                <a:tc>
-                  <a:txBody>
-                    <a:bodyPr/>
-                    <a:lstStyle/>
-                    <a:p>
-                      <a:pPr indent="0" marL="0">
-                        <a:buNone/>
-                      </a:pPr>
-                      <a:r>
-                        <a:rPr lang="en-US" sz="1250" b="1" dirty="0">
-                          <a:solidFill>
-                            <a:schemeClr val="tx1"/>
-                          </a:solidFill>
-                          <a:latin typeface="Calibri" pitchFamily="34" charset="0"/>
-                          <a:ea typeface="Calibri" pitchFamily="34" charset="-122"/>
-                          <a:cs typeface="Calibri" pitchFamily="34" charset="-120"/>
-                        </a:rPr>
-                        <a:t>29.73</a:t>
-                      </a:r>
-                      <a:endParaRPr lang="en-US" sz="1250" dirty="0">
-                        <a:latin typeface="Calibri" charset="0"/>
-                        <a:ea typeface="Calibri" charset="0"/>
-                        <a:cs typeface="Calibri" charset="0"/>
-                      </a:endParaRPr>
-                    </a:p>
-                  </a:txBody>
-                  <a:tcPr marL="54864" marR="54864" marT="54864" marB="54864">
-                    <a:lnL w="9525" cap="flat" cmpd="sng" algn="ctr">
-                      <a:solidFill>
-                        <a:srgbClr val="E5E7EB"/>
-                      </a:solidFill>
-                      <a:prstDash val="solid"/>
-                      <a:round/>
-                      <a:headEnd type="none" w="med" len="med"/>
-                      <a:tailEnd type="none" w="med" len="med"/>
-                    </a:lnL>
-                    <a:lnR w="9525" cap="flat" cmpd="sng" algn="ctr">
-                      <a:solidFill>
-                        <a:srgbClr val="E5E7EB"/>
-                      </a:solidFill>
-                      <a:prstDash val="solid"/>
-                      <a:round/>
-                      <a:headEnd type="none" w="med" len="med"/>
-                      <a:tailEnd type="none" w="med" len="med"/>
-                    </a:lnR>
-                    <a:lnT w="9525" cap="flat" cmpd="sng" algn="ctr">
-                      <a:solidFill>
-                        <a:srgbClr val="E5E7EB"/>
-                      </a:solidFill>
-                      <a:prstDash val="solid"/>
-                      <a:round/>
-                      <a:headEnd type="none" w="med" len="med"/>
-                      <a:tailEnd type="none" w="med" len="med"/>
-                    </a:lnT>
-                    <a:lnB w="9525" cap="flat" cmpd="sng" algn="ctr">
-                      <a:solidFill>
-                        <a:srgbClr val="E5E7EB"/>
-                      </a:solidFill>
-                      <a:prstDash val="solid"/>
-                      <a:round/>
-                      <a:headEnd type="none" w="med" len="med"/>
-                      <a:tailEnd type="none" w="med" len="med"/>
-                    </a:lnB>
-                    <a:solidFill>
-                      <a:schemeClr val="bg1"/>
-                    </a:solidFill>
-                  </a:tcPr>
-                </a:tc>
-                <a:tc>
-                  <a:txBody>
-                    <a:bodyPr/>
-                    <a:lstStyle/>
-                    <a:p>
-                      <a:pPr indent="0" marL="0">
-                        <a:buNone/>
-                      </a:pPr>
-                      <a:r>
-                        <a:rPr lang="en-US" sz="1250" b="1" dirty="0">
-                          <a:solidFill>
-                            <a:schemeClr val="tx1"/>
-                          </a:solidFill>
-                          <a:latin typeface="Calibri" pitchFamily="34" charset="0"/>
-                          <a:ea typeface="Calibri" pitchFamily="34" charset="-122"/>
-                          <a:cs typeface="Calibri" pitchFamily="34" charset="-120"/>
-                        </a:rPr>
-                        <a:t>0.620</a:t>
-                      </a:r>
-                      <a:endParaRPr lang="en-US" sz="1250" dirty="0">
-                        <a:latin typeface="Calibri" charset="0"/>
-                        <a:ea typeface="Calibri" charset="0"/>
-                        <a:cs typeface="Calibri" charset="0"/>
-                      </a:endParaRPr>
-                    </a:p>
-                  </a:txBody>
-                  <a:tcPr marL="54864" marR="54864" marT="54864" marB="54864">
-                    <a:lnL w="9525" cap="flat" cmpd="sng" algn="ctr">
-                      <a:solidFill>
-                        <a:srgbClr val="E5E7EB"/>
-                      </a:solidFill>
-                      <a:prstDash val="solid"/>
-                      <a:round/>
-                      <a:headEnd type="none" w="med" len="med"/>
-                      <a:tailEnd type="none" w="med" len="med"/>
-                    </a:lnL>
-                    <a:lnR w="9525" cap="flat" cmpd="sng" algn="ctr">
-                      <a:solidFill>
-                        <a:srgbClr val="E5E7EB"/>
-                      </a:solidFill>
-                      <a:prstDash val="solid"/>
-                      <a:round/>
-                      <a:headEnd type="none" w="med" len="med"/>
-                      <a:tailEnd type="none" w="med" len="med"/>
-                    </a:lnR>
-                    <a:lnT w="9525" cap="flat" cmpd="sng" algn="ctr">
-                      <a:solidFill>
-                        <a:srgbClr val="E5E7EB"/>
-                      </a:solidFill>
-                      <a:prstDash val="solid"/>
-                      <a:round/>
-                      <a:headEnd type="none" w="med" len="med"/>
-                      <a:tailEnd type="none" w="med" len="med"/>
-                    </a:lnT>
-                    <a:lnB w="9525" cap="flat" cmpd="sng" algn="ctr">
-                      <a:solidFill>
-                        <a:srgbClr val="E5E7EB"/>
-                      </a:solidFill>
-                      <a:prstDash val="solid"/>
-                      <a:round/>
-                      <a:headEnd type="none" w="med" len="med"/>
-                      <a:tailEnd type="none" w="med" len="med"/>
-                    </a:lnB>
-                    <a:solidFill>
-                      <a:schemeClr val="bg1"/>
-                    </a:solidFill>
-                  </a:tcPr>
-                </a:tc>
-                <a:tc>
-                  <a:txBody>
-                    <a:bodyPr/>
-                    <a:lstStyle/>
-                    <a:p>
-                      <a:pPr indent="0" marL="0">
-                        <a:buNone/>
-                      </a:pPr>
-                      <a:r>
-                        <a:rPr lang="en-US" sz="1250" b="1" dirty="0">
-                          <a:solidFill>
-                            <a:schemeClr val="tx1"/>
-                          </a:solidFill>
-                          <a:latin typeface="Calibri" pitchFamily="34" charset="0"/>
-                          <a:ea typeface="Calibri" pitchFamily="34" charset="-122"/>
-                          <a:cs typeface="Calibri" pitchFamily="34" charset="-120"/>
-                        </a:rPr>
-                        <a:t>0.659</a:t>
-                      </a:r>
-                      <a:endParaRPr lang="en-US" sz="1250" dirty="0">
-                        <a:latin typeface="Calibri" charset="0"/>
-                        <a:ea typeface="Calibri" charset="0"/>
-                        <a:cs typeface="Calibri" charset="0"/>
-                      </a:endParaRPr>
-                    </a:p>
-                  </a:txBody>
-                  <a:tcPr marL="54864" marR="54864" marT="54864" marB="54864">
-                    <a:lnL w="9525" cap="flat" cmpd="sng" algn="ctr">
-                      <a:solidFill>
-                        <a:srgbClr val="E5E7EB"/>
-                      </a:solidFill>
-                      <a:prstDash val="solid"/>
-                      <a:round/>
-                      <a:headEnd type="none" w="med" len="med"/>
-                      <a:tailEnd type="none" w="med" len="med"/>
-                    </a:lnL>
-                    <a:lnR w="9525" cap="flat" cmpd="sng" algn="ctr">
-                      <a:solidFill>
-                        <a:srgbClr val="E5E7EB"/>
-                      </a:solidFill>
-                      <a:prstDash val="solid"/>
-                      <a:round/>
-                      <a:headEnd type="none" w="med" len="med"/>
-                      <a:tailEnd type="none" w="med" len="med"/>
-                    </a:lnR>
-                    <a:lnT w="9525" cap="flat" cmpd="sng" algn="ctr">
-                      <a:solidFill>
-                        <a:srgbClr val="E5E7EB"/>
-                      </a:solidFill>
-                      <a:prstDash val="solid"/>
-                      <a:round/>
-                      <a:headEnd type="none" w="med" len="med"/>
-                      <a:tailEnd type="none" w="med" len="med"/>
-                    </a:lnT>
-                    <a:lnB w="9525" cap="flat" cmpd="sng" algn="ctr">
-                      <a:solidFill>
-                        <a:srgbClr val="E5E7EB"/>
-                      </a:solidFill>
-                      <a:prstDash val="solid"/>
-                      <a:round/>
-                      <a:headEnd type="none" w="med" len="med"/>
-                      <a:tailEnd type="none" w="med" len="med"/>
-                    </a:lnB>
-                    <a:solidFill>
-                      <a:schemeClr val="bg1"/>
-                    </a:solidFill>
-                  </a:tcPr>
-                </a:tc>
-                <a:tc>
-                  <a:txBody>
-                    <a:bodyPr/>
-                    <a:lstStyle/>
-                    <a:p>
-                      <a:pPr indent="0" marL="0">
-                        <a:buNone/>
-                      </a:pPr>
-                      <a:r>
-                        <a:rPr lang="en-US" sz="1250" b="1" dirty="0">
-                          <a:solidFill>
-                            <a:schemeClr val="tx1"/>
-                          </a:solidFill>
-                          <a:latin typeface="Calibri" pitchFamily="34" charset="0"/>
-                          <a:ea typeface="Calibri" pitchFamily="34" charset="-122"/>
-                          <a:cs typeface="Calibri" pitchFamily="34" charset="-120"/>
-                        </a:rPr>
-                        <a:t>39.0</a:t>
-                      </a:r>
-                      <a:endParaRPr lang="en-US" sz="1250" dirty="0">
-                        <a:latin typeface="Calibri" charset="0"/>
-                        <a:ea typeface="Calibri" charset="0"/>
-                        <a:cs typeface="Calibri" charset="0"/>
-                      </a:endParaRPr>
-                    </a:p>
-                  </a:txBody>
-                  <a:tcPr marL="54864" marR="54864" marT="54864" marB="54864">
-                    <a:lnL w="9525" cap="flat" cmpd="sng" algn="ctr">
-                      <a:solidFill>
-                        <a:srgbClr val="E5E7EB"/>
-                      </a:solidFill>
-                      <a:prstDash val="solid"/>
-                      <a:round/>
-                      <a:headEnd type="none" w="med" len="med"/>
-                      <a:tailEnd type="none" w="med" len="med"/>
-                    </a:lnL>
-                    <a:lnR w="9525" cap="flat" cmpd="sng" algn="ctr">
-                      <a:solidFill>
-                        <a:srgbClr val="E5E7EB"/>
-                      </a:solidFill>
-                      <a:prstDash val="solid"/>
-                      <a:round/>
-                      <a:headEnd type="none" w="med" len="med"/>
-                      <a:tailEnd type="none" w="med" len="med"/>
-                    </a:lnR>
-                    <a:lnT w="9525" cap="flat" cmpd="sng" algn="ctr">
-                      <a:solidFill>
-                        <a:srgbClr val="E5E7EB"/>
-                      </a:solidFill>
-                      <a:prstDash val="solid"/>
-                      <a:round/>
-                      <a:headEnd type="none" w="med" len="med"/>
-                      <a:tailEnd type="none" w="med" len="med"/>
-                    </a:lnT>
-                    <a:lnB w="9525" cap="flat" cmpd="sng" algn="ctr">
-                      <a:solidFill>
-                        <a:srgbClr val="E5E7EB"/>
-                      </a:solidFill>
-                      <a:prstDash val="solid"/>
-                      <a:round/>
-                      <a:headEnd type="none" w="med" len="med"/>
-                      <a:tailEnd type="none" w="med" len="med"/>
-                    </a:lnB>
-                    <a:solidFill>
-                      <a:schemeClr val="bg1"/>
-                    </a:solidFill>
-                  </a:tcPr>
-                </a:tc>
-              </a:tr>
-              <a:tr h="310896">
-                <a:tc>
-                  <a:txBody>
-                    <a:bodyPr/>
-                    <a:lstStyle/>
-                    <a:p>
-                      <a:pPr indent="0" marL="0">
-                        <a:buNone/>
-                      </a:pPr>
-                      <a:r>
-                        <a:rPr lang="en-US" sz="1250" b="1" dirty="0">
-                          <a:solidFill>
-                            <a:schemeClr val="tx1"/>
-                          </a:solidFill>
-                          <a:latin typeface="Calibri" pitchFamily="34" charset="0"/>
-                          <a:ea typeface="Calibri" pitchFamily="34" charset="-122"/>
-                          <a:cs typeface="Calibri" pitchFamily="34" charset="-120"/>
-                        </a:rPr>
-                        <a:t>PixelForge RRDB-S, GAN ★</a:t>
-                      </a:r>
-                      <a:endParaRPr lang="en-US" sz="1250" dirty="0">
-                        <a:latin typeface="Calibri" charset="0"/>
-                        <a:ea typeface="Calibri" charset="0"/>
-                        <a:cs typeface="Calibri" charset="0"/>
-                      </a:endParaRPr>
-                    </a:p>
-                  </a:txBody>
-                  <a:tcPr marL="54864" marR="54864" marT="54864" marB="54864">
-                    <a:lnL w="9525" cap="flat" cmpd="sng" algn="ctr">
-                      <a:solidFill>
-                        <a:srgbClr val="E5E7EB"/>
-                      </a:solidFill>
-                      <a:prstDash val="solid"/>
-                      <a:round/>
-                      <a:headEnd type="none" w="med" len="med"/>
-                      <a:tailEnd type="none" w="med" len="med"/>
-                    </a:lnL>
-                    <a:lnR w="9525" cap="flat" cmpd="sng" algn="ctr">
-                      <a:solidFill>
-                        <a:srgbClr val="E5E7EB"/>
-                      </a:solidFill>
-                      <a:prstDash val="solid"/>
-                      <a:round/>
-                      <a:headEnd type="none" w="med" len="med"/>
-                      <a:tailEnd type="none" w="med" len="med"/>
-                    </a:lnR>
-                    <a:lnT w="9525" cap="flat" cmpd="sng" algn="ctr">
-                      <a:solidFill>
-                        <a:srgbClr val="E5E7EB"/>
-                      </a:solidFill>
-                      <a:prstDash val="solid"/>
-                      <a:round/>
-                      <a:headEnd type="none" w="med" len="med"/>
-                      <a:tailEnd type="none" w="med" len="med"/>
-                    </a:lnT>
-                    <a:lnB w="9525" cap="flat" cmpd="sng" algn="ctr">
-                      <a:solidFill>
-                        <a:srgbClr val="E5E7EB"/>
-                      </a:solidFill>
-                      <a:prstDash val="solid"/>
-                      <a:round/>
-                      <a:headEnd type="none" w="med" len="med"/>
-                      <a:tailEnd type="none" w="med" len="med"/>
-                    </a:lnB>
-                    <a:solidFill>
-                      <a:schemeClr val="bg1"/>
-                    </a:solidFill>
-                  </a:tcPr>
-                </a:tc>
-                <a:tc>
-                  <a:txBody>
-                    <a:bodyPr/>
-                    <a:lstStyle/>
-                    <a:p>
-                      <a:pPr indent="0" marL="0">
-                        <a:buNone/>
-                      </a:pPr>
-                      <a:r>
-                        <a:rPr lang="en-US" sz="1250" b="1" dirty="0">
-                          <a:solidFill>
-                            <a:schemeClr val="tx1"/>
-                          </a:solidFill>
-                          <a:latin typeface="Calibri" pitchFamily="34" charset="0"/>
-                          <a:ea typeface="Calibri" pitchFamily="34" charset="-122"/>
-                          <a:cs typeface="Calibri" pitchFamily="34" charset="-120"/>
-                        </a:rPr>
-                        <a:t>1.12M</a:t>
-                      </a:r>
-                      <a:endParaRPr lang="en-US" sz="1250" dirty="0">
-                        <a:latin typeface="Calibri" charset="0"/>
-                        <a:ea typeface="Calibri" charset="0"/>
-                        <a:cs typeface="Calibri" charset="0"/>
-                      </a:endParaRPr>
-                    </a:p>
-                  </a:txBody>
-                  <a:tcPr marL="54864" marR="54864" marT="54864" marB="54864">
-                    <a:lnL w="9525" cap="flat" cmpd="sng" algn="ctr">
-                      <a:solidFill>
-                        <a:srgbClr val="E5E7EB"/>
-                      </a:solidFill>
-                      <a:prstDash val="solid"/>
-                      <a:round/>
-                      <a:headEnd type="none" w="med" len="med"/>
-                      <a:tailEnd type="none" w="med" len="med"/>
-                    </a:lnL>
-                    <a:lnR w="9525" cap="flat" cmpd="sng" algn="ctr">
-                      <a:solidFill>
-                        <a:srgbClr val="E5E7EB"/>
-                      </a:solidFill>
-                      <a:prstDash val="solid"/>
-                      <a:round/>
-                      <a:headEnd type="none" w="med" len="med"/>
-                      <a:tailEnd type="none" w="med" len="med"/>
-                    </a:lnR>
-                    <a:lnT w="9525" cap="flat" cmpd="sng" algn="ctr">
-                      <a:solidFill>
-                        <a:srgbClr val="E5E7EB"/>
-                      </a:solidFill>
-                      <a:prstDash val="solid"/>
-                      <a:round/>
-                      <a:headEnd type="none" w="med" len="med"/>
-                      <a:tailEnd type="none" w="med" len="med"/>
-                    </a:lnT>
-                    <a:lnB w="9525" cap="flat" cmpd="sng" algn="ctr">
-                      <a:solidFill>
-                        <a:srgbClr val="E5E7EB"/>
-                      </a:solidFill>
-                      <a:prstDash val="solid"/>
-                      <a:round/>
-                      <a:headEnd type="none" w="med" len="med"/>
-                      <a:tailEnd type="none" w="med" len="med"/>
-                    </a:lnB>
-                    <a:solidFill>
-                      <a:schemeClr val="bg1"/>
-                    </a:solidFill>
-                  </a:tcPr>
-                </a:tc>
-                <a:tc>
-                  <a:txBody>
-                    <a:bodyPr/>
-                    <a:lstStyle/>
-                    <a:p>
-                      <a:pPr indent="0" marL="0">
-                        <a:buNone/>
-                      </a:pPr>
-                      <a:r>
-                        <a:rPr lang="en-US" sz="1250" b="1" dirty="0">
-                          <a:solidFill>
-                            <a:schemeClr val="tx1"/>
-                          </a:solidFill>
-                          <a:latin typeface="Calibri" pitchFamily="34" charset="0"/>
-                          <a:ea typeface="Calibri" pitchFamily="34" charset="-122"/>
-                          <a:cs typeface="Calibri" pitchFamily="34" charset="-120"/>
-                        </a:rPr>
-                        <a:t>28.76</a:t>
-                      </a:r>
-                      <a:endParaRPr lang="en-US" sz="1250" dirty="0">
-                        <a:latin typeface="Calibri" charset="0"/>
-                        <a:ea typeface="Calibri" charset="0"/>
-                        <a:cs typeface="Calibri" charset="0"/>
-                      </a:endParaRPr>
-                    </a:p>
-                  </a:txBody>
-                  <a:tcPr marL="54864" marR="54864" marT="54864" marB="54864">
-                    <a:lnL w="9525" cap="flat" cmpd="sng" algn="ctr">
-                      <a:solidFill>
-                        <a:srgbClr val="E5E7EB"/>
-                      </a:solidFill>
-                      <a:prstDash val="solid"/>
-                      <a:round/>
-                      <a:headEnd type="none" w="med" len="med"/>
-                      <a:tailEnd type="none" w="med" len="med"/>
-                    </a:lnL>
-                    <a:lnR w="9525" cap="flat" cmpd="sng" algn="ctr">
-                      <a:solidFill>
-                        <a:srgbClr val="E5E7EB"/>
-                      </a:solidFill>
-                      <a:prstDash val="solid"/>
-                      <a:round/>
-                      <a:headEnd type="none" w="med" len="med"/>
-                      <a:tailEnd type="none" w="med" len="med"/>
-                    </a:lnR>
-                    <a:lnT w="9525" cap="flat" cmpd="sng" algn="ctr">
-                      <a:solidFill>
-                        <a:srgbClr val="E5E7EB"/>
-                      </a:solidFill>
-                      <a:prstDash val="solid"/>
-                      <a:round/>
-                      <a:headEnd type="none" w="med" len="med"/>
-                      <a:tailEnd type="none" w="med" len="med"/>
-                    </a:lnT>
-                    <a:lnB w="9525" cap="flat" cmpd="sng" algn="ctr">
-                      <a:solidFill>
-                        <a:srgbClr val="E5E7EB"/>
-                      </a:solidFill>
-                      <a:prstDash val="solid"/>
-                      <a:round/>
-                      <a:headEnd type="none" w="med" len="med"/>
-                      <a:tailEnd type="none" w="med" len="med"/>
-                    </a:lnB>
-                    <a:solidFill>
-                      <a:schemeClr val="bg1"/>
-                    </a:solidFill>
-                  </a:tcPr>
-                </a:tc>
-                <a:tc>
-                  <a:txBody>
-                    <a:bodyPr/>
-                    <a:lstStyle/>
-                    <a:p>
-                      <a:pPr indent="0" marL="0">
-                        <a:buNone/>
-                      </a:pPr>
-                      <a:r>
-                        <a:rPr lang="en-US" sz="1250" b="1" dirty="0">
-                          <a:solidFill>
-                            <a:schemeClr val="tx1"/>
-                          </a:solidFill>
-                          <a:latin typeface="Calibri" pitchFamily="34" charset="0"/>
-                          <a:ea typeface="Calibri" pitchFamily="34" charset="-122"/>
-                          <a:cs typeface="Calibri" pitchFamily="34" charset="-120"/>
-                        </a:rPr>
-                        <a:t>0.571</a:t>
-                      </a:r>
-                      <a:endParaRPr lang="en-US" sz="1250" dirty="0">
-                        <a:latin typeface="Calibri" charset="0"/>
-                        <a:ea typeface="Calibri" charset="0"/>
-                        <a:cs typeface="Calibri" charset="0"/>
-                      </a:endParaRPr>
-                    </a:p>
-                  </a:txBody>
-                  <a:tcPr marL="54864" marR="54864" marT="54864" marB="54864">
-                    <a:lnL w="9525" cap="flat" cmpd="sng" algn="ctr">
-                      <a:solidFill>
-                        <a:srgbClr val="E5E7EB"/>
-                      </a:solidFill>
-                      <a:prstDash val="solid"/>
-                      <a:round/>
-                      <a:headEnd type="none" w="med" len="med"/>
-                      <a:tailEnd type="none" w="med" len="med"/>
-                    </a:lnL>
-                    <a:lnR w="9525" cap="flat" cmpd="sng" algn="ctr">
-                      <a:solidFill>
-                        <a:srgbClr val="E5E7EB"/>
-                      </a:solidFill>
-                      <a:prstDash val="solid"/>
-                      <a:round/>
-                      <a:headEnd type="none" w="med" len="med"/>
-                      <a:tailEnd type="none" w="med" len="med"/>
-                    </a:lnR>
-                    <a:lnT w="9525" cap="flat" cmpd="sng" algn="ctr">
-                      <a:solidFill>
-                        <a:srgbClr val="E5E7EB"/>
-                      </a:solidFill>
-                      <a:prstDash val="solid"/>
-                      <a:round/>
-                      <a:headEnd type="none" w="med" len="med"/>
-                      <a:tailEnd type="none" w="med" len="med"/>
-                    </a:lnT>
-                    <a:lnB w="9525" cap="flat" cmpd="sng" algn="ctr">
-                      <a:solidFill>
-                        <a:srgbClr val="E5E7EB"/>
-                      </a:solidFill>
-                      <a:prstDash val="solid"/>
-                      <a:round/>
-                      <a:headEnd type="none" w="med" len="med"/>
-                      <a:tailEnd type="none" w="med" len="med"/>
-                    </a:lnB>
-                    <a:solidFill>
-                      <a:schemeClr val="bg1"/>
-                    </a:solidFill>
-                  </a:tcPr>
-                </a:tc>
-                <a:tc>
-                  <a:txBody>
-                    <a:bodyPr/>
-                    <a:lstStyle/>
-                    <a:p>
-                      <a:pPr indent="0" marL="0">
-                        <a:buNone/>
-                      </a:pPr>
-                      <a:r>
-                        <a:rPr lang="en-US" sz="1250" b="1" dirty="0">
-                          <a:solidFill>
-                            <a:schemeClr val="tx1"/>
-                          </a:solidFill>
-                          <a:latin typeface="Calibri" pitchFamily="34" charset="0"/>
-                          <a:ea typeface="Calibri" pitchFamily="34" charset="-122"/>
-                          <a:cs typeface="Calibri" pitchFamily="34" charset="-120"/>
-                        </a:rPr>
-                        <a:t>0.414</a:t>
-                      </a:r>
-                      <a:endParaRPr lang="en-US" sz="1250" dirty="0">
-                        <a:latin typeface="Calibri" charset="0"/>
-                        <a:ea typeface="Calibri" charset="0"/>
-                        <a:cs typeface="Calibri" charset="0"/>
-                      </a:endParaRPr>
-                    </a:p>
-                  </a:txBody>
-                  <a:tcPr marL="54864" marR="54864" marT="54864" marB="54864">
-                    <a:lnL w="9525" cap="flat" cmpd="sng" algn="ctr">
-                      <a:solidFill>
-                        <a:srgbClr val="E5E7EB"/>
-                      </a:solidFill>
-                      <a:prstDash val="solid"/>
-                      <a:round/>
-                      <a:headEnd type="none" w="med" len="med"/>
-                      <a:tailEnd type="none" w="med" len="med"/>
-                    </a:lnL>
-                    <a:lnR w="9525" cap="flat" cmpd="sng" algn="ctr">
-                      <a:solidFill>
-                        <a:srgbClr val="E5E7EB"/>
-                      </a:solidFill>
-                      <a:prstDash val="solid"/>
-                      <a:round/>
-                      <a:headEnd type="none" w="med" len="med"/>
-                      <a:tailEnd type="none" w="med" len="med"/>
-                    </a:lnR>
-                    <a:lnT w="9525" cap="flat" cmpd="sng" algn="ctr">
-                      <a:solidFill>
-                        <a:srgbClr val="E5E7EB"/>
-                      </a:solidFill>
-                      <a:prstDash val="solid"/>
-                      <a:round/>
-                      <a:headEnd type="none" w="med" len="med"/>
-                      <a:tailEnd type="none" w="med" len="med"/>
-                    </a:lnT>
-                    <a:lnB w="9525" cap="flat" cmpd="sng" algn="ctr">
-                      <a:solidFill>
-                        <a:srgbClr val="E5E7EB"/>
-                      </a:solidFill>
-                      <a:prstDash val="solid"/>
-                      <a:round/>
-                      <a:headEnd type="none" w="med" len="med"/>
-                      <a:tailEnd type="none" w="med" len="med"/>
-                    </a:lnB>
-                    <a:solidFill>
-                      <a:schemeClr val="bg1"/>
-                    </a:solidFill>
-                  </a:tcPr>
-                </a:tc>
-                <a:tc>
-                  <a:txBody>
-                    <a:bodyPr/>
-                    <a:lstStyle/>
-                    <a:p>
-                      <a:pPr indent="0" marL="0">
-                        <a:buNone/>
-                      </a:pPr>
-                      <a:r>
-                        <a:rPr lang="en-US" sz="1250" b="1" dirty="0">
-                          <a:solidFill>
-                            <a:schemeClr val="tx1"/>
-                          </a:solidFill>
-                          <a:latin typeface="Calibri" pitchFamily="34" charset="0"/>
-                          <a:ea typeface="Calibri" pitchFamily="34" charset="-122"/>
-                          <a:cs typeface="Calibri" pitchFamily="34" charset="-120"/>
-                        </a:rPr>
-                        <a:t>36.0</a:t>
-                      </a:r>
-                      <a:endParaRPr lang="en-US" sz="1250" dirty="0">
-                        <a:latin typeface="Calibri" charset="0"/>
-                        <a:ea typeface="Calibri" charset="0"/>
-                        <a:cs typeface="Calibri" charset="0"/>
-                      </a:endParaRPr>
-                    </a:p>
-                  </a:txBody>
-                  <a:tcPr marL="54864" marR="54864" marT="54864" marB="54864">
-                    <a:lnL w="9525" cap="flat" cmpd="sng" algn="ctr">
-                      <a:solidFill>
-                        <a:srgbClr val="E5E7EB"/>
-                      </a:solidFill>
-                      <a:prstDash val="solid"/>
-                      <a:round/>
-                      <a:headEnd type="none" w="med" len="med"/>
-                      <a:tailEnd type="none" w="med" len="med"/>
-                    </a:lnL>
-                    <a:lnR w="9525" cap="flat" cmpd="sng" algn="ctr">
-                      <a:solidFill>
-                        <a:srgbClr val="E5E7EB"/>
-                      </a:solidFill>
-                      <a:prstDash val="solid"/>
-                      <a:round/>
-                      <a:headEnd type="none" w="med" len="med"/>
-                      <a:tailEnd type="none" w="med" len="med"/>
-                    </a:lnR>
-                    <a:lnT w="9525" cap="flat" cmpd="sng" algn="ctr">
-                      <a:solidFill>
-                        <a:srgbClr val="E5E7EB"/>
-                      </a:solidFill>
-                      <a:prstDash val="solid"/>
-                      <a:round/>
-                      <a:headEnd type="none" w="med" len="med"/>
-                      <a:tailEnd type="none" w="med" len="med"/>
-                    </a:lnT>
-                    <a:lnB w="9525" cap="flat" cmpd="sng" algn="ctr">
-                      <a:solidFill>
-                        <a:srgbClr val="E5E7EB"/>
-                      </a:solidFill>
-                      <a:prstDash val="solid"/>
-                      <a:round/>
-                      <a:headEnd type="none" w="med" len="med"/>
-                      <a:tailEnd type="none" w="med" len="med"/>
+                    <a:lnB w="0" cap="flat" cmpd="sng" algn="ctr">
+                      <a:noFill/>
                     </a:lnB>
                     <a:solidFill>
                       <a:schemeClr val="bg1"/>
@@ -9514,14 +8434,14 @@
       </p:graphicFrame>
       <p:sp>
         <p:nvSpPr>
-          <p:cNvPr id="6" name="Text 3"/>
+          <p:cNvPr id="7" name="Text 4"/>
           <p:cNvSpPr txBox="1"/>
           <p:nvPr/>
         </p:nvSpPr>
         <p:spPr>
           <a:xfrm>
-            <a:off x="548640" y="4617720"/>
-            <a:ext cx="11064240" cy="1554480"/>
+            <a:off x="548640" y="4846320"/>
+            <a:ext cx="11064240" cy="1463040"/>
           </a:xfrm>
           <a:prstGeom prst="rect">
             <a:avLst/>
@@ -9541,14 +8461,14 @@
               <a:buChar char="•"/>
             </a:pPr>
             <a:r>
-              <a:rPr lang="en-US" sz="1350" dirty="0">
+              <a:rPr lang="en-US" sz="1300" dirty="0">
                 <a:solidFill>
                   <a:schemeClr val="tx2"/>
                 </a:solidFill>
               </a:rPr>
               <a:t>Architecture: the 7× smaller SRVGG-S (0.16M) gets within 0.07 dB PSNR of RRDB-S (1.12M) and slightly better LPIPS (0.636 vs 0.659), at 15 vs 39 ms: a strong candidate for real-time use.</a:t>
             </a:r>
-            <a:endParaRPr lang="en-US" sz="1350" dirty="0"/>
+            <a:endParaRPr lang="en-US" sz="1300" dirty="0"/>
           </a:p>
           <a:p>
             <a:pPr marL="342900" indent="-342900">
@@ -9559,14 +8479,14 @@
               <a:buChar char="•"/>
             </a:pPr>
             <a:r>
-              <a:rPr lang="en-US" sz="1350" dirty="0">
+              <a:rPr lang="en-US" sz="1300" dirty="0">
                 <a:solidFill>
                   <a:schemeClr val="tx2"/>
                 </a:solidFill>
               </a:rPr>
               <a:t>L1 vs GAN: the GAN stage cuts LPIPS from 0.659 to 0.414 (looks far more real) at a cost of 0.97 dB PSNR, the classic fidelity vs realism trade-off.</a:t>
             </a:r>
-            <a:endParaRPr lang="en-US" sz="1350" dirty="0"/>
+            <a:endParaRPr lang="en-US" sz="1300" dirty="0"/>
           </a:p>
           <a:p>
             <a:pPr marL="342900" indent="-342900">
@@ -9577,14 +8497,14 @@
               <a:buChar char="•"/>
             </a:pPr>
             <a:r>
-              <a:rPr lang="en-US" sz="1350" dirty="0">
+              <a:rPr lang="en-US" sz="1300" dirty="0">
                 <a:solidFill>
                   <a:schemeClr val="tx2"/>
                 </a:solidFill>
               </a:rPr>
               <a:t>Versus Real-ESRGAN x4plus (trained on photos): LPIPS 0.414 vs 0.454, PSNR 28.76 vs 27.76 dB, with 15× fewer parameters.</a:t>
             </a:r>
-            <a:endParaRPr lang="en-US" sz="1350" dirty="0"/>
+            <a:endParaRPr lang="en-US" sz="1300" dirty="0"/>
           </a:p>
           <a:p>
             <a:pPr marL="342900" indent="-342900">
@@ -9595,14 +8515,14 @@
               <a:buChar char="•"/>
             </a:pPr>
             <a:r>
-              <a:rPr lang="en-US" sz="1350" dirty="0">
+              <a:rPr lang="en-US" sz="1300" dirty="0">
                 <a:solidFill>
                   <a:schemeClr val="tx2"/>
                 </a:solidFill>
               </a:rPr>
               <a:t>Single training run per model; synthetic degradations; pixel art and alpha channels not yet evaluated.</a:t>
             </a:r>
-            <a:endParaRPr lang="en-US" sz="1350" dirty="0"/>
+            <a:endParaRPr lang="en-US" sz="1300" dirty="0"/>
           </a:p>
         </p:txBody>
       </p:sp>
@@ -9662,47 +8582,47 @@
 <file path=ppt/theme/theme1.xml><?xml version="1.0" encoding="utf-8"?>
 <a:theme xmlns:a="http://schemas.openxmlformats.org/drawingml/2006/main" name="Office Theme">
   <a:themeElements>
-    <a:clrScheme name="PixelForge">
+    <a:clrScheme name="PixelForge Neon">
       <a:dk1>
-        <a:srgbClr val="1F2937"/>
+        <a:srgbClr val="14532D"/>
       </a:dk1>
       <a:lt1>
         <a:srgbClr val="FFFFFF"/>
       </a:lt1>
       <a:dk2>
-        <a:srgbClr val="4B5563"/>
+        <a:srgbClr val="166534"/>
       </a:dk2>
       <a:lt2>
-        <a:srgbClr val="F6F5F4"/>
+        <a:srgbClr val="F0FDF4"/>
       </a:lt2>
       <a:accent1>
-        <a:srgbClr val="EA580C"/>
+        <a:srgbClr val="16A34A"/>
       </a:accent1>
       <a:accent2>
-        <a:srgbClr val="DC2626"/>
+        <a:srgbClr val="39FF14"/>
       </a:accent2>
       <a:accent3>
-        <a:srgbClr val="F59E0B"/>
+        <a:srgbClr val="4ADE80"/>
       </a:accent3>
       <a:accent4>
-        <a:srgbClr val="B91C1C"/>
+        <a:srgbClr val="15803D"/>
       </a:accent4>
       <a:accent5>
-        <a:srgbClr val="6B7280"/>
+        <a:srgbClr val="4B6B58"/>
       </a:accent5>
       <a:accent6>
-        <a:srgbClr val="E5E7EB"/>
+        <a:srgbClr val="86EFAC"/>
       </a:accent6>
       <a:hlink>
-        <a:srgbClr val="EA580C"/>
+        <a:srgbClr val="15803D"/>
       </a:hlink>
       <a:folHlink>
-        <a:srgbClr val="B91C1C"/>
+        <a:srgbClr val="166534"/>
       </a:folHlink>
     </a:clrScheme>
     <a:fontScheme name="Office">
       <a:majorFont>
-        <a:latin typeface="Arial"/>
+        <a:latin typeface="Segoe Script"/>
         <a:ea typeface=""/>
         <a:cs typeface=""/>
         <a:font script="Jpan" typeface="游ゴシック Light"/>
@@ -9754,7 +8674,7 @@
         <a:font script="Tfng" typeface="Ebrima"/>
       </a:majorFont>
       <a:minorFont>
-        <a:latin typeface="Calibri"/>
+        <a:latin typeface="Segoe UI"/>
         <a:ea typeface=""/>
         <a:cs typeface=""/>
         <a:font script="Jpan" typeface="游ゴシック"/>

--- a/presentation/deck.pptx
+++ b/presentation/deck.pptx
@@ -14,9 +14,10 @@
     <p:sldId id="262" r:id="rId8"/>
     <p:sldId id="263" r:id="rId9"/>
     <p:sldId id="264" r:id="rId10"/>
+    <p:sldId id="265" r:id="rId11"/>
   </p:sldIdLst>
   <p:notesMasterIdLst>
-    <p:notesMasterId r:id="rId11"/>
+    <p:notesMasterId r:id="rId12"/>
   </p:notesMasterIdLst>
   <p:sldSz cx="12192000" cy="6858000"/>
   <p:notesSz cx="6858000" cy="12192000"/>
@@ -115,41 +116,42 @@
   <p:extLst>
     <p:ext uri="{521415D9-36F7-43E2-AB2F-B90AF26B5E84}">
       <p14:sectionLst xmlns:p14="http://schemas.microsoft.com/office/powerpoint/2010/main">
-        <p14:section name="Hook" id="{df10b5c0-0eba-d61d-3c74-205a784b13cf}">
+        <p14:section name="Hook" id="{aed7fdb2-0f34-4d54-fbed-72bbb61f2287}">
           <p14:sldIdLst>
             <p14:sldId id="256"/>
           </p14:sldIdLst>
         </p14:section>
-        <p14:section name="Problem" id="{133a19d1-7526-cb53-6ba1-9beac4af8fd2}">
+        <p14:section name="Problem" id="{0566c98d-4d41-b794-2185-6e71695acce4}">
           <p14:sldIdLst>
             <p14:sldId id="257"/>
           </p14:sldIdLst>
         </p14:section>
-        <p14:section name="Solution" id="{b677a2f5-ebd0-1cb9-ec23-a65598b77ab6}">
+        <p14:section name="Solution" id="{a8549771-bde3-3395-0476-8cd665e9c30b}">
           <p14:sldIdLst>
             <p14:sldId id="258"/>
+            <p14:sldId id="259"/>
           </p14:sldIdLst>
         </p14:section>
-        <p14:section name="Results" id="{e12e3ffe-f2fb-4abc-5cd7-1bb9511e3022}">
+        <p14:section name="Results" id="{312fda28-9864-9f46-8e9f-ae4ca6fb445d}">
           <p14:sldIdLst>
-            <p14:sldId id="259"/>
             <p14:sldId id="260"/>
             <p14:sldId id="261"/>
-          </p14:sldIdLst>
-        </p14:section>
-        <p14:section name="Working together" id="{cdeb3a0d-a88e-2ebc-6516-3beb9a12ba22}">
-          <p14:sldIdLst>
             <p14:sldId id="262"/>
           </p14:sldIdLst>
         </p14:section>
-        <p14:section name="Call to action" id="{7c668e16-4a2d-59b0-6376-91194c38afb3}">
+        <p14:section name="Working together" id="{08e61b48-aefa-6e67-d8f1-f6653778e14b}">
           <p14:sldIdLst>
             <p14:sldId id="263"/>
           </p14:sldIdLst>
         </p14:section>
-        <p14:section name="Appendix" id="{0f229c10-45c6-68b5-2cec-661683412b08}">
+        <p14:section name="Call to action" id="{153e7b64-8894-7ff6-313c-a1759c006c5c}">
           <p14:sldIdLst>
             <p14:sldId id="264"/>
+          </p14:sldIdLst>
+        </p14:section>
+        <p14:section name="Appendix" id="{b1fd93c5-944e-f918-b926-14bac2ba7fd9}">
+          <p14:sldIdLst>
+            <p14:sldId id="265"/>
           </p14:sldIdLst>
         </p14:section>
       </p14:sectionLst>
@@ -598,6 +600,94 @@
 </p:notes>
 </file>
 
+<file path=ppt/notesSlides/notesSlide10.xml><?xml version="1.0" encoding="utf-8"?>
+<p:notes xmlns:a="http://schemas.openxmlformats.org/drawingml/2006/main" xmlns:r="http://schemas.openxmlformats.org/officeDocument/2006/relationships" xmlns:p="http://schemas.openxmlformats.org/presentationml/2006/main">
+  <p:cSld>
+    <p:spTree>
+      <p:nvGrpSpPr>
+        <p:cNvPr id="1" name=""/>
+        <p:cNvGrpSpPr/>
+        <p:nvPr/>
+      </p:nvGrpSpPr>
+      <p:grpSpPr>
+        <a:xfrm>
+          <a:off x="0" y="0"/>
+          <a:ext cx="0" cy="0"/>
+          <a:chOff x="0" y="0"/>
+          <a:chExt cx="0" cy="0"/>
+        </a:xfrm>
+      </p:grpSpPr>
+      <p:sp>
+        <p:nvSpPr>
+          <p:cNvPr id="2" name="Slide Image Placeholder 1"/>
+          <p:cNvSpPr>
+            <a:spLocks noGrp="1" noRot="1" noChangeAspect="1"/>
+          </p:cNvSpPr>
+          <p:nvPr>
+            <p:ph type="sldImg"/>
+          </p:nvPr>
+        </p:nvSpPr>
+        <p:spPr/>
+      </p:sp>
+      <p:sp>
+        <p:nvSpPr>
+          <p:cNvPr id="3" name="Notes Placeholder 2"/>
+          <p:cNvSpPr>
+            <a:spLocks noGrp="1"/>
+          </p:cNvSpPr>
+          <p:nvPr>
+            <p:ph type="body" idx="1"/>
+          </p:nvPr>
+        </p:nvSpPr>
+        <p:spPr/>
+        <p:txBody>
+          <a:bodyPr/>
+          <a:lstStyle/>
+          <a:p>
+            <a:r>
+              <a:rPr lang="en-US" dirty="0"/>
+              <a:t>For technical buyers: architectures compared, L1 vs GAN, and the official Real-ESRGAN models as references.</a:t>
+            </a:r>
+            <a:endParaRPr lang="en-US" dirty="0"/>
+          </a:p>
+        </p:txBody>
+      </p:sp>
+      <p:sp>
+        <p:nvSpPr>
+          <p:cNvPr id="4" name="Slide Number Placeholder 3"/>
+          <p:cNvSpPr>
+            <a:spLocks noGrp="1"/>
+          </p:cNvSpPr>
+          <p:nvPr>
+            <p:ph type="sldNum" sz="quarter" idx="10"/>
+          </p:nvPr>
+        </p:nvSpPr>
+        <p:spPr/>
+        <p:txBody>
+          <a:bodyPr/>
+          <a:lstStyle/>
+          <a:p>
+            <a:fld id="{F7021451-1387-4CA6-816F-3879F97B5CBC}" type="slidenum">
+              <a:rPr lang="en-US"/>
+              <a:t>10</a:t>
+            </a:fld>
+            <a:endParaRPr lang="en-US"/>
+          </a:p>
+        </p:txBody>
+      </p:sp>
+    </p:spTree>
+    <p:extLst>
+      <p:ext uri="{BB962C8B-B14F-4D97-AF65-F5344CB8AC3E}">
+        <p14:creationId xmlns:p14="http://schemas.microsoft.com/office/powerpoint/2010/main" val="1024086991"/>
+      </p:ext>
+    </p:extLst>
+  </p:cSld>
+  <p:clrMapOvr>
+    <a:masterClrMapping/>
+  </p:clrMapOvr>
+</p:notes>
+</file>
+
 <file path=ppt/notesSlides/notesSlide2.xml><?xml version="1.0" encoding="utf-8"?>
 <p:notes xmlns:a="http://schemas.openxmlformats.org/drawingml/2006/main" xmlns:r="http://schemas.openxmlformats.org/officeDocument/2006/relationships" xmlns:p="http://schemas.openxmlformats.org/presentationml/2006/main">
   <p:cSld>
@@ -820,7 +910,7 @@
           <a:p>
             <a:r>
               <a:rPr lang="en-US" dirty="0"/>
-              <a:t>One number that proves it works: closer to the real HD texture than bicubic, at a fraction of the big model's size.</a:t>
+              <a:t>For modders: batch whole packs, tiling textures stay seamless, transparent edges stay clean. All measured.</a:t>
             </a:r>
             <a:endParaRPr lang="en-US" dirty="0"/>
           </a:p>
@@ -908,7 +998,7 @@
           <a:p>
             <a:r>
               <a:rPr lang="en-US" dirty="0"/>
-              <a:t>Technical peek: the training trick is damaging clean textures on purpose so the model learns to undo it.</a:t>
+              <a:t>One number that proves it works: closer to the real HD texture than bicubic, at a fraction of the big model's size.</a:t>
             </a:r>
             <a:endParaRPr lang="en-US" dirty="0"/>
           </a:p>
@@ -996,7 +1086,7 @@
           <a:p>
             <a:r>
               <a:rPr lang="en-US" dirty="0"/>
-              <a:t>Run three textures live; toggle 'vs True HD' to show it's honest.</a:t>
+              <a:t>Technical peek: the training trick is damaging clean textures on purpose so the model learns to undo it.</a:t>
             </a:r>
             <a:endParaRPr lang="en-US" dirty="0"/>
           </a:p>
@@ -1084,7 +1174,7 @@
           <a:p>
             <a:r>
               <a:rPr lang="en-US" dirty="0"/>
-              <a:t>Lower the risk: a small test pack first.</a:t>
+              <a:t>Run three textures live; toggle 'vs True HD' to show it's honest.</a:t>
             </a:r>
             <a:endParaRPr lang="en-US" dirty="0"/>
           </a:p>
@@ -1172,7 +1262,7 @@
           <a:p>
             <a:r>
               <a:rPr lang="en-US" dirty="0"/>
-              <a:t>The live demo is linked. Send me ten textures and I'll send them back in HD.</a:t>
+              <a:t>Lower the risk: a small test pack first.</a:t>
             </a:r>
             <a:endParaRPr lang="en-US" dirty="0"/>
           </a:p>
@@ -1260,7 +1350,7 @@
           <a:p>
             <a:r>
               <a:rPr lang="en-US" dirty="0"/>
-              <a:t>For technical buyers: architectures compared, L1 vs GAN, and the official Real-ESRGAN models as references.</a:t>
+              <a:t>The live demo is linked. Send me ten textures and I'll send them back in HD.</a:t>
             </a:r>
             <a:endParaRPr lang="en-US" dirty="0"/>
           </a:p>
@@ -1502,7 +1592,7 @@
                   <a:schemeClr val="accent5"/>
                 </a:solidFill>
               </a:rPr>
-              <a:t>PixelForge · 4× game texture upscaler</a:t>
+              <a:t>PixelForge Engine · texture upscaling for modders</a:t>
             </a:r>
             <a:endParaRPr lang="en-US" sz="1100" dirty="0"/>
           </a:p>
@@ -1934,8 +2024,8 @@
         </p:nvSpPr>
         <p:spPr>
           <a:xfrm>
-            <a:off x="548640" y="1097280"/>
-            <a:ext cx="5562295" cy="411480"/>
+            <a:off x="548640" y="868680"/>
+            <a:ext cx="5562295" cy="365760"/>
           </a:xfrm>
           <a:prstGeom prst="rect">
             <a:avLst/>
@@ -1951,7 +2041,7 @@
               <a:buNone/>
             </a:pPr>
             <a:r>
-              <a:rPr lang="en-US" sz="1800" b="1" spc="300" kern="0" dirty="0">
+              <a:rPr lang="en-US" sz="1600" b="1" spc="300" kern="0" dirty="0">
                 <a:solidFill>
                   <a:schemeClr val="accent1"/>
                 </a:solidFill>
@@ -1959,9 +2049,9 @@
                 <a:ea typeface="Segoe UI" pitchFamily="34" charset="-122"/>
                 <a:cs typeface="Segoe UI" pitchFamily="34" charset="-120"/>
               </a:rPr>
-              <a:t>AI FOR GAME ARTISTS &amp; MODDERS</a:t>
-            </a:r>
-            <a:endParaRPr lang="en-US" sz="1800" dirty="0"/>
+              <a:t>UPSCALING ENGINE FOR MODDERS</a:t>
+            </a:r>
+            <a:endParaRPr lang="en-US" sz="1600" dirty="0"/>
           </a:p>
         </p:txBody>
       </p:sp>
@@ -1973,8 +2063,8 @@
         </p:nvSpPr>
         <p:spPr>
           <a:xfrm>
-            <a:off x="548640" y="1600200"/>
-            <a:ext cx="5562295" cy="1051560"/>
+            <a:off x="548640" y="1280160"/>
+            <a:ext cx="5562295" cy="2057400"/>
           </a:xfrm>
           <a:prstGeom prst="rect">
             <a:avLst/>
@@ -1987,10 +2077,13 @@
           <a:lstStyle/>
           <a:p>
             <a:pPr indent="0" marL="0">
+              <a:lnSpc>
+                <a:spcPct val="90000"/>
+              </a:lnSpc>
               <a:buNone/>
             </a:pPr>
             <a:r>
-              <a:rPr lang="en-US" sz="6600" b="1" dirty="0">
+              <a:rPr lang="en-US" sz="5600" b="1" dirty="0">
                 <a:solidFill>
                   <a:schemeClr val="tx1"/>
                 </a:solidFill>
@@ -2000,7 +2093,27 @@
               </a:rPr>
               <a:t>PixelForge</a:t>
             </a:r>
-            <a:endParaRPr lang="en-US" sz="6600" dirty="0"/>
+            <a:endParaRPr lang="en-US" sz="5600" dirty="0"/>
+          </a:p>
+          <a:p>
+            <a:pPr indent="0" marL="0">
+              <a:lnSpc>
+                <a:spcPct val="90000"/>
+              </a:lnSpc>
+              <a:buNone/>
+            </a:pPr>
+            <a:r>
+              <a:rPr lang="en-US" sz="5600" b="1" dirty="0">
+                <a:solidFill>
+                  <a:schemeClr val="accent1"/>
+                </a:solidFill>
+                <a:latin typeface="Segoe Script" pitchFamily="34" charset="0"/>
+                <a:ea typeface="Segoe Script" pitchFamily="34" charset="-122"/>
+                <a:cs typeface="Segoe Script" pitchFamily="34" charset="-120"/>
+              </a:rPr>
+              <a:t>Engine</a:t>
+            </a:r>
+            <a:endParaRPr lang="en-US" sz="5600" dirty="0"/>
           </a:p>
         </p:txBody>
       </p:sp>
@@ -2012,8 +2125,8 @@
         </p:nvSpPr>
         <p:spPr>
           <a:xfrm>
-            <a:off x="548640" y="2834640"/>
-            <a:ext cx="5562295" cy="1554480"/>
+            <a:off x="548640" y="3474720"/>
+            <a:ext cx="5562295" cy="1188720"/>
           </a:xfrm>
           <a:prstGeom prst="rect">
             <a:avLst/>
@@ -2029,7 +2142,7 @@
               <a:buNone/>
             </a:pPr>
             <a:r>
-              <a:rPr lang="en-US" sz="3000" b="1" dirty="0">
+              <a:rPr lang="en-US" sz="2600" b="1" dirty="0">
                 <a:solidFill>
                   <a:schemeClr val="tx1"/>
                 </a:solidFill>
@@ -2039,14 +2152,14 @@
               </a:rPr>
               <a:t>Old game textures in.</a:t>
             </a:r>
-            <a:endParaRPr lang="en-US" sz="3000" dirty="0"/>
+            <a:endParaRPr lang="en-US" sz="2600" dirty="0"/>
           </a:p>
           <a:p>
             <a:pPr indent="0" marL="0">
               <a:buNone/>
             </a:pPr>
             <a:r>
-              <a:rPr lang="en-US" sz="3000" b="1" dirty="0">
+              <a:rPr lang="en-US" sz="2600" b="1" dirty="0">
                 <a:solidFill>
                   <a:schemeClr val="accent1"/>
                 </a:solidFill>
@@ -2056,7 +2169,7 @@
               </a:rPr>
               <a:t>4× HD out.</a:t>
             </a:r>
-            <a:endParaRPr lang="en-US" sz="3000" dirty="0"/>
+            <a:endParaRPr lang="en-US" sz="2600" dirty="0"/>
           </a:p>
         </p:txBody>
       </p:sp>
@@ -2068,8 +2181,8 @@
         </p:nvSpPr>
         <p:spPr>
           <a:xfrm>
-            <a:off x="548640" y="4572000"/>
-            <a:ext cx="1280160" cy="502920"/>
+            <a:off x="548640" y="4892040"/>
+            <a:ext cx="1627632" cy="502920"/>
           </a:xfrm>
           <a:prstGeom prst="roundRect">
             <a:avLst>
@@ -2095,8 +2208,8 @@
         </p:nvSpPr>
         <p:spPr>
           <a:xfrm>
-            <a:off x="548640" y="4572000"/>
-            <a:ext cx="1280160" cy="502920"/>
+            <a:off x="548640" y="4892040"/>
+            <a:ext cx="1627632" cy="502920"/>
           </a:xfrm>
           <a:prstGeom prst="rect">
             <a:avLst/>
@@ -2117,7 +2230,7 @@
                   <a:schemeClr val="tx1"/>
                 </a:solidFill>
               </a:rPr>
-              <a:t>4× upscale</a:t>
+              <a:t>Seamless tiles</a:t>
             </a:r>
             <a:endParaRPr lang="en-US" sz="1500" dirty="0"/>
           </a:p>
@@ -2131,8 +2244,8 @@
         </p:nvSpPr>
         <p:spPr>
           <a:xfrm>
-            <a:off x="1938528" y="4572000"/>
-            <a:ext cx="2061972" cy="502920"/>
+            <a:off x="2286000" y="4892040"/>
+            <a:ext cx="1367028" cy="502920"/>
           </a:xfrm>
           <a:prstGeom prst="roundRect">
             <a:avLst>
@@ -2158,8 +2271,8 @@
         </p:nvSpPr>
         <p:spPr>
           <a:xfrm>
-            <a:off x="1938528" y="4572000"/>
-            <a:ext cx="2061972" cy="502920"/>
+            <a:off x="2286000" y="4892040"/>
+            <a:ext cx="1367028" cy="502920"/>
           </a:xfrm>
           <a:prstGeom prst="rect">
             <a:avLst/>
@@ -2180,7 +2293,7 @@
                   <a:schemeClr val="tx1"/>
                 </a:solidFill>
               </a:rPr>
-              <a:t>Trained on game art</a:t>
+              <a:t>Keeps alpha</a:t>
             </a:r>
             <a:endParaRPr lang="en-US" sz="1500" dirty="0"/>
           </a:p>
@@ -2194,8 +2307,8 @@
         </p:nvSpPr>
         <p:spPr>
           <a:xfrm>
-            <a:off x="4110228" y="4572000"/>
-            <a:ext cx="1714500" cy="502920"/>
+            <a:off x="3762756" y="4892040"/>
+            <a:ext cx="1888236" cy="502920"/>
           </a:xfrm>
           <a:prstGeom prst="roundRect">
             <a:avLst>
@@ -2221,8 +2334,8 @@
         </p:nvSpPr>
         <p:spPr>
           <a:xfrm>
-            <a:off x="4110228" y="4572000"/>
-            <a:ext cx="1714500" cy="502920"/>
+            <a:off x="3762756" y="4892040"/>
+            <a:ext cx="1888236" cy="502920"/>
           </a:xfrm>
           <a:prstGeom prst="rect">
             <a:avLst/>
@@ -2243,7 +2356,7 @@
                   <a:schemeClr val="tx1"/>
                 </a:solidFill>
               </a:rPr>
-              <a:t>Runs in browser</a:t>
+              <a:t>Batch whole packs</a:t>
             </a:r>
             <a:endParaRPr lang="en-US" sz="1500" dirty="0"/>
           </a:p>
@@ -2257,9 +2370,9 @@
 </p:sld>
 </file>
 
-<file path=ppt/slides/slide2.xml><?xml version="1.0" encoding="utf-8"?>
+<file path=ppt/slides/slide10.xml><?xml version="1.0" encoding="utf-8"?>
 <p:sld xmlns:a="http://schemas.openxmlformats.org/drawingml/2006/main" xmlns:r="http://schemas.openxmlformats.org/officeDocument/2006/relationships" xmlns:p="http://schemas.openxmlformats.org/presentationml/2006/main">
-  <p:cSld name="Slide 2">
+  <p:cSld name="Slide 10">
     <p:spTree>
       <p:nvGrpSpPr>
         <p:cNvPr id="1" name=""/>
@@ -2309,3857 +2422,6 @@
                 <a:ea typeface="Segoe UI" pitchFamily="34" charset="-122"/>
                 <a:cs typeface="Segoe UI" pitchFamily="34" charset="-120"/>
               </a:rPr>
-              <a:t>THE PROBLEM</a:t>
-            </a:r>
-            <a:endParaRPr lang="en-US" sz="1300" dirty="0"/>
-          </a:p>
-        </p:txBody>
-      </p:sp>
-      <p:sp>
-        <p:nvSpPr>
-          <p:cNvPr id="3" name="Text 0"/>
-          <p:cNvSpPr/>
-          <p:nvPr>
-            <p:ph idx="101" type="title" hasCustomPrompt="1"/>
-          </p:nvPr>
-        </p:nvSpPr>
-        <p:spPr>
-          <a:xfrm>
-            <a:off x="548640" y="749808"/>
-            <a:ext cx="11064240" cy="868680"/>
-          </a:xfrm>
-          <a:prstGeom prst="rect">
-            <a:avLst/>
-          </a:prstGeom>
-          <a:noFill/>
-          <a:ln/>
-        </p:spPr>
-        <p:txBody>
-          <a:bodyPr wrap="square" lIns="0" tIns="0" rIns="0" bIns="0" rtlCol="0" anchor="t"/>
-          <a:lstStyle/>
-          <a:p>
-            <a:pPr algn="l" indent="0" marL="0">
-              <a:buNone/>
-            </a:pPr>
-            <a:r>
-              <a:rPr lang="en-US" sz="3000" b="1" dirty="0">
-                <a:solidFill>
-                  <a:schemeClr val="tx1"/>
-                </a:solidFill>
-                <a:latin typeface="Segoe Script" pitchFamily="34" charset="0"/>
-                <a:ea typeface="Segoe Script" pitchFamily="34" charset="-122"/>
-                <a:cs typeface="Segoe Script" pitchFamily="34" charset="-120"/>
-              </a:rPr>
-              <a:t>HD screens expose every old texture.</a:t>
-            </a:r>
-            <a:endParaRPr lang="en-US" sz="3000" dirty="0"/>
-          </a:p>
-        </p:txBody>
-      </p:sp>
-      <p:sp>
-        <p:nvSpPr>
-          <p:cNvPr id="4" name="Problem 1"/>
-          <p:cNvSpPr/>
-          <p:nvPr/>
-        </p:nvSpPr>
-        <p:spPr>
-          <a:xfrm>
-            <a:off x="548640" y="2011680"/>
-            <a:ext cx="3483864" cy="2880360"/>
-          </a:xfrm>
-          <a:prstGeom prst="roundRect">
-            <a:avLst>
-              <a:gd name="adj" fmla="val 10159"/>
-            </a:avLst>
-          </a:prstGeom>
-          <a:solidFill>
-            <a:schemeClr val="bg2"/>
-          </a:solidFill>
-          <a:ln w="15875">
-            <a:solidFill>
-              <a:schemeClr val="accent6"/>
-            </a:solidFill>
-            <a:prstDash val="solid"/>
-          </a:ln>
-        </p:spPr>
-      </p:sp>
-      <p:sp>
-        <p:nvSpPr>
-          <p:cNvPr id="5" name="Shape 3"/>
-          <p:cNvSpPr/>
-          <p:nvPr/>
-        </p:nvSpPr>
-        <p:spPr>
-          <a:xfrm>
-            <a:off x="868680" y="2331720"/>
-            <a:ext cx="457200" cy="457200"/>
-          </a:xfrm>
-          <a:prstGeom prst="ellipse">
-            <a:avLst/>
-          </a:prstGeom>
-          <a:solidFill>
-            <a:schemeClr val="accent4"/>
-          </a:solidFill>
-          <a:ln w="25400">
-            <a:solidFill>
-              <a:schemeClr val="accent2"/>
-            </a:solidFill>
-            <a:prstDash val="solid"/>
-          </a:ln>
-        </p:spPr>
-      </p:sp>
-      <p:sp>
-        <p:nvSpPr>
-          <p:cNvPr id="6" name="Text 4"/>
-          <p:cNvSpPr txBox="1"/>
-          <p:nvPr/>
-        </p:nvSpPr>
-        <p:spPr>
-          <a:xfrm>
-            <a:off x="868680" y="2331720"/>
-            <a:ext cx="457200" cy="457200"/>
-          </a:xfrm>
-          <a:prstGeom prst="rect">
-            <a:avLst/>
-          </a:prstGeom>
-          <a:noFill/>
-          <a:ln/>
-        </p:spPr>
-        <p:txBody>
-          <a:bodyPr wrap="square" lIns="0" tIns="0" rIns="0" bIns="0" rtlCol="0" anchor="ctr"/>
-          <a:lstStyle/>
-          <a:p>
-            <a:pPr algn="ctr" indent="0" marL="0">
-              <a:buNone/>
-            </a:pPr>
-            <a:r>
-              <a:rPr lang="en-US" sz="1500" b="1" dirty="0">
-                <a:solidFill>
-                  <a:schemeClr val="bg1"/>
-                </a:solidFill>
-              </a:rPr>
-              <a:t>1</a:t>
-            </a:r>
-            <a:endParaRPr lang="en-US" sz="1500" dirty="0"/>
-          </a:p>
-        </p:txBody>
-      </p:sp>
-      <p:sp>
-        <p:nvSpPr>
-          <p:cNvPr id="7" name="Text 5"/>
-          <p:cNvSpPr txBox="1"/>
-          <p:nvPr/>
-        </p:nvSpPr>
-        <p:spPr>
-          <a:xfrm>
-            <a:off x="868680" y="2926080"/>
-            <a:ext cx="2843784" cy="685800"/>
-          </a:xfrm>
-          <a:prstGeom prst="rect">
-            <a:avLst/>
-          </a:prstGeom>
-          <a:noFill/>
-          <a:ln/>
-        </p:spPr>
-        <p:txBody>
-          <a:bodyPr wrap="square" lIns="0" tIns="0" rIns="0" bIns="0" rtlCol="0" anchor="t"/>
-          <a:lstStyle/>
-          <a:p>
-            <a:pPr indent="0" marL="0">
-              <a:buNone/>
-            </a:pPr>
-            <a:r>
-              <a:rPr lang="en-US" sz="1800" b="1" dirty="0">
-                <a:solidFill>
-                  <a:schemeClr val="tx1"/>
-                </a:solidFill>
-                <a:latin typeface="Segoe Script" pitchFamily="34" charset="0"/>
-                <a:ea typeface="Segoe Script" pitchFamily="34" charset="-122"/>
-                <a:cs typeface="Segoe Script" pitchFamily="34" charset="-120"/>
-              </a:rPr>
-              <a:t>Remasters need thousands of textures</a:t>
-            </a:r>
-            <a:endParaRPr lang="en-US" sz="1800" dirty="0"/>
-          </a:p>
-        </p:txBody>
-      </p:sp>
-      <p:sp>
-        <p:nvSpPr>
-          <p:cNvPr id="8" name="Text 6"/>
-          <p:cNvSpPr txBox="1"/>
-          <p:nvPr/>
-        </p:nvSpPr>
-        <p:spPr>
-          <a:xfrm>
-            <a:off x="868680" y="3703320"/>
-            <a:ext cx="2843784" cy="1097280"/>
-          </a:xfrm>
-          <a:prstGeom prst="rect">
-            <a:avLst/>
-          </a:prstGeom>
-          <a:noFill/>
-          <a:ln/>
-        </p:spPr>
-        <p:txBody>
-          <a:bodyPr wrap="square" lIns="0" tIns="0" rIns="0" bIns="0" rtlCol="0" anchor="t"/>
-          <a:lstStyle/>
-          <a:p>
-            <a:pPr indent="0" marL="0">
-              <a:buNone/>
-            </a:pPr>
-            <a:r>
-              <a:rPr lang="en-US" sz="1500" dirty="0">
-                <a:solidFill>
-                  <a:schemeClr val="tx2"/>
-                </a:solidFill>
-              </a:rPr>
-              <a:t>Redrawing every wall, floor and prop by hand is the slowest, most expensive part of a remaster or HD mod.</a:t>
-            </a:r>
-            <a:endParaRPr lang="en-US" sz="1500" dirty="0"/>
-          </a:p>
-        </p:txBody>
-      </p:sp>
-      <p:sp>
-        <p:nvSpPr>
-          <p:cNvPr id="9" name="Problem 2"/>
-          <p:cNvSpPr/>
-          <p:nvPr/>
-        </p:nvSpPr>
-        <p:spPr>
-          <a:xfrm>
-            <a:off x="4352544" y="2011680"/>
-            <a:ext cx="3483864" cy="2880360"/>
-          </a:xfrm>
-          <a:prstGeom prst="roundRect">
-            <a:avLst>
-              <a:gd name="adj" fmla="val 10159"/>
-            </a:avLst>
-          </a:prstGeom>
-          <a:solidFill>
-            <a:schemeClr val="bg2"/>
-          </a:solidFill>
-          <a:ln w="15875">
-            <a:solidFill>
-              <a:schemeClr val="accent6"/>
-            </a:solidFill>
-            <a:prstDash val="solid"/>
-          </a:ln>
-        </p:spPr>
-      </p:sp>
-      <p:sp>
-        <p:nvSpPr>
-          <p:cNvPr id="10" name="Shape 8"/>
-          <p:cNvSpPr/>
-          <p:nvPr/>
-        </p:nvSpPr>
-        <p:spPr>
-          <a:xfrm>
-            <a:off x="4672584" y="2331720"/>
-            <a:ext cx="457200" cy="457200"/>
-          </a:xfrm>
-          <a:prstGeom prst="ellipse">
-            <a:avLst/>
-          </a:prstGeom>
-          <a:solidFill>
-            <a:schemeClr val="accent4"/>
-          </a:solidFill>
-          <a:ln w="25400">
-            <a:solidFill>
-              <a:schemeClr val="accent2"/>
-            </a:solidFill>
-            <a:prstDash val="solid"/>
-          </a:ln>
-        </p:spPr>
-      </p:sp>
-      <p:sp>
-        <p:nvSpPr>
-          <p:cNvPr id="11" name="Text 9"/>
-          <p:cNvSpPr txBox="1"/>
-          <p:nvPr/>
-        </p:nvSpPr>
-        <p:spPr>
-          <a:xfrm>
-            <a:off x="4672584" y="2331720"/>
-            <a:ext cx="457200" cy="457200"/>
-          </a:xfrm>
-          <a:prstGeom prst="rect">
-            <a:avLst/>
-          </a:prstGeom>
-          <a:noFill/>
-          <a:ln/>
-        </p:spPr>
-        <p:txBody>
-          <a:bodyPr wrap="square" lIns="0" tIns="0" rIns="0" bIns="0" rtlCol="0" anchor="ctr"/>
-          <a:lstStyle/>
-          <a:p>
-            <a:pPr algn="ctr" indent="0" marL="0">
-              <a:buNone/>
-            </a:pPr>
-            <a:r>
-              <a:rPr lang="en-US" sz="1500" b="1" dirty="0">
-                <a:solidFill>
-                  <a:schemeClr val="bg1"/>
-                </a:solidFill>
-              </a:rPr>
-              <a:t>2</a:t>
-            </a:r>
-            <a:endParaRPr lang="en-US" sz="1500" dirty="0"/>
-          </a:p>
-        </p:txBody>
-      </p:sp>
-      <p:sp>
-        <p:nvSpPr>
-          <p:cNvPr id="12" name="Text 10"/>
-          <p:cNvSpPr txBox="1"/>
-          <p:nvPr/>
-        </p:nvSpPr>
-        <p:spPr>
-          <a:xfrm>
-            <a:off x="4672584" y="2926080"/>
-            <a:ext cx="2843784" cy="685800"/>
-          </a:xfrm>
-          <a:prstGeom prst="rect">
-            <a:avLst/>
-          </a:prstGeom>
-          <a:noFill/>
-          <a:ln/>
-        </p:spPr>
-        <p:txBody>
-          <a:bodyPr wrap="square" lIns="0" tIns="0" rIns="0" bIns="0" rtlCol="0" anchor="t"/>
-          <a:lstStyle/>
-          <a:p>
-            <a:pPr indent="0" marL="0">
-              <a:buNone/>
-            </a:pPr>
-            <a:r>
-              <a:rPr lang="en-US" sz="1800" b="1" dirty="0">
-                <a:solidFill>
-                  <a:schemeClr val="tx1"/>
-                </a:solidFill>
-                <a:latin typeface="Segoe Script" pitchFamily="34" charset="0"/>
-                <a:ea typeface="Segoe Script" pitchFamily="34" charset="-122"/>
-                <a:cs typeface="Segoe Script" pitchFamily="34" charset="-120"/>
-              </a:rPr>
-              <a:t>Simple resizing just blurs</a:t>
-            </a:r>
-            <a:endParaRPr lang="en-US" sz="1800" dirty="0"/>
-          </a:p>
-        </p:txBody>
-      </p:sp>
-      <p:sp>
-        <p:nvSpPr>
-          <p:cNvPr id="13" name="Text 11"/>
-          <p:cNvSpPr txBox="1"/>
-          <p:nvPr/>
-        </p:nvSpPr>
-        <p:spPr>
-          <a:xfrm>
-            <a:off x="4672584" y="3703320"/>
-            <a:ext cx="2843784" cy="1097280"/>
-          </a:xfrm>
-          <a:prstGeom prst="rect">
-            <a:avLst/>
-          </a:prstGeom>
-          <a:noFill/>
-          <a:ln/>
-        </p:spPr>
-        <p:txBody>
-          <a:bodyPr wrap="square" lIns="0" tIns="0" rIns="0" bIns="0" rtlCol="0" anchor="t"/>
-          <a:lstStyle/>
-          <a:p>
-            <a:pPr indent="0" marL="0">
-              <a:buNone/>
-            </a:pPr>
-            <a:r>
-              <a:rPr lang="en-US" sz="1500" dirty="0">
-                <a:solidFill>
-                  <a:schemeClr val="tx2"/>
-                </a:solidFill>
-              </a:rPr>
-              <a:t>Stretching a texture 4× with bicubic gives soft, muddy surfaces that look worse on a modern monitor.</a:t>
-            </a:r>
-            <a:endParaRPr lang="en-US" sz="1500" dirty="0"/>
-          </a:p>
-        </p:txBody>
-      </p:sp>
-      <p:sp>
-        <p:nvSpPr>
-          <p:cNvPr id="14" name="Problem 3"/>
-          <p:cNvSpPr/>
-          <p:nvPr/>
-        </p:nvSpPr>
-        <p:spPr>
-          <a:xfrm>
-            <a:off x="8156448" y="2011680"/>
-            <a:ext cx="3483864" cy="2880360"/>
-          </a:xfrm>
-          <a:prstGeom prst="roundRect">
-            <a:avLst>
-              <a:gd name="adj" fmla="val 10159"/>
-            </a:avLst>
-          </a:prstGeom>
-          <a:solidFill>
-            <a:schemeClr val="bg2"/>
-          </a:solidFill>
-          <a:ln w="15875">
-            <a:solidFill>
-              <a:schemeClr val="accent6"/>
-            </a:solidFill>
-            <a:prstDash val="solid"/>
-          </a:ln>
-        </p:spPr>
-      </p:sp>
-      <p:sp>
-        <p:nvSpPr>
-          <p:cNvPr id="15" name="Shape 13"/>
-          <p:cNvSpPr/>
-          <p:nvPr/>
-        </p:nvSpPr>
-        <p:spPr>
-          <a:xfrm>
-            <a:off x="8476488" y="2331720"/>
-            <a:ext cx="457200" cy="457200"/>
-          </a:xfrm>
-          <a:prstGeom prst="ellipse">
-            <a:avLst/>
-          </a:prstGeom>
-          <a:solidFill>
-            <a:schemeClr val="accent4"/>
-          </a:solidFill>
-          <a:ln w="25400">
-            <a:solidFill>
-              <a:schemeClr val="accent2"/>
-            </a:solidFill>
-            <a:prstDash val="solid"/>
-          </a:ln>
-        </p:spPr>
-      </p:sp>
-      <p:sp>
-        <p:nvSpPr>
-          <p:cNvPr id="16" name="Text 14"/>
-          <p:cNvSpPr txBox="1"/>
-          <p:nvPr/>
-        </p:nvSpPr>
-        <p:spPr>
-          <a:xfrm>
-            <a:off x="8476488" y="2331720"/>
-            <a:ext cx="457200" cy="457200"/>
-          </a:xfrm>
-          <a:prstGeom prst="rect">
-            <a:avLst/>
-          </a:prstGeom>
-          <a:noFill/>
-          <a:ln/>
-        </p:spPr>
-        <p:txBody>
-          <a:bodyPr wrap="square" lIns="0" tIns="0" rIns="0" bIns="0" rtlCol="0" anchor="ctr"/>
-          <a:lstStyle/>
-          <a:p>
-            <a:pPr algn="ctr" indent="0" marL="0">
-              <a:buNone/>
-            </a:pPr>
-            <a:r>
-              <a:rPr lang="en-US" sz="1500" b="1" dirty="0">
-                <a:solidFill>
-                  <a:schemeClr val="bg1"/>
-                </a:solidFill>
-              </a:rPr>
-              <a:t>3</a:t>
-            </a:r>
-            <a:endParaRPr lang="en-US" sz="1500" dirty="0"/>
-          </a:p>
-        </p:txBody>
-      </p:sp>
-      <p:sp>
-        <p:nvSpPr>
-          <p:cNvPr id="17" name="Text 15"/>
-          <p:cNvSpPr txBox="1"/>
-          <p:nvPr/>
-        </p:nvSpPr>
-        <p:spPr>
-          <a:xfrm>
-            <a:off x="8476488" y="2926080"/>
-            <a:ext cx="2843784" cy="685800"/>
-          </a:xfrm>
-          <a:prstGeom prst="rect">
-            <a:avLst/>
-          </a:prstGeom>
-          <a:noFill/>
-          <a:ln/>
-        </p:spPr>
-        <p:txBody>
-          <a:bodyPr wrap="square" lIns="0" tIns="0" rIns="0" bIns="0" rtlCol="0" anchor="t"/>
-          <a:lstStyle/>
-          <a:p>
-            <a:pPr indent="0" marL="0">
-              <a:buNone/>
-            </a:pPr>
-            <a:r>
-              <a:rPr lang="en-US" sz="1800" b="1" dirty="0">
-                <a:solidFill>
-                  <a:schemeClr val="tx1"/>
-                </a:solidFill>
-                <a:latin typeface="Segoe Script" pitchFamily="34" charset="0"/>
-                <a:ea typeface="Segoe Script" pitchFamily="34" charset="-122"/>
-                <a:cs typeface="Segoe Script" pitchFamily="34" charset="-120"/>
-              </a:rPr>
-              <a:t>Generic AI upscalers aren't tuned for games</a:t>
-            </a:r>
-            <a:endParaRPr lang="en-US" sz="1800" dirty="0"/>
-          </a:p>
-        </p:txBody>
-      </p:sp>
-      <p:sp>
-        <p:nvSpPr>
-          <p:cNvPr id="18" name="Text 16"/>
-          <p:cNvSpPr txBox="1"/>
-          <p:nvPr/>
-        </p:nvSpPr>
-        <p:spPr>
-          <a:xfrm>
-            <a:off x="8476488" y="3703320"/>
-            <a:ext cx="2843784" cy="1097280"/>
-          </a:xfrm>
-          <a:prstGeom prst="rect">
-            <a:avLst/>
-          </a:prstGeom>
-          <a:noFill/>
-          <a:ln/>
-        </p:spPr>
-        <p:txBody>
-          <a:bodyPr wrap="square" lIns="0" tIns="0" rIns="0" bIns="0" rtlCol="0" anchor="t"/>
-          <a:lstStyle/>
-          <a:p>
-            <a:pPr indent="0" marL="0">
-              <a:buNone/>
-            </a:pPr>
-            <a:r>
-              <a:rPr lang="en-US" sz="1500" dirty="0">
-                <a:solidFill>
-                  <a:schemeClr val="tx2"/>
-                </a:solidFill>
-              </a:rPr>
-              <a:t>Tools trained on photos can smear tiling patterns or invent the wrong kind of detail.</a:t>
-            </a:r>
-            <a:endParaRPr lang="en-US" sz="1500" dirty="0"/>
-          </a:p>
-        </p:txBody>
-      </p:sp>
-      <p:sp>
-        <p:nvSpPr>
-          <p:cNvPr id="19" name="Text 17"/>
-          <p:cNvSpPr txBox="1"/>
-          <p:nvPr/>
-        </p:nvSpPr>
-        <p:spPr>
-          <a:xfrm>
-            <a:off x="548640" y="5303520"/>
-            <a:ext cx="11064240" cy="640080"/>
-          </a:xfrm>
-          <a:prstGeom prst="rect">
-            <a:avLst/>
-          </a:prstGeom>
-          <a:noFill/>
-          <a:ln/>
-        </p:spPr>
-        <p:txBody>
-          <a:bodyPr wrap="square" lIns="0" tIns="0" rIns="0" bIns="0" rtlCol="0" anchor="ctr"/>
-          <a:lstStyle/>
-          <a:p>
-            <a:pPr indent="0" marL="0">
-              <a:buNone/>
-            </a:pPr>
-            <a:r>
-              <a:rPr lang="en-US" sz="2400" dirty="0">
-                <a:solidFill>
-                  <a:schemeClr val="tx2"/>
-                </a:solidFill>
-              </a:rPr>
-              <a:t>PixelForge does the first pass for you: </a:t>
-            </a:r>
-            <a:pPr indent="0" marL="0">
-              <a:buNone/>
-            </a:pPr>
-            <a:r>
-              <a:rPr lang="en-US" sz="2400" b="1" dirty="0">
-                <a:solidFill>
-                  <a:schemeClr val="accent1"/>
-                </a:solidFill>
-              </a:rPr>
-              <a:t>seconds per texture, in your browser.</a:t>
-            </a:r>
-            <a:endParaRPr lang="en-US" sz="2400" dirty="0"/>
-          </a:p>
-        </p:txBody>
-      </p:sp>
-      <p:sp>
-        <p:nvSpPr>
-          <p:cNvPr id="25" name="Slide Number Placeholder 0"/>
-          <p:cNvSpPr>
-            <a:spLocks noGrp="1"/>
-          </p:cNvSpPr>
-          <p:nvPr>
-            <p:ph type="sldNum" sz="quarter" idx="4294967295"/>
-          </p:nvPr>
-        </p:nvSpPr>
-        <p:spPr>
-          <a:xfrm>
-            <a:off x="11064240" y="6400800"/>
-            <a:ext cx="576072" cy="274320"/>
-          </a:xfrm>
-          <a:prstGeom prst="rect">
-            <a:avLst/>
-          </a:prstGeom>
-          <a:extLst>
-            <a:ext uri="{C572A759-6A51-4108-AA02-DFA0A04FC94B}">
-              <ma14:wrappingTextBoxFlag xmlns:ma14="http://schemas.microsoft.com/office/mac/drawingml/2011/main" val="0"/>
-            </a:ext>
-          </a:extLst>
-        </p:spPr>
-        <p:txBody>
-          <a:bodyPr/>
-          <a:lstStyle>
-            <a:lvl1pPr>
-              <a:defRPr sz="1100">
-                <a:solidFill>
-                  <a:schemeClr val="accent5"/>
-                </a:solidFill>
-              </a:defRPr>
-            </a:lvl1pPr>
-          </a:lstStyle>
-          <a:p>
-            <a:pPr algn="r"/>
-            <a:fld id="{F7021451-1387-4CA6-816F-3879F97B5CBC}" type="slidenum">
-              <a:rPr b="0" lang="en-US"/>
-              <a:t>2</a:t>
-            </a:fld>
-            <a:endParaRPr lang="en-US"/>
-          </a:p>
-        </p:txBody>
-      </p:sp>
-    </p:spTree>
-  </p:cSld>
-  <p:clrMapOvr>
-    <a:masterClrMapping/>
-  </p:clrMapOvr>
-</p:sld>
-</file>
-
-<file path=ppt/slides/slide3.xml><?xml version="1.0" encoding="utf-8"?>
-<p:sld xmlns:a="http://schemas.openxmlformats.org/drawingml/2006/main" xmlns:r="http://schemas.openxmlformats.org/officeDocument/2006/relationships" xmlns:p="http://schemas.openxmlformats.org/presentationml/2006/main">
-  <p:cSld name="Slide 3">
-    <p:spTree>
-      <p:nvGrpSpPr>
-        <p:cNvPr id="1" name=""/>
-        <p:cNvGrpSpPr/>
-        <p:nvPr/>
-      </p:nvGrpSpPr>
-      <p:grpSpPr>
-        <a:xfrm>
-          <a:off x="0" y="0"/>
-          <a:ext cx="0" cy="0"/>
-          <a:chOff x="0" y="0"/>
-          <a:chExt cx="0" cy="0"/>
-        </a:xfrm>
-      </p:grpSpPr>
-      <p:sp>
-        <p:nvSpPr>
-          <p:cNvPr id="2" name="Text 0"/>
-          <p:cNvSpPr/>
-          <p:nvPr>
-            <p:ph idx="100" type="body" hasCustomPrompt="1"/>
-          </p:nvPr>
-        </p:nvSpPr>
-        <p:spPr>
-          <a:xfrm>
-            <a:off x="548640" y="384048"/>
-            <a:ext cx="11064240" cy="365760"/>
-          </a:xfrm>
-          <a:prstGeom prst="rect">
-            <a:avLst/>
-          </a:prstGeom>
-          <a:noFill/>
-          <a:ln/>
-        </p:spPr>
-        <p:txBody>
-          <a:bodyPr wrap="square" lIns="0" tIns="0" rIns="0" bIns="0" rtlCol="0" anchor="ctr"/>
-          <a:lstStyle/>
-          <a:p>
-            <a:pPr indent="0" marL="0">
-              <a:buNone/>
-            </a:pPr>
-            <a:r>
-              <a:rPr lang="en-US" sz="1300" b="1" spc="200" kern="0" dirty="0">
-                <a:solidFill>
-                  <a:schemeClr val="accent1"/>
-                </a:solidFill>
-                <a:latin typeface="Segoe UI" pitchFamily="34" charset="0"/>
-                <a:ea typeface="Segoe UI" pitchFamily="34" charset="-122"/>
-                <a:cs typeface="Segoe UI" pitchFamily="34" charset="-120"/>
-              </a:rPr>
-              <a:t>TRY IT YOURSELF</a:t>
-            </a:r>
-            <a:endParaRPr lang="en-US" sz="1300" dirty="0"/>
-          </a:p>
-        </p:txBody>
-      </p:sp>
-      <p:sp>
-        <p:nvSpPr>
-          <p:cNvPr id="3" name="Text 0"/>
-          <p:cNvSpPr/>
-          <p:nvPr>
-            <p:ph idx="101" type="title" hasCustomPrompt="1"/>
-          </p:nvPr>
-        </p:nvSpPr>
-        <p:spPr>
-          <a:xfrm>
-            <a:off x="548640" y="749808"/>
-            <a:ext cx="11064240" cy="868680"/>
-          </a:xfrm>
-          <a:prstGeom prst="rect">
-            <a:avLst/>
-          </a:prstGeom>
-          <a:noFill/>
-          <a:ln/>
-        </p:spPr>
-        <p:txBody>
-          <a:bodyPr wrap="square" lIns="0" tIns="0" rIns="0" bIns="0" rtlCol="0" anchor="t"/>
-          <a:lstStyle/>
-          <a:p>
-            <a:pPr algn="l" indent="0" marL="0">
-              <a:buNone/>
-            </a:pPr>
-            <a:r>
-              <a:rPr lang="en-US" sz="3000" b="1" dirty="0">
-                <a:solidFill>
-                  <a:schemeClr val="tx1"/>
-                </a:solidFill>
-                <a:latin typeface="Segoe Script" pitchFamily="34" charset="0"/>
-                <a:ea typeface="Segoe Script" pitchFamily="34" charset="-122"/>
-                <a:cs typeface="Segoe Script" pitchFamily="34" charset="-120"/>
-              </a:rPr>
-              <a:t>Drop in a texture. Drag the slider.</a:t>
-            </a:r>
-            <a:endParaRPr lang="en-US" sz="3000" dirty="0"/>
-          </a:p>
-        </p:txBody>
-      </p:sp>
-      <p:sp>
-        <p:nvSpPr>
-          <p:cNvPr id="4" name="Screenshot frame"/>
-          <p:cNvSpPr/>
-          <p:nvPr/>
-        </p:nvSpPr>
-        <p:spPr>
-          <a:xfrm>
-            <a:off x="548640" y="1783080"/>
-            <a:ext cx="6949440" cy="4434840"/>
-          </a:xfrm>
-          <a:prstGeom prst="roundRect">
-            <a:avLst>
-              <a:gd name="adj" fmla="val 6598"/>
-            </a:avLst>
-          </a:prstGeom>
-          <a:solidFill>
-            <a:schemeClr val="bg2"/>
-          </a:solidFill>
-          <a:ln w="15875">
-            <a:solidFill>
-              <a:schemeClr val="accent6"/>
-            </a:solidFill>
-            <a:prstDash val="solid"/>
-          </a:ln>
-        </p:spPr>
-      </p:sp>
-      <p:pic>
-        <p:nvPicPr>
-          <p:cNvPr id="5" name="Demo screenshot" descr="PixelForge web app with a before/after slider">    </p:cNvPr>
-          <p:cNvPicPr>
-            <a:picLocks noChangeAspect="1"/>
-          </p:cNvPicPr>
-          <p:nvPr/>
-        </p:nvPicPr>
-        <p:blipFill>
-          <a:blip r:embed="rId1"/>
-          <a:stretch>
-            <a:fillRect/>
-          </a:stretch>
-        </p:blipFill>
-        <p:spPr>
-          <a:xfrm>
-            <a:off x="1479464" y="1920240"/>
-            <a:ext cx="5087791" cy="4160520"/>
-          </a:xfrm>
-          <a:prstGeom prst="rect">
-            <a:avLst/>
-          </a:prstGeom>
-        </p:spPr>
-      </p:pic>
-      <p:sp>
-        <p:nvSpPr>
-          <p:cNvPr id="6" name="Point 1"/>
-          <p:cNvSpPr/>
-          <p:nvPr/>
-        </p:nvSpPr>
-        <p:spPr>
-          <a:xfrm>
-            <a:off x="7818120" y="1783080"/>
-            <a:ext cx="3824935" cy="1325880"/>
-          </a:xfrm>
-          <a:prstGeom prst="roundRect">
-            <a:avLst>
-              <a:gd name="adj" fmla="val 22069"/>
-            </a:avLst>
-          </a:prstGeom>
-          <a:solidFill>
-            <a:schemeClr val="bg2"/>
-          </a:solidFill>
-          <a:ln w="15875">
-            <a:solidFill>
-              <a:schemeClr val="accent6"/>
-            </a:solidFill>
-            <a:prstDash val="solid"/>
-          </a:ln>
-        </p:spPr>
-      </p:sp>
-      <p:sp>
-        <p:nvSpPr>
-          <p:cNvPr id="7" name="Shape 4"/>
-          <p:cNvSpPr/>
-          <p:nvPr/>
-        </p:nvSpPr>
-        <p:spPr>
-          <a:xfrm>
-            <a:off x="8046720" y="2011680"/>
-            <a:ext cx="457200" cy="457200"/>
-          </a:xfrm>
-          <a:prstGeom prst="ellipse">
-            <a:avLst/>
-          </a:prstGeom>
-          <a:solidFill>
-            <a:schemeClr val="accent4"/>
-          </a:solidFill>
-          <a:ln w="25400">
-            <a:solidFill>
-              <a:schemeClr val="accent2"/>
-            </a:solidFill>
-            <a:prstDash val="solid"/>
-          </a:ln>
-        </p:spPr>
-      </p:sp>
-      <p:sp>
-        <p:nvSpPr>
-          <p:cNvPr id="8" name="Text 5"/>
-          <p:cNvSpPr txBox="1"/>
-          <p:nvPr/>
-        </p:nvSpPr>
-        <p:spPr>
-          <a:xfrm>
-            <a:off x="8046720" y="2011680"/>
-            <a:ext cx="457200" cy="457200"/>
-          </a:xfrm>
-          <a:prstGeom prst="rect">
-            <a:avLst/>
-          </a:prstGeom>
-          <a:noFill/>
-          <a:ln/>
-        </p:spPr>
-        <p:txBody>
-          <a:bodyPr wrap="square" lIns="0" tIns="0" rIns="0" bIns="0" rtlCol="0" anchor="ctr"/>
-          <a:lstStyle/>
-          <a:p>
-            <a:pPr algn="ctr" indent="0" marL="0">
-              <a:buNone/>
-            </a:pPr>
-            <a:r>
-              <a:rPr lang="en-US" sz="1500" b="1" dirty="0">
-                <a:solidFill>
-                  <a:schemeClr val="bg1"/>
-                </a:solidFill>
-              </a:rPr>
-              <a:t>1</a:t>
-            </a:r>
-            <a:endParaRPr lang="en-US" sz="1500" dirty="0"/>
-          </a:p>
-        </p:txBody>
-      </p:sp>
-      <p:sp>
-        <p:nvSpPr>
-          <p:cNvPr id="9" name="Text 6"/>
-          <p:cNvSpPr txBox="1"/>
-          <p:nvPr/>
-        </p:nvSpPr>
-        <p:spPr>
-          <a:xfrm>
-            <a:off x="8686800" y="1965960"/>
-            <a:ext cx="2773375" cy="411480"/>
-          </a:xfrm>
-          <a:prstGeom prst="rect">
-            <a:avLst/>
-          </a:prstGeom>
-          <a:noFill/>
-          <a:ln/>
-        </p:spPr>
-        <p:txBody>
-          <a:bodyPr wrap="square" lIns="0" tIns="0" rIns="0" bIns="0" rtlCol="0" anchor="ctr"/>
-          <a:lstStyle/>
-          <a:p>
-            <a:pPr indent="0" marL="0">
-              <a:buNone/>
-            </a:pPr>
-            <a:r>
-              <a:rPr lang="en-US" sz="1600" b="1" dirty="0">
-                <a:solidFill>
-                  <a:schemeClr val="tx1"/>
-                </a:solidFill>
-                <a:latin typeface="Segoe Script" pitchFamily="34" charset="0"/>
-                <a:ea typeface="Segoe Script" pitchFamily="34" charset="-122"/>
-                <a:cs typeface="Segoe Script" pitchFamily="34" charset="-120"/>
-              </a:rPr>
-              <a:t>Before/after slider</a:t>
-            </a:r>
-            <a:endParaRPr lang="en-US" sz="1600" dirty="0"/>
-          </a:p>
-        </p:txBody>
-      </p:sp>
-      <p:sp>
-        <p:nvSpPr>
-          <p:cNvPr id="10" name="Text 7"/>
-          <p:cNvSpPr txBox="1"/>
-          <p:nvPr/>
-        </p:nvSpPr>
-        <p:spPr>
-          <a:xfrm>
-            <a:off x="8686800" y="2377440"/>
-            <a:ext cx="2773375" cy="658368"/>
-          </a:xfrm>
-          <a:prstGeom prst="rect">
-            <a:avLst/>
-          </a:prstGeom>
-          <a:noFill/>
-          <a:ln/>
-        </p:spPr>
-        <p:txBody>
-          <a:bodyPr wrap="square" lIns="0" tIns="0" rIns="0" bIns="0" rtlCol="0" anchor="t"/>
-          <a:lstStyle/>
-          <a:p>
-            <a:pPr indent="0" marL="0">
-              <a:buNone/>
-            </a:pPr>
-            <a:r>
-              <a:rPr lang="en-US" sz="1300" dirty="0">
-                <a:solidFill>
-                  <a:schemeClr val="tx2"/>
-                </a:solidFill>
-              </a:rPr>
-              <a:t>Compare against bicubic, the original pixels, or the true HD texture.</a:t>
-            </a:r>
-            <a:endParaRPr lang="en-US" sz="1300" dirty="0"/>
-          </a:p>
-        </p:txBody>
-      </p:sp>
-      <p:sp>
-        <p:nvSpPr>
-          <p:cNvPr id="11" name="Point 2"/>
-          <p:cNvSpPr/>
-          <p:nvPr/>
-        </p:nvSpPr>
-        <p:spPr>
-          <a:xfrm>
-            <a:off x="7818120" y="3337560"/>
-            <a:ext cx="3824935" cy="1325880"/>
-          </a:xfrm>
-          <a:prstGeom prst="roundRect">
-            <a:avLst>
-              <a:gd name="adj" fmla="val 22069"/>
-            </a:avLst>
-          </a:prstGeom>
-          <a:solidFill>
-            <a:schemeClr val="bg2"/>
-          </a:solidFill>
-          <a:ln w="15875">
-            <a:solidFill>
-              <a:schemeClr val="accent6"/>
-            </a:solidFill>
-            <a:prstDash val="solid"/>
-          </a:ln>
-        </p:spPr>
-      </p:sp>
-      <p:sp>
-        <p:nvSpPr>
-          <p:cNvPr id="12" name="Shape 9"/>
-          <p:cNvSpPr/>
-          <p:nvPr/>
-        </p:nvSpPr>
-        <p:spPr>
-          <a:xfrm>
-            <a:off x="8046720" y="3566160"/>
-            <a:ext cx="457200" cy="457200"/>
-          </a:xfrm>
-          <a:prstGeom prst="ellipse">
-            <a:avLst/>
-          </a:prstGeom>
-          <a:solidFill>
-            <a:schemeClr val="accent4"/>
-          </a:solidFill>
-          <a:ln w="25400">
-            <a:solidFill>
-              <a:schemeClr val="accent2"/>
-            </a:solidFill>
-            <a:prstDash val="solid"/>
-          </a:ln>
-        </p:spPr>
-      </p:sp>
-      <p:sp>
-        <p:nvSpPr>
-          <p:cNvPr id="13" name="Text 10"/>
-          <p:cNvSpPr txBox="1"/>
-          <p:nvPr/>
-        </p:nvSpPr>
-        <p:spPr>
-          <a:xfrm>
-            <a:off x="8046720" y="3566160"/>
-            <a:ext cx="457200" cy="457200"/>
-          </a:xfrm>
-          <a:prstGeom prst="rect">
-            <a:avLst/>
-          </a:prstGeom>
-          <a:noFill/>
-          <a:ln/>
-        </p:spPr>
-        <p:txBody>
-          <a:bodyPr wrap="square" lIns="0" tIns="0" rIns="0" bIns="0" rtlCol="0" anchor="ctr"/>
-          <a:lstStyle/>
-          <a:p>
-            <a:pPr algn="ctr" indent="0" marL="0">
-              <a:buNone/>
-            </a:pPr>
-            <a:r>
-              <a:rPr lang="en-US" sz="1500" b="1" dirty="0">
-                <a:solidFill>
-                  <a:schemeClr val="bg1"/>
-                </a:solidFill>
-              </a:rPr>
-              <a:t>2</a:t>
-            </a:r>
-            <a:endParaRPr lang="en-US" sz="1500" dirty="0"/>
-          </a:p>
-        </p:txBody>
-      </p:sp>
-      <p:sp>
-        <p:nvSpPr>
-          <p:cNvPr id="14" name="Text 11"/>
-          <p:cNvSpPr txBox="1"/>
-          <p:nvPr/>
-        </p:nvSpPr>
-        <p:spPr>
-          <a:xfrm>
-            <a:off x="8686800" y="3520440"/>
-            <a:ext cx="2773375" cy="411480"/>
-          </a:xfrm>
-          <a:prstGeom prst="rect">
-            <a:avLst/>
-          </a:prstGeom>
-          <a:noFill/>
-          <a:ln/>
-        </p:spPr>
-        <p:txBody>
-          <a:bodyPr wrap="square" lIns="0" tIns="0" rIns="0" bIns="0" rtlCol="0" anchor="ctr"/>
-          <a:lstStyle/>
-          <a:p>
-            <a:pPr indent="0" marL="0">
-              <a:buNone/>
-            </a:pPr>
-            <a:r>
-              <a:rPr lang="en-US" sz="1600" b="1" dirty="0">
-                <a:solidFill>
-                  <a:schemeClr val="tx1"/>
-                </a:solidFill>
-                <a:latin typeface="Segoe Script" pitchFamily="34" charset="0"/>
-                <a:ea typeface="Segoe Script" pitchFamily="34" charset="-122"/>
-                <a:cs typeface="Segoe Script" pitchFamily="34" charset="-120"/>
-              </a:rPr>
-              <a:t>Runs in your browser</a:t>
-            </a:r>
-            <a:endParaRPr lang="en-US" sz="1600" dirty="0"/>
-          </a:p>
-        </p:txBody>
-      </p:sp>
-      <p:sp>
-        <p:nvSpPr>
-          <p:cNvPr id="15" name="Text 12"/>
-          <p:cNvSpPr txBox="1"/>
-          <p:nvPr/>
-        </p:nvSpPr>
-        <p:spPr>
-          <a:xfrm>
-            <a:off x="8686800" y="3931920"/>
-            <a:ext cx="2773375" cy="658368"/>
-          </a:xfrm>
-          <a:prstGeom prst="rect">
-            <a:avLst/>
-          </a:prstGeom>
-          <a:noFill/>
-          <a:ln/>
-        </p:spPr>
-        <p:txBody>
-          <a:bodyPr wrap="square" lIns="0" tIns="0" rIns="0" bIns="0" rtlCol="0" anchor="t"/>
-          <a:lstStyle/>
-          <a:p>
-            <a:pPr indent="0" marL="0">
-              <a:buNone/>
-            </a:pPr>
-            <a:r>
-              <a:rPr lang="en-US" sz="1300" dirty="0">
-                <a:solidFill>
-                  <a:schemeClr val="tx2"/>
-                </a:solidFill>
-              </a:rPr>
-              <a:t>No upload, no server, no install. Your art never leaves your machine.</a:t>
-            </a:r>
-            <a:endParaRPr lang="en-US" sz="1300" dirty="0"/>
-          </a:p>
-        </p:txBody>
-      </p:sp>
-      <p:sp>
-        <p:nvSpPr>
-          <p:cNvPr id="16" name="Point 3"/>
-          <p:cNvSpPr/>
-          <p:nvPr/>
-        </p:nvSpPr>
-        <p:spPr>
-          <a:xfrm>
-            <a:off x="7818120" y="4892040"/>
-            <a:ext cx="3824935" cy="1325880"/>
-          </a:xfrm>
-          <a:prstGeom prst="roundRect">
-            <a:avLst>
-              <a:gd name="adj" fmla="val 22069"/>
-            </a:avLst>
-          </a:prstGeom>
-          <a:solidFill>
-            <a:schemeClr val="bg2"/>
-          </a:solidFill>
-          <a:ln w="15875">
-            <a:solidFill>
-              <a:schemeClr val="accent6"/>
-            </a:solidFill>
-            <a:prstDash val="solid"/>
-          </a:ln>
-        </p:spPr>
-      </p:sp>
-      <p:sp>
-        <p:nvSpPr>
-          <p:cNvPr id="17" name="Shape 14"/>
-          <p:cNvSpPr/>
-          <p:nvPr/>
-        </p:nvSpPr>
-        <p:spPr>
-          <a:xfrm>
-            <a:off x="8046720" y="5120640"/>
-            <a:ext cx="457200" cy="457200"/>
-          </a:xfrm>
-          <a:prstGeom prst="ellipse">
-            <a:avLst/>
-          </a:prstGeom>
-          <a:solidFill>
-            <a:schemeClr val="accent4"/>
-          </a:solidFill>
-          <a:ln w="25400">
-            <a:solidFill>
-              <a:schemeClr val="accent2"/>
-            </a:solidFill>
-            <a:prstDash val="solid"/>
-          </a:ln>
-        </p:spPr>
-      </p:sp>
-      <p:sp>
-        <p:nvSpPr>
-          <p:cNvPr id="18" name="Text 15"/>
-          <p:cNvSpPr txBox="1"/>
-          <p:nvPr/>
-        </p:nvSpPr>
-        <p:spPr>
-          <a:xfrm>
-            <a:off x="8046720" y="5120640"/>
-            <a:ext cx="457200" cy="457200"/>
-          </a:xfrm>
-          <a:prstGeom prst="rect">
-            <a:avLst/>
-          </a:prstGeom>
-          <a:noFill/>
-          <a:ln/>
-        </p:spPr>
-        <p:txBody>
-          <a:bodyPr wrap="square" lIns="0" tIns="0" rIns="0" bIns="0" rtlCol="0" anchor="ctr"/>
-          <a:lstStyle/>
-          <a:p>
-            <a:pPr algn="ctr" indent="0" marL="0">
-              <a:buNone/>
-            </a:pPr>
-            <a:r>
-              <a:rPr lang="en-US" sz="1500" b="1" dirty="0">
-                <a:solidFill>
-                  <a:schemeClr val="bg1"/>
-                </a:solidFill>
-              </a:rPr>
-              <a:t>3</a:t>
-            </a:r>
-            <a:endParaRPr lang="en-US" sz="1500" dirty="0"/>
-          </a:p>
-        </p:txBody>
-      </p:sp>
-      <p:sp>
-        <p:nvSpPr>
-          <p:cNvPr id="19" name="Text 16"/>
-          <p:cNvSpPr txBox="1"/>
-          <p:nvPr/>
-        </p:nvSpPr>
-        <p:spPr>
-          <a:xfrm>
-            <a:off x="8686800" y="5074920"/>
-            <a:ext cx="2773375" cy="411480"/>
-          </a:xfrm>
-          <a:prstGeom prst="rect">
-            <a:avLst/>
-          </a:prstGeom>
-          <a:noFill/>
-          <a:ln/>
-        </p:spPr>
-        <p:txBody>
-          <a:bodyPr wrap="square" lIns="0" tIns="0" rIns="0" bIns="0" rtlCol="0" anchor="ctr"/>
-          <a:lstStyle/>
-          <a:p>
-            <a:pPr indent="0" marL="0">
-              <a:buNone/>
-            </a:pPr>
-            <a:r>
-              <a:rPr lang="en-US" sz="1600" b="1" dirty="0">
-                <a:solidFill>
-                  <a:schemeClr val="tx1"/>
-                </a:solidFill>
-                <a:latin typeface="Segoe Script" pitchFamily="34" charset="0"/>
-                <a:ea typeface="Segoe Script" pitchFamily="34" charset="-122"/>
-                <a:cs typeface="Segoe Script" pitchFamily="34" charset="-120"/>
-              </a:rPr>
-              <a:t>Download the HD file</a:t>
-            </a:r>
-            <a:endParaRPr lang="en-US" sz="1600" dirty="0"/>
-          </a:p>
-        </p:txBody>
-      </p:sp>
-      <p:sp>
-        <p:nvSpPr>
-          <p:cNvPr id="20" name="Text 17"/>
-          <p:cNvSpPr txBox="1"/>
-          <p:nvPr/>
-        </p:nvSpPr>
-        <p:spPr>
-          <a:xfrm>
-            <a:off x="8686800" y="5486400"/>
-            <a:ext cx="2773375" cy="658368"/>
-          </a:xfrm>
-          <a:prstGeom prst="rect">
-            <a:avLst/>
-          </a:prstGeom>
-          <a:noFill/>
-          <a:ln/>
-        </p:spPr>
-        <p:txBody>
-          <a:bodyPr wrap="square" lIns="0" tIns="0" rIns="0" bIns="0" rtlCol="0" anchor="t"/>
-          <a:lstStyle/>
-          <a:p>
-            <a:pPr indent="0" marL="0">
-              <a:buNone/>
-            </a:pPr>
-            <a:r>
-              <a:rPr lang="en-US" sz="1300" dirty="0">
-                <a:solidFill>
-                  <a:schemeClr val="tx2"/>
-                </a:solidFill>
-              </a:rPr>
-              <a:t>Large images are processed in tiles; get a 4× PNG in seconds (2.3 s for a 512×512 result in a laptop browser).</a:t>
-            </a:r>
-            <a:endParaRPr lang="en-US" sz="1300" dirty="0"/>
-          </a:p>
-        </p:txBody>
-      </p:sp>
-      <p:sp>
-        <p:nvSpPr>
-          <p:cNvPr id="25" name="Slide Number Placeholder 0"/>
-          <p:cNvSpPr>
-            <a:spLocks noGrp="1"/>
-          </p:cNvSpPr>
-          <p:nvPr>
-            <p:ph type="sldNum" sz="quarter" idx="4294967295"/>
-          </p:nvPr>
-        </p:nvSpPr>
-        <p:spPr>
-          <a:xfrm>
-            <a:off x="11064240" y="6400800"/>
-            <a:ext cx="576072" cy="274320"/>
-          </a:xfrm>
-          <a:prstGeom prst="rect">
-            <a:avLst/>
-          </a:prstGeom>
-          <a:extLst>
-            <a:ext uri="{C572A759-6A51-4108-AA02-DFA0A04FC94B}">
-              <ma14:wrappingTextBoxFlag xmlns:ma14="http://schemas.microsoft.com/office/mac/drawingml/2011/main" val="0"/>
-            </a:ext>
-          </a:extLst>
-        </p:spPr>
-        <p:txBody>
-          <a:bodyPr/>
-          <a:lstStyle>
-            <a:lvl1pPr>
-              <a:defRPr sz="1100">
-                <a:solidFill>
-                  <a:schemeClr val="accent5"/>
-                </a:solidFill>
-              </a:defRPr>
-            </a:lvl1pPr>
-          </a:lstStyle>
-          <a:p>
-            <a:pPr algn="r"/>
-            <a:fld id="{F7021451-1387-4CA6-816F-3879F97B5CBC}" type="slidenum">
-              <a:rPr b="0" lang="en-US"/>
-              <a:t>3</a:t>
-            </a:fld>
-            <a:endParaRPr lang="en-US"/>
-          </a:p>
-        </p:txBody>
-      </p:sp>
-    </p:spTree>
-  </p:cSld>
-  <p:clrMapOvr>
-    <a:masterClrMapping/>
-  </p:clrMapOvr>
-</p:sld>
-</file>
-
-<file path=ppt/slides/slide4.xml><?xml version="1.0" encoding="utf-8"?>
-<p:sld xmlns:a="http://schemas.openxmlformats.org/drawingml/2006/main" xmlns:r="http://schemas.openxmlformats.org/officeDocument/2006/relationships" xmlns:p="http://schemas.openxmlformats.org/presentationml/2006/main">
-  <p:cSld name="Slide 4">
-    <p:spTree>
-      <p:nvGrpSpPr>
-        <p:cNvPr id="1" name=""/>
-        <p:cNvGrpSpPr/>
-        <p:nvPr/>
-      </p:nvGrpSpPr>
-      <p:grpSpPr>
-        <a:xfrm>
-          <a:off x="0" y="0"/>
-          <a:ext cx="0" cy="0"/>
-          <a:chOff x="0" y="0"/>
-          <a:chExt cx="0" cy="0"/>
-        </a:xfrm>
-      </p:grpSpPr>
-      <p:sp>
-        <p:nvSpPr>
-          <p:cNvPr id="2" name="Text 0"/>
-          <p:cNvSpPr/>
-          <p:nvPr>
-            <p:ph idx="100" type="body" hasCustomPrompt="1"/>
-          </p:nvPr>
-        </p:nvSpPr>
-        <p:spPr>
-          <a:xfrm>
-            <a:off x="548640" y="384048"/>
-            <a:ext cx="11064240" cy="365760"/>
-          </a:xfrm>
-          <a:prstGeom prst="rect">
-            <a:avLst/>
-          </a:prstGeom>
-          <a:noFill/>
-          <a:ln/>
-        </p:spPr>
-        <p:txBody>
-          <a:bodyPr wrap="square" lIns="0" tIns="0" rIns="0" bIns="0" rtlCol="0" anchor="ctr"/>
-          <a:lstStyle/>
-          <a:p>
-            <a:pPr indent="0" marL="0">
-              <a:buNone/>
-            </a:pPr>
-            <a:r>
-              <a:rPr lang="en-US" sz="1300" b="1" spc="200" kern="0" dirty="0">
-                <a:solidFill>
-                  <a:schemeClr val="accent1"/>
-                </a:solidFill>
-                <a:latin typeface="Segoe UI" pitchFamily="34" charset="0"/>
-                <a:ea typeface="Segoe UI" pitchFamily="34" charset="-122"/>
-                <a:cs typeface="Segoe UI" pitchFamily="34" charset="-120"/>
-              </a:rPr>
-              <a:t>RESULTS</a:t>
-            </a:r>
-            <a:endParaRPr lang="en-US" sz="1300" dirty="0"/>
-          </a:p>
-        </p:txBody>
-      </p:sp>
-      <p:sp>
-        <p:nvSpPr>
-          <p:cNvPr id="3" name="Text 0"/>
-          <p:cNvSpPr/>
-          <p:nvPr>
-            <p:ph idx="101" type="title" hasCustomPrompt="1"/>
-          </p:nvPr>
-        </p:nvSpPr>
-        <p:spPr>
-          <a:xfrm>
-            <a:off x="548640" y="749808"/>
-            <a:ext cx="11064240" cy="868680"/>
-          </a:xfrm>
-          <a:prstGeom prst="rect">
-            <a:avLst/>
-          </a:prstGeom>
-          <a:noFill/>
-          <a:ln/>
-        </p:spPr>
-        <p:txBody>
-          <a:bodyPr wrap="square" lIns="0" tIns="0" rIns="0" bIns="0" rtlCol="0" anchor="t"/>
-          <a:lstStyle/>
-          <a:p>
-            <a:pPr algn="l" indent="0" marL="0">
-              <a:buNone/>
-            </a:pPr>
-            <a:r>
-              <a:rPr lang="en-US" sz="3000" b="1" dirty="0">
-                <a:solidFill>
-                  <a:schemeClr val="tx1"/>
-                </a:solidFill>
-                <a:latin typeface="Segoe Script" pitchFamily="34" charset="0"/>
-                <a:ea typeface="Segoe Script" pitchFamily="34" charset="-122"/>
-                <a:cs typeface="Segoe Script" pitchFamily="34" charset="-120"/>
-              </a:rPr>
-              <a:t>Looks like real HD. Small enough for a browser.</a:t>
-            </a:r>
-            <a:endParaRPr lang="en-US" sz="3000" dirty="0"/>
-          </a:p>
-        </p:txBody>
-      </p:sp>
-      <p:sp>
-        <p:nvSpPr>
-          <p:cNvPr id="4" name="Stat 1"/>
-          <p:cNvSpPr/>
-          <p:nvPr/>
-        </p:nvSpPr>
-        <p:spPr>
-          <a:xfrm>
-            <a:off x="548640" y="1691640"/>
-            <a:ext cx="3483864" cy="2103120"/>
-          </a:xfrm>
-          <a:prstGeom prst="roundRect">
-            <a:avLst>
-              <a:gd name="adj" fmla="val 13913"/>
-            </a:avLst>
-          </a:prstGeom>
-          <a:solidFill>
-            <a:schemeClr val="bg2"/>
-          </a:solidFill>
-          <a:ln w="15875">
-            <a:solidFill>
-              <a:schemeClr val="accent6"/>
-            </a:solidFill>
-            <a:prstDash val="solid"/>
-          </a:ln>
-        </p:spPr>
-      </p:sp>
-      <p:sp>
-        <p:nvSpPr>
-          <p:cNvPr id="5" name="Text 3"/>
-          <p:cNvSpPr txBox="1"/>
-          <p:nvPr/>
-        </p:nvSpPr>
-        <p:spPr>
-          <a:xfrm>
-            <a:off x="822960" y="1828800"/>
-            <a:ext cx="2935224" cy="777240"/>
-          </a:xfrm>
-          <a:prstGeom prst="rect">
-            <a:avLst/>
-          </a:prstGeom>
-          <a:noFill/>
-          <a:ln/>
-        </p:spPr>
-        <p:txBody>
-          <a:bodyPr wrap="square" lIns="0" tIns="0" rIns="0" bIns="0" rtlCol="0" anchor="ctr"/>
-          <a:lstStyle/>
-          <a:p>
-            <a:pPr indent="0" marL="0">
-              <a:buNone/>
-            </a:pPr>
-            <a:r>
-              <a:rPr lang="en-US" sz="4000" b="1" dirty="0">
-                <a:solidFill>
-                  <a:schemeClr val="accent1"/>
-                </a:solidFill>
-                <a:latin typeface="Segoe UI" pitchFamily="34" charset="0"/>
-                <a:ea typeface="Segoe UI" pitchFamily="34" charset="-122"/>
-                <a:cs typeface="Segoe UI" pitchFamily="34" charset="-120"/>
-              </a:rPr>
-              <a:t>41%</a:t>
-            </a:r>
-            <a:endParaRPr lang="en-US" sz="4000" dirty="0"/>
-          </a:p>
-        </p:txBody>
-      </p:sp>
-      <p:sp>
-        <p:nvSpPr>
-          <p:cNvPr id="6" name="Text 4"/>
-          <p:cNvSpPr txBox="1"/>
-          <p:nvPr/>
-        </p:nvSpPr>
-        <p:spPr>
-          <a:xfrm>
-            <a:off x="822960" y="2651760"/>
-            <a:ext cx="2935224" cy="1005840"/>
-          </a:xfrm>
-          <a:prstGeom prst="rect">
-            <a:avLst/>
-          </a:prstGeom>
-          <a:noFill/>
-          <a:ln/>
-        </p:spPr>
-        <p:txBody>
-          <a:bodyPr wrap="square" lIns="0" tIns="0" rIns="0" bIns="0" rtlCol="0" anchor="t"/>
-          <a:lstStyle/>
-          <a:p>
-            <a:pPr indent="0" marL="0">
-              <a:buNone/>
-            </a:pPr>
-            <a:r>
-              <a:rPr lang="en-US" sz="1300" b="1" dirty="0">
-                <a:solidFill>
-                  <a:schemeClr val="tx1"/>
-                </a:solidFill>
-              </a:rPr>
-              <a:t>closer to the real HD look than bicubic</a:t>
-            </a:r>
-            <a:endParaRPr lang="en-US" sz="1300" dirty="0"/>
-          </a:p>
-          <a:p>
-            <a:pPr indent="0" marL="0">
-              <a:buNone/>
-            </a:pPr>
-            <a:r>
-              <a:rPr lang="en-US" sz="1300" dirty="0">
-                <a:solidFill>
-                  <a:schemeClr val="accent5"/>
-                </a:solidFill>
-              </a:rPr>
-              <a:t>LPIPS perceptual distance, 60 unseen game textures</a:t>
-            </a:r>
-            <a:endParaRPr lang="en-US" sz="1300" dirty="0"/>
-          </a:p>
-        </p:txBody>
-      </p:sp>
-      <p:sp>
-        <p:nvSpPr>
-          <p:cNvPr id="7" name="Stat 2"/>
-          <p:cNvSpPr/>
-          <p:nvPr/>
-        </p:nvSpPr>
-        <p:spPr>
-          <a:xfrm>
-            <a:off x="4352544" y="1691640"/>
-            <a:ext cx="3483864" cy="2103120"/>
-          </a:xfrm>
-          <a:prstGeom prst="roundRect">
-            <a:avLst>
-              <a:gd name="adj" fmla="val 13913"/>
-            </a:avLst>
-          </a:prstGeom>
-          <a:solidFill>
-            <a:schemeClr val="bg2"/>
-          </a:solidFill>
-          <a:ln w="15875">
-            <a:solidFill>
-              <a:schemeClr val="accent6"/>
-            </a:solidFill>
-            <a:prstDash val="solid"/>
-          </a:ln>
-        </p:spPr>
-      </p:sp>
-      <p:sp>
-        <p:nvSpPr>
-          <p:cNvPr id="8" name="Text 6"/>
-          <p:cNvSpPr txBox="1"/>
-          <p:nvPr/>
-        </p:nvSpPr>
-        <p:spPr>
-          <a:xfrm>
-            <a:off x="4626864" y="1828800"/>
-            <a:ext cx="2935224" cy="777240"/>
-          </a:xfrm>
-          <a:prstGeom prst="rect">
-            <a:avLst/>
-          </a:prstGeom>
-          <a:noFill/>
-          <a:ln/>
-        </p:spPr>
-        <p:txBody>
-          <a:bodyPr wrap="square" lIns="0" tIns="0" rIns="0" bIns="0" rtlCol="0" anchor="ctr"/>
-          <a:lstStyle/>
-          <a:p>
-            <a:pPr indent="0" marL="0">
-              <a:buNone/>
-            </a:pPr>
-            <a:r>
-              <a:rPr lang="en-US" sz="4000" b="1" dirty="0">
-                <a:solidFill>
-                  <a:schemeClr val="accent1"/>
-                </a:solidFill>
-                <a:latin typeface="Segoe UI" pitchFamily="34" charset="0"/>
-                <a:ea typeface="Segoe UI" pitchFamily="34" charset="-122"/>
-                <a:cs typeface="Segoe UI" pitchFamily="34" charset="-120"/>
-              </a:rPr>
-              <a:t>15×</a:t>
-            </a:r>
-            <a:endParaRPr lang="en-US" sz="4000" dirty="0"/>
-          </a:p>
-        </p:txBody>
-      </p:sp>
-      <p:sp>
-        <p:nvSpPr>
-          <p:cNvPr id="9" name="Text 7"/>
-          <p:cNvSpPr txBox="1"/>
-          <p:nvPr/>
-        </p:nvSpPr>
-        <p:spPr>
-          <a:xfrm>
-            <a:off x="4626864" y="2651760"/>
-            <a:ext cx="2935224" cy="1005840"/>
-          </a:xfrm>
-          <a:prstGeom prst="rect">
-            <a:avLst/>
-          </a:prstGeom>
-          <a:noFill/>
-          <a:ln/>
-        </p:spPr>
-        <p:txBody>
-          <a:bodyPr wrap="square" lIns="0" tIns="0" rIns="0" bIns="0" rtlCol="0" anchor="t"/>
-          <a:lstStyle/>
-          <a:p>
-            <a:pPr indent="0" marL="0">
-              <a:buNone/>
-            </a:pPr>
-            <a:r>
-              <a:rPr lang="en-US" sz="1300" b="1" dirty="0">
-                <a:solidFill>
-                  <a:schemeClr val="tx1"/>
-                </a:solidFill>
-              </a:rPr>
-              <a:t>smaller than Real-ESRGAN (1.1M vs 16.7M parameters)</a:t>
-            </a:r>
-            <a:endParaRPr lang="en-US" sz="1300" dirty="0"/>
-          </a:p>
-          <a:p>
-            <a:pPr indent="0" marL="0">
-              <a:buNone/>
-            </a:pPr>
-            <a:r>
-              <a:rPr lang="en-US" sz="1300" dirty="0">
-                <a:solidFill>
-                  <a:schemeClr val="accent5"/>
-                </a:solidFill>
-              </a:rPr>
-              <a:t>LPIPS 0.414 vs 0.454 (lower is better)</a:t>
-            </a:r>
-            <a:endParaRPr lang="en-US" sz="1300" dirty="0"/>
-          </a:p>
-        </p:txBody>
-      </p:sp>
-      <p:sp>
-        <p:nvSpPr>
-          <p:cNvPr id="10" name="Stat 3"/>
-          <p:cNvSpPr/>
-          <p:nvPr/>
-        </p:nvSpPr>
-        <p:spPr>
-          <a:xfrm>
-            <a:off x="8156448" y="1691640"/>
-            <a:ext cx="3483864" cy="2103120"/>
-          </a:xfrm>
-          <a:prstGeom prst="roundRect">
-            <a:avLst>
-              <a:gd name="adj" fmla="val 13913"/>
-            </a:avLst>
-          </a:prstGeom>
-          <a:solidFill>
-            <a:schemeClr val="bg2"/>
-          </a:solidFill>
-          <a:ln w="15875">
-            <a:solidFill>
-              <a:schemeClr val="accent6"/>
-            </a:solidFill>
-            <a:prstDash val="solid"/>
-          </a:ln>
-        </p:spPr>
-      </p:sp>
-      <p:sp>
-        <p:nvSpPr>
-          <p:cNvPr id="11" name="Text 9"/>
-          <p:cNvSpPr txBox="1"/>
-          <p:nvPr/>
-        </p:nvSpPr>
-        <p:spPr>
-          <a:xfrm>
-            <a:off x="8430768" y="1828800"/>
-            <a:ext cx="2935224" cy="777240"/>
-          </a:xfrm>
-          <a:prstGeom prst="rect">
-            <a:avLst/>
-          </a:prstGeom>
-          <a:noFill/>
-          <a:ln/>
-        </p:spPr>
-        <p:txBody>
-          <a:bodyPr wrap="square" lIns="0" tIns="0" rIns="0" bIns="0" rtlCol="0" anchor="ctr"/>
-          <a:lstStyle/>
-          <a:p>
-            <a:pPr indent="0" marL="0">
-              <a:buNone/>
-            </a:pPr>
-            <a:r>
-              <a:rPr lang="en-US" sz="4000" b="1" dirty="0">
-                <a:solidFill>
-                  <a:schemeClr val="accent1"/>
-                </a:solidFill>
-                <a:latin typeface="Segoe UI" pitchFamily="34" charset="0"/>
-                <a:ea typeface="Segoe UI" pitchFamily="34" charset="-122"/>
-                <a:cs typeface="Segoe UI" pitchFamily="34" charset="-120"/>
-              </a:rPr>
-              <a:t>2.3 s</a:t>
-            </a:r>
-            <a:endParaRPr lang="en-US" sz="4000" dirty="0"/>
-          </a:p>
-        </p:txBody>
-      </p:sp>
-      <p:sp>
-        <p:nvSpPr>
-          <p:cNvPr id="12" name="Text 10"/>
-          <p:cNvSpPr txBox="1"/>
-          <p:nvPr/>
-        </p:nvSpPr>
-        <p:spPr>
-          <a:xfrm>
-            <a:off x="8430768" y="2651760"/>
-            <a:ext cx="2935224" cy="1005840"/>
-          </a:xfrm>
-          <a:prstGeom prst="rect">
-            <a:avLst/>
-          </a:prstGeom>
-          <a:noFill/>
-          <a:ln/>
-        </p:spPr>
-        <p:txBody>
-          <a:bodyPr wrap="square" lIns="0" tIns="0" rIns="0" bIns="0" rtlCol="0" anchor="t"/>
-          <a:lstStyle/>
-          <a:p>
-            <a:pPr indent="0" marL="0">
-              <a:buNone/>
-            </a:pPr>
-            <a:r>
-              <a:rPr lang="en-US" sz="1300" b="1" dirty="0">
-                <a:solidFill>
-                  <a:schemeClr val="tx1"/>
-                </a:solidFill>
-              </a:rPr>
-              <a:t>to upscale a texture 4× in a laptop browser</a:t>
-            </a:r>
-            <a:endParaRPr lang="en-US" sz="1300" dirty="0"/>
-          </a:p>
-          <a:p>
-            <a:pPr indent="0" marL="0">
-              <a:buNone/>
-            </a:pPr>
-            <a:r>
-              <a:rPr lang="en-US" sz="1300" dirty="0">
-                <a:solidFill>
-                  <a:schemeClr val="accent5"/>
-                </a:solidFill>
-              </a:rPr>
-              <a:t>128×128 → 512×512, no GPU, no upload</a:t>
-            </a:r>
-            <a:endParaRPr lang="en-US" sz="1300" dirty="0"/>
-          </a:p>
-        </p:txBody>
-      </p:sp>
-      <p:sp>
-        <p:nvSpPr>
-          <p:cNvPr id="13" name="Shape 11"/>
-          <p:cNvSpPr/>
-          <p:nvPr/>
-        </p:nvSpPr>
-        <p:spPr>
-          <a:xfrm>
-            <a:off x="548640" y="3977640"/>
-            <a:ext cx="11091672" cy="2286000"/>
-          </a:xfrm>
-          <a:prstGeom prst="roundRect">
-            <a:avLst>
-              <a:gd name="adj" fmla="val 12800"/>
-            </a:avLst>
-          </a:prstGeom>
-          <a:solidFill>
-            <a:srgbClr val="FFFFFF"/>
-          </a:solidFill>
-          <a:ln w="22225">
-            <a:solidFill>
-              <a:schemeClr val="accent2"/>
-            </a:solidFill>
-            <a:prstDash val="solid"/>
-          </a:ln>
-        </p:spPr>
-      </p:sp>
-      <p:pic>
-        <p:nvPicPr>
-          <p:cNvPr id="14" name="Zoom comparison" descr="Zoomed crops: input, bicubic, Real-ESRGAN, PixelForge, true HD">    </p:cNvPr>
-          <p:cNvPicPr>
-            <a:picLocks noChangeAspect="1"/>
-          </p:cNvPicPr>
-          <p:nvPr/>
-        </p:nvPicPr>
-        <p:blipFill>
-          <a:blip r:embed="rId1"/>
-          <a:stretch>
-            <a:fillRect/>
-          </a:stretch>
-        </p:blipFill>
-        <p:spPr>
-          <a:xfrm>
-            <a:off x="699516" y="4041648"/>
-            <a:ext cx="10789920" cy="2157984"/>
-          </a:xfrm>
-          <a:prstGeom prst="rect">
-            <a:avLst/>
-          </a:prstGeom>
-        </p:spPr>
-      </p:pic>
-      <p:sp>
-        <p:nvSpPr>
-          <p:cNvPr id="25" name="Slide Number Placeholder 0"/>
-          <p:cNvSpPr>
-            <a:spLocks noGrp="1"/>
-          </p:cNvSpPr>
-          <p:nvPr>
-            <p:ph type="sldNum" sz="quarter" idx="4294967295"/>
-          </p:nvPr>
-        </p:nvSpPr>
-        <p:spPr>
-          <a:xfrm>
-            <a:off x="11064240" y="6400800"/>
-            <a:ext cx="576072" cy="274320"/>
-          </a:xfrm>
-          <a:prstGeom prst="rect">
-            <a:avLst/>
-          </a:prstGeom>
-          <a:extLst>
-            <a:ext uri="{C572A759-6A51-4108-AA02-DFA0A04FC94B}">
-              <ma14:wrappingTextBoxFlag xmlns:ma14="http://schemas.microsoft.com/office/mac/drawingml/2011/main" val="0"/>
-            </a:ext>
-          </a:extLst>
-        </p:spPr>
-        <p:txBody>
-          <a:bodyPr/>
-          <a:lstStyle>
-            <a:lvl1pPr>
-              <a:defRPr sz="1100">
-                <a:solidFill>
-                  <a:schemeClr val="accent5"/>
-                </a:solidFill>
-              </a:defRPr>
-            </a:lvl1pPr>
-          </a:lstStyle>
-          <a:p>
-            <a:pPr algn="r"/>
-            <a:fld id="{F7021451-1387-4CA6-816F-3879F97B5CBC}" type="slidenum">
-              <a:rPr b="0" lang="en-US"/>
-              <a:t>4</a:t>
-            </a:fld>
-            <a:endParaRPr lang="en-US"/>
-          </a:p>
-        </p:txBody>
-      </p:sp>
-    </p:spTree>
-  </p:cSld>
-  <p:clrMapOvr>
-    <a:masterClrMapping/>
-  </p:clrMapOvr>
-</p:sld>
-</file>
-
-<file path=ppt/slides/slide5.xml><?xml version="1.0" encoding="utf-8"?>
-<p:sld xmlns:a="http://schemas.openxmlformats.org/drawingml/2006/main" xmlns:r="http://schemas.openxmlformats.org/officeDocument/2006/relationships" xmlns:p="http://schemas.openxmlformats.org/presentationml/2006/main">
-  <p:cSld name="Slide 5">
-    <p:spTree>
-      <p:nvGrpSpPr>
-        <p:cNvPr id="1" name=""/>
-        <p:cNvGrpSpPr/>
-        <p:nvPr/>
-      </p:nvGrpSpPr>
-      <p:grpSpPr>
-        <a:xfrm>
-          <a:off x="0" y="0"/>
-          <a:ext cx="0" cy="0"/>
-          <a:chOff x="0" y="0"/>
-          <a:chExt cx="0" cy="0"/>
-        </a:xfrm>
-      </p:grpSpPr>
-      <p:sp>
-        <p:nvSpPr>
-          <p:cNvPr id="2" name="Text 0"/>
-          <p:cNvSpPr/>
-          <p:nvPr>
-            <p:ph idx="100" type="body" hasCustomPrompt="1"/>
-          </p:nvPr>
-        </p:nvSpPr>
-        <p:spPr>
-          <a:xfrm>
-            <a:off x="548640" y="384048"/>
-            <a:ext cx="11064240" cy="365760"/>
-          </a:xfrm>
-          <a:prstGeom prst="rect">
-            <a:avLst/>
-          </a:prstGeom>
-          <a:noFill/>
-          <a:ln/>
-        </p:spPr>
-        <p:txBody>
-          <a:bodyPr wrap="square" lIns="0" tIns="0" rIns="0" bIns="0" rtlCol="0" anchor="ctr"/>
-          <a:lstStyle/>
-          <a:p>
-            <a:pPr indent="0" marL="0">
-              <a:buNone/>
-            </a:pPr>
-            <a:r>
-              <a:rPr lang="en-US" sz="1300" b="1" spc="200" kern="0" dirty="0">
-                <a:solidFill>
-                  <a:schemeClr val="accent1"/>
-                </a:solidFill>
-                <a:latin typeface="Segoe UI" pitchFamily="34" charset="0"/>
-                <a:ea typeface="Segoe UI" pitchFamily="34" charset="-122"/>
-                <a:cs typeface="Segoe UI" pitchFamily="34" charset="-120"/>
-              </a:rPr>
-              <a:t>HOW IT WORKS</a:t>
-            </a:r>
-            <a:endParaRPr lang="en-US" sz="1300" dirty="0"/>
-          </a:p>
-        </p:txBody>
-      </p:sp>
-      <p:sp>
-        <p:nvSpPr>
-          <p:cNvPr id="3" name="Text 0"/>
-          <p:cNvSpPr/>
-          <p:nvPr>
-            <p:ph idx="101" type="title" hasCustomPrompt="1"/>
-          </p:nvPr>
-        </p:nvSpPr>
-        <p:spPr>
-          <a:xfrm>
-            <a:off x="548640" y="749808"/>
-            <a:ext cx="11064240" cy="868680"/>
-          </a:xfrm>
-          <a:prstGeom prst="rect">
-            <a:avLst/>
-          </a:prstGeom>
-          <a:noFill/>
-          <a:ln/>
-        </p:spPr>
-        <p:txBody>
-          <a:bodyPr wrap="square" lIns="0" tIns="0" rIns="0" bIns="0" rtlCol="0" anchor="t"/>
-          <a:lstStyle/>
-          <a:p>
-            <a:pPr algn="l" indent="0" marL="0">
-              <a:buNone/>
-            </a:pPr>
-            <a:r>
-              <a:rPr lang="en-US" sz="3000" b="1" dirty="0">
-                <a:solidFill>
-                  <a:schemeClr val="tx1"/>
-                </a:solidFill>
-                <a:latin typeface="Segoe Script" pitchFamily="34" charset="0"/>
-                <a:ea typeface="Segoe Script" pitchFamily="34" charset="-122"/>
-                <a:cs typeface="Segoe Script" pitchFamily="34" charset="-120"/>
-              </a:rPr>
-              <a:t>Trained to undo old-texture damage.</a:t>
-            </a:r>
-            <a:endParaRPr lang="en-US" sz="3000" dirty="0"/>
-          </a:p>
-        </p:txBody>
-      </p:sp>
-      <p:sp>
-        <p:nvSpPr>
-          <p:cNvPr id="4" name="Step 1"/>
-          <p:cNvSpPr/>
-          <p:nvPr/>
-        </p:nvSpPr>
-        <p:spPr>
-          <a:xfrm>
-            <a:off x="548640" y="2057400"/>
-            <a:ext cx="3361944" cy="2651760"/>
-          </a:xfrm>
-          <a:prstGeom prst="roundRect">
-            <a:avLst>
-              <a:gd name="adj" fmla="val 11034"/>
-            </a:avLst>
-          </a:prstGeom>
-          <a:solidFill>
-            <a:schemeClr val="bg2"/>
-          </a:solidFill>
-          <a:ln w="15875">
-            <a:solidFill>
-              <a:schemeClr val="accent6"/>
-            </a:solidFill>
-            <a:prstDash val="solid"/>
-          </a:ln>
-        </p:spPr>
-      </p:sp>
-      <p:sp>
-        <p:nvSpPr>
-          <p:cNvPr id="5" name="Shape 3"/>
-          <p:cNvSpPr/>
-          <p:nvPr/>
-        </p:nvSpPr>
-        <p:spPr>
-          <a:xfrm>
-            <a:off x="822960" y="2331720"/>
-            <a:ext cx="457200" cy="457200"/>
-          </a:xfrm>
-          <a:prstGeom prst="ellipse">
-            <a:avLst/>
-          </a:prstGeom>
-          <a:solidFill>
-            <a:schemeClr val="accent4"/>
-          </a:solidFill>
-          <a:ln w="25400">
-            <a:solidFill>
-              <a:schemeClr val="accent2"/>
-            </a:solidFill>
-            <a:prstDash val="solid"/>
-          </a:ln>
-        </p:spPr>
-      </p:sp>
-      <p:sp>
-        <p:nvSpPr>
-          <p:cNvPr id="6" name="Text 4"/>
-          <p:cNvSpPr txBox="1"/>
-          <p:nvPr/>
-        </p:nvSpPr>
-        <p:spPr>
-          <a:xfrm>
-            <a:off x="822960" y="2331720"/>
-            <a:ext cx="457200" cy="457200"/>
-          </a:xfrm>
-          <a:prstGeom prst="rect">
-            <a:avLst/>
-          </a:prstGeom>
-          <a:noFill/>
-          <a:ln/>
-        </p:spPr>
-        <p:txBody>
-          <a:bodyPr wrap="square" lIns="0" tIns="0" rIns="0" bIns="0" rtlCol="0" anchor="ctr"/>
-          <a:lstStyle/>
-          <a:p>
-            <a:pPr algn="ctr" indent="0" marL="0">
-              <a:buNone/>
-            </a:pPr>
-            <a:r>
-              <a:rPr lang="en-US" sz="1500" b="1" dirty="0">
-                <a:solidFill>
-                  <a:schemeClr val="bg1"/>
-                </a:solidFill>
-              </a:rPr>
-              <a:t>1</a:t>
-            </a:r>
-            <a:endParaRPr lang="en-US" sz="1500" dirty="0"/>
-          </a:p>
-        </p:txBody>
-      </p:sp>
-      <p:sp>
-        <p:nvSpPr>
-          <p:cNvPr id="7" name="Text 5"/>
-          <p:cNvSpPr txBox="1"/>
-          <p:nvPr/>
-        </p:nvSpPr>
-        <p:spPr>
-          <a:xfrm>
-            <a:off x="822960" y="2926080"/>
-            <a:ext cx="2813304" cy="777240"/>
-          </a:xfrm>
-          <a:prstGeom prst="rect">
-            <a:avLst/>
-          </a:prstGeom>
-          <a:noFill/>
-          <a:ln/>
-        </p:spPr>
-        <p:txBody>
-          <a:bodyPr wrap="square" lIns="0" tIns="0" rIns="0" bIns="0" rtlCol="0" anchor="t"/>
-          <a:lstStyle/>
-          <a:p>
-            <a:pPr indent="0" marL="0">
-              <a:buNone/>
-            </a:pPr>
-            <a:r>
-              <a:rPr lang="en-US" sz="1800" b="1" dirty="0">
-                <a:solidFill>
-                  <a:schemeClr val="tx1"/>
-                </a:solidFill>
-                <a:latin typeface="Segoe Script" pitchFamily="34" charset="0"/>
-                <a:ea typeface="Segoe Script" pitchFamily="34" charset="-122"/>
-                <a:cs typeface="Segoe Script" pitchFamily="34" charset="-120"/>
-              </a:rPr>
-              <a:t>Collect game textures</a:t>
-            </a:r>
-            <a:endParaRPr lang="en-US" sz="1800" dirty="0"/>
-          </a:p>
-        </p:txBody>
-      </p:sp>
-      <p:sp>
-        <p:nvSpPr>
-          <p:cNvPr id="8" name="Text 6"/>
-          <p:cNvSpPr txBox="1"/>
-          <p:nvPr/>
-        </p:nvSpPr>
-        <p:spPr>
-          <a:xfrm>
-            <a:off x="822960" y="3749040"/>
-            <a:ext cx="2813304" cy="914400"/>
-          </a:xfrm>
-          <a:prstGeom prst="rect">
-            <a:avLst/>
-          </a:prstGeom>
-          <a:noFill/>
-          <a:ln/>
-        </p:spPr>
-        <p:txBody>
-          <a:bodyPr wrap="square" lIns="0" tIns="0" rIns="0" bIns="0" rtlCol="0" anchor="t"/>
-          <a:lstStyle/>
-          <a:p>
-            <a:pPr indent="0" marL="0">
-              <a:buNone/>
-            </a:pPr>
-            <a:r>
-              <a:rPr lang="en-US" sz="1400" dirty="0">
-                <a:solidFill>
-                  <a:schemeClr val="tx2"/>
-                </a:solidFill>
-              </a:rPr>
-              <a:t>738 free (CC0) textures: bricks, wood, metal, ground, fabric, stone.</a:t>
-            </a:r>
-            <a:endParaRPr lang="en-US" sz="1400" dirty="0"/>
-          </a:p>
-        </p:txBody>
-      </p:sp>
-      <p:sp>
-        <p:nvSpPr>
-          <p:cNvPr id="9" name="Shape 7"/>
-          <p:cNvSpPr/>
-          <p:nvPr/>
-        </p:nvSpPr>
-        <p:spPr>
-          <a:xfrm>
-            <a:off x="4020312" y="3246120"/>
-            <a:ext cx="283464" cy="274320"/>
-          </a:xfrm>
-          <a:prstGeom prst="rightArrow">
-            <a:avLst/>
-          </a:prstGeom>
-          <a:solidFill>
-            <a:schemeClr val="accent1"/>
-          </a:solidFill>
-          <a:ln/>
-        </p:spPr>
-      </p:sp>
-      <p:sp>
-        <p:nvSpPr>
-          <p:cNvPr id="10" name="Step 2"/>
-          <p:cNvSpPr/>
-          <p:nvPr/>
-        </p:nvSpPr>
-        <p:spPr>
-          <a:xfrm>
-            <a:off x="4413504" y="2057400"/>
-            <a:ext cx="3361944" cy="2651760"/>
-          </a:xfrm>
-          <a:prstGeom prst="roundRect">
-            <a:avLst>
-              <a:gd name="adj" fmla="val 11034"/>
-            </a:avLst>
-          </a:prstGeom>
-          <a:solidFill>
-            <a:schemeClr val="bg2"/>
-          </a:solidFill>
-          <a:ln w="15875">
-            <a:solidFill>
-              <a:schemeClr val="accent6"/>
-            </a:solidFill>
-            <a:prstDash val="solid"/>
-          </a:ln>
-        </p:spPr>
-      </p:sp>
-      <p:sp>
-        <p:nvSpPr>
-          <p:cNvPr id="11" name="Shape 9"/>
-          <p:cNvSpPr/>
-          <p:nvPr/>
-        </p:nvSpPr>
-        <p:spPr>
-          <a:xfrm>
-            <a:off x="4687824" y="2331720"/>
-            <a:ext cx="457200" cy="457200"/>
-          </a:xfrm>
-          <a:prstGeom prst="ellipse">
-            <a:avLst/>
-          </a:prstGeom>
-          <a:solidFill>
-            <a:schemeClr val="accent4"/>
-          </a:solidFill>
-          <a:ln w="25400">
-            <a:solidFill>
-              <a:schemeClr val="accent2"/>
-            </a:solidFill>
-            <a:prstDash val="solid"/>
-          </a:ln>
-        </p:spPr>
-      </p:sp>
-      <p:sp>
-        <p:nvSpPr>
-          <p:cNvPr id="12" name="Text 10"/>
-          <p:cNvSpPr txBox="1"/>
-          <p:nvPr/>
-        </p:nvSpPr>
-        <p:spPr>
-          <a:xfrm>
-            <a:off x="4687824" y="2331720"/>
-            <a:ext cx="457200" cy="457200"/>
-          </a:xfrm>
-          <a:prstGeom prst="rect">
-            <a:avLst/>
-          </a:prstGeom>
-          <a:noFill/>
-          <a:ln/>
-        </p:spPr>
-        <p:txBody>
-          <a:bodyPr wrap="square" lIns="0" tIns="0" rIns="0" bIns="0" rtlCol="0" anchor="ctr"/>
-          <a:lstStyle/>
-          <a:p>
-            <a:pPr algn="ctr" indent="0" marL="0">
-              <a:buNone/>
-            </a:pPr>
-            <a:r>
-              <a:rPr lang="en-US" sz="1500" b="1" dirty="0">
-                <a:solidFill>
-                  <a:schemeClr val="bg1"/>
-                </a:solidFill>
-              </a:rPr>
-              <a:t>2</a:t>
-            </a:r>
-            <a:endParaRPr lang="en-US" sz="1500" dirty="0"/>
-          </a:p>
-        </p:txBody>
-      </p:sp>
-      <p:sp>
-        <p:nvSpPr>
-          <p:cNvPr id="13" name="Text 11"/>
-          <p:cNvSpPr txBox="1"/>
-          <p:nvPr/>
-        </p:nvSpPr>
-        <p:spPr>
-          <a:xfrm>
-            <a:off x="4687824" y="2926080"/>
-            <a:ext cx="2813304" cy="777240"/>
-          </a:xfrm>
-          <a:prstGeom prst="rect">
-            <a:avLst/>
-          </a:prstGeom>
-          <a:noFill/>
-          <a:ln/>
-        </p:spPr>
-        <p:txBody>
-          <a:bodyPr wrap="square" lIns="0" tIns="0" rIns="0" bIns="0" rtlCol="0" anchor="t"/>
-          <a:lstStyle/>
-          <a:p>
-            <a:pPr indent="0" marL="0">
-              <a:buNone/>
-            </a:pPr>
-            <a:r>
-              <a:rPr lang="en-US" sz="1800" b="1" dirty="0">
-                <a:solidFill>
-                  <a:schemeClr val="tx1"/>
-                </a:solidFill>
-                <a:latin typeface="Segoe Script" pitchFamily="34" charset="0"/>
-                <a:ea typeface="Segoe Script" pitchFamily="34" charset="-122"/>
-                <a:cs typeface="Segoe Script" pitchFamily="34" charset="-120"/>
-              </a:rPr>
-              <a:t>Damage them on purpose</a:t>
-            </a:r>
-            <a:endParaRPr lang="en-US" sz="1800" dirty="0"/>
-          </a:p>
-        </p:txBody>
-      </p:sp>
-      <p:sp>
-        <p:nvSpPr>
-          <p:cNvPr id="14" name="Text 12"/>
-          <p:cNvSpPr txBox="1"/>
-          <p:nvPr/>
-        </p:nvSpPr>
-        <p:spPr>
-          <a:xfrm>
-            <a:off x="4687824" y="3749040"/>
-            <a:ext cx="2813304" cy="914400"/>
-          </a:xfrm>
-          <a:prstGeom prst="rect">
-            <a:avLst/>
-          </a:prstGeom>
-          <a:noFill/>
-          <a:ln/>
-        </p:spPr>
-        <p:txBody>
-          <a:bodyPr wrap="square" lIns="0" tIns="0" rIns="0" bIns="0" rtlCol="0" anchor="t"/>
-          <a:lstStyle/>
-          <a:p>
-            <a:pPr indent="0" marL="0">
-              <a:buNone/>
-            </a:pPr>
-            <a:r>
-              <a:rPr lang="en-US" sz="1400" dirty="0">
-                <a:solidFill>
-                  <a:schemeClr val="tx2"/>
-                </a:solidFill>
-              </a:rPr>
-              <a:t>Blur, downscale, noise and JPEG compression, applied at random, the way old assets get degraded.</a:t>
-            </a:r>
-            <a:endParaRPr lang="en-US" sz="1400" dirty="0"/>
-          </a:p>
-        </p:txBody>
-      </p:sp>
-      <p:sp>
-        <p:nvSpPr>
-          <p:cNvPr id="15" name="Shape 13"/>
-          <p:cNvSpPr/>
-          <p:nvPr/>
-        </p:nvSpPr>
-        <p:spPr>
-          <a:xfrm>
-            <a:off x="7885176" y="3246120"/>
-            <a:ext cx="283464" cy="274320"/>
-          </a:xfrm>
-          <a:prstGeom prst="rightArrow">
-            <a:avLst/>
-          </a:prstGeom>
-          <a:solidFill>
-            <a:schemeClr val="accent1"/>
-          </a:solidFill>
-          <a:ln/>
-        </p:spPr>
-      </p:sp>
-      <p:sp>
-        <p:nvSpPr>
-          <p:cNvPr id="16" name="Step 3"/>
-          <p:cNvSpPr/>
-          <p:nvPr/>
-        </p:nvSpPr>
-        <p:spPr>
-          <a:xfrm>
-            <a:off x="8278368" y="2057400"/>
-            <a:ext cx="3361944" cy="2651760"/>
-          </a:xfrm>
-          <a:prstGeom prst="roundRect">
-            <a:avLst>
-              <a:gd name="adj" fmla="val 11034"/>
-            </a:avLst>
-          </a:prstGeom>
-          <a:solidFill>
-            <a:schemeClr val="bg2"/>
-          </a:solidFill>
-          <a:ln w="31750">
-            <a:solidFill>
-              <a:schemeClr val="accent2"/>
-            </a:solidFill>
-            <a:prstDash val="solid"/>
-          </a:ln>
-        </p:spPr>
-      </p:sp>
-      <p:sp>
-        <p:nvSpPr>
-          <p:cNvPr id="17" name="Shape 15"/>
-          <p:cNvSpPr/>
-          <p:nvPr/>
-        </p:nvSpPr>
-        <p:spPr>
-          <a:xfrm>
-            <a:off x="8552688" y="2331720"/>
-            <a:ext cx="457200" cy="457200"/>
-          </a:xfrm>
-          <a:prstGeom prst="ellipse">
-            <a:avLst/>
-          </a:prstGeom>
-          <a:solidFill>
-            <a:schemeClr val="accent4"/>
-          </a:solidFill>
-          <a:ln w="25400">
-            <a:solidFill>
-              <a:schemeClr val="accent2"/>
-            </a:solidFill>
-            <a:prstDash val="solid"/>
-          </a:ln>
-        </p:spPr>
-      </p:sp>
-      <p:sp>
-        <p:nvSpPr>
-          <p:cNvPr id="18" name="Text 16"/>
-          <p:cNvSpPr txBox="1"/>
-          <p:nvPr/>
-        </p:nvSpPr>
-        <p:spPr>
-          <a:xfrm>
-            <a:off x="8552688" y="2331720"/>
-            <a:ext cx="457200" cy="457200"/>
-          </a:xfrm>
-          <a:prstGeom prst="rect">
-            <a:avLst/>
-          </a:prstGeom>
-          <a:noFill/>
-          <a:ln/>
-        </p:spPr>
-        <p:txBody>
-          <a:bodyPr wrap="square" lIns="0" tIns="0" rIns="0" bIns="0" rtlCol="0" anchor="ctr"/>
-          <a:lstStyle/>
-          <a:p>
-            <a:pPr algn="ctr" indent="0" marL="0">
-              <a:buNone/>
-            </a:pPr>
-            <a:r>
-              <a:rPr lang="en-US" sz="1500" b="1" dirty="0">
-                <a:solidFill>
-                  <a:schemeClr val="bg1"/>
-                </a:solidFill>
-              </a:rPr>
-              <a:t>3</a:t>
-            </a:r>
-            <a:endParaRPr lang="en-US" sz="1500" dirty="0"/>
-          </a:p>
-        </p:txBody>
-      </p:sp>
-      <p:sp>
-        <p:nvSpPr>
-          <p:cNvPr id="19" name="Text 17"/>
-          <p:cNvSpPr txBox="1"/>
-          <p:nvPr/>
-        </p:nvSpPr>
-        <p:spPr>
-          <a:xfrm>
-            <a:off x="8552688" y="2926080"/>
-            <a:ext cx="2813304" cy="777240"/>
-          </a:xfrm>
-          <a:prstGeom prst="rect">
-            <a:avLst/>
-          </a:prstGeom>
-          <a:noFill/>
-          <a:ln/>
-        </p:spPr>
-        <p:txBody>
-          <a:bodyPr wrap="square" lIns="0" tIns="0" rIns="0" bIns="0" rtlCol="0" anchor="t"/>
-          <a:lstStyle/>
-          <a:p>
-            <a:pPr indent="0" marL="0">
-              <a:buNone/>
-            </a:pPr>
-            <a:r>
-              <a:rPr lang="en-US" sz="1800" b="1" dirty="0">
-                <a:solidFill>
-                  <a:schemeClr val="tx1"/>
-                </a:solidFill>
-                <a:latin typeface="Segoe Script" pitchFamily="34" charset="0"/>
-                <a:ea typeface="Segoe Script" pitchFamily="34" charset="-122"/>
-                <a:cs typeface="Segoe Script" pitchFamily="34" charset="-120"/>
-              </a:rPr>
-              <a:t>Learn to undo it</a:t>
-            </a:r>
-            <a:endParaRPr lang="en-US" sz="1800" dirty="0"/>
-          </a:p>
-        </p:txBody>
-      </p:sp>
-      <p:sp>
-        <p:nvSpPr>
-          <p:cNvPr id="20" name="Text 18"/>
-          <p:cNvSpPr txBox="1"/>
-          <p:nvPr/>
-        </p:nvSpPr>
-        <p:spPr>
-          <a:xfrm>
-            <a:off x="8552688" y="3749040"/>
-            <a:ext cx="2813304" cy="914400"/>
-          </a:xfrm>
-          <a:prstGeom prst="rect">
-            <a:avLst/>
-          </a:prstGeom>
-          <a:noFill/>
-          <a:ln/>
-        </p:spPr>
-        <p:txBody>
-          <a:bodyPr wrap="square" lIns="0" tIns="0" rIns="0" bIns="0" rtlCol="0" anchor="t"/>
-          <a:lstStyle/>
-          <a:p>
-            <a:pPr indent="0" marL="0">
-              <a:buNone/>
-            </a:pPr>
-            <a:r>
-              <a:rPr lang="en-US" sz="1400" dirty="0">
-                <a:solidFill>
-                  <a:schemeClr val="tx2"/>
-                </a:solidFill>
-              </a:rPr>
-              <a:t>A compact generator learns to rebuild the missing detail at 4×, sharpened with a GAN stage.</a:t>
-            </a:r>
-            <a:endParaRPr lang="en-US" sz="1400" dirty="0"/>
-          </a:p>
-        </p:txBody>
-      </p:sp>
-      <p:sp>
-        <p:nvSpPr>
-          <p:cNvPr id="21" name="Text 19"/>
-          <p:cNvSpPr txBox="1"/>
-          <p:nvPr/>
-        </p:nvSpPr>
-        <p:spPr>
-          <a:xfrm>
-            <a:off x="548640" y="5120640"/>
-            <a:ext cx="11064240" cy="822960"/>
-          </a:xfrm>
-          <a:prstGeom prst="rect">
-            <a:avLst/>
-          </a:prstGeom>
-          <a:noFill/>
-          <a:ln/>
-        </p:spPr>
-        <p:txBody>
-          <a:bodyPr wrap="square" lIns="0" tIns="0" rIns="0" bIns="0" rtlCol="0" anchor="t"/>
-          <a:lstStyle/>
-          <a:p>
-            <a:pPr indent="0" marL="0">
-              <a:buNone/>
-            </a:pPr>
-            <a:r>
-              <a:rPr lang="en-US" sz="1400" b="1" dirty="0">
-                <a:solidFill>
-                  <a:schemeClr val="tx1"/>
-                </a:solidFill>
-              </a:rPr>
-              <a:t>For engineers: </a:t>
-            </a:r>
-            <a:pPr indent="0" marL="0">
-              <a:buNone/>
-            </a:pPr>
-            <a:r>
-              <a:rPr lang="en-US" sz="1400" dirty="0">
-                <a:solidFill>
-                  <a:schemeClr val="tx2"/>
-                </a:solidFill>
-              </a:rPr>
-              <a:t>compact ESRGAN-style RRDB generator (1.1M params) trained from scratch in PyTorch: L1 stage, then VGG-perceptual + U-Net-discriminator GAN stage with EMA (Real-ESRGAN recipe), exported to ONNX. Benchmarks are in the appendix.</a:t>
-            </a:r>
-            <a:endParaRPr lang="en-US" sz="1400" dirty="0"/>
-          </a:p>
-        </p:txBody>
-      </p:sp>
-      <p:sp>
-        <p:nvSpPr>
-          <p:cNvPr id="25" name="Slide Number Placeholder 0"/>
-          <p:cNvSpPr>
-            <a:spLocks noGrp="1"/>
-          </p:cNvSpPr>
-          <p:nvPr>
-            <p:ph type="sldNum" sz="quarter" idx="4294967295"/>
-          </p:nvPr>
-        </p:nvSpPr>
-        <p:spPr>
-          <a:xfrm>
-            <a:off x="11064240" y="6400800"/>
-            <a:ext cx="576072" cy="274320"/>
-          </a:xfrm>
-          <a:prstGeom prst="rect">
-            <a:avLst/>
-          </a:prstGeom>
-          <a:extLst>
-            <a:ext uri="{C572A759-6A51-4108-AA02-DFA0A04FC94B}">
-              <ma14:wrappingTextBoxFlag xmlns:ma14="http://schemas.microsoft.com/office/mac/drawingml/2011/main" val="0"/>
-            </a:ext>
-          </a:extLst>
-        </p:spPr>
-        <p:txBody>
-          <a:bodyPr/>
-          <a:lstStyle>
-            <a:lvl1pPr>
-              <a:defRPr sz="1100">
-                <a:solidFill>
-                  <a:schemeClr val="accent5"/>
-                </a:solidFill>
-              </a:defRPr>
-            </a:lvl1pPr>
-          </a:lstStyle>
-          <a:p>
-            <a:pPr algn="r"/>
-            <a:fld id="{F7021451-1387-4CA6-816F-3879F97B5CBC}" type="slidenum">
-              <a:rPr b="0" lang="en-US"/>
-              <a:t>5</a:t>
-            </a:fld>
-            <a:endParaRPr lang="en-US"/>
-          </a:p>
-        </p:txBody>
-      </p:sp>
-    </p:spTree>
-  </p:cSld>
-  <p:clrMapOvr>
-    <a:masterClrMapping/>
-  </p:clrMapOvr>
-</p:sld>
-</file>
-
-<file path=ppt/slides/slide6.xml><?xml version="1.0" encoding="utf-8"?>
-<p:sld xmlns:a="http://schemas.openxmlformats.org/drawingml/2006/main" xmlns:r="http://schemas.openxmlformats.org/officeDocument/2006/relationships" xmlns:p="http://schemas.openxmlformats.org/presentationml/2006/main">
-  <p:cSld name="Slide 6">
-    <p:spTree>
-      <p:nvGrpSpPr>
-        <p:cNvPr id="1" name=""/>
-        <p:cNvGrpSpPr/>
-        <p:nvPr/>
-      </p:nvGrpSpPr>
-      <p:grpSpPr>
-        <a:xfrm>
-          <a:off x="0" y="0"/>
-          <a:ext cx="0" cy="0"/>
-          <a:chOff x="0" y="0"/>
-          <a:chExt cx="0" cy="0"/>
-        </a:xfrm>
-      </p:grpSpPr>
-      <p:sp>
-        <p:nvSpPr>
-          <p:cNvPr id="2" name="Text 0"/>
-          <p:cNvSpPr/>
-          <p:nvPr>
-            <p:ph idx="100" type="body" hasCustomPrompt="1"/>
-          </p:nvPr>
-        </p:nvSpPr>
-        <p:spPr>
-          <a:xfrm>
-            <a:off x="548640" y="384048"/>
-            <a:ext cx="11064240" cy="365760"/>
-          </a:xfrm>
-          <a:prstGeom prst="rect">
-            <a:avLst/>
-          </a:prstGeom>
-          <a:noFill/>
-          <a:ln/>
-        </p:spPr>
-        <p:txBody>
-          <a:bodyPr wrap="square" lIns="0" tIns="0" rIns="0" bIns="0" rtlCol="0" anchor="ctr"/>
-          <a:lstStyle/>
-          <a:p>
-            <a:pPr indent="0" marL="0">
-              <a:buNone/>
-            </a:pPr>
-            <a:r>
-              <a:rPr lang="en-US" sz="1300" b="1" spc="200" kern="0" dirty="0">
-                <a:solidFill>
-                  <a:schemeClr val="accent1"/>
-                </a:solidFill>
-                <a:latin typeface="Segoe UI" pitchFamily="34" charset="0"/>
-                <a:ea typeface="Segoe UI" pitchFamily="34" charset="-122"/>
-                <a:cs typeface="Segoe UI" pitchFamily="34" charset="-120"/>
-              </a:rPr>
-              <a:t>REAL RESULTS</a:t>
-            </a:r>
-            <a:endParaRPr lang="en-US" sz="1300" dirty="0"/>
-          </a:p>
-        </p:txBody>
-      </p:sp>
-      <p:sp>
-        <p:nvSpPr>
-          <p:cNvPr id="3" name="Text 0"/>
-          <p:cNvSpPr/>
-          <p:nvPr>
-            <p:ph idx="101" type="title" hasCustomPrompt="1"/>
-          </p:nvPr>
-        </p:nvSpPr>
-        <p:spPr>
-          <a:xfrm>
-            <a:off x="548640" y="749808"/>
-            <a:ext cx="11064240" cy="868680"/>
-          </a:xfrm>
-          <a:prstGeom prst="rect">
-            <a:avLst/>
-          </a:prstGeom>
-          <a:noFill/>
-          <a:ln/>
-        </p:spPr>
-        <p:txBody>
-          <a:bodyPr wrap="square" lIns="0" tIns="0" rIns="0" bIns="0" rtlCol="0" anchor="t"/>
-          <a:lstStyle/>
-          <a:p>
-            <a:pPr algn="l" indent="0" marL="0">
-              <a:buNone/>
-            </a:pPr>
-            <a:r>
-              <a:rPr lang="en-US" sz="3000" b="1" dirty="0">
-                <a:solidFill>
-                  <a:schemeClr val="tx1"/>
-                </a:solidFill>
-                <a:latin typeface="Segoe Script" pitchFamily="34" charset="0"/>
-                <a:ea typeface="Segoe Script" pitchFamily="34" charset="-122"/>
-                <a:cs typeface="Segoe Script" pitchFamily="34" charset="-120"/>
-              </a:rPr>
-              <a:t>Real results on textures it never saw.</a:t>
-            </a:r>
-            <a:endParaRPr lang="en-US" sz="3000" dirty="0"/>
-          </a:p>
-        </p:txBody>
-      </p:sp>
-      <p:sp>
-        <p:nvSpPr>
-          <p:cNvPr id="4" name="Text 2"/>
-          <p:cNvSpPr txBox="1"/>
-          <p:nvPr/>
-        </p:nvSpPr>
-        <p:spPr>
-          <a:xfrm>
-            <a:off x="548640" y="1508760"/>
-            <a:ext cx="11064240" cy="365760"/>
-          </a:xfrm>
-          <a:prstGeom prst="rect">
-            <a:avLst/>
-          </a:prstGeom>
-          <a:noFill/>
-          <a:ln/>
-        </p:spPr>
-        <p:txBody>
-          <a:bodyPr wrap="square" lIns="0" tIns="0" rIns="0" bIns="0" rtlCol="0" anchor="ctr"/>
-          <a:lstStyle/>
-          <a:p>
-            <a:pPr indent="0" marL="0">
-              <a:buNone/>
-            </a:pPr>
-            <a:r>
-              <a:rPr lang="en-US" sz="1400" dirty="0">
-                <a:solidFill>
-                  <a:schemeClr val="tx2"/>
-                </a:solidFill>
-              </a:rPr>
-              <a:t>Median-improvement textures, different materials, zoomed. PixelForge clears noise and JPEG blocks; detail the tiny input no longer has can't be fully recovered.</a:t>
-            </a:r>
-            <a:endParaRPr lang="en-US" sz="1400" dirty="0"/>
-          </a:p>
-        </p:txBody>
-      </p:sp>
-      <p:sp>
-        <p:nvSpPr>
-          <p:cNvPr id="5" name="Shape 3"/>
-          <p:cNvSpPr/>
-          <p:nvPr/>
-        </p:nvSpPr>
-        <p:spPr>
-          <a:xfrm>
-            <a:off x="548640" y="2011680"/>
-            <a:ext cx="11091672" cy="4206240"/>
-          </a:xfrm>
-          <a:prstGeom prst="roundRect">
-            <a:avLst>
-              <a:gd name="adj" fmla="val 6957"/>
-            </a:avLst>
-          </a:prstGeom>
-          <a:solidFill>
-            <a:srgbClr val="FFFFFF"/>
-          </a:solidFill>
-          <a:ln w="22225">
-            <a:solidFill>
-              <a:schemeClr val="accent2"/>
-            </a:solidFill>
-            <a:prstDash val="solid"/>
-          </a:ln>
-        </p:spPr>
-      </p:sp>
-      <p:pic>
-        <p:nvPicPr>
-          <p:cNvPr id="6" name="Gallery" descr="Zoomed comparisons for three textures">    </p:cNvPr>
-          <p:cNvPicPr>
-            <a:picLocks noChangeAspect="1"/>
-          </p:cNvPicPr>
-          <p:nvPr/>
-        </p:nvPicPr>
-        <p:blipFill>
-          <a:blip r:embed="rId1"/>
-          <a:stretch>
-            <a:fillRect/>
-          </a:stretch>
-        </p:blipFill>
-        <p:spPr>
-          <a:xfrm>
-            <a:off x="2741676" y="2103120"/>
-            <a:ext cx="6705600" cy="4023360"/>
-          </a:xfrm>
-          <a:prstGeom prst="rect">
-            <a:avLst/>
-          </a:prstGeom>
-        </p:spPr>
-      </p:pic>
-      <p:sp>
-        <p:nvSpPr>
-          <p:cNvPr id="25" name="Slide Number Placeholder 0"/>
-          <p:cNvSpPr>
-            <a:spLocks noGrp="1"/>
-          </p:cNvSpPr>
-          <p:nvPr>
-            <p:ph type="sldNum" sz="quarter" idx="4294967295"/>
-          </p:nvPr>
-        </p:nvSpPr>
-        <p:spPr>
-          <a:xfrm>
-            <a:off x="11064240" y="6400800"/>
-            <a:ext cx="576072" cy="274320"/>
-          </a:xfrm>
-          <a:prstGeom prst="rect">
-            <a:avLst/>
-          </a:prstGeom>
-          <a:extLst>
-            <a:ext uri="{C572A759-6A51-4108-AA02-DFA0A04FC94B}">
-              <ma14:wrappingTextBoxFlag xmlns:ma14="http://schemas.microsoft.com/office/mac/drawingml/2011/main" val="0"/>
-            </a:ext>
-          </a:extLst>
-        </p:spPr>
-        <p:txBody>
-          <a:bodyPr/>
-          <a:lstStyle>
-            <a:lvl1pPr>
-              <a:defRPr sz="1100">
-                <a:solidFill>
-                  <a:schemeClr val="accent5"/>
-                </a:solidFill>
-              </a:defRPr>
-            </a:lvl1pPr>
-          </a:lstStyle>
-          <a:p>
-            <a:pPr algn="r"/>
-            <a:fld id="{F7021451-1387-4CA6-816F-3879F97B5CBC}" type="slidenum">
-              <a:rPr b="0" lang="en-US"/>
-              <a:t>6</a:t>
-            </a:fld>
-            <a:endParaRPr lang="en-US"/>
-          </a:p>
-        </p:txBody>
-      </p:sp>
-    </p:spTree>
-  </p:cSld>
-  <p:clrMapOvr>
-    <a:masterClrMapping/>
-  </p:clrMapOvr>
-</p:sld>
-</file>
-
-<file path=ppt/slides/slide7.xml><?xml version="1.0" encoding="utf-8"?>
-<p:sld xmlns:a="http://schemas.openxmlformats.org/drawingml/2006/main" xmlns:r="http://schemas.openxmlformats.org/officeDocument/2006/relationships" xmlns:p="http://schemas.openxmlformats.org/presentationml/2006/main">
-  <p:cSld name="Slide 7">
-    <p:spTree>
-      <p:nvGrpSpPr>
-        <p:cNvPr id="1" name=""/>
-        <p:cNvGrpSpPr/>
-        <p:nvPr/>
-      </p:nvGrpSpPr>
-      <p:grpSpPr>
-        <a:xfrm>
-          <a:off x="0" y="0"/>
-          <a:ext cx="0" cy="0"/>
-          <a:chOff x="0" y="0"/>
-          <a:chExt cx="0" cy="0"/>
-        </a:xfrm>
-      </p:grpSpPr>
-      <p:sp>
-        <p:nvSpPr>
-          <p:cNvPr id="2" name="Text 0"/>
-          <p:cNvSpPr/>
-          <p:nvPr>
-            <p:ph idx="100" type="body" hasCustomPrompt="1"/>
-          </p:nvPr>
-        </p:nvSpPr>
-        <p:spPr>
-          <a:xfrm>
-            <a:off x="548640" y="384048"/>
-            <a:ext cx="11064240" cy="365760"/>
-          </a:xfrm>
-          <a:prstGeom prst="rect">
-            <a:avLst/>
-          </a:prstGeom>
-          <a:noFill/>
-          <a:ln/>
-        </p:spPr>
-        <p:txBody>
-          <a:bodyPr wrap="square" lIns="0" tIns="0" rIns="0" bIns="0" rtlCol="0" anchor="ctr"/>
-          <a:lstStyle/>
-          <a:p>
-            <a:pPr indent="0" marL="0">
-              <a:buNone/>
-            </a:pPr>
-            <a:r>
-              <a:rPr lang="en-US" sz="1300" b="1" spc="200" kern="0" dirty="0">
-                <a:solidFill>
-                  <a:schemeClr val="accent1"/>
-                </a:solidFill>
-                <a:latin typeface="Segoe UI" pitchFamily="34" charset="0"/>
-                <a:ea typeface="Segoe UI" pitchFamily="34" charset="-122"/>
-                <a:cs typeface="Segoe UI" pitchFamily="34" charset="-120"/>
-              </a:rPr>
-              <a:t>HOW WE'D WORK TOGETHER</a:t>
-            </a:r>
-            <a:endParaRPr lang="en-US" sz="1300" dirty="0"/>
-          </a:p>
-        </p:txBody>
-      </p:sp>
-      <p:sp>
-        <p:nvSpPr>
-          <p:cNvPr id="3" name="Text 0"/>
-          <p:cNvSpPr/>
-          <p:nvPr>
-            <p:ph idx="101" type="title" hasCustomPrompt="1"/>
-          </p:nvPr>
-        </p:nvSpPr>
-        <p:spPr>
-          <a:xfrm>
-            <a:off x="548640" y="749808"/>
-            <a:ext cx="11064240" cy="868680"/>
-          </a:xfrm>
-          <a:prstGeom prst="rect">
-            <a:avLst/>
-          </a:prstGeom>
-          <a:noFill/>
-          <a:ln/>
-        </p:spPr>
-        <p:txBody>
-          <a:bodyPr wrap="square" lIns="0" tIns="0" rIns="0" bIns="0" rtlCol="0" anchor="t"/>
-          <a:lstStyle/>
-          <a:p>
-            <a:pPr algn="l" indent="0" marL="0">
-              <a:buNone/>
-            </a:pPr>
-            <a:r>
-              <a:rPr lang="en-US" sz="3000" b="1" dirty="0">
-                <a:solidFill>
-                  <a:schemeClr val="tx1"/>
-                </a:solidFill>
-                <a:latin typeface="Segoe Script" pitchFamily="34" charset="0"/>
-                <a:ea typeface="Segoe Script" pitchFamily="34" charset="-122"/>
-                <a:cs typeface="Segoe Script" pitchFamily="34" charset="-120"/>
-              </a:rPr>
-              <a:t>Start with a test pack. Scale to the whole library.</a:t>
-            </a:r>
-            <a:endParaRPr lang="en-US" sz="3000" dirty="0"/>
-          </a:p>
-        </p:txBody>
-      </p:sp>
-      <p:sp>
-        <p:nvSpPr>
-          <p:cNvPr id="4" name="Work step 1"/>
-          <p:cNvSpPr/>
-          <p:nvPr/>
-        </p:nvSpPr>
-        <p:spPr>
-          <a:xfrm>
-            <a:off x="548640" y="2011680"/>
-            <a:ext cx="3483864" cy="2514600"/>
-          </a:xfrm>
-          <a:prstGeom prst="roundRect">
-            <a:avLst>
-              <a:gd name="adj" fmla="val 11636"/>
-            </a:avLst>
-          </a:prstGeom>
-          <a:solidFill>
-            <a:schemeClr val="bg2"/>
-          </a:solidFill>
-          <a:ln w="15875">
-            <a:solidFill>
-              <a:schemeClr val="accent6"/>
-            </a:solidFill>
-            <a:prstDash val="solid"/>
-          </a:ln>
-        </p:spPr>
-      </p:sp>
-      <p:sp>
-        <p:nvSpPr>
-          <p:cNvPr id="5" name="Text 3"/>
-          <p:cNvSpPr txBox="1"/>
-          <p:nvPr/>
-        </p:nvSpPr>
-        <p:spPr>
-          <a:xfrm>
-            <a:off x="868680" y="2286000"/>
-            <a:ext cx="1828800" cy="320040"/>
-          </a:xfrm>
-          <a:prstGeom prst="rect">
-            <a:avLst/>
-          </a:prstGeom>
-          <a:noFill/>
-          <a:ln/>
-        </p:spPr>
-        <p:txBody>
-          <a:bodyPr wrap="square" lIns="0" tIns="0" rIns="0" bIns="0" rtlCol="0" anchor="ctr"/>
-          <a:lstStyle/>
-          <a:p>
-            <a:pPr indent="0" marL="0">
-              <a:buNone/>
-            </a:pPr>
-            <a:r>
-              <a:rPr lang="en-US" sz="1300" b="1" spc="200" kern="0" dirty="0">
-                <a:solidFill>
-                  <a:schemeClr val="accent1"/>
-                </a:solidFill>
-              </a:rPr>
-              <a:t>STEP 1</a:t>
-            </a:r>
-            <a:endParaRPr lang="en-US" sz="1300" dirty="0"/>
-          </a:p>
-        </p:txBody>
-      </p:sp>
-      <p:sp>
-        <p:nvSpPr>
-          <p:cNvPr id="6" name="Text 4"/>
-          <p:cNvSpPr txBox="1"/>
-          <p:nvPr/>
-        </p:nvSpPr>
-        <p:spPr>
-          <a:xfrm>
-            <a:off x="868680" y="2651760"/>
-            <a:ext cx="2843784" cy="777240"/>
-          </a:xfrm>
-          <a:prstGeom prst="rect">
-            <a:avLst/>
-          </a:prstGeom>
-          <a:noFill/>
-          <a:ln/>
-        </p:spPr>
-        <p:txBody>
-          <a:bodyPr wrap="square" lIns="0" tIns="0" rIns="0" bIns="0" rtlCol="0" anchor="t"/>
-          <a:lstStyle/>
-          <a:p>
-            <a:pPr indent="0" marL="0">
-              <a:buNone/>
-            </a:pPr>
-            <a:r>
-              <a:rPr lang="en-US" sz="1800" b="1" dirty="0">
-                <a:solidFill>
-                  <a:schemeClr val="tx1"/>
-                </a:solidFill>
-                <a:latin typeface="Segoe Script" pitchFamily="34" charset="0"/>
-                <a:ea typeface="Segoe Script" pitchFamily="34" charset="-122"/>
-                <a:cs typeface="Segoe Script" pitchFamily="34" charset="-120"/>
-              </a:rPr>
-              <a:t>Send 10–20 textures</a:t>
-            </a:r>
-            <a:endParaRPr lang="en-US" sz="1800" dirty="0"/>
-          </a:p>
-        </p:txBody>
-      </p:sp>
-      <p:sp>
-        <p:nvSpPr>
-          <p:cNvPr id="7" name="Text 5"/>
-          <p:cNvSpPr txBox="1"/>
-          <p:nvPr/>
-        </p:nvSpPr>
-        <p:spPr>
-          <a:xfrm>
-            <a:off x="868680" y="3474720"/>
-            <a:ext cx="2843784" cy="960120"/>
-          </a:xfrm>
-          <a:prstGeom prst="rect">
-            <a:avLst/>
-          </a:prstGeom>
-          <a:noFill/>
-          <a:ln/>
-        </p:spPr>
-        <p:txBody>
-          <a:bodyPr wrap="square" lIns="0" tIns="0" rIns="0" bIns="0" rtlCol="0" anchor="t"/>
-          <a:lstStyle/>
-          <a:p>
-            <a:pPr indent="0" marL="0">
-              <a:buNone/>
-            </a:pPr>
-            <a:r>
-              <a:rPr lang="en-US" sz="1400" dirty="0">
-                <a:solidFill>
-                  <a:schemeClr val="tx2"/>
-                </a:solidFill>
-              </a:rPr>
-              <a:t>A representative sample of your game's textures or asset pack.</a:t>
-            </a:r>
-            <a:endParaRPr lang="en-US" sz="1400" dirty="0"/>
-          </a:p>
-        </p:txBody>
-      </p:sp>
-      <p:sp>
-        <p:nvSpPr>
-          <p:cNvPr id="8" name="Work step 2"/>
-          <p:cNvSpPr/>
-          <p:nvPr/>
-        </p:nvSpPr>
-        <p:spPr>
-          <a:xfrm>
-            <a:off x="4352544" y="2011680"/>
-            <a:ext cx="3483864" cy="2514600"/>
-          </a:xfrm>
-          <a:prstGeom prst="roundRect">
-            <a:avLst>
-              <a:gd name="adj" fmla="val 11636"/>
-            </a:avLst>
-          </a:prstGeom>
-          <a:solidFill>
-            <a:schemeClr val="bg2"/>
-          </a:solidFill>
-          <a:ln w="15875">
-            <a:solidFill>
-              <a:schemeClr val="accent6"/>
-            </a:solidFill>
-            <a:prstDash val="solid"/>
-          </a:ln>
-        </p:spPr>
-      </p:sp>
-      <p:sp>
-        <p:nvSpPr>
-          <p:cNvPr id="9" name="Text 7"/>
-          <p:cNvSpPr txBox="1"/>
-          <p:nvPr/>
-        </p:nvSpPr>
-        <p:spPr>
-          <a:xfrm>
-            <a:off x="4672584" y="2286000"/>
-            <a:ext cx="1828800" cy="320040"/>
-          </a:xfrm>
-          <a:prstGeom prst="rect">
-            <a:avLst/>
-          </a:prstGeom>
-          <a:noFill/>
-          <a:ln/>
-        </p:spPr>
-        <p:txBody>
-          <a:bodyPr wrap="square" lIns="0" tIns="0" rIns="0" bIns="0" rtlCol="0" anchor="ctr"/>
-          <a:lstStyle/>
-          <a:p>
-            <a:pPr indent="0" marL="0">
-              <a:buNone/>
-            </a:pPr>
-            <a:r>
-              <a:rPr lang="en-US" sz="1300" b="1" spc="200" kern="0" dirty="0">
-                <a:solidFill>
-                  <a:schemeClr val="accent1"/>
-                </a:solidFill>
-              </a:rPr>
-              <a:t>STEP 2</a:t>
-            </a:r>
-            <a:endParaRPr lang="en-US" sz="1300" dirty="0"/>
-          </a:p>
-        </p:txBody>
-      </p:sp>
-      <p:sp>
-        <p:nvSpPr>
-          <p:cNvPr id="10" name="Text 8"/>
-          <p:cNvSpPr txBox="1"/>
-          <p:nvPr/>
-        </p:nvSpPr>
-        <p:spPr>
-          <a:xfrm>
-            <a:off x="4672584" y="2651760"/>
-            <a:ext cx="2843784" cy="777240"/>
-          </a:xfrm>
-          <a:prstGeom prst="rect">
-            <a:avLst/>
-          </a:prstGeom>
-          <a:noFill/>
-          <a:ln/>
-        </p:spPr>
-        <p:txBody>
-          <a:bodyPr wrap="square" lIns="0" tIns="0" rIns="0" bIns="0" rtlCol="0" anchor="t"/>
-          <a:lstStyle/>
-          <a:p>
-            <a:pPr indent="0" marL="0">
-              <a:buNone/>
-            </a:pPr>
-            <a:r>
-              <a:rPr lang="en-US" sz="1800" b="1" dirty="0">
-                <a:solidFill>
-                  <a:schemeClr val="tx1"/>
-                </a:solidFill>
-                <a:latin typeface="Segoe Script" pitchFamily="34" charset="0"/>
-                <a:ea typeface="Segoe Script" pitchFamily="34" charset="-122"/>
-                <a:cs typeface="Segoe Script" pitchFamily="34" charset="-120"/>
-              </a:rPr>
-              <a:t>Test pack back</a:t>
-            </a:r>
-            <a:endParaRPr lang="en-US" sz="1800" dirty="0"/>
-          </a:p>
-        </p:txBody>
-      </p:sp>
-      <p:sp>
-        <p:nvSpPr>
-          <p:cNvPr id="11" name="Text 9"/>
-          <p:cNvSpPr txBox="1"/>
-          <p:nvPr/>
-        </p:nvSpPr>
-        <p:spPr>
-          <a:xfrm>
-            <a:off x="4672584" y="3474720"/>
-            <a:ext cx="2843784" cy="960120"/>
-          </a:xfrm>
-          <a:prstGeom prst="rect">
-            <a:avLst/>
-          </a:prstGeom>
-          <a:noFill/>
-          <a:ln/>
-        </p:spPr>
-        <p:txBody>
-          <a:bodyPr wrap="square" lIns="0" tIns="0" rIns="0" bIns="0" rtlCol="0" anchor="t"/>
-          <a:lstStyle/>
-          <a:p>
-            <a:pPr indent="0" marL="0">
-              <a:buNone/>
-            </a:pPr>
-            <a:r>
-              <a:rPr lang="en-US" sz="1400" dirty="0">
-                <a:solidFill>
-                  <a:schemeClr val="tx2"/>
-                </a:solidFill>
-              </a:rPr>
-              <a:t>I upscale them, optionally fine-tune on your art style, and send before/after comparisons.</a:t>
-            </a:r>
-            <a:endParaRPr lang="en-US" sz="1400" dirty="0"/>
-          </a:p>
-        </p:txBody>
-      </p:sp>
-      <p:sp>
-        <p:nvSpPr>
-          <p:cNvPr id="12" name="Work step 3"/>
-          <p:cNvSpPr/>
-          <p:nvPr/>
-        </p:nvSpPr>
-        <p:spPr>
-          <a:xfrm>
-            <a:off x="8156448" y="2011680"/>
-            <a:ext cx="3483864" cy="2514600"/>
-          </a:xfrm>
-          <a:prstGeom prst="roundRect">
-            <a:avLst>
-              <a:gd name="adj" fmla="val 11636"/>
-            </a:avLst>
-          </a:prstGeom>
-          <a:solidFill>
-            <a:schemeClr val="bg2"/>
-          </a:solidFill>
-          <a:ln w="15875">
-            <a:solidFill>
-              <a:schemeClr val="accent6"/>
-            </a:solidFill>
-            <a:prstDash val="solid"/>
-          </a:ln>
-        </p:spPr>
-      </p:sp>
-      <p:sp>
-        <p:nvSpPr>
-          <p:cNvPr id="13" name="Text 11"/>
-          <p:cNvSpPr txBox="1"/>
-          <p:nvPr/>
-        </p:nvSpPr>
-        <p:spPr>
-          <a:xfrm>
-            <a:off x="8476488" y="2286000"/>
-            <a:ext cx="1828800" cy="320040"/>
-          </a:xfrm>
-          <a:prstGeom prst="rect">
-            <a:avLst/>
-          </a:prstGeom>
-          <a:noFill/>
-          <a:ln/>
-        </p:spPr>
-        <p:txBody>
-          <a:bodyPr wrap="square" lIns="0" tIns="0" rIns="0" bIns="0" rtlCol="0" anchor="ctr"/>
-          <a:lstStyle/>
-          <a:p>
-            <a:pPr indent="0" marL="0">
-              <a:buNone/>
-            </a:pPr>
-            <a:r>
-              <a:rPr lang="en-US" sz="1300" b="1" spc="200" kern="0" dirty="0">
-                <a:solidFill>
-                  <a:schemeClr val="accent1"/>
-                </a:solidFill>
-              </a:rPr>
-              <a:t>STEP 3</a:t>
-            </a:r>
-            <a:endParaRPr lang="en-US" sz="1300" dirty="0"/>
-          </a:p>
-        </p:txBody>
-      </p:sp>
-      <p:sp>
-        <p:nvSpPr>
-          <p:cNvPr id="14" name="Text 12"/>
-          <p:cNvSpPr txBox="1"/>
-          <p:nvPr/>
-        </p:nvSpPr>
-        <p:spPr>
-          <a:xfrm>
-            <a:off x="8476488" y="2651760"/>
-            <a:ext cx="2843784" cy="777240"/>
-          </a:xfrm>
-          <a:prstGeom prst="rect">
-            <a:avLst/>
-          </a:prstGeom>
-          <a:noFill/>
-          <a:ln/>
-        </p:spPr>
-        <p:txBody>
-          <a:bodyPr wrap="square" lIns="0" tIns="0" rIns="0" bIns="0" rtlCol="0" anchor="t"/>
-          <a:lstStyle/>
-          <a:p>
-            <a:pPr indent="0" marL="0">
-              <a:buNone/>
-            </a:pPr>
-            <a:r>
-              <a:rPr lang="en-US" sz="1800" b="1" dirty="0">
-                <a:solidFill>
-                  <a:schemeClr val="tx1"/>
-                </a:solidFill>
-                <a:latin typeface="Segoe Script" pitchFamily="34" charset="0"/>
-                <a:ea typeface="Segoe Script" pitchFamily="34" charset="-122"/>
-                <a:cs typeface="Segoe Script" pitchFamily="34" charset="-120"/>
-              </a:rPr>
-              <a:t>Batch the library</a:t>
-            </a:r>
-            <a:endParaRPr lang="en-US" sz="1800" dirty="0"/>
-          </a:p>
-        </p:txBody>
-      </p:sp>
-      <p:sp>
-        <p:nvSpPr>
-          <p:cNvPr id="15" name="Text 13"/>
-          <p:cNvSpPr txBox="1"/>
-          <p:nvPr/>
-        </p:nvSpPr>
-        <p:spPr>
-          <a:xfrm>
-            <a:off x="8476488" y="3474720"/>
-            <a:ext cx="2843784" cy="960120"/>
-          </a:xfrm>
-          <a:prstGeom prst="rect">
-            <a:avLst/>
-          </a:prstGeom>
-          <a:noFill/>
-          <a:ln/>
-        </p:spPr>
-        <p:txBody>
-          <a:bodyPr wrap="square" lIns="0" tIns="0" rIns="0" bIns="0" rtlCol="0" anchor="t"/>
-          <a:lstStyle/>
-          <a:p>
-            <a:pPr indent="0" marL="0">
-              <a:buNone/>
-            </a:pPr>
-            <a:r>
-              <a:rPr lang="en-US" sz="1400" dirty="0">
-                <a:solidFill>
-                  <a:schemeClr val="tx2"/>
-                </a:solidFill>
-              </a:rPr>
-              <a:t>Folder in, folder out, file names kept, ready to drop into your mod or engine.</a:t>
-            </a:r>
-            <a:endParaRPr lang="en-US" sz="1400" dirty="0"/>
-          </a:p>
-        </p:txBody>
-      </p:sp>
-      <p:sp>
-        <p:nvSpPr>
-          <p:cNvPr id="16" name="What you get"/>
-          <p:cNvSpPr/>
-          <p:nvPr/>
-        </p:nvSpPr>
-        <p:spPr>
-          <a:xfrm>
-            <a:off x="548640" y="4800600"/>
-            <a:ext cx="11091672" cy="1325880"/>
-          </a:xfrm>
-          <a:prstGeom prst="roundRect">
-            <a:avLst>
-              <a:gd name="adj" fmla="val 22069"/>
-            </a:avLst>
-          </a:prstGeom>
-          <a:solidFill>
-            <a:schemeClr val="bg2"/>
-          </a:solidFill>
-          <a:ln w="15875">
-            <a:solidFill>
-              <a:schemeClr val="accent6"/>
-            </a:solidFill>
-            <a:prstDash val="solid"/>
-          </a:ln>
-        </p:spPr>
-      </p:sp>
-      <p:sp>
-        <p:nvSpPr>
-          <p:cNvPr id="17" name="Text 15"/>
-          <p:cNvSpPr txBox="1"/>
-          <p:nvPr/>
-        </p:nvSpPr>
-        <p:spPr>
-          <a:xfrm>
-            <a:off x="868680" y="4937760"/>
-            <a:ext cx="10424160" cy="1051560"/>
-          </a:xfrm>
-          <a:prstGeom prst="rect">
-            <a:avLst/>
-          </a:prstGeom>
-          <a:noFill/>
-          <a:ln/>
-        </p:spPr>
-        <p:txBody>
-          <a:bodyPr wrap="square" lIns="0" tIns="0" rIns="0" bIns="0" rtlCol="0" anchor="ctr"/>
-          <a:lstStyle/>
-          <a:p>
-            <a:pPr indent="0" marL="0">
-              <a:buNone/>
-            </a:pPr>
-            <a:r>
-              <a:rPr lang="en-US" sz="1600" b="1" dirty="0">
-                <a:solidFill>
-                  <a:schemeClr val="tx1"/>
-                </a:solidFill>
-              </a:rPr>
-              <a:t>What you get:  </a:t>
-            </a:r>
-            <a:pPr indent="0" marL="0">
-              <a:buNone/>
-            </a:pPr>
-            <a:r>
-              <a:rPr lang="en-US" sz="1600" dirty="0">
-                <a:solidFill>
-                  <a:schemeClr val="tx2"/>
-                </a:solidFill>
-              </a:rPr>
-              <a:t>the HD texture set · a batch tool you can rerun on new assets · optional model fine-tuned on your art style · before/after report</a:t>
-            </a:r>
-            <a:endParaRPr lang="en-US" sz="1600" dirty="0"/>
-          </a:p>
-        </p:txBody>
-      </p:sp>
-      <p:sp>
-        <p:nvSpPr>
-          <p:cNvPr id="25" name="Slide Number Placeholder 0"/>
-          <p:cNvSpPr>
-            <a:spLocks noGrp="1"/>
-          </p:cNvSpPr>
-          <p:nvPr>
-            <p:ph type="sldNum" sz="quarter" idx="4294967295"/>
-          </p:nvPr>
-        </p:nvSpPr>
-        <p:spPr>
-          <a:xfrm>
-            <a:off x="11064240" y="6400800"/>
-            <a:ext cx="576072" cy="274320"/>
-          </a:xfrm>
-          <a:prstGeom prst="rect">
-            <a:avLst/>
-          </a:prstGeom>
-          <a:extLst>
-            <a:ext uri="{C572A759-6A51-4108-AA02-DFA0A04FC94B}">
-              <ma14:wrappingTextBoxFlag xmlns:ma14="http://schemas.microsoft.com/office/mac/drawingml/2011/main" val="0"/>
-            </a:ext>
-          </a:extLst>
-        </p:spPr>
-        <p:txBody>
-          <a:bodyPr/>
-          <a:lstStyle>
-            <a:lvl1pPr>
-              <a:defRPr sz="1100">
-                <a:solidFill>
-                  <a:schemeClr val="accent5"/>
-                </a:solidFill>
-              </a:defRPr>
-            </a:lvl1pPr>
-          </a:lstStyle>
-          <a:p>
-            <a:pPr algn="r"/>
-            <a:fld id="{F7021451-1387-4CA6-816F-3879F97B5CBC}" type="slidenum">
-              <a:rPr b="0" lang="en-US"/>
-              <a:t>7</a:t>
-            </a:fld>
-            <a:endParaRPr lang="en-US"/>
-          </a:p>
-        </p:txBody>
-      </p:sp>
-    </p:spTree>
-  </p:cSld>
-  <p:clrMapOvr>
-    <a:masterClrMapping/>
-  </p:clrMapOvr>
-</p:sld>
-</file>
-
-<file path=ppt/slides/slide8.xml><?xml version="1.0" encoding="utf-8"?>
-<p:sld xmlns:a="http://schemas.openxmlformats.org/drawingml/2006/main" xmlns:r="http://schemas.openxmlformats.org/officeDocument/2006/relationships" xmlns:p="http://schemas.openxmlformats.org/presentationml/2006/main">
-  <p:cSld name="Slide 8">
-    <p:spTree>
-      <p:nvGrpSpPr>
-        <p:cNvPr id="1" name=""/>
-        <p:cNvGrpSpPr/>
-        <p:nvPr/>
-      </p:nvGrpSpPr>
-      <p:grpSpPr>
-        <a:xfrm>
-          <a:off x="0" y="0"/>
-          <a:ext cx="0" cy="0"/>
-          <a:chOff x="0" y="0"/>
-          <a:chExt cx="0" cy="0"/>
-        </a:xfrm>
-      </p:grpSpPr>
-      <p:sp>
-        <p:nvSpPr>
-          <p:cNvPr id="2" name="Text 0"/>
-          <p:cNvSpPr txBox="1"/>
-          <p:nvPr/>
-        </p:nvSpPr>
-        <p:spPr>
-          <a:xfrm>
-            <a:off x="548640" y="822960"/>
-            <a:ext cx="5486400" cy="365760"/>
-          </a:xfrm>
-          <a:prstGeom prst="rect">
-            <a:avLst/>
-          </a:prstGeom>
-          <a:noFill/>
-          <a:ln/>
-        </p:spPr>
-        <p:txBody>
-          <a:bodyPr wrap="square" lIns="0" tIns="0" rIns="0" bIns="0" rtlCol="0" anchor="ctr"/>
-          <a:lstStyle/>
-          <a:p>
-            <a:pPr indent="0" marL="0">
-              <a:buNone/>
-            </a:pPr>
-            <a:r>
-              <a:rPr lang="en-US" sz="1400" b="1" spc="200" kern="0" dirty="0">
-                <a:solidFill>
-                  <a:schemeClr val="accent1"/>
-                </a:solidFill>
-                <a:latin typeface="Segoe UI" pitchFamily="34" charset="0"/>
-                <a:ea typeface="Segoe UI" pitchFamily="34" charset="-122"/>
-                <a:cs typeface="Segoe UI" pitchFamily="34" charset="-120"/>
-              </a:rPr>
-              <a:t>NEXT STEP</a:t>
-            </a:r>
-            <a:endParaRPr lang="en-US" sz="1400" dirty="0"/>
-          </a:p>
-        </p:txBody>
-      </p:sp>
-      <p:sp>
-        <p:nvSpPr>
-          <p:cNvPr id="3" name="Text 1"/>
-          <p:cNvSpPr txBox="1"/>
-          <p:nvPr/>
-        </p:nvSpPr>
-        <p:spPr>
-          <a:xfrm>
-            <a:off x="548640" y="1234440"/>
-            <a:ext cx="11064240" cy="1737360"/>
-          </a:xfrm>
-          <a:prstGeom prst="rect">
-            <a:avLst/>
-          </a:prstGeom>
-          <a:noFill/>
-          <a:ln/>
-        </p:spPr>
-        <p:txBody>
-          <a:bodyPr wrap="square" lIns="0" tIns="0" rIns="0" bIns="0" rtlCol="0" anchor="t"/>
-          <a:lstStyle/>
-          <a:p>
-            <a:pPr indent="0" marL="0">
-              <a:buNone/>
-            </a:pPr>
-            <a:r>
-              <a:rPr lang="en-US" sz="4200" b="1" dirty="0">
-                <a:solidFill>
-                  <a:schemeClr val="tx1"/>
-                </a:solidFill>
-                <a:latin typeface="Segoe Script" pitchFamily="34" charset="0"/>
-                <a:ea typeface="Segoe Script" pitchFamily="34" charset="-122"/>
-                <a:cs typeface="Segoe Script" pitchFamily="34" charset="-120"/>
-              </a:rPr>
-              <a:t>Send me 10 of your textures.</a:t>
-            </a:r>
-            <a:endParaRPr lang="en-US" sz="4200" dirty="0"/>
-          </a:p>
-          <a:p>
-            <a:pPr indent="0" marL="0">
-              <a:buNone/>
-            </a:pPr>
-            <a:r>
-              <a:rPr lang="en-US" sz="4200" b="1" dirty="0">
-                <a:solidFill>
-                  <a:schemeClr val="accent1"/>
-                </a:solidFill>
-                <a:latin typeface="Segoe Script" pitchFamily="34" charset="0"/>
-                <a:ea typeface="Segoe Script" pitchFamily="34" charset="-122"/>
-                <a:cs typeface="Segoe Script" pitchFamily="34" charset="-120"/>
-              </a:rPr>
-              <a:t>I'll send them back in HD.</a:t>
-            </a:r>
-            <a:endParaRPr lang="en-US" sz="4200" dirty="0"/>
-          </a:p>
-        </p:txBody>
-      </p:sp>
-      <p:sp>
-        <p:nvSpPr>
-          <p:cNvPr id="4" name="Shape 2"/>
-          <p:cNvSpPr/>
-          <p:nvPr/>
-        </p:nvSpPr>
-        <p:spPr>
-          <a:xfrm>
-            <a:off x="548640" y="3246120"/>
-            <a:ext cx="2651760" cy="2651760"/>
-          </a:xfrm>
-          <a:prstGeom prst="roundRect">
-            <a:avLst>
-              <a:gd name="adj" fmla="val 11034"/>
-            </a:avLst>
-          </a:prstGeom>
-          <a:solidFill>
-            <a:srgbClr val="FFFFFF"/>
-          </a:solidFill>
-          <a:ln w="22225">
-            <a:solidFill>
-              <a:schemeClr val="accent2"/>
-            </a:solidFill>
-            <a:prstDash val="solid"/>
-          </a:ln>
-        </p:spPr>
-      </p:sp>
-      <p:pic>
-        <p:nvPicPr>
-          <p:cNvPr id="5" name="QR code" descr="QR code to the live demo">    </p:cNvPr>
-          <p:cNvPicPr>
-            <a:picLocks noChangeAspect="1"/>
-          </p:cNvPicPr>
-          <p:nvPr/>
-        </p:nvPicPr>
-        <p:blipFill>
-          <a:blip r:embed="rId1"/>
-          <a:stretch>
-            <a:fillRect/>
-          </a:stretch>
-        </p:blipFill>
-        <p:spPr>
-          <a:xfrm>
-            <a:off x="685800" y="3383280"/>
-            <a:ext cx="2377440" cy="2377440"/>
-          </a:xfrm>
-          <a:prstGeom prst="rect">
-            <a:avLst/>
-          </a:prstGeom>
-        </p:spPr>
-      </p:pic>
-      <p:sp>
-        <p:nvSpPr>
-          <p:cNvPr id="6" name="Text 3"/>
-          <p:cNvSpPr txBox="1"/>
-          <p:nvPr/>
-        </p:nvSpPr>
-        <p:spPr>
-          <a:xfrm>
-            <a:off x="3657600" y="3246120"/>
-            <a:ext cx="7863840" cy="2651760"/>
-          </a:xfrm>
-          <a:prstGeom prst="rect">
-            <a:avLst/>
-          </a:prstGeom>
-          <a:noFill/>
-          <a:ln/>
-        </p:spPr>
-        <p:txBody>
-          <a:bodyPr wrap="square" lIns="0" tIns="0" rIns="0" bIns="0" rtlCol="0" anchor="t"/>
-          <a:lstStyle/>
-          <a:p>
-            <a:pPr indent="0" marL="0">
-              <a:buNone/>
-            </a:pPr>
-            <a:r>
-              <a:rPr lang="en-US" sz="1800" b="1" dirty="0">
-                <a:solidFill>
-                  <a:schemeClr val="tx1"/>
-                </a:solidFill>
-              </a:rPr>
-              <a:t>Try the live demo</a:t>
-            </a:r>
-            <a:endParaRPr lang="en-US" sz="1800" dirty="0"/>
-          </a:p>
-          <a:p>
-            <a:pPr indent="0" marL="0">
-              <a:buNone/>
-            </a:pPr>
-            <a:r>
-              <a:rPr lang="en-US" sz="1800" u="sng" dirty="0">
-                <a:solidFill>
-                  <a:schemeClr val="accent1"/>
-                </a:solidFill>
-                <a:hlinkClick r:id="rId2" invalidUrl="" action="" tgtFrame="" tooltip="" history="1" highlightClick="0" endSnd="0">
-                  <a:extLst>
-                    <a:ext uri="{A12FA001-AC4F-418D-AE19-62706E023703}">
-                      <ahyp:hlinkClr xmlns:ahyp="http://schemas.microsoft.com/office/drawing/2018/hyperlinkcolor" val="tx"/>
-                    </a:ext>
-                  </a:extLst>
-                </a:hlinkClick>
-              </a:rPr>
-              <a:t>priyanshu-singh-git.github.io/pixelforge/</a:t>
-            </a:r>
-            <a:endParaRPr lang="en-US" sz="1800" dirty="0"/>
-          </a:p>
-          <a:p>
-            <a:pPr indent="0" marL="0">
-              <a:buNone/>
-            </a:pPr>
-            <a:r>
-              <a:rPr lang="en-US" sz="600" dirty="0">
-                <a:solidFill>
-                  <a:srgbClr val="000000"/>
-                </a:solidFill>
-              </a:rPr>
-              <a:t> </a:t>
-            </a:r>
-            <a:endParaRPr lang="en-US" sz="1800" dirty="0"/>
-          </a:p>
-          <a:p>
-            <a:pPr indent="0" marL="0">
-              <a:buNone/>
-            </a:pPr>
-            <a:r>
-              <a:rPr lang="en-US" sz="1800" b="1" dirty="0">
-                <a:solidFill>
-                  <a:schemeClr val="tx1"/>
-                </a:solidFill>
-              </a:rPr>
-              <a:t>Code and full benchmark</a:t>
-            </a:r>
-            <a:endParaRPr lang="en-US" sz="1800" dirty="0"/>
-          </a:p>
-          <a:p>
-            <a:pPr indent="0" marL="0">
-              <a:buNone/>
-            </a:pPr>
-            <a:r>
-              <a:rPr lang="en-US" sz="1800" u="sng" dirty="0">
-                <a:solidFill>
-                  <a:schemeClr val="accent1"/>
-                </a:solidFill>
-                <a:hlinkClick r:id="rId3" invalidUrl="" action="" tgtFrame="" tooltip="" history="1" highlightClick="0" endSnd="0">
-                  <a:extLst>
-                    <a:ext uri="{A12FA001-AC4F-418D-AE19-62706E023703}">
-                      <ahyp:hlinkClr xmlns:ahyp="http://schemas.microsoft.com/office/drawing/2018/hyperlinkcolor" val="tx"/>
-                    </a:ext>
-                  </a:extLst>
-                </a:hlinkClick>
-              </a:rPr>
-              <a:t>github.com/Priyanshu-Singh-git/pixelforge</a:t>
-            </a:r>
-            <a:endParaRPr lang="en-US" sz="1800" dirty="0"/>
-          </a:p>
-        </p:txBody>
-      </p:sp>
-      <p:sp>
-        <p:nvSpPr>
-          <p:cNvPr id="7" name="Text 4"/>
-          <p:cNvSpPr txBox="1"/>
-          <p:nvPr/>
-        </p:nvSpPr>
-        <p:spPr>
-          <a:xfrm>
-            <a:off x="548640" y="6172200"/>
-            <a:ext cx="11064240" cy="365760"/>
-          </a:xfrm>
-          <a:prstGeom prst="rect">
-            <a:avLst/>
-          </a:prstGeom>
-          <a:noFill/>
-          <a:ln/>
-        </p:spPr>
-        <p:txBody>
-          <a:bodyPr wrap="square" lIns="0" tIns="0" rIns="0" bIns="0" rtlCol="0" anchor="ctr"/>
-          <a:lstStyle/>
-          <a:p>
-            <a:pPr indent="0" marL="0">
-              <a:buNone/>
-            </a:pPr>
-            <a:r>
-              <a:rPr lang="en-US" sz="1200" dirty="0">
-                <a:solidFill>
-                  <a:schemeClr val="accent5"/>
-                </a:solidFill>
-              </a:rPr>
-              <a:t>Priyanshu Singh · Freelance AI / ML Engineer · Trained on Poly Haven CC0 textures. Commercial use of the code needs a licence; see the repo.</a:t>
-            </a:r>
-            <a:endParaRPr lang="en-US" sz="1200" dirty="0"/>
-          </a:p>
-        </p:txBody>
-      </p:sp>
-    </p:spTree>
-  </p:cSld>
-  <p:clrMapOvr>
-    <a:masterClrMapping/>
-  </p:clrMapOvr>
-</p:sld>
-</file>
-
-<file path=ppt/slides/slide9.xml><?xml version="1.0" encoding="utf-8"?>
-<p:sld xmlns:a="http://schemas.openxmlformats.org/drawingml/2006/main" xmlns:r="http://schemas.openxmlformats.org/officeDocument/2006/relationships" xmlns:p="http://schemas.openxmlformats.org/presentationml/2006/main">
-  <p:cSld name="Slide 9">
-    <p:spTree>
-      <p:nvGrpSpPr>
-        <p:cNvPr id="1" name=""/>
-        <p:cNvGrpSpPr/>
-        <p:nvPr/>
-      </p:nvGrpSpPr>
-      <p:grpSpPr>
-        <a:xfrm>
-          <a:off x="0" y="0"/>
-          <a:ext cx="0" cy="0"/>
-          <a:chOff x="0" y="0"/>
-          <a:chExt cx="0" cy="0"/>
-        </a:xfrm>
-      </p:grpSpPr>
-      <p:sp>
-        <p:nvSpPr>
-          <p:cNvPr id="2" name="Text 0"/>
-          <p:cNvSpPr/>
-          <p:nvPr>
-            <p:ph idx="100" type="body" hasCustomPrompt="1"/>
-          </p:nvPr>
-        </p:nvSpPr>
-        <p:spPr>
-          <a:xfrm>
-            <a:off x="548640" y="384048"/>
-            <a:ext cx="11064240" cy="365760"/>
-          </a:xfrm>
-          <a:prstGeom prst="rect">
-            <a:avLst/>
-          </a:prstGeom>
-          <a:noFill/>
-          <a:ln/>
-        </p:spPr>
-        <p:txBody>
-          <a:bodyPr wrap="square" lIns="0" tIns="0" rIns="0" bIns="0" rtlCol="0" anchor="ctr"/>
-          <a:lstStyle/>
-          <a:p>
-            <a:pPr indent="0" marL="0">
-              <a:buNone/>
-            </a:pPr>
-            <a:r>
-              <a:rPr lang="en-US" sz="1300" b="1" spc="200" kern="0" dirty="0">
-                <a:solidFill>
-                  <a:schemeClr val="accent1"/>
-                </a:solidFill>
-                <a:latin typeface="Segoe UI" pitchFamily="34" charset="0"/>
-                <a:ea typeface="Segoe UI" pitchFamily="34" charset="-122"/>
-                <a:cs typeface="Segoe UI" pitchFamily="34" charset="-120"/>
-              </a:rPr>
               <a:t>APPENDIX · FOR ENGINEERS</a:t>
             </a:r>
             <a:endParaRPr lang="en-US" sz="1300" dirty="0"/>
@@ -6272,7 +2534,7 @@
       </p:sp>
       <p:graphicFrame>
         <p:nvGraphicFramePr>
-          <p:cNvPr id="10" name="Benchmark table"/>
+          <p:cNvPr id="11" name="Benchmark table"/>
           <p:cNvGraphicFramePr>
             <a:graphicFrameLocks noGrp="1"/>
           </p:cNvGraphicFramePr>
@@ -8520,7 +4782,7 @@
                   <a:schemeClr val="tx2"/>
                 </a:solidFill>
               </a:rPr>
-              <a:t>Single training run per model; synthetic degradations; pixel art and alpha channels not yet evaluated.</a:t>
+              <a:t>Single training run per model; synthetic degradations; pixel-art sprites and normal maps not yet handled.</a:t>
             </a:r>
             <a:endParaRPr lang="en-US" sz="1300" dirty="0"/>
           </a:p>
@@ -8565,9 +4827,4930 @@
             <a:pPr algn="r"/>
             <a:fld id="{F7021451-1387-4CA6-816F-3879F97B5CBC}" type="slidenum">
               <a:rPr b="0" lang="en-US"/>
-              <a:t>9</a:t>
+              <a:t>10</a:t>
             </a:fld>
             <a:endParaRPr lang="en-US"/>
+          </a:p>
+        </p:txBody>
+      </p:sp>
+    </p:spTree>
+  </p:cSld>
+  <p:clrMapOvr>
+    <a:masterClrMapping/>
+  </p:clrMapOvr>
+</p:sld>
+</file>
+
+<file path=ppt/slides/slide2.xml><?xml version="1.0" encoding="utf-8"?>
+<p:sld xmlns:a="http://schemas.openxmlformats.org/drawingml/2006/main" xmlns:r="http://schemas.openxmlformats.org/officeDocument/2006/relationships" xmlns:p="http://schemas.openxmlformats.org/presentationml/2006/main">
+  <p:cSld name="Slide 2">
+    <p:spTree>
+      <p:nvGrpSpPr>
+        <p:cNvPr id="1" name=""/>
+        <p:cNvGrpSpPr/>
+        <p:nvPr/>
+      </p:nvGrpSpPr>
+      <p:grpSpPr>
+        <a:xfrm>
+          <a:off x="0" y="0"/>
+          <a:ext cx="0" cy="0"/>
+          <a:chOff x="0" y="0"/>
+          <a:chExt cx="0" cy="0"/>
+        </a:xfrm>
+      </p:grpSpPr>
+      <p:sp>
+        <p:nvSpPr>
+          <p:cNvPr id="2" name="Text 0"/>
+          <p:cNvSpPr/>
+          <p:nvPr>
+            <p:ph idx="100" type="body" hasCustomPrompt="1"/>
+          </p:nvPr>
+        </p:nvSpPr>
+        <p:spPr>
+          <a:xfrm>
+            <a:off x="548640" y="384048"/>
+            <a:ext cx="11064240" cy="365760"/>
+          </a:xfrm>
+          <a:prstGeom prst="rect">
+            <a:avLst/>
+          </a:prstGeom>
+          <a:noFill/>
+          <a:ln/>
+        </p:spPr>
+        <p:txBody>
+          <a:bodyPr wrap="square" lIns="0" tIns="0" rIns="0" bIns="0" rtlCol="0" anchor="ctr"/>
+          <a:lstStyle/>
+          <a:p>
+            <a:pPr indent="0" marL="0">
+              <a:buNone/>
+            </a:pPr>
+            <a:r>
+              <a:rPr lang="en-US" sz="1300" b="1" spc="200" kern="0" dirty="0">
+                <a:solidFill>
+                  <a:schemeClr val="accent1"/>
+                </a:solidFill>
+                <a:latin typeface="Segoe UI" pitchFamily="34" charset="0"/>
+                <a:ea typeface="Segoe UI" pitchFamily="34" charset="-122"/>
+                <a:cs typeface="Segoe UI" pitchFamily="34" charset="-120"/>
+              </a:rPr>
+              <a:t>THE PROBLEM</a:t>
+            </a:r>
+            <a:endParaRPr lang="en-US" sz="1300" dirty="0"/>
+          </a:p>
+        </p:txBody>
+      </p:sp>
+      <p:sp>
+        <p:nvSpPr>
+          <p:cNvPr id="3" name="Text 0"/>
+          <p:cNvSpPr/>
+          <p:nvPr>
+            <p:ph idx="101" type="title" hasCustomPrompt="1"/>
+          </p:nvPr>
+        </p:nvSpPr>
+        <p:spPr>
+          <a:xfrm>
+            <a:off x="548640" y="749808"/>
+            <a:ext cx="11064240" cy="868680"/>
+          </a:xfrm>
+          <a:prstGeom prst="rect">
+            <a:avLst/>
+          </a:prstGeom>
+          <a:noFill/>
+          <a:ln/>
+        </p:spPr>
+        <p:txBody>
+          <a:bodyPr wrap="square" lIns="0" tIns="0" rIns="0" bIns="0" rtlCol="0" anchor="t"/>
+          <a:lstStyle/>
+          <a:p>
+            <a:pPr algn="l" indent="0" marL="0">
+              <a:buNone/>
+            </a:pPr>
+            <a:r>
+              <a:rPr lang="en-US" sz="3000" b="1" dirty="0">
+                <a:solidFill>
+                  <a:schemeClr val="tx1"/>
+                </a:solidFill>
+                <a:latin typeface="Segoe Script" pitchFamily="34" charset="0"/>
+                <a:ea typeface="Segoe Script" pitchFamily="34" charset="-122"/>
+                <a:cs typeface="Segoe Script" pitchFamily="34" charset="-120"/>
+              </a:rPr>
+              <a:t>HD screens expose every old texture.</a:t>
+            </a:r>
+            <a:endParaRPr lang="en-US" sz="3000" dirty="0"/>
+          </a:p>
+        </p:txBody>
+      </p:sp>
+      <p:sp>
+        <p:nvSpPr>
+          <p:cNvPr id="4" name="Problem 1"/>
+          <p:cNvSpPr/>
+          <p:nvPr/>
+        </p:nvSpPr>
+        <p:spPr>
+          <a:xfrm>
+            <a:off x="548640" y="2011680"/>
+            <a:ext cx="3483864" cy="2880360"/>
+          </a:xfrm>
+          <a:prstGeom prst="roundRect">
+            <a:avLst>
+              <a:gd name="adj" fmla="val 10159"/>
+            </a:avLst>
+          </a:prstGeom>
+          <a:solidFill>
+            <a:schemeClr val="bg2"/>
+          </a:solidFill>
+          <a:ln w="15875">
+            <a:solidFill>
+              <a:schemeClr val="accent6"/>
+            </a:solidFill>
+            <a:prstDash val="solid"/>
+          </a:ln>
+        </p:spPr>
+      </p:sp>
+      <p:sp>
+        <p:nvSpPr>
+          <p:cNvPr id="5" name="Shape 3"/>
+          <p:cNvSpPr/>
+          <p:nvPr/>
+        </p:nvSpPr>
+        <p:spPr>
+          <a:xfrm>
+            <a:off x="868680" y="2331720"/>
+            <a:ext cx="457200" cy="457200"/>
+          </a:xfrm>
+          <a:prstGeom prst="ellipse">
+            <a:avLst/>
+          </a:prstGeom>
+          <a:solidFill>
+            <a:schemeClr val="accent4"/>
+          </a:solidFill>
+          <a:ln w="25400">
+            <a:solidFill>
+              <a:schemeClr val="accent2"/>
+            </a:solidFill>
+            <a:prstDash val="solid"/>
+          </a:ln>
+        </p:spPr>
+      </p:sp>
+      <p:sp>
+        <p:nvSpPr>
+          <p:cNvPr id="6" name="Text 4"/>
+          <p:cNvSpPr txBox="1"/>
+          <p:nvPr/>
+        </p:nvSpPr>
+        <p:spPr>
+          <a:xfrm>
+            <a:off x="868680" y="2331720"/>
+            <a:ext cx="457200" cy="457200"/>
+          </a:xfrm>
+          <a:prstGeom prst="rect">
+            <a:avLst/>
+          </a:prstGeom>
+          <a:noFill/>
+          <a:ln/>
+        </p:spPr>
+        <p:txBody>
+          <a:bodyPr wrap="square" lIns="0" tIns="0" rIns="0" bIns="0" rtlCol="0" anchor="ctr"/>
+          <a:lstStyle/>
+          <a:p>
+            <a:pPr algn="ctr" indent="0" marL="0">
+              <a:buNone/>
+            </a:pPr>
+            <a:r>
+              <a:rPr lang="en-US" sz="1500" b="1" dirty="0">
+                <a:solidFill>
+                  <a:schemeClr val="bg1"/>
+                </a:solidFill>
+              </a:rPr>
+              <a:t>1</a:t>
+            </a:r>
+            <a:endParaRPr lang="en-US" sz="1500" dirty="0"/>
+          </a:p>
+        </p:txBody>
+      </p:sp>
+      <p:sp>
+        <p:nvSpPr>
+          <p:cNvPr id="7" name="Text 5"/>
+          <p:cNvSpPr txBox="1"/>
+          <p:nvPr/>
+        </p:nvSpPr>
+        <p:spPr>
+          <a:xfrm>
+            <a:off x="868680" y="2926080"/>
+            <a:ext cx="2843784" cy="685800"/>
+          </a:xfrm>
+          <a:prstGeom prst="rect">
+            <a:avLst/>
+          </a:prstGeom>
+          <a:noFill/>
+          <a:ln/>
+        </p:spPr>
+        <p:txBody>
+          <a:bodyPr wrap="square" lIns="0" tIns="0" rIns="0" bIns="0" rtlCol="0" anchor="t"/>
+          <a:lstStyle/>
+          <a:p>
+            <a:pPr indent="0" marL="0">
+              <a:buNone/>
+            </a:pPr>
+            <a:r>
+              <a:rPr lang="en-US" sz="1800" b="1" dirty="0">
+                <a:solidFill>
+                  <a:schemeClr val="tx1"/>
+                </a:solidFill>
+                <a:latin typeface="Segoe Script" pitchFamily="34" charset="0"/>
+                <a:ea typeface="Segoe Script" pitchFamily="34" charset="-122"/>
+                <a:cs typeface="Segoe Script" pitchFamily="34" charset="-120"/>
+              </a:rPr>
+              <a:t>Remasters need thousands of textures</a:t>
+            </a:r>
+            <a:endParaRPr lang="en-US" sz="1800" dirty="0"/>
+          </a:p>
+        </p:txBody>
+      </p:sp>
+      <p:sp>
+        <p:nvSpPr>
+          <p:cNvPr id="8" name="Text 6"/>
+          <p:cNvSpPr txBox="1"/>
+          <p:nvPr/>
+        </p:nvSpPr>
+        <p:spPr>
+          <a:xfrm>
+            <a:off x="868680" y="3703320"/>
+            <a:ext cx="2843784" cy="1097280"/>
+          </a:xfrm>
+          <a:prstGeom prst="rect">
+            <a:avLst/>
+          </a:prstGeom>
+          <a:noFill/>
+          <a:ln/>
+        </p:spPr>
+        <p:txBody>
+          <a:bodyPr wrap="square" lIns="0" tIns="0" rIns="0" bIns="0" rtlCol="0" anchor="t"/>
+          <a:lstStyle/>
+          <a:p>
+            <a:pPr indent="0" marL="0">
+              <a:buNone/>
+            </a:pPr>
+            <a:r>
+              <a:rPr lang="en-US" sz="1500" dirty="0">
+                <a:solidFill>
+                  <a:schemeClr val="tx2"/>
+                </a:solidFill>
+              </a:rPr>
+              <a:t>Redrawing every wall, floor and prop by hand is the slowest, most expensive part of a remaster or HD mod.</a:t>
+            </a:r>
+            <a:endParaRPr lang="en-US" sz="1500" dirty="0"/>
+          </a:p>
+        </p:txBody>
+      </p:sp>
+      <p:sp>
+        <p:nvSpPr>
+          <p:cNvPr id="9" name="Problem 2"/>
+          <p:cNvSpPr/>
+          <p:nvPr/>
+        </p:nvSpPr>
+        <p:spPr>
+          <a:xfrm>
+            <a:off x="4352544" y="2011680"/>
+            <a:ext cx="3483864" cy="2880360"/>
+          </a:xfrm>
+          <a:prstGeom prst="roundRect">
+            <a:avLst>
+              <a:gd name="adj" fmla="val 10159"/>
+            </a:avLst>
+          </a:prstGeom>
+          <a:solidFill>
+            <a:schemeClr val="bg2"/>
+          </a:solidFill>
+          <a:ln w="15875">
+            <a:solidFill>
+              <a:schemeClr val="accent6"/>
+            </a:solidFill>
+            <a:prstDash val="solid"/>
+          </a:ln>
+        </p:spPr>
+      </p:sp>
+      <p:sp>
+        <p:nvSpPr>
+          <p:cNvPr id="10" name="Shape 8"/>
+          <p:cNvSpPr/>
+          <p:nvPr/>
+        </p:nvSpPr>
+        <p:spPr>
+          <a:xfrm>
+            <a:off x="4672584" y="2331720"/>
+            <a:ext cx="457200" cy="457200"/>
+          </a:xfrm>
+          <a:prstGeom prst="ellipse">
+            <a:avLst/>
+          </a:prstGeom>
+          <a:solidFill>
+            <a:schemeClr val="accent4"/>
+          </a:solidFill>
+          <a:ln w="25400">
+            <a:solidFill>
+              <a:schemeClr val="accent2"/>
+            </a:solidFill>
+            <a:prstDash val="solid"/>
+          </a:ln>
+        </p:spPr>
+      </p:sp>
+      <p:sp>
+        <p:nvSpPr>
+          <p:cNvPr id="11" name="Text 9"/>
+          <p:cNvSpPr txBox="1"/>
+          <p:nvPr/>
+        </p:nvSpPr>
+        <p:spPr>
+          <a:xfrm>
+            <a:off x="4672584" y="2331720"/>
+            <a:ext cx="457200" cy="457200"/>
+          </a:xfrm>
+          <a:prstGeom prst="rect">
+            <a:avLst/>
+          </a:prstGeom>
+          <a:noFill/>
+          <a:ln/>
+        </p:spPr>
+        <p:txBody>
+          <a:bodyPr wrap="square" lIns="0" tIns="0" rIns="0" bIns="0" rtlCol="0" anchor="ctr"/>
+          <a:lstStyle/>
+          <a:p>
+            <a:pPr algn="ctr" indent="0" marL="0">
+              <a:buNone/>
+            </a:pPr>
+            <a:r>
+              <a:rPr lang="en-US" sz="1500" b="1" dirty="0">
+                <a:solidFill>
+                  <a:schemeClr val="bg1"/>
+                </a:solidFill>
+              </a:rPr>
+              <a:t>2</a:t>
+            </a:r>
+            <a:endParaRPr lang="en-US" sz="1500" dirty="0"/>
+          </a:p>
+        </p:txBody>
+      </p:sp>
+      <p:sp>
+        <p:nvSpPr>
+          <p:cNvPr id="12" name="Text 10"/>
+          <p:cNvSpPr txBox="1"/>
+          <p:nvPr/>
+        </p:nvSpPr>
+        <p:spPr>
+          <a:xfrm>
+            <a:off x="4672584" y="2926080"/>
+            <a:ext cx="2843784" cy="685800"/>
+          </a:xfrm>
+          <a:prstGeom prst="rect">
+            <a:avLst/>
+          </a:prstGeom>
+          <a:noFill/>
+          <a:ln/>
+        </p:spPr>
+        <p:txBody>
+          <a:bodyPr wrap="square" lIns="0" tIns="0" rIns="0" bIns="0" rtlCol="0" anchor="t"/>
+          <a:lstStyle/>
+          <a:p>
+            <a:pPr indent="0" marL="0">
+              <a:buNone/>
+            </a:pPr>
+            <a:r>
+              <a:rPr lang="en-US" sz="1800" b="1" dirty="0">
+                <a:solidFill>
+                  <a:schemeClr val="tx1"/>
+                </a:solidFill>
+                <a:latin typeface="Segoe Script" pitchFamily="34" charset="0"/>
+                <a:ea typeface="Segoe Script" pitchFamily="34" charset="-122"/>
+                <a:cs typeface="Segoe Script" pitchFamily="34" charset="-120"/>
+              </a:rPr>
+              <a:t>Simple resizing just blurs</a:t>
+            </a:r>
+            <a:endParaRPr lang="en-US" sz="1800" dirty="0"/>
+          </a:p>
+        </p:txBody>
+      </p:sp>
+      <p:sp>
+        <p:nvSpPr>
+          <p:cNvPr id="13" name="Text 11"/>
+          <p:cNvSpPr txBox="1"/>
+          <p:nvPr/>
+        </p:nvSpPr>
+        <p:spPr>
+          <a:xfrm>
+            <a:off x="4672584" y="3703320"/>
+            <a:ext cx="2843784" cy="1097280"/>
+          </a:xfrm>
+          <a:prstGeom prst="rect">
+            <a:avLst/>
+          </a:prstGeom>
+          <a:noFill/>
+          <a:ln/>
+        </p:spPr>
+        <p:txBody>
+          <a:bodyPr wrap="square" lIns="0" tIns="0" rIns="0" bIns="0" rtlCol="0" anchor="t"/>
+          <a:lstStyle/>
+          <a:p>
+            <a:pPr indent="0" marL="0">
+              <a:buNone/>
+            </a:pPr>
+            <a:r>
+              <a:rPr lang="en-US" sz="1500" dirty="0">
+                <a:solidFill>
+                  <a:schemeClr val="tx2"/>
+                </a:solidFill>
+              </a:rPr>
+              <a:t>Stretching a texture 4× with bicubic gives soft, muddy surfaces that look worse on a modern monitor.</a:t>
+            </a:r>
+            <a:endParaRPr lang="en-US" sz="1500" dirty="0"/>
+          </a:p>
+        </p:txBody>
+      </p:sp>
+      <p:sp>
+        <p:nvSpPr>
+          <p:cNvPr id="14" name="Problem 3"/>
+          <p:cNvSpPr/>
+          <p:nvPr/>
+        </p:nvSpPr>
+        <p:spPr>
+          <a:xfrm>
+            <a:off x="8156448" y="2011680"/>
+            <a:ext cx="3483864" cy="2880360"/>
+          </a:xfrm>
+          <a:prstGeom prst="roundRect">
+            <a:avLst>
+              <a:gd name="adj" fmla="val 10159"/>
+            </a:avLst>
+          </a:prstGeom>
+          <a:solidFill>
+            <a:schemeClr val="bg2"/>
+          </a:solidFill>
+          <a:ln w="15875">
+            <a:solidFill>
+              <a:schemeClr val="accent6"/>
+            </a:solidFill>
+            <a:prstDash val="solid"/>
+          </a:ln>
+        </p:spPr>
+      </p:sp>
+      <p:sp>
+        <p:nvSpPr>
+          <p:cNvPr id="15" name="Shape 13"/>
+          <p:cNvSpPr/>
+          <p:nvPr/>
+        </p:nvSpPr>
+        <p:spPr>
+          <a:xfrm>
+            <a:off x="8476488" y="2331720"/>
+            <a:ext cx="457200" cy="457200"/>
+          </a:xfrm>
+          <a:prstGeom prst="ellipse">
+            <a:avLst/>
+          </a:prstGeom>
+          <a:solidFill>
+            <a:schemeClr val="accent4"/>
+          </a:solidFill>
+          <a:ln w="25400">
+            <a:solidFill>
+              <a:schemeClr val="accent2"/>
+            </a:solidFill>
+            <a:prstDash val="solid"/>
+          </a:ln>
+        </p:spPr>
+      </p:sp>
+      <p:sp>
+        <p:nvSpPr>
+          <p:cNvPr id="16" name="Text 14"/>
+          <p:cNvSpPr txBox="1"/>
+          <p:nvPr/>
+        </p:nvSpPr>
+        <p:spPr>
+          <a:xfrm>
+            <a:off x="8476488" y="2331720"/>
+            <a:ext cx="457200" cy="457200"/>
+          </a:xfrm>
+          <a:prstGeom prst="rect">
+            <a:avLst/>
+          </a:prstGeom>
+          <a:noFill/>
+          <a:ln/>
+        </p:spPr>
+        <p:txBody>
+          <a:bodyPr wrap="square" lIns="0" tIns="0" rIns="0" bIns="0" rtlCol="0" anchor="ctr"/>
+          <a:lstStyle/>
+          <a:p>
+            <a:pPr algn="ctr" indent="0" marL="0">
+              <a:buNone/>
+            </a:pPr>
+            <a:r>
+              <a:rPr lang="en-US" sz="1500" b="1" dirty="0">
+                <a:solidFill>
+                  <a:schemeClr val="bg1"/>
+                </a:solidFill>
+              </a:rPr>
+              <a:t>3</a:t>
+            </a:r>
+            <a:endParaRPr lang="en-US" sz="1500" dirty="0"/>
+          </a:p>
+        </p:txBody>
+      </p:sp>
+      <p:sp>
+        <p:nvSpPr>
+          <p:cNvPr id="17" name="Text 15"/>
+          <p:cNvSpPr txBox="1"/>
+          <p:nvPr/>
+        </p:nvSpPr>
+        <p:spPr>
+          <a:xfrm>
+            <a:off x="8476488" y="2926080"/>
+            <a:ext cx="2843784" cy="685800"/>
+          </a:xfrm>
+          <a:prstGeom prst="rect">
+            <a:avLst/>
+          </a:prstGeom>
+          <a:noFill/>
+          <a:ln/>
+        </p:spPr>
+        <p:txBody>
+          <a:bodyPr wrap="square" lIns="0" tIns="0" rIns="0" bIns="0" rtlCol="0" anchor="t"/>
+          <a:lstStyle/>
+          <a:p>
+            <a:pPr indent="0" marL="0">
+              <a:buNone/>
+            </a:pPr>
+            <a:r>
+              <a:rPr lang="en-US" sz="1800" b="1" dirty="0">
+                <a:solidFill>
+                  <a:schemeClr val="tx1"/>
+                </a:solidFill>
+                <a:latin typeface="Segoe Script" pitchFamily="34" charset="0"/>
+                <a:ea typeface="Segoe Script" pitchFamily="34" charset="-122"/>
+                <a:cs typeface="Segoe Script" pitchFamily="34" charset="-120"/>
+              </a:rPr>
+              <a:t>Generic AI upscalers aren't tuned for games</a:t>
+            </a:r>
+            <a:endParaRPr lang="en-US" sz="1800" dirty="0"/>
+          </a:p>
+        </p:txBody>
+      </p:sp>
+      <p:sp>
+        <p:nvSpPr>
+          <p:cNvPr id="18" name="Text 16"/>
+          <p:cNvSpPr txBox="1"/>
+          <p:nvPr/>
+        </p:nvSpPr>
+        <p:spPr>
+          <a:xfrm>
+            <a:off x="8476488" y="3703320"/>
+            <a:ext cx="2843784" cy="1097280"/>
+          </a:xfrm>
+          <a:prstGeom prst="rect">
+            <a:avLst/>
+          </a:prstGeom>
+          <a:noFill/>
+          <a:ln/>
+        </p:spPr>
+        <p:txBody>
+          <a:bodyPr wrap="square" lIns="0" tIns="0" rIns="0" bIns="0" rtlCol="0" anchor="t"/>
+          <a:lstStyle/>
+          <a:p>
+            <a:pPr indent="0" marL="0">
+              <a:buNone/>
+            </a:pPr>
+            <a:r>
+              <a:rPr lang="en-US" sz="1500" dirty="0">
+                <a:solidFill>
+                  <a:schemeClr val="tx2"/>
+                </a:solidFill>
+              </a:rPr>
+              <a:t>Tools trained on photos can smear tiling patterns or invent the wrong kind of detail.</a:t>
+            </a:r>
+            <a:endParaRPr lang="en-US" sz="1500" dirty="0"/>
+          </a:p>
+        </p:txBody>
+      </p:sp>
+      <p:sp>
+        <p:nvSpPr>
+          <p:cNvPr id="19" name="Text 17"/>
+          <p:cNvSpPr txBox="1"/>
+          <p:nvPr/>
+        </p:nvSpPr>
+        <p:spPr>
+          <a:xfrm>
+            <a:off x="548640" y="5303520"/>
+            <a:ext cx="11064240" cy="640080"/>
+          </a:xfrm>
+          <a:prstGeom prst="rect">
+            <a:avLst/>
+          </a:prstGeom>
+          <a:noFill/>
+          <a:ln/>
+        </p:spPr>
+        <p:txBody>
+          <a:bodyPr wrap="square" lIns="0" tIns="0" rIns="0" bIns="0" rtlCol="0" anchor="ctr"/>
+          <a:lstStyle/>
+          <a:p>
+            <a:pPr indent="0" marL="0">
+              <a:buNone/>
+            </a:pPr>
+            <a:r>
+              <a:rPr lang="en-US" sz="2400" dirty="0">
+                <a:solidFill>
+                  <a:schemeClr val="tx2"/>
+                </a:solidFill>
+              </a:rPr>
+              <a:t>PixelForge does the first pass for you: </a:t>
+            </a:r>
+            <a:pPr indent="0" marL="0">
+              <a:buNone/>
+            </a:pPr>
+            <a:r>
+              <a:rPr lang="en-US" sz="2400" b="1" dirty="0">
+                <a:solidFill>
+                  <a:schemeClr val="accent1"/>
+                </a:solidFill>
+              </a:rPr>
+              <a:t>seconds per texture, in your browser.</a:t>
+            </a:r>
+            <a:endParaRPr lang="en-US" sz="2400" dirty="0"/>
+          </a:p>
+        </p:txBody>
+      </p:sp>
+      <p:sp>
+        <p:nvSpPr>
+          <p:cNvPr id="25" name="Slide Number Placeholder 0"/>
+          <p:cNvSpPr>
+            <a:spLocks noGrp="1"/>
+          </p:cNvSpPr>
+          <p:nvPr>
+            <p:ph type="sldNum" sz="quarter" idx="4294967295"/>
+          </p:nvPr>
+        </p:nvSpPr>
+        <p:spPr>
+          <a:xfrm>
+            <a:off x="11064240" y="6400800"/>
+            <a:ext cx="576072" cy="274320"/>
+          </a:xfrm>
+          <a:prstGeom prst="rect">
+            <a:avLst/>
+          </a:prstGeom>
+          <a:extLst>
+            <a:ext uri="{C572A759-6A51-4108-AA02-DFA0A04FC94B}">
+              <ma14:wrappingTextBoxFlag xmlns:ma14="http://schemas.microsoft.com/office/mac/drawingml/2011/main" val="0"/>
+            </a:ext>
+          </a:extLst>
+        </p:spPr>
+        <p:txBody>
+          <a:bodyPr/>
+          <a:lstStyle>
+            <a:lvl1pPr>
+              <a:defRPr sz="1100">
+                <a:solidFill>
+                  <a:schemeClr val="accent5"/>
+                </a:solidFill>
+              </a:defRPr>
+            </a:lvl1pPr>
+          </a:lstStyle>
+          <a:p>
+            <a:pPr algn="r"/>
+            <a:fld id="{F7021451-1387-4CA6-816F-3879F97B5CBC}" type="slidenum">
+              <a:rPr b="0" lang="en-US"/>
+              <a:t>2</a:t>
+            </a:fld>
+            <a:endParaRPr lang="en-US"/>
+          </a:p>
+        </p:txBody>
+      </p:sp>
+    </p:spTree>
+  </p:cSld>
+  <p:clrMapOvr>
+    <a:masterClrMapping/>
+  </p:clrMapOvr>
+</p:sld>
+</file>
+
+<file path=ppt/slides/slide3.xml><?xml version="1.0" encoding="utf-8"?>
+<p:sld xmlns:a="http://schemas.openxmlformats.org/drawingml/2006/main" xmlns:r="http://schemas.openxmlformats.org/officeDocument/2006/relationships" xmlns:p="http://schemas.openxmlformats.org/presentationml/2006/main">
+  <p:cSld name="Slide 3">
+    <p:spTree>
+      <p:nvGrpSpPr>
+        <p:cNvPr id="1" name=""/>
+        <p:cNvGrpSpPr/>
+        <p:nvPr/>
+      </p:nvGrpSpPr>
+      <p:grpSpPr>
+        <a:xfrm>
+          <a:off x="0" y="0"/>
+          <a:ext cx="0" cy="0"/>
+          <a:chOff x="0" y="0"/>
+          <a:chExt cx="0" cy="0"/>
+        </a:xfrm>
+      </p:grpSpPr>
+      <p:sp>
+        <p:nvSpPr>
+          <p:cNvPr id="2" name="Text 0"/>
+          <p:cNvSpPr/>
+          <p:nvPr>
+            <p:ph idx="100" type="body" hasCustomPrompt="1"/>
+          </p:nvPr>
+        </p:nvSpPr>
+        <p:spPr>
+          <a:xfrm>
+            <a:off x="548640" y="384048"/>
+            <a:ext cx="11064240" cy="365760"/>
+          </a:xfrm>
+          <a:prstGeom prst="rect">
+            <a:avLst/>
+          </a:prstGeom>
+          <a:noFill/>
+          <a:ln/>
+        </p:spPr>
+        <p:txBody>
+          <a:bodyPr wrap="square" lIns="0" tIns="0" rIns="0" bIns="0" rtlCol="0" anchor="ctr"/>
+          <a:lstStyle/>
+          <a:p>
+            <a:pPr indent="0" marL="0">
+              <a:buNone/>
+            </a:pPr>
+            <a:r>
+              <a:rPr lang="en-US" sz="1300" b="1" spc="200" kern="0" dirty="0">
+                <a:solidFill>
+                  <a:schemeClr val="accent1"/>
+                </a:solidFill>
+                <a:latin typeface="Segoe UI" pitchFamily="34" charset="0"/>
+                <a:ea typeface="Segoe UI" pitchFamily="34" charset="-122"/>
+                <a:cs typeface="Segoe UI" pitchFamily="34" charset="-120"/>
+              </a:rPr>
+              <a:t>TRY IT YOURSELF</a:t>
+            </a:r>
+            <a:endParaRPr lang="en-US" sz="1300" dirty="0"/>
+          </a:p>
+        </p:txBody>
+      </p:sp>
+      <p:sp>
+        <p:nvSpPr>
+          <p:cNvPr id="3" name="Text 0"/>
+          <p:cNvSpPr/>
+          <p:nvPr>
+            <p:ph idx="101" type="title" hasCustomPrompt="1"/>
+          </p:nvPr>
+        </p:nvSpPr>
+        <p:spPr>
+          <a:xfrm>
+            <a:off x="548640" y="749808"/>
+            <a:ext cx="11064240" cy="868680"/>
+          </a:xfrm>
+          <a:prstGeom prst="rect">
+            <a:avLst/>
+          </a:prstGeom>
+          <a:noFill/>
+          <a:ln/>
+        </p:spPr>
+        <p:txBody>
+          <a:bodyPr wrap="square" lIns="0" tIns="0" rIns="0" bIns="0" rtlCol="0" anchor="t"/>
+          <a:lstStyle/>
+          <a:p>
+            <a:pPr algn="l" indent="0" marL="0">
+              <a:buNone/>
+            </a:pPr>
+            <a:r>
+              <a:rPr lang="en-US" sz="3000" b="1" dirty="0">
+                <a:solidFill>
+                  <a:schemeClr val="tx1"/>
+                </a:solidFill>
+                <a:latin typeface="Segoe Script" pitchFamily="34" charset="0"/>
+                <a:ea typeface="Segoe Script" pitchFamily="34" charset="-122"/>
+                <a:cs typeface="Segoe Script" pitchFamily="34" charset="-120"/>
+              </a:rPr>
+              <a:t>Drop in a texture. Drag the slider.</a:t>
+            </a:r>
+            <a:endParaRPr lang="en-US" sz="3000" dirty="0"/>
+          </a:p>
+        </p:txBody>
+      </p:sp>
+      <p:sp>
+        <p:nvSpPr>
+          <p:cNvPr id="4" name="Screenshot frame"/>
+          <p:cNvSpPr/>
+          <p:nvPr/>
+        </p:nvSpPr>
+        <p:spPr>
+          <a:xfrm>
+            <a:off x="548640" y="1783080"/>
+            <a:ext cx="6949440" cy="4434840"/>
+          </a:xfrm>
+          <a:prstGeom prst="roundRect">
+            <a:avLst>
+              <a:gd name="adj" fmla="val 6598"/>
+            </a:avLst>
+          </a:prstGeom>
+          <a:solidFill>
+            <a:schemeClr val="bg2"/>
+          </a:solidFill>
+          <a:ln w="15875">
+            <a:solidFill>
+              <a:schemeClr val="accent6"/>
+            </a:solidFill>
+            <a:prstDash val="solid"/>
+          </a:ln>
+        </p:spPr>
+      </p:sp>
+      <p:pic>
+        <p:nvPicPr>
+          <p:cNvPr id="5" name="Demo screenshot" descr="PixelForge web app with a before/after slider">    </p:cNvPr>
+          <p:cNvPicPr>
+            <a:picLocks noChangeAspect="1"/>
+          </p:cNvPicPr>
+          <p:nvPr/>
+        </p:nvPicPr>
+        <p:blipFill>
+          <a:blip r:embed="rId1"/>
+          <a:stretch>
+            <a:fillRect/>
+          </a:stretch>
+        </p:blipFill>
+        <p:spPr>
+          <a:xfrm>
+            <a:off x="1479464" y="1920240"/>
+            <a:ext cx="5087791" cy="4160520"/>
+          </a:xfrm>
+          <a:prstGeom prst="rect">
+            <a:avLst/>
+          </a:prstGeom>
+        </p:spPr>
+      </p:pic>
+      <p:sp>
+        <p:nvSpPr>
+          <p:cNvPr id="6" name="Point 1"/>
+          <p:cNvSpPr/>
+          <p:nvPr/>
+        </p:nvSpPr>
+        <p:spPr>
+          <a:xfrm>
+            <a:off x="7818120" y="1783080"/>
+            <a:ext cx="3824935" cy="1325880"/>
+          </a:xfrm>
+          <a:prstGeom prst="roundRect">
+            <a:avLst>
+              <a:gd name="adj" fmla="val 22069"/>
+            </a:avLst>
+          </a:prstGeom>
+          <a:solidFill>
+            <a:schemeClr val="bg2"/>
+          </a:solidFill>
+          <a:ln w="15875">
+            <a:solidFill>
+              <a:schemeClr val="accent6"/>
+            </a:solidFill>
+            <a:prstDash val="solid"/>
+          </a:ln>
+        </p:spPr>
+      </p:sp>
+      <p:sp>
+        <p:nvSpPr>
+          <p:cNvPr id="7" name="Shape 4"/>
+          <p:cNvSpPr/>
+          <p:nvPr/>
+        </p:nvSpPr>
+        <p:spPr>
+          <a:xfrm>
+            <a:off x="8046720" y="2011680"/>
+            <a:ext cx="457200" cy="457200"/>
+          </a:xfrm>
+          <a:prstGeom prst="ellipse">
+            <a:avLst/>
+          </a:prstGeom>
+          <a:solidFill>
+            <a:schemeClr val="accent4"/>
+          </a:solidFill>
+          <a:ln w="25400">
+            <a:solidFill>
+              <a:schemeClr val="accent2"/>
+            </a:solidFill>
+            <a:prstDash val="solid"/>
+          </a:ln>
+        </p:spPr>
+      </p:sp>
+      <p:sp>
+        <p:nvSpPr>
+          <p:cNvPr id="8" name="Text 5"/>
+          <p:cNvSpPr txBox="1"/>
+          <p:nvPr/>
+        </p:nvSpPr>
+        <p:spPr>
+          <a:xfrm>
+            <a:off x="8046720" y="2011680"/>
+            <a:ext cx="457200" cy="457200"/>
+          </a:xfrm>
+          <a:prstGeom prst="rect">
+            <a:avLst/>
+          </a:prstGeom>
+          <a:noFill/>
+          <a:ln/>
+        </p:spPr>
+        <p:txBody>
+          <a:bodyPr wrap="square" lIns="0" tIns="0" rIns="0" bIns="0" rtlCol="0" anchor="ctr"/>
+          <a:lstStyle/>
+          <a:p>
+            <a:pPr algn="ctr" indent="0" marL="0">
+              <a:buNone/>
+            </a:pPr>
+            <a:r>
+              <a:rPr lang="en-US" sz="1500" b="1" dirty="0">
+                <a:solidFill>
+                  <a:schemeClr val="bg1"/>
+                </a:solidFill>
+              </a:rPr>
+              <a:t>1</a:t>
+            </a:r>
+            <a:endParaRPr lang="en-US" sz="1500" dirty="0"/>
+          </a:p>
+        </p:txBody>
+      </p:sp>
+      <p:sp>
+        <p:nvSpPr>
+          <p:cNvPr id="9" name="Text 6"/>
+          <p:cNvSpPr txBox="1"/>
+          <p:nvPr/>
+        </p:nvSpPr>
+        <p:spPr>
+          <a:xfrm>
+            <a:off x="8686800" y="1965960"/>
+            <a:ext cx="2773375" cy="411480"/>
+          </a:xfrm>
+          <a:prstGeom prst="rect">
+            <a:avLst/>
+          </a:prstGeom>
+          <a:noFill/>
+          <a:ln/>
+        </p:spPr>
+        <p:txBody>
+          <a:bodyPr wrap="square" lIns="0" tIns="0" rIns="0" bIns="0" rtlCol="0" anchor="ctr"/>
+          <a:lstStyle/>
+          <a:p>
+            <a:pPr indent="0" marL="0">
+              <a:buNone/>
+            </a:pPr>
+            <a:r>
+              <a:rPr lang="en-US" sz="1600" b="1" dirty="0">
+                <a:solidFill>
+                  <a:schemeClr val="tx1"/>
+                </a:solidFill>
+                <a:latin typeface="Segoe Script" pitchFamily="34" charset="0"/>
+                <a:ea typeface="Segoe Script" pitchFamily="34" charset="-122"/>
+                <a:cs typeface="Segoe Script" pitchFamily="34" charset="-120"/>
+              </a:rPr>
+              <a:t>Before/after slider</a:t>
+            </a:r>
+            <a:endParaRPr lang="en-US" sz="1600" dirty="0"/>
+          </a:p>
+        </p:txBody>
+      </p:sp>
+      <p:sp>
+        <p:nvSpPr>
+          <p:cNvPr id="10" name="Text 7"/>
+          <p:cNvSpPr txBox="1"/>
+          <p:nvPr/>
+        </p:nvSpPr>
+        <p:spPr>
+          <a:xfrm>
+            <a:off x="8686800" y="2377440"/>
+            <a:ext cx="2773375" cy="658368"/>
+          </a:xfrm>
+          <a:prstGeom prst="rect">
+            <a:avLst/>
+          </a:prstGeom>
+          <a:noFill/>
+          <a:ln/>
+        </p:spPr>
+        <p:txBody>
+          <a:bodyPr wrap="square" lIns="0" tIns="0" rIns="0" bIns="0" rtlCol="0" anchor="t"/>
+          <a:lstStyle/>
+          <a:p>
+            <a:pPr indent="0" marL="0">
+              <a:buNone/>
+            </a:pPr>
+            <a:r>
+              <a:rPr lang="en-US" sz="1300" dirty="0">
+                <a:solidFill>
+                  <a:schemeClr val="tx2"/>
+                </a:solidFill>
+              </a:rPr>
+              <a:t>Compare against bicubic, the original pixels, or the true HD texture.</a:t>
+            </a:r>
+            <a:endParaRPr lang="en-US" sz="1300" dirty="0"/>
+          </a:p>
+        </p:txBody>
+      </p:sp>
+      <p:sp>
+        <p:nvSpPr>
+          <p:cNvPr id="11" name="Point 2"/>
+          <p:cNvSpPr/>
+          <p:nvPr/>
+        </p:nvSpPr>
+        <p:spPr>
+          <a:xfrm>
+            <a:off x="7818120" y="3337560"/>
+            <a:ext cx="3824935" cy="1325880"/>
+          </a:xfrm>
+          <a:prstGeom prst="roundRect">
+            <a:avLst>
+              <a:gd name="adj" fmla="val 22069"/>
+            </a:avLst>
+          </a:prstGeom>
+          <a:solidFill>
+            <a:schemeClr val="bg2"/>
+          </a:solidFill>
+          <a:ln w="15875">
+            <a:solidFill>
+              <a:schemeClr val="accent6"/>
+            </a:solidFill>
+            <a:prstDash val="solid"/>
+          </a:ln>
+        </p:spPr>
+      </p:sp>
+      <p:sp>
+        <p:nvSpPr>
+          <p:cNvPr id="12" name="Shape 9"/>
+          <p:cNvSpPr/>
+          <p:nvPr/>
+        </p:nvSpPr>
+        <p:spPr>
+          <a:xfrm>
+            <a:off x="8046720" y="3566160"/>
+            <a:ext cx="457200" cy="457200"/>
+          </a:xfrm>
+          <a:prstGeom prst="ellipse">
+            <a:avLst/>
+          </a:prstGeom>
+          <a:solidFill>
+            <a:schemeClr val="accent4"/>
+          </a:solidFill>
+          <a:ln w="25400">
+            <a:solidFill>
+              <a:schemeClr val="accent2"/>
+            </a:solidFill>
+            <a:prstDash val="solid"/>
+          </a:ln>
+        </p:spPr>
+      </p:sp>
+      <p:sp>
+        <p:nvSpPr>
+          <p:cNvPr id="13" name="Text 10"/>
+          <p:cNvSpPr txBox="1"/>
+          <p:nvPr/>
+        </p:nvSpPr>
+        <p:spPr>
+          <a:xfrm>
+            <a:off x="8046720" y="3566160"/>
+            <a:ext cx="457200" cy="457200"/>
+          </a:xfrm>
+          <a:prstGeom prst="rect">
+            <a:avLst/>
+          </a:prstGeom>
+          <a:noFill/>
+          <a:ln/>
+        </p:spPr>
+        <p:txBody>
+          <a:bodyPr wrap="square" lIns="0" tIns="0" rIns="0" bIns="0" rtlCol="0" anchor="ctr"/>
+          <a:lstStyle/>
+          <a:p>
+            <a:pPr algn="ctr" indent="0" marL="0">
+              <a:buNone/>
+            </a:pPr>
+            <a:r>
+              <a:rPr lang="en-US" sz="1500" b="1" dirty="0">
+                <a:solidFill>
+                  <a:schemeClr val="bg1"/>
+                </a:solidFill>
+              </a:rPr>
+              <a:t>2</a:t>
+            </a:r>
+            <a:endParaRPr lang="en-US" sz="1500" dirty="0"/>
+          </a:p>
+        </p:txBody>
+      </p:sp>
+      <p:sp>
+        <p:nvSpPr>
+          <p:cNvPr id="14" name="Text 11"/>
+          <p:cNvSpPr txBox="1"/>
+          <p:nvPr/>
+        </p:nvSpPr>
+        <p:spPr>
+          <a:xfrm>
+            <a:off x="8686800" y="3520440"/>
+            <a:ext cx="2773375" cy="411480"/>
+          </a:xfrm>
+          <a:prstGeom prst="rect">
+            <a:avLst/>
+          </a:prstGeom>
+          <a:noFill/>
+          <a:ln/>
+        </p:spPr>
+        <p:txBody>
+          <a:bodyPr wrap="square" lIns="0" tIns="0" rIns="0" bIns="0" rtlCol="0" anchor="ctr"/>
+          <a:lstStyle/>
+          <a:p>
+            <a:pPr indent="0" marL="0">
+              <a:buNone/>
+            </a:pPr>
+            <a:r>
+              <a:rPr lang="en-US" sz="1600" b="1" dirty="0">
+                <a:solidFill>
+                  <a:schemeClr val="tx1"/>
+                </a:solidFill>
+                <a:latin typeface="Segoe Script" pitchFamily="34" charset="0"/>
+                <a:ea typeface="Segoe Script" pitchFamily="34" charset="-122"/>
+                <a:cs typeface="Segoe Script" pitchFamily="34" charset="-120"/>
+              </a:rPr>
+              <a:t>Runs in your browser</a:t>
+            </a:r>
+            <a:endParaRPr lang="en-US" sz="1600" dirty="0"/>
+          </a:p>
+        </p:txBody>
+      </p:sp>
+      <p:sp>
+        <p:nvSpPr>
+          <p:cNvPr id="15" name="Text 12"/>
+          <p:cNvSpPr txBox="1"/>
+          <p:nvPr/>
+        </p:nvSpPr>
+        <p:spPr>
+          <a:xfrm>
+            <a:off x="8686800" y="3931920"/>
+            <a:ext cx="2773375" cy="658368"/>
+          </a:xfrm>
+          <a:prstGeom prst="rect">
+            <a:avLst/>
+          </a:prstGeom>
+          <a:noFill/>
+          <a:ln/>
+        </p:spPr>
+        <p:txBody>
+          <a:bodyPr wrap="square" lIns="0" tIns="0" rIns="0" bIns="0" rtlCol="0" anchor="t"/>
+          <a:lstStyle/>
+          <a:p>
+            <a:pPr indent="0" marL="0">
+              <a:buNone/>
+            </a:pPr>
+            <a:r>
+              <a:rPr lang="en-US" sz="1300" dirty="0">
+                <a:solidFill>
+                  <a:schemeClr val="tx2"/>
+                </a:solidFill>
+              </a:rPr>
+              <a:t>No upload, no server, no install. Your art never leaves your machine.</a:t>
+            </a:r>
+            <a:endParaRPr lang="en-US" sz="1300" dirty="0"/>
+          </a:p>
+        </p:txBody>
+      </p:sp>
+      <p:sp>
+        <p:nvSpPr>
+          <p:cNvPr id="16" name="Point 3"/>
+          <p:cNvSpPr/>
+          <p:nvPr/>
+        </p:nvSpPr>
+        <p:spPr>
+          <a:xfrm>
+            <a:off x="7818120" y="4892040"/>
+            <a:ext cx="3824935" cy="1325880"/>
+          </a:xfrm>
+          <a:prstGeom prst="roundRect">
+            <a:avLst>
+              <a:gd name="adj" fmla="val 22069"/>
+            </a:avLst>
+          </a:prstGeom>
+          <a:solidFill>
+            <a:schemeClr val="bg2"/>
+          </a:solidFill>
+          <a:ln w="15875">
+            <a:solidFill>
+              <a:schemeClr val="accent6"/>
+            </a:solidFill>
+            <a:prstDash val="solid"/>
+          </a:ln>
+        </p:spPr>
+      </p:sp>
+      <p:sp>
+        <p:nvSpPr>
+          <p:cNvPr id="17" name="Shape 14"/>
+          <p:cNvSpPr/>
+          <p:nvPr/>
+        </p:nvSpPr>
+        <p:spPr>
+          <a:xfrm>
+            <a:off x="8046720" y="5120640"/>
+            <a:ext cx="457200" cy="457200"/>
+          </a:xfrm>
+          <a:prstGeom prst="ellipse">
+            <a:avLst/>
+          </a:prstGeom>
+          <a:solidFill>
+            <a:schemeClr val="accent4"/>
+          </a:solidFill>
+          <a:ln w="25400">
+            <a:solidFill>
+              <a:schemeClr val="accent2"/>
+            </a:solidFill>
+            <a:prstDash val="solid"/>
+          </a:ln>
+        </p:spPr>
+      </p:sp>
+      <p:sp>
+        <p:nvSpPr>
+          <p:cNvPr id="18" name="Text 15"/>
+          <p:cNvSpPr txBox="1"/>
+          <p:nvPr/>
+        </p:nvSpPr>
+        <p:spPr>
+          <a:xfrm>
+            <a:off x="8046720" y="5120640"/>
+            <a:ext cx="457200" cy="457200"/>
+          </a:xfrm>
+          <a:prstGeom prst="rect">
+            <a:avLst/>
+          </a:prstGeom>
+          <a:noFill/>
+          <a:ln/>
+        </p:spPr>
+        <p:txBody>
+          <a:bodyPr wrap="square" lIns="0" tIns="0" rIns="0" bIns="0" rtlCol="0" anchor="ctr"/>
+          <a:lstStyle/>
+          <a:p>
+            <a:pPr algn="ctr" indent="0" marL="0">
+              <a:buNone/>
+            </a:pPr>
+            <a:r>
+              <a:rPr lang="en-US" sz="1500" b="1" dirty="0">
+                <a:solidFill>
+                  <a:schemeClr val="bg1"/>
+                </a:solidFill>
+              </a:rPr>
+              <a:t>3</a:t>
+            </a:r>
+            <a:endParaRPr lang="en-US" sz="1500" dirty="0"/>
+          </a:p>
+        </p:txBody>
+      </p:sp>
+      <p:sp>
+        <p:nvSpPr>
+          <p:cNvPr id="19" name="Text 16"/>
+          <p:cNvSpPr txBox="1"/>
+          <p:nvPr/>
+        </p:nvSpPr>
+        <p:spPr>
+          <a:xfrm>
+            <a:off x="8686800" y="5074920"/>
+            <a:ext cx="2773375" cy="411480"/>
+          </a:xfrm>
+          <a:prstGeom prst="rect">
+            <a:avLst/>
+          </a:prstGeom>
+          <a:noFill/>
+          <a:ln/>
+        </p:spPr>
+        <p:txBody>
+          <a:bodyPr wrap="square" lIns="0" tIns="0" rIns="0" bIns="0" rtlCol="0" anchor="ctr"/>
+          <a:lstStyle/>
+          <a:p>
+            <a:pPr indent="0" marL="0">
+              <a:buNone/>
+            </a:pPr>
+            <a:r>
+              <a:rPr lang="en-US" sz="1600" b="1" dirty="0">
+                <a:solidFill>
+                  <a:schemeClr val="tx1"/>
+                </a:solidFill>
+                <a:latin typeface="Segoe Script" pitchFamily="34" charset="0"/>
+                <a:ea typeface="Segoe Script" pitchFamily="34" charset="-122"/>
+                <a:cs typeface="Segoe Script" pitchFamily="34" charset="-120"/>
+              </a:rPr>
+              <a:t>Batch + ZIP download</a:t>
+            </a:r>
+            <a:endParaRPr lang="en-US" sz="1600" dirty="0"/>
+          </a:p>
+        </p:txBody>
+      </p:sp>
+      <p:sp>
+        <p:nvSpPr>
+          <p:cNvPr id="20" name="Text 17"/>
+          <p:cNvSpPr txBox="1"/>
+          <p:nvPr/>
+        </p:nvSpPr>
+        <p:spPr>
+          <a:xfrm>
+            <a:off x="8686800" y="5486400"/>
+            <a:ext cx="2773375" cy="658368"/>
+          </a:xfrm>
+          <a:prstGeom prst="rect">
+            <a:avLst/>
+          </a:prstGeom>
+          <a:noFill/>
+          <a:ln/>
+        </p:spPr>
+        <p:txBody>
+          <a:bodyPr wrap="square" lIns="0" tIns="0" rIns="0" bIns="0" rtlCol="0" anchor="t"/>
+          <a:lstStyle/>
+          <a:p>
+            <a:pPr indent="0" marL="0">
+              <a:buNone/>
+            </a:pPr>
+            <a:r>
+              <a:rPr lang="en-US" sz="1300" dirty="0">
+                <a:solidFill>
+                  <a:schemeClr val="tx2"/>
+                </a:solidFill>
+              </a:rPr>
+              <a:t>Drop in many textures at once and get one ZIP back (2.3 s per 512×512 result in a laptop browser).</a:t>
+            </a:r>
+            <a:endParaRPr lang="en-US" sz="1300" dirty="0"/>
+          </a:p>
+        </p:txBody>
+      </p:sp>
+      <p:sp>
+        <p:nvSpPr>
+          <p:cNvPr id="25" name="Slide Number Placeholder 0"/>
+          <p:cNvSpPr>
+            <a:spLocks noGrp="1"/>
+          </p:cNvSpPr>
+          <p:nvPr>
+            <p:ph type="sldNum" sz="quarter" idx="4294967295"/>
+          </p:nvPr>
+        </p:nvSpPr>
+        <p:spPr>
+          <a:xfrm>
+            <a:off x="11064240" y="6400800"/>
+            <a:ext cx="576072" cy="274320"/>
+          </a:xfrm>
+          <a:prstGeom prst="rect">
+            <a:avLst/>
+          </a:prstGeom>
+          <a:extLst>
+            <a:ext uri="{C572A759-6A51-4108-AA02-DFA0A04FC94B}">
+              <ma14:wrappingTextBoxFlag xmlns:ma14="http://schemas.microsoft.com/office/mac/drawingml/2011/main" val="0"/>
+            </a:ext>
+          </a:extLst>
+        </p:spPr>
+        <p:txBody>
+          <a:bodyPr/>
+          <a:lstStyle>
+            <a:lvl1pPr>
+              <a:defRPr sz="1100">
+                <a:solidFill>
+                  <a:schemeClr val="accent5"/>
+                </a:solidFill>
+              </a:defRPr>
+            </a:lvl1pPr>
+          </a:lstStyle>
+          <a:p>
+            <a:pPr algn="r"/>
+            <a:fld id="{F7021451-1387-4CA6-816F-3879F97B5CBC}" type="slidenum">
+              <a:rPr b="0" lang="en-US"/>
+              <a:t>3</a:t>
+            </a:fld>
+            <a:endParaRPr lang="en-US"/>
+          </a:p>
+        </p:txBody>
+      </p:sp>
+    </p:spTree>
+  </p:cSld>
+  <p:clrMapOvr>
+    <a:masterClrMapping/>
+  </p:clrMapOvr>
+</p:sld>
+</file>
+
+<file path=ppt/slides/slide4.xml><?xml version="1.0" encoding="utf-8"?>
+<p:sld xmlns:a="http://schemas.openxmlformats.org/drawingml/2006/main" xmlns:r="http://schemas.openxmlformats.org/officeDocument/2006/relationships" xmlns:p="http://schemas.openxmlformats.org/presentationml/2006/main">
+  <p:cSld name="Slide 4">
+    <p:spTree>
+      <p:nvGrpSpPr>
+        <p:cNvPr id="1" name=""/>
+        <p:cNvGrpSpPr/>
+        <p:nvPr/>
+      </p:nvGrpSpPr>
+      <p:grpSpPr>
+        <a:xfrm>
+          <a:off x="0" y="0"/>
+          <a:ext cx="0" cy="0"/>
+          <a:chOff x="0" y="0"/>
+          <a:chExt cx="0" cy="0"/>
+        </a:xfrm>
+      </p:grpSpPr>
+      <p:sp>
+        <p:nvSpPr>
+          <p:cNvPr id="2" name="Text 0"/>
+          <p:cNvSpPr/>
+          <p:nvPr>
+            <p:ph idx="100" type="body" hasCustomPrompt="1"/>
+          </p:nvPr>
+        </p:nvSpPr>
+        <p:spPr>
+          <a:xfrm>
+            <a:off x="548640" y="384048"/>
+            <a:ext cx="11064240" cy="365760"/>
+          </a:xfrm>
+          <a:prstGeom prst="rect">
+            <a:avLst/>
+          </a:prstGeom>
+          <a:noFill/>
+          <a:ln/>
+        </p:spPr>
+        <p:txBody>
+          <a:bodyPr wrap="square" lIns="0" tIns="0" rIns="0" bIns="0" rtlCol="0" anchor="ctr"/>
+          <a:lstStyle/>
+          <a:p>
+            <a:pPr indent="0" marL="0">
+              <a:buNone/>
+            </a:pPr>
+            <a:r>
+              <a:rPr lang="en-US" sz="1300" b="1" spc="200" kern="0" dirty="0">
+                <a:solidFill>
+                  <a:schemeClr val="accent1"/>
+                </a:solidFill>
+                <a:latin typeface="Segoe UI" pitchFamily="34" charset="0"/>
+                <a:ea typeface="Segoe UI" pitchFamily="34" charset="-122"/>
+                <a:cs typeface="Segoe UI" pitchFamily="34" charset="-120"/>
+              </a:rPr>
+              <a:t>BUILT FOR MODDERS</a:t>
+            </a:r>
+            <a:endParaRPr lang="en-US" sz="1300" dirty="0"/>
+          </a:p>
+        </p:txBody>
+      </p:sp>
+      <p:sp>
+        <p:nvSpPr>
+          <p:cNvPr id="3" name="Text 0"/>
+          <p:cNvSpPr/>
+          <p:nvPr>
+            <p:ph idx="101" type="title" hasCustomPrompt="1"/>
+          </p:nvPr>
+        </p:nvSpPr>
+        <p:spPr>
+          <a:xfrm>
+            <a:off x="548640" y="749808"/>
+            <a:ext cx="11064240" cy="868680"/>
+          </a:xfrm>
+          <a:prstGeom prst="rect">
+            <a:avLst/>
+          </a:prstGeom>
+          <a:noFill/>
+          <a:ln/>
+        </p:spPr>
+        <p:txBody>
+          <a:bodyPr wrap="square" lIns="0" tIns="0" rIns="0" bIns="0" rtlCol="0" anchor="t"/>
+          <a:lstStyle/>
+          <a:p>
+            <a:pPr algn="l" indent="0" marL="0">
+              <a:buNone/>
+            </a:pPr>
+            <a:r>
+              <a:rPr lang="en-US" sz="3000" b="1" dirty="0">
+                <a:solidFill>
+                  <a:schemeClr val="tx1"/>
+                </a:solidFill>
+                <a:latin typeface="Segoe Script" pitchFamily="34" charset="0"/>
+                <a:ea typeface="Segoe Script" pitchFamily="34" charset="-122"/>
+                <a:cs typeface="Segoe Script" pitchFamily="34" charset="-120"/>
+              </a:rPr>
+              <a:t>An engine you can drop into your mod pipeline.</a:t>
+            </a:r>
+            <a:endParaRPr lang="en-US" sz="3000" dirty="0"/>
+          </a:p>
+        </p:txBody>
+      </p:sp>
+      <p:sp>
+        <p:nvSpPr>
+          <p:cNvPr id="4" name="Shape 2"/>
+          <p:cNvSpPr/>
+          <p:nvPr/>
+        </p:nvSpPr>
+        <p:spPr>
+          <a:xfrm>
+            <a:off x="502920" y="1691640"/>
+            <a:ext cx="6720840" cy="1828800"/>
+          </a:xfrm>
+          <a:prstGeom prst="roundRect">
+            <a:avLst>
+              <a:gd name="adj" fmla="val 15000"/>
+            </a:avLst>
+          </a:prstGeom>
+          <a:solidFill>
+            <a:schemeClr val="bg1"/>
+          </a:solidFill>
+          <a:ln w="25400">
+            <a:solidFill>
+              <a:schemeClr val="accent2"/>
+            </a:solidFill>
+            <a:prstDash val="solid"/>
+          </a:ln>
+        </p:spPr>
+      </p:sp>
+      <p:graphicFrame>
+        <p:nvGraphicFramePr>
+          <p:cNvPr id="5" name="Engine features"/>
+          <p:cNvGraphicFramePr>
+            <a:graphicFrameLocks noGrp="1"/>
+          </p:cNvGraphicFramePr>
+          <p:nvPr>
+            <p:extLst>
+              <p:ext uri="{D42A27DB-BD31-4B8C-83A1-F6EECF244321}">
+                <p14:modId xmlns:p14="http://schemas.microsoft.com/office/powerpoint/2010/main" val="1579011935"/>
+              </p:ext>
+            </p:extLst>
+          </p:nvPr>
+        </p:nvGraphicFramePr>
+        <p:xfrm>
+          <a:off x="685800" y="1828800"/>
+          <a:ext cx="6355080" cy="914400"/>
+        </p:xfrm>
+        <a:graphic>
+          <a:graphicData uri="http://schemas.openxmlformats.org/drawingml/2006/table">
+            <a:tbl>
+              <a:tblPr/>
+              <a:tblGrid>
+                <a:gridCol w="1737360"/>
+                <a:gridCol w="2331720"/>
+                <a:gridCol w="2286000"/>
+              </a:tblGrid>
+              <a:tr h="384048">
+                <a:tc>
+                  <a:txBody>
+                    <a:bodyPr/>
+                    <a:lstStyle/>
+                    <a:p>
+                      <a:pPr indent="0" marL="0">
+                        <a:buNone/>
+                      </a:pPr>
+                      <a:r>
+                        <a:rPr lang="en-US" sz="1300" b="1" dirty="0">
+                          <a:solidFill>
+                            <a:schemeClr val="accent1"/>
+                          </a:solidFill>
+                          <a:latin typeface="Segoe UI" pitchFamily="34" charset="0"/>
+                          <a:ea typeface="Segoe UI" pitchFamily="34" charset="-122"/>
+                          <a:cs typeface="Segoe UI" pitchFamily="34" charset="-120"/>
+                        </a:rPr>
+                        <a:t>Feature</a:t>
+                      </a:r>
+                      <a:endParaRPr lang="en-US" sz="1300" dirty="0">
+                        <a:latin typeface="Segoe UI" charset="0"/>
+                        <a:ea typeface="Segoe UI" charset="0"/>
+                        <a:cs typeface="Segoe UI" charset="0"/>
+                      </a:endParaRPr>
+                    </a:p>
+                  </a:txBody>
+                  <a:tcPr marL="54864" marR="54864" marT="54864" marB="54864">
+                    <a:lnL w="0" cap="flat" cmpd="sng" algn="ctr">
+                      <a:noFill/>
+                    </a:lnL>
+                    <a:lnR w="0" cap="flat" cmpd="sng" algn="ctr">
+                      <a:noFill/>
+                    </a:lnR>
+                    <a:lnT w="0" cap="flat" cmpd="sng" algn="ctr">
+                      <a:noFill/>
+                    </a:lnT>
+                    <a:lnB w="0" cap="flat" cmpd="sng" algn="ctr">
+                      <a:noFill/>
+                    </a:lnB>
+                    <a:solidFill>
+                      <a:schemeClr val="bg2"/>
+                    </a:solidFill>
+                  </a:tcPr>
+                </a:tc>
+                <a:tc>
+                  <a:txBody>
+                    <a:bodyPr/>
+                    <a:lstStyle/>
+                    <a:p>
+                      <a:pPr indent="0" marL="0">
+                        <a:buNone/>
+                      </a:pPr>
+                      <a:r>
+                        <a:rPr lang="en-US" sz="1300" b="1" dirty="0">
+                          <a:solidFill>
+                            <a:schemeClr val="accent1"/>
+                          </a:solidFill>
+                          <a:latin typeface="Segoe UI" pitchFamily="34" charset="0"/>
+                          <a:ea typeface="Segoe UI" pitchFamily="34" charset="-122"/>
+                          <a:cs typeface="Segoe UI" pitchFamily="34" charset="-120"/>
+                        </a:rPr>
+                        <a:t>Plain upscaling</a:t>
+                      </a:r>
+                      <a:endParaRPr lang="en-US" sz="1300" dirty="0">
+                        <a:latin typeface="Segoe UI" charset="0"/>
+                        <a:ea typeface="Segoe UI" charset="0"/>
+                        <a:cs typeface="Segoe UI" charset="0"/>
+                      </a:endParaRPr>
+                    </a:p>
+                  </a:txBody>
+                  <a:tcPr marL="54864" marR="54864" marT="54864" marB="54864">
+                    <a:lnL w="0" cap="flat" cmpd="sng" algn="ctr">
+                      <a:noFill/>
+                    </a:lnL>
+                    <a:lnR w="0" cap="flat" cmpd="sng" algn="ctr">
+                      <a:noFill/>
+                    </a:lnR>
+                    <a:lnT w="0" cap="flat" cmpd="sng" algn="ctr">
+                      <a:noFill/>
+                    </a:lnT>
+                    <a:lnB w="0" cap="flat" cmpd="sng" algn="ctr">
+                      <a:noFill/>
+                    </a:lnB>
+                    <a:solidFill>
+                      <a:schemeClr val="bg2"/>
+                    </a:solidFill>
+                  </a:tcPr>
+                </a:tc>
+                <a:tc>
+                  <a:txBody>
+                    <a:bodyPr/>
+                    <a:lstStyle/>
+                    <a:p>
+                      <a:pPr indent="0" marL="0">
+                        <a:buNone/>
+                      </a:pPr>
+                      <a:r>
+                        <a:rPr lang="en-US" sz="1300" b="1" dirty="0">
+                          <a:solidFill>
+                            <a:schemeClr val="accent1"/>
+                          </a:solidFill>
+                          <a:latin typeface="Segoe UI" pitchFamily="34" charset="0"/>
+                          <a:ea typeface="Segoe UI" pitchFamily="34" charset="-122"/>
+                          <a:cs typeface="Segoe UI" pitchFamily="34" charset="-120"/>
+                        </a:rPr>
+                        <a:t>PixelForge Engine</a:t>
+                      </a:r>
+                      <a:endParaRPr lang="en-US" sz="1300" dirty="0">
+                        <a:latin typeface="Segoe UI" charset="0"/>
+                        <a:ea typeface="Segoe UI" charset="0"/>
+                        <a:cs typeface="Segoe UI" charset="0"/>
+                      </a:endParaRPr>
+                    </a:p>
+                  </a:txBody>
+                  <a:tcPr marL="54864" marR="54864" marT="54864" marB="54864">
+                    <a:lnL w="0" cap="flat" cmpd="sng" algn="ctr">
+                      <a:noFill/>
+                    </a:lnL>
+                    <a:lnR w="0" cap="flat" cmpd="sng" algn="ctr">
+                      <a:noFill/>
+                    </a:lnR>
+                    <a:lnT w="0" cap="flat" cmpd="sng" algn="ctr">
+                      <a:noFill/>
+                    </a:lnT>
+                    <a:lnB w="0" cap="flat" cmpd="sng" algn="ctr">
+                      <a:noFill/>
+                    </a:lnB>
+                    <a:solidFill>
+                      <a:schemeClr val="bg2"/>
+                    </a:solidFill>
+                  </a:tcPr>
+                </a:tc>
+              </a:tr>
+              <a:tr h="384048">
+                <a:tc>
+                  <a:txBody>
+                    <a:bodyPr/>
+                    <a:lstStyle/>
+                    <a:p>
+                      <a:pPr indent="0" marL="0">
+                        <a:buNone/>
+                      </a:pPr>
+                      <a:r>
+                        <a:rPr lang="en-US" sz="1300" b="1" dirty="0">
+                          <a:solidFill>
+                            <a:schemeClr val="tx2"/>
+                          </a:solidFill>
+                          <a:latin typeface="Segoe UI" pitchFamily="34" charset="0"/>
+                          <a:ea typeface="Segoe UI" pitchFamily="34" charset="-122"/>
+                          <a:cs typeface="Segoe UI" pitchFamily="34" charset="-120"/>
+                        </a:rPr>
+                        <a:t>Seamless tiles</a:t>
+                      </a:r>
+                      <a:endParaRPr lang="en-US" sz="1300" dirty="0">
+                        <a:latin typeface="Segoe UI" charset="0"/>
+                        <a:ea typeface="Segoe UI" charset="0"/>
+                        <a:cs typeface="Segoe UI" charset="0"/>
+                      </a:endParaRPr>
+                    </a:p>
+                  </a:txBody>
+                  <a:tcPr marL="54864" marR="54864" marT="54864" marB="54864">
+                    <a:lnL w="0" cap="flat" cmpd="sng" algn="ctr">
+                      <a:noFill/>
+                    </a:lnL>
+                    <a:lnR w="0" cap="flat" cmpd="sng" algn="ctr">
+                      <a:noFill/>
+                    </a:lnR>
+                    <a:lnT w="0" cap="flat" cmpd="sng" algn="ctr">
+                      <a:noFill/>
+                    </a:lnT>
+                    <a:lnB w="0" cap="flat" cmpd="sng" algn="ctr">
+                      <a:noFill/>
+                    </a:lnB>
+                    <a:solidFill>
+                      <a:schemeClr val="bg1"/>
+                    </a:solidFill>
+                  </a:tcPr>
+                </a:tc>
+                <a:tc>
+                  <a:txBody>
+                    <a:bodyPr/>
+                    <a:lstStyle/>
+                    <a:p>
+                      <a:pPr indent="0" marL="0">
+                        <a:buNone/>
+                      </a:pPr>
+                      <a:r>
+                        <a:rPr lang="en-US" sz="1300" dirty="0">
+                          <a:solidFill>
+                            <a:schemeClr val="tx2"/>
+                          </a:solidFill>
+                          <a:latin typeface="Segoe UI" pitchFamily="34" charset="0"/>
+                          <a:ea typeface="Segoe UI" pitchFamily="34" charset="-122"/>
+                          <a:cs typeface="Segoe UI" pitchFamily="34" charset="-120"/>
+                        </a:rPr>
+                        <a:t>24 of 30 textures show a seam</a:t>
+                      </a:r>
+                      <a:endParaRPr lang="en-US" sz="1300" dirty="0">
+                        <a:latin typeface="Segoe UI" charset="0"/>
+                        <a:ea typeface="Segoe UI" charset="0"/>
+                        <a:cs typeface="Segoe UI" charset="0"/>
+                      </a:endParaRPr>
+                    </a:p>
+                  </a:txBody>
+                  <a:tcPr marL="54864" marR="54864" marT="54864" marB="54864">
+                    <a:lnL w="0" cap="flat" cmpd="sng" algn="ctr">
+                      <a:noFill/>
+                    </a:lnL>
+                    <a:lnR w="0" cap="flat" cmpd="sng" algn="ctr">
+                      <a:noFill/>
+                    </a:lnR>
+                    <a:lnT w="0" cap="flat" cmpd="sng" algn="ctr">
+                      <a:noFill/>
+                    </a:lnT>
+                    <a:lnB w="0" cap="flat" cmpd="sng" algn="ctr">
+                      <a:noFill/>
+                    </a:lnB>
+                    <a:solidFill>
+                      <a:schemeClr val="bg1"/>
+                    </a:solidFill>
+                  </a:tcPr>
+                </a:tc>
+                <a:tc>
+                  <a:txBody>
+                    <a:bodyPr/>
+                    <a:lstStyle/>
+                    <a:p>
+                      <a:pPr indent="0" marL="0">
+                        <a:buNone/>
+                      </a:pPr>
+                      <a:r>
+                        <a:rPr lang="en-US" sz="1300" b="1" dirty="0">
+                          <a:solidFill>
+                            <a:schemeClr val="tx1"/>
+                          </a:solidFill>
+                          <a:latin typeface="Segoe UI" pitchFamily="34" charset="0"/>
+                          <a:ea typeface="Segoe UI" pitchFamily="34" charset="-122"/>
+                          <a:cs typeface="Segoe UI" pitchFamily="34" charset="-120"/>
+                        </a:rPr>
+                        <a:t>2 of 30</a:t>
+                      </a:r>
+                      <a:endParaRPr lang="en-US" sz="1300" dirty="0">
+                        <a:latin typeface="Segoe UI" charset="0"/>
+                        <a:ea typeface="Segoe UI" charset="0"/>
+                        <a:cs typeface="Segoe UI" charset="0"/>
+                      </a:endParaRPr>
+                    </a:p>
+                  </a:txBody>
+                  <a:tcPr marL="54864" marR="54864" marT="54864" marB="54864">
+                    <a:lnL w="0" cap="flat" cmpd="sng" algn="ctr">
+                      <a:noFill/>
+                    </a:lnL>
+                    <a:lnR w="0" cap="flat" cmpd="sng" algn="ctr">
+                      <a:noFill/>
+                    </a:lnR>
+                    <a:lnT w="0" cap="flat" cmpd="sng" algn="ctr">
+                      <a:noFill/>
+                    </a:lnT>
+                    <a:lnB w="0" cap="flat" cmpd="sng" algn="ctr">
+                      <a:noFill/>
+                    </a:lnB>
+                    <a:solidFill>
+                      <a:schemeClr val="bg1"/>
+                    </a:solidFill>
+                  </a:tcPr>
+                </a:tc>
+              </a:tr>
+              <a:tr h="384048">
+                <a:tc>
+                  <a:txBody>
+                    <a:bodyPr/>
+                    <a:lstStyle/>
+                    <a:p>
+                      <a:pPr indent="0" marL="0">
+                        <a:buNone/>
+                      </a:pPr>
+                      <a:r>
+                        <a:rPr lang="en-US" sz="1300" b="1" dirty="0">
+                          <a:solidFill>
+                            <a:schemeClr val="tx2"/>
+                          </a:solidFill>
+                          <a:latin typeface="Segoe UI" pitchFamily="34" charset="0"/>
+                          <a:ea typeface="Segoe UI" pitchFamily="34" charset="-122"/>
+                          <a:cs typeface="Segoe UI" pitchFamily="34" charset="-120"/>
+                        </a:rPr>
+                        <a:t>Transparent edges</a:t>
+                      </a:r>
+                      <a:endParaRPr lang="en-US" sz="1300" dirty="0">
+                        <a:latin typeface="Segoe UI" charset="0"/>
+                        <a:ea typeface="Segoe UI" charset="0"/>
+                        <a:cs typeface="Segoe UI" charset="0"/>
+                      </a:endParaRPr>
+                    </a:p>
+                  </a:txBody>
+                  <a:tcPr marL="54864" marR="54864" marT="54864" marB="54864">
+                    <a:lnL w="0" cap="flat" cmpd="sng" algn="ctr">
+                      <a:noFill/>
+                    </a:lnL>
+                    <a:lnR w="0" cap="flat" cmpd="sng" algn="ctr">
+                      <a:noFill/>
+                    </a:lnR>
+                    <a:lnT w="0" cap="flat" cmpd="sng" algn="ctr">
+                      <a:noFill/>
+                    </a:lnT>
+                    <a:lnB w="0" cap="flat" cmpd="sng" algn="ctr">
+                      <a:noFill/>
+                    </a:lnB>
+                    <a:solidFill>
+                      <a:schemeClr val="bg1"/>
+                    </a:solidFill>
+                  </a:tcPr>
+                </a:tc>
+                <a:tc>
+                  <a:txBody>
+                    <a:bodyPr/>
+                    <a:lstStyle/>
+                    <a:p>
+                      <a:pPr indent="0" marL="0">
+                        <a:buNone/>
+                      </a:pPr>
+                      <a:r>
+                        <a:rPr lang="en-US" sz="1300" dirty="0">
+                          <a:solidFill>
+                            <a:schemeClr val="tx2"/>
+                          </a:solidFill>
+                          <a:latin typeface="Segoe UI" pitchFamily="34" charset="0"/>
+                          <a:ea typeface="Segoe UI" pitchFamily="34" charset="-122"/>
+                          <a:cs typeface="Segoe UI" pitchFamily="34" charset="-120"/>
+                        </a:rPr>
+                        <a:t>colour halo (edge error 16.1)</a:t>
+                      </a:r>
+                      <a:endParaRPr lang="en-US" sz="1300" dirty="0">
+                        <a:latin typeface="Segoe UI" charset="0"/>
+                        <a:ea typeface="Segoe UI" charset="0"/>
+                        <a:cs typeface="Segoe UI" charset="0"/>
+                      </a:endParaRPr>
+                    </a:p>
+                  </a:txBody>
+                  <a:tcPr marL="54864" marR="54864" marT="54864" marB="54864">
+                    <a:lnL w="0" cap="flat" cmpd="sng" algn="ctr">
+                      <a:noFill/>
+                    </a:lnL>
+                    <a:lnR w="0" cap="flat" cmpd="sng" algn="ctr">
+                      <a:noFill/>
+                    </a:lnR>
+                    <a:lnT w="0" cap="flat" cmpd="sng" algn="ctr">
+                      <a:noFill/>
+                    </a:lnT>
+                    <a:lnB w="0" cap="flat" cmpd="sng" algn="ctr">
+                      <a:noFill/>
+                    </a:lnB>
+                    <a:solidFill>
+                      <a:schemeClr val="bg1"/>
+                    </a:solidFill>
+                  </a:tcPr>
+                </a:tc>
+                <a:tc>
+                  <a:txBody>
+                    <a:bodyPr/>
+                    <a:lstStyle/>
+                    <a:p>
+                      <a:pPr indent="0" marL="0">
+                        <a:buNone/>
+                      </a:pPr>
+                      <a:r>
+                        <a:rPr lang="en-US" sz="1300" b="1" dirty="0">
+                          <a:solidFill>
+                            <a:schemeClr val="tx1"/>
+                          </a:solidFill>
+                          <a:latin typeface="Segoe UI" pitchFamily="34" charset="0"/>
+                          <a:ea typeface="Segoe UI" pitchFamily="34" charset="-122"/>
+                          <a:cs typeface="Segoe UI" pitchFamily="34" charset="-120"/>
+                        </a:rPr>
+                        <a:t>1.6  (−90%)</a:t>
+                      </a:r>
+                      <a:endParaRPr lang="en-US" sz="1300" dirty="0">
+                        <a:latin typeface="Segoe UI" charset="0"/>
+                        <a:ea typeface="Segoe UI" charset="0"/>
+                        <a:cs typeface="Segoe UI" charset="0"/>
+                      </a:endParaRPr>
+                    </a:p>
+                  </a:txBody>
+                  <a:tcPr marL="54864" marR="54864" marT="54864" marB="54864">
+                    <a:lnL w="0" cap="flat" cmpd="sng" algn="ctr">
+                      <a:noFill/>
+                    </a:lnL>
+                    <a:lnR w="0" cap="flat" cmpd="sng" algn="ctr">
+                      <a:noFill/>
+                    </a:lnR>
+                    <a:lnT w="0" cap="flat" cmpd="sng" algn="ctr">
+                      <a:noFill/>
+                    </a:lnT>
+                    <a:lnB w="0" cap="flat" cmpd="sng" algn="ctr">
+                      <a:noFill/>
+                    </a:lnB>
+                    <a:solidFill>
+                      <a:schemeClr val="bg1"/>
+                    </a:solidFill>
+                  </a:tcPr>
+                </a:tc>
+              </a:tr>
+              <a:tr h="384048">
+                <a:tc>
+                  <a:txBody>
+                    <a:bodyPr/>
+                    <a:lstStyle/>
+                    <a:p>
+                      <a:pPr indent="0" marL="0">
+                        <a:buNone/>
+                      </a:pPr>
+                      <a:r>
+                        <a:rPr lang="en-US" sz="1300" b="1" dirty="0">
+                          <a:solidFill>
+                            <a:schemeClr val="tx2"/>
+                          </a:solidFill>
+                          <a:latin typeface="Segoe UI" pitchFamily="34" charset="0"/>
+                          <a:ea typeface="Segoe UI" pitchFamily="34" charset="-122"/>
+                          <a:cs typeface="Segoe UI" pitchFamily="34" charset="-120"/>
+                        </a:rPr>
+                        <a:t>Whole texture packs</a:t>
+                      </a:r>
+                      <a:endParaRPr lang="en-US" sz="1300" dirty="0">
+                        <a:latin typeface="Segoe UI" charset="0"/>
+                        <a:ea typeface="Segoe UI" charset="0"/>
+                        <a:cs typeface="Segoe UI" charset="0"/>
+                      </a:endParaRPr>
+                    </a:p>
+                  </a:txBody>
+                  <a:tcPr marL="54864" marR="54864" marT="54864" marB="54864">
+                    <a:lnL w="0" cap="flat" cmpd="sng" algn="ctr">
+                      <a:noFill/>
+                    </a:lnL>
+                    <a:lnR w="0" cap="flat" cmpd="sng" algn="ctr">
+                      <a:noFill/>
+                    </a:lnR>
+                    <a:lnT w="0" cap="flat" cmpd="sng" algn="ctr">
+                      <a:noFill/>
+                    </a:lnT>
+                    <a:lnB w="0" cap="flat" cmpd="sng" algn="ctr">
+                      <a:noFill/>
+                    </a:lnB>
+                    <a:solidFill>
+                      <a:schemeClr val="bg1"/>
+                    </a:solidFill>
+                  </a:tcPr>
+                </a:tc>
+                <a:tc>
+                  <a:txBody>
+                    <a:bodyPr/>
+                    <a:lstStyle/>
+                    <a:p>
+                      <a:pPr indent="0" marL="0">
+                        <a:buNone/>
+                      </a:pPr>
+                      <a:r>
+                        <a:rPr lang="en-US" sz="1300" dirty="0">
+                          <a:solidFill>
+                            <a:schemeClr val="tx2"/>
+                          </a:solidFill>
+                          <a:latin typeface="Segoe UI" pitchFamily="34" charset="0"/>
+                          <a:ea typeface="Segoe UI" pitchFamily="34" charset="-122"/>
+                          <a:cs typeface="Segoe UI" pitchFamily="34" charset="-120"/>
+                        </a:rPr>
+                        <a:t>one file at a time</a:t>
+                      </a:r>
+                      <a:endParaRPr lang="en-US" sz="1300" dirty="0">
+                        <a:latin typeface="Segoe UI" charset="0"/>
+                        <a:ea typeface="Segoe UI" charset="0"/>
+                        <a:cs typeface="Segoe UI" charset="0"/>
+                      </a:endParaRPr>
+                    </a:p>
+                  </a:txBody>
+                  <a:tcPr marL="54864" marR="54864" marT="54864" marB="54864">
+                    <a:lnL w="0" cap="flat" cmpd="sng" algn="ctr">
+                      <a:noFill/>
+                    </a:lnL>
+                    <a:lnR w="0" cap="flat" cmpd="sng" algn="ctr">
+                      <a:noFill/>
+                    </a:lnR>
+                    <a:lnT w="0" cap="flat" cmpd="sng" algn="ctr">
+                      <a:noFill/>
+                    </a:lnT>
+                    <a:lnB w="0" cap="flat" cmpd="sng" algn="ctr">
+                      <a:noFill/>
+                    </a:lnB>
+                    <a:solidFill>
+                      <a:schemeClr val="bg1"/>
+                    </a:solidFill>
+                  </a:tcPr>
+                </a:tc>
+                <a:tc>
+                  <a:txBody>
+                    <a:bodyPr/>
+                    <a:lstStyle/>
+                    <a:p>
+                      <a:pPr indent="0" marL="0">
+                        <a:buNone/>
+                      </a:pPr>
+                      <a:r>
+                        <a:rPr lang="en-US" sz="1300" b="1" dirty="0">
+                          <a:solidFill>
+                            <a:schemeClr val="tx1"/>
+                          </a:solidFill>
+                          <a:latin typeface="Segoe UI" pitchFamily="34" charset="0"/>
+                          <a:ea typeface="Segoe UI" pitchFamily="34" charset="-122"/>
+                          <a:cs typeface="Segoe UI" pitchFamily="34" charset="-120"/>
+                        </a:rPr>
+                        <a:t>0.20 s / texture GPU · 0.55 s CPU</a:t>
+                      </a:r>
+                      <a:endParaRPr lang="en-US" sz="1300" dirty="0">
+                        <a:latin typeface="Segoe UI" charset="0"/>
+                        <a:ea typeface="Segoe UI" charset="0"/>
+                        <a:cs typeface="Segoe UI" charset="0"/>
+                      </a:endParaRPr>
+                    </a:p>
+                  </a:txBody>
+                  <a:tcPr marL="54864" marR="54864" marT="54864" marB="54864">
+                    <a:lnL w="0" cap="flat" cmpd="sng" algn="ctr">
+                      <a:noFill/>
+                    </a:lnL>
+                    <a:lnR w="0" cap="flat" cmpd="sng" algn="ctr">
+                      <a:noFill/>
+                    </a:lnR>
+                    <a:lnT w="0" cap="flat" cmpd="sng" algn="ctr">
+                      <a:noFill/>
+                    </a:lnT>
+                    <a:lnB w="0" cap="flat" cmpd="sng" algn="ctr">
+                      <a:noFill/>
+                    </a:lnB>
+                    <a:solidFill>
+                      <a:schemeClr val="bg1"/>
+                    </a:solidFill>
+                  </a:tcPr>
+                </a:tc>
+              </a:tr>
+            </a:tbl>
+          </a:graphicData>
+        </a:graphic>
+      </p:graphicFrame>
+      <p:sp>
+        <p:nvSpPr>
+          <p:cNvPr id="6" name="CLI card"/>
+          <p:cNvSpPr/>
+          <p:nvPr/>
+        </p:nvSpPr>
+        <p:spPr>
+          <a:xfrm>
+            <a:off x="548640" y="3749040"/>
+            <a:ext cx="6629400" cy="2514600"/>
+          </a:xfrm>
+          <a:prstGeom prst="roundRect">
+            <a:avLst>
+              <a:gd name="adj" fmla="val 11636"/>
+            </a:avLst>
+          </a:prstGeom>
+          <a:solidFill>
+            <a:schemeClr val="bg2"/>
+          </a:solidFill>
+          <a:ln w="15875">
+            <a:solidFill>
+              <a:schemeClr val="accent6"/>
+            </a:solidFill>
+            <a:prstDash val="solid"/>
+          </a:ln>
+        </p:spPr>
+      </p:sp>
+      <p:sp>
+        <p:nvSpPr>
+          <p:cNvPr id="7" name="Text 4"/>
+          <p:cNvSpPr txBox="1"/>
+          <p:nvPr/>
+        </p:nvSpPr>
+        <p:spPr>
+          <a:xfrm>
+            <a:off x="822960" y="3886200"/>
+            <a:ext cx="5486400" cy="411480"/>
+          </a:xfrm>
+          <a:prstGeom prst="rect">
+            <a:avLst/>
+          </a:prstGeom>
+          <a:noFill/>
+          <a:ln/>
+        </p:spPr>
+        <p:txBody>
+          <a:bodyPr wrap="square" lIns="0" tIns="0" rIns="0" bIns="0" rtlCol="0" anchor="ctr"/>
+          <a:lstStyle/>
+          <a:p>
+            <a:pPr indent="0" marL="0">
+              <a:buNone/>
+            </a:pPr>
+            <a:r>
+              <a:rPr lang="en-US" sz="1800" b="1" dirty="0">
+                <a:solidFill>
+                  <a:schemeClr val="tx1"/>
+                </a:solidFill>
+                <a:latin typeface="Segoe Script" pitchFamily="34" charset="0"/>
+                <a:ea typeface="Segoe Script" pitchFamily="34" charset="-122"/>
+                <a:cs typeface="Segoe Script" pitchFamily="34" charset="-120"/>
+              </a:rPr>
+              <a:t>Command line</a:t>
+            </a:r>
+            <a:endParaRPr lang="en-US" sz="1800" dirty="0"/>
+          </a:p>
+        </p:txBody>
+      </p:sp>
+      <p:sp>
+        <p:nvSpPr>
+          <p:cNvPr id="8" name="Text 5"/>
+          <p:cNvSpPr txBox="1"/>
+          <p:nvPr/>
+        </p:nvSpPr>
+        <p:spPr>
+          <a:xfrm>
+            <a:off x="822960" y="4389120"/>
+            <a:ext cx="6126480" cy="1280160"/>
+          </a:xfrm>
+          <a:prstGeom prst="rect">
+            <a:avLst/>
+          </a:prstGeom>
+          <a:noFill/>
+          <a:ln/>
+        </p:spPr>
+        <p:txBody>
+          <a:bodyPr wrap="square" lIns="0" tIns="0" rIns="0" bIns="0" rtlCol="0" anchor="t"/>
+          <a:lstStyle/>
+          <a:p>
+            <a:pPr indent="0" marL="0">
+              <a:spcAft>
+                <a:spcPts val="400"/>
+              </a:spcAft>
+              <a:buNone/>
+            </a:pPr>
+            <a:r>
+              <a:rPr lang="en-US" sz="1200" dirty="0">
+                <a:solidFill>
+                  <a:schemeClr val="tx1"/>
+                </a:solidFill>
+                <a:latin typeface="Consolas" pitchFamily="34" charset="0"/>
+                <a:ea typeface="Consolas" pitchFamily="34" charset="-122"/>
+                <a:cs typeface="Consolas" pitchFamily="34" charset="-120"/>
+              </a:rPr>
+              <a:t>pip install git+https://github.com/Priyanshu-Singh-git/pixelforge</a:t>
+            </a:r>
+            <a:endParaRPr lang="en-US" sz="1200" dirty="0"/>
+          </a:p>
+          <a:p>
+            <a:pPr indent="0" marL="0">
+              <a:spcAft>
+                <a:spcPts val="400"/>
+              </a:spcAft>
+              <a:buNone/>
+            </a:pPr>
+            <a:r>
+              <a:rPr lang="en-US" sz="1200" dirty="0">
+                <a:solidFill>
+                  <a:schemeClr val="tx1"/>
+                </a:solidFill>
+                <a:latin typeface="Consolas" pitchFamily="34" charset="0"/>
+                <a:ea typeface="Consolas" pitchFamily="34" charset="-122"/>
+                <a:cs typeface="Consolas" pitchFamily="34" charset="-120"/>
+              </a:rPr>
+              <a:t>pixelforge upscale ./textures ./textures_hd</a:t>
+            </a:r>
+            <a:endParaRPr lang="en-US" sz="1200" dirty="0"/>
+          </a:p>
+          <a:p>
+            <a:pPr indent="0" marL="0">
+              <a:spcAft>
+                <a:spcPts val="400"/>
+              </a:spcAft>
+              <a:buNone/>
+            </a:pPr>
+            <a:r>
+              <a:rPr lang="en-US" sz="1200" dirty="0">
+                <a:solidFill>
+                  <a:schemeClr val="tx1"/>
+                </a:solidFill>
+                <a:latin typeface="Consolas" pitchFamily="34" charset="0"/>
+                <a:ea typeface="Consolas" pitchFamily="34" charset="-122"/>
+                <a:cs typeface="Consolas" pitchFamily="34" charset="-120"/>
+              </a:rPr>
+              <a:t>pixelforge upscale ./tiles ./tiles_hd --tileable</a:t>
+            </a:r>
+            <a:endParaRPr lang="en-US" sz="1200" dirty="0"/>
+          </a:p>
+          <a:p>
+            <a:pPr indent="0" marL="0">
+              <a:spcAft>
+                <a:spcPts val="400"/>
+              </a:spcAft>
+              <a:buNone/>
+            </a:pPr>
+            <a:r>
+              <a:rPr lang="en-US" sz="1200" dirty="0">
+                <a:solidFill>
+                  <a:schemeClr val="tx1"/>
+                </a:solidFill>
+                <a:latin typeface="Consolas" pitchFamily="34" charset="0"/>
+                <a:ea typeface="Consolas" pitchFamily="34" charset="-122"/>
+                <a:cs typeface="Consolas" pitchFamily="34" charset="-120"/>
+              </a:rPr>
+              <a:t>pixelforge export PixelForge_4x.pth</a:t>
+            </a:r>
+            <a:endParaRPr lang="en-US" sz="1200" dirty="0"/>
+          </a:p>
+        </p:txBody>
+      </p:sp>
+      <p:sp>
+        <p:nvSpPr>
+          <p:cNvPr id="9" name="Text 6"/>
+          <p:cNvSpPr txBox="1"/>
+          <p:nvPr/>
+        </p:nvSpPr>
+        <p:spPr>
+          <a:xfrm>
+            <a:off x="822960" y="5715000"/>
+            <a:ext cx="6126480" cy="411480"/>
+          </a:xfrm>
+          <a:prstGeom prst="rect">
+            <a:avLst/>
+          </a:prstGeom>
+          <a:noFill/>
+          <a:ln/>
+        </p:spPr>
+        <p:txBody>
+          <a:bodyPr wrap="square" lIns="0" tIns="0" rIns="0" bIns="0" rtlCol="0" anchor="ctr"/>
+          <a:lstStyle/>
+          <a:p>
+            <a:pPr indent="0" marL="0">
+              <a:buNone/>
+            </a:pPr>
+            <a:r>
+              <a:rPr lang="en-US" sz="1200" dirty="0">
+                <a:solidFill>
+                  <a:schemeClr val="accent5"/>
+                </a:solidFill>
+              </a:rPr>
+              <a:t>Folder in, folder out · names and sub-folders kept · GPU or CPU · ONNX + ESRGAN-format weights</a:t>
+            </a:r>
+            <a:endParaRPr lang="en-US" sz="1200" dirty="0"/>
+          </a:p>
+        </p:txBody>
+      </p:sp>
+      <p:pic>
+        <p:nvPicPr>
+          <p:cNvPr id="10" name="Seam comparison" descr="Normal upscale shows a seam cross; tileable mode does not">    </p:cNvPr>
+          <p:cNvPicPr>
+            <a:picLocks noChangeAspect="1"/>
+          </p:cNvPicPr>
+          <p:nvPr/>
+        </p:nvPicPr>
+        <p:blipFill>
+          <a:blip r:embed="rId1"/>
+          <a:stretch>
+            <a:fillRect/>
+          </a:stretch>
+        </p:blipFill>
+        <p:spPr>
+          <a:xfrm>
+            <a:off x="7498080" y="1746804"/>
+            <a:ext cx="4144975" cy="2038512"/>
+          </a:xfrm>
+          <a:prstGeom prst="rect">
+            <a:avLst/>
+          </a:prstGeom>
+        </p:spPr>
+      </p:pic>
+      <p:sp>
+        <p:nvSpPr>
+          <p:cNvPr id="11" name="Text 7"/>
+          <p:cNvSpPr txBox="1"/>
+          <p:nvPr/>
+        </p:nvSpPr>
+        <p:spPr>
+          <a:xfrm>
+            <a:off x="7498080" y="3858768"/>
+            <a:ext cx="4144975" cy="274320"/>
+          </a:xfrm>
+          <a:prstGeom prst="rect">
+            <a:avLst/>
+          </a:prstGeom>
+          <a:noFill/>
+          <a:ln/>
+        </p:spPr>
+        <p:txBody>
+          <a:bodyPr wrap="square" lIns="0" tIns="0" rIns="0" bIns="0" rtlCol="0" anchor="ctr"/>
+          <a:lstStyle/>
+          <a:p>
+            <a:pPr algn="ctr" indent="0" marL="0">
+              <a:buNone/>
+            </a:pPr>
+            <a:r>
+              <a:rPr lang="en-US" sz="1100" dirty="0">
+                <a:solidFill>
+                  <a:schemeClr val="accent5"/>
+                </a:solidFill>
+              </a:rPr>
+              <a:t>Tiling seam: normal (left) vs --tileable (right)</a:t>
+            </a:r>
+            <a:endParaRPr lang="en-US" sz="1100" dirty="0"/>
+          </a:p>
+        </p:txBody>
+      </p:sp>
+      <p:pic>
+        <p:nvPicPr>
+          <p:cNvPr id="12" name="Alpha comparison" descr="Naive upscale shows a magenta halo; PixelForge stays clean">    </p:cNvPr>
+          <p:cNvPicPr>
+            <a:picLocks noChangeAspect="1"/>
+          </p:cNvPicPr>
+          <p:nvPr/>
+        </p:nvPicPr>
+        <p:blipFill>
+          <a:blip r:embed="rId2"/>
+          <a:stretch>
+            <a:fillRect/>
+          </a:stretch>
+        </p:blipFill>
+        <p:spPr>
+          <a:xfrm>
+            <a:off x="7713193" y="4206240"/>
+            <a:ext cx="3714750" cy="1828800"/>
+          </a:xfrm>
+          <a:prstGeom prst="rect">
+            <a:avLst/>
+          </a:prstGeom>
+        </p:spPr>
+      </p:pic>
+      <p:sp>
+        <p:nvSpPr>
+          <p:cNvPr id="13" name="Text 8"/>
+          <p:cNvSpPr txBox="1"/>
+          <p:nvPr/>
+        </p:nvSpPr>
+        <p:spPr>
+          <a:xfrm>
+            <a:off x="7498080" y="6053328"/>
+            <a:ext cx="4144975" cy="274320"/>
+          </a:xfrm>
+          <a:prstGeom prst="rect">
+            <a:avLst/>
+          </a:prstGeom>
+          <a:noFill/>
+          <a:ln/>
+        </p:spPr>
+        <p:txBody>
+          <a:bodyPr wrap="square" lIns="0" tIns="0" rIns="0" bIns="0" rtlCol="0" anchor="ctr"/>
+          <a:lstStyle/>
+          <a:p>
+            <a:pPr algn="ctr" indent="0" marL="0">
+              <a:buNone/>
+            </a:pPr>
+            <a:r>
+              <a:rPr lang="en-US" sz="1100" dirty="0">
+                <a:solidFill>
+                  <a:schemeClr val="accent5"/>
+                </a:solidFill>
+              </a:rPr>
+              <a:t>Transparent decal: halo (left) vs clean edge (right)</a:t>
+            </a:r>
+            <a:endParaRPr lang="en-US" sz="1100" dirty="0"/>
+          </a:p>
+        </p:txBody>
+      </p:sp>
+      <p:sp>
+        <p:nvSpPr>
+          <p:cNvPr id="25" name="Slide Number Placeholder 0"/>
+          <p:cNvSpPr>
+            <a:spLocks noGrp="1"/>
+          </p:cNvSpPr>
+          <p:nvPr>
+            <p:ph type="sldNum" sz="quarter" idx="4294967295"/>
+          </p:nvPr>
+        </p:nvSpPr>
+        <p:spPr>
+          <a:xfrm>
+            <a:off x="11064240" y="6400800"/>
+            <a:ext cx="576072" cy="274320"/>
+          </a:xfrm>
+          <a:prstGeom prst="rect">
+            <a:avLst/>
+          </a:prstGeom>
+          <a:extLst>
+            <a:ext uri="{C572A759-6A51-4108-AA02-DFA0A04FC94B}">
+              <ma14:wrappingTextBoxFlag xmlns:ma14="http://schemas.microsoft.com/office/mac/drawingml/2011/main" val="0"/>
+            </a:ext>
+          </a:extLst>
+        </p:spPr>
+        <p:txBody>
+          <a:bodyPr/>
+          <a:lstStyle>
+            <a:lvl1pPr>
+              <a:defRPr sz="1100">
+                <a:solidFill>
+                  <a:schemeClr val="accent5"/>
+                </a:solidFill>
+              </a:defRPr>
+            </a:lvl1pPr>
+          </a:lstStyle>
+          <a:p>
+            <a:pPr algn="r"/>
+            <a:fld id="{F7021451-1387-4CA6-816F-3879F97B5CBC}" type="slidenum">
+              <a:rPr b="0" lang="en-US"/>
+              <a:t>4</a:t>
+            </a:fld>
+            <a:endParaRPr lang="en-US"/>
+          </a:p>
+        </p:txBody>
+      </p:sp>
+    </p:spTree>
+  </p:cSld>
+  <p:clrMapOvr>
+    <a:masterClrMapping/>
+  </p:clrMapOvr>
+</p:sld>
+</file>
+
+<file path=ppt/slides/slide5.xml><?xml version="1.0" encoding="utf-8"?>
+<p:sld xmlns:a="http://schemas.openxmlformats.org/drawingml/2006/main" xmlns:r="http://schemas.openxmlformats.org/officeDocument/2006/relationships" xmlns:p="http://schemas.openxmlformats.org/presentationml/2006/main">
+  <p:cSld name="Slide 5">
+    <p:spTree>
+      <p:nvGrpSpPr>
+        <p:cNvPr id="1" name=""/>
+        <p:cNvGrpSpPr/>
+        <p:nvPr/>
+      </p:nvGrpSpPr>
+      <p:grpSpPr>
+        <a:xfrm>
+          <a:off x="0" y="0"/>
+          <a:ext cx="0" cy="0"/>
+          <a:chOff x="0" y="0"/>
+          <a:chExt cx="0" cy="0"/>
+        </a:xfrm>
+      </p:grpSpPr>
+      <p:sp>
+        <p:nvSpPr>
+          <p:cNvPr id="2" name="Text 0"/>
+          <p:cNvSpPr/>
+          <p:nvPr>
+            <p:ph idx="100" type="body" hasCustomPrompt="1"/>
+          </p:nvPr>
+        </p:nvSpPr>
+        <p:spPr>
+          <a:xfrm>
+            <a:off x="548640" y="384048"/>
+            <a:ext cx="11064240" cy="365760"/>
+          </a:xfrm>
+          <a:prstGeom prst="rect">
+            <a:avLst/>
+          </a:prstGeom>
+          <a:noFill/>
+          <a:ln/>
+        </p:spPr>
+        <p:txBody>
+          <a:bodyPr wrap="square" lIns="0" tIns="0" rIns="0" bIns="0" rtlCol="0" anchor="ctr"/>
+          <a:lstStyle/>
+          <a:p>
+            <a:pPr indent="0" marL="0">
+              <a:buNone/>
+            </a:pPr>
+            <a:r>
+              <a:rPr lang="en-US" sz="1300" b="1" spc="200" kern="0" dirty="0">
+                <a:solidFill>
+                  <a:schemeClr val="accent1"/>
+                </a:solidFill>
+                <a:latin typeface="Segoe UI" pitchFamily="34" charset="0"/>
+                <a:ea typeface="Segoe UI" pitchFamily="34" charset="-122"/>
+                <a:cs typeface="Segoe UI" pitchFamily="34" charset="-120"/>
+              </a:rPr>
+              <a:t>RESULTS</a:t>
+            </a:r>
+            <a:endParaRPr lang="en-US" sz="1300" dirty="0"/>
+          </a:p>
+        </p:txBody>
+      </p:sp>
+      <p:sp>
+        <p:nvSpPr>
+          <p:cNvPr id="3" name="Text 0"/>
+          <p:cNvSpPr/>
+          <p:nvPr>
+            <p:ph idx="101" type="title" hasCustomPrompt="1"/>
+          </p:nvPr>
+        </p:nvSpPr>
+        <p:spPr>
+          <a:xfrm>
+            <a:off x="548640" y="749808"/>
+            <a:ext cx="11064240" cy="868680"/>
+          </a:xfrm>
+          <a:prstGeom prst="rect">
+            <a:avLst/>
+          </a:prstGeom>
+          <a:noFill/>
+          <a:ln/>
+        </p:spPr>
+        <p:txBody>
+          <a:bodyPr wrap="square" lIns="0" tIns="0" rIns="0" bIns="0" rtlCol="0" anchor="t"/>
+          <a:lstStyle/>
+          <a:p>
+            <a:pPr algn="l" indent="0" marL="0">
+              <a:buNone/>
+            </a:pPr>
+            <a:r>
+              <a:rPr lang="en-US" sz="3000" b="1" dirty="0">
+                <a:solidFill>
+                  <a:schemeClr val="tx1"/>
+                </a:solidFill>
+                <a:latin typeface="Segoe Script" pitchFamily="34" charset="0"/>
+                <a:ea typeface="Segoe Script" pitchFamily="34" charset="-122"/>
+                <a:cs typeface="Segoe Script" pitchFamily="34" charset="-120"/>
+              </a:rPr>
+              <a:t>Looks like real HD. Small enough for a browser.</a:t>
+            </a:r>
+            <a:endParaRPr lang="en-US" sz="3000" dirty="0"/>
+          </a:p>
+        </p:txBody>
+      </p:sp>
+      <p:sp>
+        <p:nvSpPr>
+          <p:cNvPr id="4" name="Stat 1"/>
+          <p:cNvSpPr/>
+          <p:nvPr/>
+        </p:nvSpPr>
+        <p:spPr>
+          <a:xfrm>
+            <a:off x="548640" y="1691640"/>
+            <a:ext cx="3483864" cy="2103120"/>
+          </a:xfrm>
+          <a:prstGeom prst="roundRect">
+            <a:avLst>
+              <a:gd name="adj" fmla="val 13913"/>
+            </a:avLst>
+          </a:prstGeom>
+          <a:solidFill>
+            <a:schemeClr val="bg2"/>
+          </a:solidFill>
+          <a:ln w="15875">
+            <a:solidFill>
+              <a:schemeClr val="accent6"/>
+            </a:solidFill>
+            <a:prstDash val="solid"/>
+          </a:ln>
+        </p:spPr>
+      </p:sp>
+      <p:sp>
+        <p:nvSpPr>
+          <p:cNvPr id="5" name="Text 3"/>
+          <p:cNvSpPr txBox="1"/>
+          <p:nvPr/>
+        </p:nvSpPr>
+        <p:spPr>
+          <a:xfrm>
+            <a:off x="822960" y="1828800"/>
+            <a:ext cx="2935224" cy="777240"/>
+          </a:xfrm>
+          <a:prstGeom prst="rect">
+            <a:avLst/>
+          </a:prstGeom>
+          <a:noFill/>
+          <a:ln/>
+        </p:spPr>
+        <p:txBody>
+          <a:bodyPr wrap="square" lIns="0" tIns="0" rIns="0" bIns="0" rtlCol="0" anchor="ctr"/>
+          <a:lstStyle/>
+          <a:p>
+            <a:pPr indent="0" marL="0">
+              <a:buNone/>
+            </a:pPr>
+            <a:r>
+              <a:rPr lang="en-US" sz="4000" b="1" dirty="0">
+                <a:solidFill>
+                  <a:schemeClr val="accent1"/>
+                </a:solidFill>
+                <a:latin typeface="Segoe UI" pitchFamily="34" charset="0"/>
+                <a:ea typeface="Segoe UI" pitchFamily="34" charset="-122"/>
+                <a:cs typeface="Segoe UI" pitchFamily="34" charset="-120"/>
+              </a:rPr>
+              <a:t>41%</a:t>
+            </a:r>
+            <a:endParaRPr lang="en-US" sz="4000" dirty="0"/>
+          </a:p>
+        </p:txBody>
+      </p:sp>
+      <p:sp>
+        <p:nvSpPr>
+          <p:cNvPr id="6" name="Text 4"/>
+          <p:cNvSpPr txBox="1"/>
+          <p:nvPr/>
+        </p:nvSpPr>
+        <p:spPr>
+          <a:xfrm>
+            <a:off x="822960" y="2651760"/>
+            <a:ext cx="2935224" cy="1005840"/>
+          </a:xfrm>
+          <a:prstGeom prst="rect">
+            <a:avLst/>
+          </a:prstGeom>
+          <a:noFill/>
+          <a:ln/>
+        </p:spPr>
+        <p:txBody>
+          <a:bodyPr wrap="square" lIns="0" tIns="0" rIns="0" bIns="0" rtlCol="0" anchor="t"/>
+          <a:lstStyle/>
+          <a:p>
+            <a:pPr indent="0" marL="0">
+              <a:buNone/>
+            </a:pPr>
+            <a:r>
+              <a:rPr lang="en-US" sz="1300" b="1" dirty="0">
+                <a:solidFill>
+                  <a:schemeClr val="tx1"/>
+                </a:solidFill>
+              </a:rPr>
+              <a:t>closer to the real HD look than bicubic</a:t>
+            </a:r>
+            <a:endParaRPr lang="en-US" sz="1300" dirty="0"/>
+          </a:p>
+          <a:p>
+            <a:pPr indent="0" marL="0">
+              <a:buNone/>
+            </a:pPr>
+            <a:r>
+              <a:rPr lang="en-US" sz="1300" dirty="0">
+                <a:solidFill>
+                  <a:schemeClr val="accent5"/>
+                </a:solidFill>
+              </a:rPr>
+              <a:t>LPIPS perceptual distance, 60 unseen game textures</a:t>
+            </a:r>
+            <a:endParaRPr lang="en-US" sz="1300" dirty="0"/>
+          </a:p>
+        </p:txBody>
+      </p:sp>
+      <p:sp>
+        <p:nvSpPr>
+          <p:cNvPr id="7" name="Stat 2"/>
+          <p:cNvSpPr/>
+          <p:nvPr/>
+        </p:nvSpPr>
+        <p:spPr>
+          <a:xfrm>
+            <a:off x="4352544" y="1691640"/>
+            <a:ext cx="3483864" cy="2103120"/>
+          </a:xfrm>
+          <a:prstGeom prst="roundRect">
+            <a:avLst>
+              <a:gd name="adj" fmla="val 13913"/>
+            </a:avLst>
+          </a:prstGeom>
+          <a:solidFill>
+            <a:schemeClr val="bg2"/>
+          </a:solidFill>
+          <a:ln w="15875">
+            <a:solidFill>
+              <a:schemeClr val="accent6"/>
+            </a:solidFill>
+            <a:prstDash val="solid"/>
+          </a:ln>
+        </p:spPr>
+      </p:sp>
+      <p:sp>
+        <p:nvSpPr>
+          <p:cNvPr id="8" name="Text 6"/>
+          <p:cNvSpPr txBox="1"/>
+          <p:nvPr/>
+        </p:nvSpPr>
+        <p:spPr>
+          <a:xfrm>
+            <a:off x="4626864" y="1828800"/>
+            <a:ext cx="2935224" cy="777240"/>
+          </a:xfrm>
+          <a:prstGeom prst="rect">
+            <a:avLst/>
+          </a:prstGeom>
+          <a:noFill/>
+          <a:ln/>
+        </p:spPr>
+        <p:txBody>
+          <a:bodyPr wrap="square" lIns="0" tIns="0" rIns="0" bIns="0" rtlCol="0" anchor="ctr"/>
+          <a:lstStyle/>
+          <a:p>
+            <a:pPr indent="0" marL="0">
+              <a:buNone/>
+            </a:pPr>
+            <a:r>
+              <a:rPr lang="en-US" sz="4000" b="1" dirty="0">
+                <a:solidFill>
+                  <a:schemeClr val="accent1"/>
+                </a:solidFill>
+                <a:latin typeface="Segoe UI" pitchFamily="34" charset="0"/>
+                <a:ea typeface="Segoe UI" pitchFamily="34" charset="-122"/>
+                <a:cs typeface="Segoe UI" pitchFamily="34" charset="-120"/>
+              </a:rPr>
+              <a:t>15×</a:t>
+            </a:r>
+            <a:endParaRPr lang="en-US" sz="4000" dirty="0"/>
+          </a:p>
+        </p:txBody>
+      </p:sp>
+      <p:sp>
+        <p:nvSpPr>
+          <p:cNvPr id="9" name="Text 7"/>
+          <p:cNvSpPr txBox="1"/>
+          <p:nvPr/>
+        </p:nvSpPr>
+        <p:spPr>
+          <a:xfrm>
+            <a:off x="4626864" y="2651760"/>
+            <a:ext cx="2935224" cy="1005840"/>
+          </a:xfrm>
+          <a:prstGeom prst="rect">
+            <a:avLst/>
+          </a:prstGeom>
+          <a:noFill/>
+          <a:ln/>
+        </p:spPr>
+        <p:txBody>
+          <a:bodyPr wrap="square" lIns="0" tIns="0" rIns="0" bIns="0" rtlCol="0" anchor="t"/>
+          <a:lstStyle/>
+          <a:p>
+            <a:pPr indent="0" marL="0">
+              <a:buNone/>
+            </a:pPr>
+            <a:r>
+              <a:rPr lang="en-US" sz="1300" b="1" dirty="0">
+                <a:solidFill>
+                  <a:schemeClr val="tx1"/>
+                </a:solidFill>
+              </a:rPr>
+              <a:t>smaller than Real-ESRGAN (1.1M vs 16.7M parameters)</a:t>
+            </a:r>
+            <a:endParaRPr lang="en-US" sz="1300" dirty="0"/>
+          </a:p>
+          <a:p>
+            <a:pPr indent="0" marL="0">
+              <a:buNone/>
+            </a:pPr>
+            <a:r>
+              <a:rPr lang="en-US" sz="1300" dirty="0">
+                <a:solidFill>
+                  <a:schemeClr val="accent5"/>
+                </a:solidFill>
+              </a:rPr>
+              <a:t>LPIPS 0.414 vs 0.454 (lower is better)</a:t>
+            </a:r>
+            <a:endParaRPr lang="en-US" sz="1300" dirty="0"/>
+          </a:p>
+        </p:txBody>
+      </p:sp>
+      <p:sp>
+        <p:nvSpPr>
+          <p:cNvPr id="10" name="Stat 3"/>
+          <p:cNvSpPr/>
+          <p:nvPr/>
+        </p:nvSpPr>
+        <p:spPr>
+          <a:xfrm>
+            <a:off x="8156448" y="1691640"/>
+            <a:ext cx="3483864" cy="2103120"/>
+          </a:xfrm>
+          <a:prstGeom prst="roundRect">
+            <a:avLst>
+              <a:gd name="adj" fmla="val 13913"/>
+            </a:avLst>
+          </a:prstGeom>
+          <a:solidFill>
+            <a:schemeClr val="bg2"/>
+          </a:solidFill>
+          <a:ln w="15875">
+            <a:solidFill>
+              <a:schemeClr val="accent6"/>
+            </a:solidFill>
+            <a:prstDash val="solid"/>
+          </a:ln>
+        </p:spPr>
+      </p:sp>
+      <p:sp>
+        <p:nvSpPr>
+          <p:cNvPr id="11" name="Text 9"/>
+          <p:cNvSpPr txBox="1"/>
+          <p:nvPr/>
+        </p:nvSpPr>
+        <p:spPr>
+          <a:xfrm>
+            <a:off x="8430768" y="1828800"/>
+            <a:ext cx="2935224" cy="777240"/>
+          </a:xfrm>
+          <a:prstGeom prst="rect">
+            <a:avLst/>
+          </a:prstGeom>
+          <a:noFill/>
+          <a:ln/>
+        </p:spPr>
+        <p:txBody>
+          <a:bodyPr wrap="square" lIns="0" tIns="0" rIns="0" bIns="0" rtlCol="0" anchor="ctr"/>
+          <a:lstStyle/>
+          <a:p>
+            <a:pPr indent="0" marL="0">
+              <a:buNone/>
+            </a:pPr>
+            <a:r>
+              <a:rPr lang="en-US" sz="4000" b="1" dirty="0">
+                <a:solidFill>
+                  <a:schemeClr val="accent1"/>
+                </a:solidFill>
+                <a:latin typeface="Segoe UI" pitchFamily="34" charset="0"/>
+                <a:ea typeface="Segoe UI" pitchFamily="34" charset="-122"/>
+                <a:cs typeface="Segoe UI" pitchFamily="34" charset="-120"/>
+              </a:rPr>
+              <a:t>2.3 s</a:t>
+            </a:r>
+            <a:endParaRPr lang="en-US" sz="4000" dirty="0"/>
+          </a:p>
+        </p:txBody>
+      </p:sp>
+      <p:sp>
+        <p:nvSpPr>
+          <p:cNvPr id="12" name="Text 10"/>
+          <p:cNvSpPr txBox="1"/>
+          <p:nvPr/>
+        </p:nvSpPr>
+        <p:spPr>
+          <a:xfrm>
+            <a:off x="8430768" y="2651760"/>
+            <a:ext cx="2935224" cy="1005840"/>
+          </a:xfrm>
+          <a:prstGeom prst="rect">
+            <a:avLst/>
+          </a:prstGeom>
+          <a:noFill/>
+          <a:ln/>
+        </p:spPr>
+        <p:txBody>
+          <a:bodyPr wrap="square" lIns="0" tIns="0" rIns="0" bIns="0" rtlCol="0" anchor="t"/>
+          <a:lstStyle/>
+          <a:p>
+            <a:pPr indent="0" marL="0">
+              <a:buNone/>
+            </a:pPr>
+            <a:r>
+              <a:rPr lang="en-US" sz="1300" b="1" dirty="0">
+                <a:solidFill>
+                  <a:schemeClr val="tx1"/>
+                </a:solidFill>
+              </a:rPr>
+              <a:t>to upscale a texture 4× in a laptop browser</a:t>
+            </a:r>
+            <a:endParaRPr lang="en-US" sz="1300" dirty="0"/>
+          </a:p>
+          <a:p>
+            <a:pPr indent="0" marL="0">
+              <a:buNone/>
+            </a:pPr>
+            <a:r>
+              <a:rPr lang="en-US" sz="1300" dirty="0">
+                <a:solidFill>
+                  <a:schemeClr val="accent5"/>
+                </a:solidFill>
+              </a:rPr>
+              <a:t>128×128 → 512×512, no GPU, no upload</a:t>
+            </a:r>
+            <a:endParaRPr lang="en-US" sz="1300" dirty="0"/>
+          </a:p>
+        </p:txBody>
+      </p:sp>
+      <p:sp>
+        <p:nvSpPr>
+          <p:cNvPr id="13" name="Shape 11"/>
+          <p:cNvSpPr/>
+          <p:nvPr/>
+        </p:nvSpPr>
+        <p:spPr>
+          <a:xfrm>
+            <a:off x="548640" y="3977640"/>
+            <a:ext cx="11091672" cy="2286000"/>
+          </a:xfrm>
+          <a:prstGeom prst="roundRect">
+            <a:avLst>
+              <a:gd name="adj" fmla="val 12800"/>
+            </a:avLst>
+          </a:prstGeom>
+          <a:solidFill>
+            <a:srgbClr val="FFFFFF"/>
+          </a:solidFill>
+          <a:ln w="22225">
+            <a:solidFill>
+              <a:schemeClr val="accent2"/>
+            </a:solidFill>
+            <a:prstDash val="solid"/>
+          </a:ln>
+        </p:spPr>
+      </p:sp>
+      <p:pic>
+        <p:nvPicPr>
+          <p:cNvPr id="14" name="Zoom comparison" descr="Zoomed crops: input, bicubic, Real-ESRGAN, PixelForge, true HD">    </p:cNvPr>
+          <p:cNvPicPr>
+            <a:picLocks noChangeAspect="1"/>
+          </p:cNvPicPr>
+          <p:nvPr/>
+        </p:nvPicPr>
+        <p:blipFill>
+          <a:blip r:embed="rId1"/>
+          <a:stretch>
+            <a:fillRect/>
+          </a:stretch>
+        </p:blipFill>
+        <p:spPr>
+          <a:xfrm>
+            <a:off x="699516" y="4041648"/>
+            <a:ext cx="10789920" cy="2157984"/>
+          </a:xfrm>
+          <a:prstGeom prst="rect">
+            <a:avLst/>
+          </a:prstGeom>
+        </p:spPr>
+      </p:pic>
+      <p:sp>
+        <p:nvSpPr>
+          <p:cNvPr id="25" name="Slide Number Placeholder 0"/>
+          <p:cNvSpPr>
+            <a:spLocks noGrp="1"/>
+          </p:cNvSpPr>
+          <p:nvPr>
+            <p:ph type="sldNum" sz="quarter" idx="4294967295"/>
+          </p:nvPr>
+        </p:nvSpPr>
+        <p:spPr>
+          <a:xfrm>
+            <a:off x="11064240" y="6400800"/>
+            <a:ext cx="576072" cy="274320"/>
+          </a:xfrm>
+          <a:prstGeom prst="rect">
+            <a:avLst/>
+          </a:prstGeom>
+          <a:extLst>
+            <a:ext uri="{C572A759-6A51-4108-AA02-DFA0A04FC94B}">
+              <ma14:wrappingTextBoxFlag xmlns:ma14="http://schemas.microsoft.com/office/mac/drawingml/2011/main" val="0"/>
+            </a:ext>
+          </a:extLst>
+        </p:spPr>
+        <p:txBody>
+          <a:bodyPr/>
+          <a:lstStyle>
+            <a:lvl1pPr>
+              <a:defRPr sz="1100">
+                <a:solidFill>
+                  <a:schemeClr val="accent5"/>
+                </a:solidFill>
+              </a:defRPr>
+            </a:lvl1pPr>
+          </a:lstStyle>
+          <a:p>
+            <a:pPr algn="r"/>
+            <a:fld id="{F7021451-1387-4CA6-816F-3879F97B5CBC}" type="slidenum">
+              <a:rPr b="0" lang="en-US"/>
+              <a:t>5</a:t>
+            </a:fld>
+            <a:endParaRPr lang="en-US"/>
+          </a:p>
+        </p:txBody>
+      </p:sp>
+    </p:spTree>
+  </p:cSld>
+  <p:clrMapOvr>
+    <a:masterClrMapping/>
+  </p:clrMapOvr>
+</p:sld>
+</file>
+
+<file path=ppt/slides/slide6.xml><?xml version="1.0" encoding="utf-8"?>
+<p:sld xmlns:a="http://schemas.openxmlformats.org/drawingml/2006/main" xmlns:r="http://schemas.openxmlformats.org/officeDocument/2006/relationships" xmlns:p="http://schemas.openxmlformats.org/presentationml/2006/main">
+  <p:cSld name="Slide 6">
+    <p:spTree>
+      <p:nvGrpSpPr>
+        <p:cNvPr id="1" name=""/>
+        <p:cNvGrpSpPr/>
+        <p:nvPr/>
+      </p:nvGrpSpPr>
+      <p:grpSpPr>
+        <a:xfrm>
+          <a:off x="0" y="0"/>
+          <a:ext cx="0" cy="0"/>
+          <a:chOff x="0" y="0"/>
+          <a:chExt cx="0" cy="0"/>
+        </a:xfrm>
+      </p:grpSpPr>
+      <p:sp>
+        <p:nvSpPr>
+          <p:cNvPr id="2" name="Text 0"/>
+          <p:cNvSpPr/>
+          <p:nvPr>
+            <p:ph idx="100" type="body" hasCustomPrompt="1"/>
+          </p:nvPr>
+        </p:nvSpPr>
+        <p:spPr>
+          <a:xfrm>
+            <a:off x="548640" y="384048"/>
+            <a:ext cx="11064240" cy="365760"/>
+          </a:xfrm>
+          <a:prstGeom prst="rect">
+            <a:avLst/>
+          </a:prstGeom>
+          <a:noFill/>
+          <a:ln/>
+        </p:spPr>
+        <p:txBody>
+          <a:bodyPr wrap="square" lIns="0" tIns="0" rIns="0" bIns="0" rtlCol="0" anchor="ctr"/>
+          <a:lstStyle/>
+          <a:p>
+            <a:pPr indent="0" marL="0">
+              <a:buNone/>
+            </a:pPr>
+            <a:r>
+              <a:rPr lang="en-US" sz="1300" b="1" spc="200" kern="0" dirty="0">
+                <a:solidFill>
+                  <a:schemeClr val="accent1"/>
+                </a:solidFill>
+                <a:latin typeface="Segoe UI" pitchFamily="34" charset="0"/>
+                <a:ea typeface="Segoe UI" pitchFamily="34" charset="-122"/>
+                <a:cs typeface="Segoe UI" pitchFamily="34" charset="-120"/>
+              </a:rPr>
+              <a:t>HOW IT WORKS</a:t>
+            </a:r>
+            <a:endParaRPr lang="en-US" sz="1300" dirty="0"/>
+          </a:p>
+        </p:txBody>
+      </p:sp>
+      <p:sp>
+        <p:nvSpPr>
+          <p:cNvPr id="3" name="Text 0"/>
+          <p:cNvSpPr/>
+          <p:nvPr>
+            <p:ph idx="101" type="title" hasCustomPrompt="1"/>
+          </p:nvPr>
+        </p:nvSpPr>
+        <p:spPr>
+          <a:xfrm>
+            <a:off x="548640" y="749808"/>
+            <a:ext cx="11064240" cy="868680"/>
+          </a:xfrm>
+          <a:prstGeom prst="rect">
+            <a:avLst/>
+          </a:prstGeom>
+          <a:noFill/>
+          <a:ln/>
+        </p:spPr>
+        <p:txBody>
+          <a:bodyPr wrap="square" lIns="0" tIns="0" rIns="0" bIns="0" rtlCol="0" anchor="t"/>
+          <a:lstStyle/>
+          <a:p>
+            <a:pPr algn="l" indent="0" marL="0">
+              <a:buNone/>
+            </a:pPr>
+            <a:r>
+              <a:rPr lang="en-US" sz="3000" b="1" dirty="0">
+                <a:solidFill>
+                  <a:schemeClr val="tx1"/>
+                </a:solidFill>
+                <a:latin typeface="Segoe Script" pitchFamily="34" charset="0"/>
+                <a:ea typeface="Segoe Script" pitchFamily="34" charset="-122"/>
+                <a:cs typeface="Segoe Script" pitchFamily="34" charset="-120"/>
+              </a:rPr>
+              <a:t>Trained to undo old-texture damage.</a:t>
+            </a:r>
+            <a:endParaRPr lang="en-US" sz="3000" dirty="0"/>
+          </a:p>
+        </p:txBody>
+      </p:sp>
+      <p:sp>
+        <p:nvSpPr>
+          <p:cNvPr id="4" name="Step 1"/>
+          <p:cNvSpPr/>
+          <p:nvPr/>
+        </p:nvSpPr>
+        <p:spPr>
+          <a:xfrm>
+            <a:off x="548640" y="2057400"/>
+            <a:ext cx="3361944" cy="2651760"/>
+          </a:xfrm>
+          <a:prstGeom prst="roundRect">
+            <a:avLst>
+              <a:gd name="adj" fmla="val 11034"/>
+            </a:avLst>
+          </a:prstGeom>
+          <a:solidFill>
+            <a:schemeClr val="bg2"/>
+          </a:solidFill>
+          <a:ln w="15875">
+            <a:solidFill>
+              <a:schemeClr val="accent6"/>
+            </a:solidFill>
+            <a:prstDash val="solid"/>
+          </a:ln>
+        </p:spPr>
+      </p:sp>
+      <p:sp>
+        <p:nvSpPr>
+          <p:cNvPr id="5" name="Shape 3"/>
+          <p:cNvSpPr/>
+          <p:nvPr/>
+        </p:nvSpPr>
+        <p:spPr>
+          <a:xfrm>
+            <a:off x="822960" y="2331720"/>
+            <a:ext cx="457200" cy="457200"/>
+          </a:xfrm>
+          <a:prstGeom prst="ellipse">
+            <a:avLst/>
+          </a:prstGeom>
+          <a:solidFill>
+            <a:schemeClr val="accent4"/>
+          </a:solidFill>
+          <a:ln w="25400">
+            <a:solidFill>
+              <a:schemeClr val="accent2"/>
+            </a:solidFill>
+            <a:prstDash val="solid"/>
+          </a:ln>
+        </p:spPr>
+      </p:sp>
+      <p:sp>
+        <p:nvSpPr>
+          <p:cNvPr id="6" name="Text 4"/>
+          <p:cNvSpPr txBox="1"/>
+          <p:nvPr/>
+        </p:nvSpPr>
+        <p:spPr>
+          <a:xfrm>
+            <a:off x="822960" y="2331720"/>
+            <a:ext cx="457200" cy="457200"/>
+          </a:xfrm>
+          <a:prstGeom prst="rect">
+            <a:avLst/>
+          </a:prstGeom>
+          <a:noFill/>
+          <a:ln/>
+        </p:spPr>
+        <p:txBody>
+          <a:bodyPr wrap="square" lIns="0" tIns="0" rIns="0" bIns="0" rtlCol="0" anchor="ctr"/>
+          <a:lstStyle/>
+          <a:p>
+            <a:pPr algn="ctr" indent="0" marL="0">
+              <a:buNone/>
+            </a:pPr>
+            <a:r>
+              <a:rPr lang="en-US" sz="1500" b="1" dirty="0">
+                <a:solidFill>
+                  <a:schemeClr val="bg1"/>
+                </a:solidFill>
+              </a:rPr>
+              <a:t>1</a:t>
+            </a:r>
+            <a:endParaRPr lang="en-US" sz="1500" dirty="0"/>
+          </a:p>
+        </p:txBody>
+      </p:sp>
+      <p:sp>
+        <p:nvSpPr>
+          <p:cNvPr id="7" name="Text 5"/>
+          <p:cNvSpPr txBox="1"/>
+          <p:nvPr/>
+        </p:nvSpPr>
+        <p:spPr>
+          <a:xfrm>
+            <a:off x="822960" y="2926080"/>
+            <a:ext cx="2813304" cy="777240"/>
+          </a:xfrm>
+          <a:prstGeom prst="rect">
+            <a:avLst/>
+          </a:prstGeom>
+          <a:noFill/>
+          <a:ln/>
+        </p:spPr>
+        <p:txBody>
+          <a:bodyPr wrap="square" lIns="0" tIns="0" rIns="0" bIns="0" rtlCol="0" anchor="t"/>
+          <a:lstStyle/>
+          <a:p>
+            <a:pPr indent="0" marL="0">
+              <a:buNone/>
+            </a:pPr>
+            <a:r>
+              <a:rPr lang="en-US" sz="1800" b="1" dirty="0">
+                <a:solidFill>
+                  <a:schemeClr val="tx1"/>
+                </a:solidFill>
+                <a:latin typeface="Segoe Script" pitchFamily="34" charset="0"/>
+                <a:ea typeface="Segoe Script" pitchFamily="34" charset="-122"/>
+                <a:cs typeface="Segoe Script" pitchFamily="34" charset="-120"/>
+              </a:rPr>
+              <a:t>Collect game textures</a:t>
+            </a:r>
+            <a:endParaRPr lang="en-US" sz="1800" dirty="0"/>
+          </a:p>
+        </p:txBody>
+      </p:sp>
+      <p:sp>
+        <p:nvSpPr>
+          <p:cNvPr id="8" name="Text 6"/>
+          <p:cNvSpPr txBox="1"/>
+          <p:nvPr/>
+        </p:nvSpPr>
+        <p:spPr>
+          <a:xfrm>
+            <a:off x="822960" y="3749040"/>
+            <a:ext cx="2813304" cy="914400"/>
+          </a:xfrm>
+          <a:prstGeom prst="rect">
+            <a:avLst/>
+          </a:prstGeom>
+          <a:noFill/>
+          <a:ln/>
+        </p:spPr>
+        <p:txBody>
+          <a:bodyPr wrap="square" lIns="0" tIns="0" rIns="0" bIns="0" rtlCol="0" anchor="t"/>
+          <a:lstStyle/>
+          <a:p>
+            <a:pPr indent="0" marL="0">
+              <a:buNone/>
+            </a:pPr>
+            <a:r>
+              <a:rPr lang="en-US" sz="1400" dirty="0">
+                <a:solidFill>
+                  <a:schemeClr val="tx2"/>
+                </a:solidFill>
+              </a:rPr>
+              <a:t>738 free (CC0) textures: bricks, wood, metal, ground, fabric, stone.</a:t>
+            </a:r>
+            <a:endParaRPr lang="en-US" sz="1400" dirty="0"/>
+          </a:p>
+        </p:txBody>
+      </p:sp>
+      <p:sp>
+        <p:nvSpPr>
+          <p:cNvPr id="9" name="Shape 7"/>
+          <p:cNvSpPr/>
+          <p:nvPr/>
+        </p:nvSpPr>
+        <p:spPr>
+          <a:xfrm>
+            <a:off x="4020312" y="3246120"/>
+            <a:ext cx="283464" cy="274320"/>
+          </a:xfrm>
+          <a:prstGeom prst="rightArrow">
+            <a:avLst/>
+          </a:prstGeom>
+          <a:solidFill>
+            <a:schemeClr val="accent1"/>
+          </a:solidFill>
+          <a:ln/>
+        </p:spPr>
+      </p:sp>
+      <p:sp>
+        <p:nvSpPr>
+          <p:cNvPr id="10" name="Step 2"/>
+          <p:cNvSpPr/>
+          <p:nvPr/>
+        </p:nvSpPr>
+        <p:spPr>
+          <a:xfrm>
+            <a:off x="4413504" y="2057400"/>
+            <a:ext cx="3361944" cy="2651760"/>
+          </a:xfrm>
+          <a:prstGeom prst="roundRect">
+            <a:avLst>
+              <a:gd name="adj" fmla="val 11034"/>
+            </a:avLst>
+          </a:prstGeom>
+          <a:solidFill>
+            <a:schemeClr val="bg2"/>
+          </a:solidFill>
+          <a:ln w="15875">
+            <a:solidFill>
+              <a:schemeClr val="accent6"/>
+            </a:solidFill>
+            <a:prstDash val="solid"/>
+          </a:ln>
+        </p:spPr>
+      </p:sp>
+      <p:sp>
+        <p:nvSpPr>
+          <p:cNvPr id="11" name="Shape 9"/>
+          <p:cNvSpPr/>
+          <p:nvPr/>
+        </p:nvSpPr>
+        <p:spPr>
+          <a:xfrm>
+            <a:off x="4687824" y="2331720"/>
+            <a:ext cx="457200" cy="457200"/>
+          </a:xfrm>
+          <a:prstGeom prst="ellipse">
+            <a:avLst/>
+          </a:prstGeom>
+          <a:solidFill>
+            <a:schemeClr val="accent4"/>
+          </a:solidFill>
+          <a:ln w="25400">
+            <a:solidFill>
+              <a:schemeClr val="accent2"/>
+            </a:solidFill>
+            <a:prstDash val="solid"/>
+          </a:ln>
+        </p:spPr>
+      </p:sp>
+      <p:sp>
+        <p:nvSpPr>
+          <p:cNvPr id="12" name="Text 10"/>
+          <p:cNvSpPr txBox="1"/>
+          <p:nvPr/>
+        </p:nvSpPr>
+        <p:spPr>
+          <a:xfrm>
+            <a:off x="4687824" y="2331720"/>
+            <a:ext cx="457200" cy="457200"/>
+          </a:xfrm>
+          <a:prstGeom prst="rect">
+            <a:avLst/>
+          </a:prstGeom>
+          <a:noFill/>
+          <a:ln/>
+        </p:spPr>
+        <p:txBody>
+          <a:bodyPr wrap="square" lIns="0" tIns="0" rIns="0" bIns="0" rtlCol="0" anchor="ctr"/>
+          <a:lstStyle/>
+          <a:p>
+            <a:pPr algn="ctr" indent="0" marL="0">
+              <a:buNone/>
+            </a:pPr>
+            <a:r>
+              <a:rPr lang="en-US" sz="1500" b="1" dirty="0">
+                <a:solidFill>
+                  <a:schemeClr val="bg1"/>
+                </a:solidFill>
+              </a:rPr>
+              <a:t>2</a:t>
+            </a:r>
+            <a:endParaRPr lang="en-US" sz="1500" dirty="0"/>
+          </a:p>
+        </p:txBody>
+      </p:sp>
+      <p:sp>
+        <p:nvSpPr>
+          <p:cNvPr id="13" name="Text 11"/>
+          <p:cNvSpPr txBox="1"/>
+          <p:nvPr/>
+        </p:nvSpPr>
+        <p:spPr>
+          <a:xfrm>
+            <a:off x="4687824" y="2926080"/>
+            <a:ext cx="2813304" cy="777240"/>
+          </a:xfrm>
+          <a:prstGeom prst="rect">
+            <a:avLst/>
+          </a:prstGeom>
+          <a:noFill/>
+          <a:ln/>
+        </p:spPr>
+        <p:txBody>
+          <a:bodyPr wrap="square" lIns="0" tIns="0" rIns="0" bIns="0" rtlCol="0" anchor="t"/>
+          <a:lstStyle/>
+          <a:p>
+            <a:pPr indent="0" marL="0">
+              <a:buNone/>
+            </a:pPr>
+            <a:r>
+              <a:rPr lang="en-US" sz="1800" b="1" dirty="0">
+                <a:solidFill>
+                  <a:schemeClr val="tx1"/>
+                </a:solidFill>
+                <a:latin typeface="Segoe Script" pitchFamily="34" charset="0"/>
+                <a:ea typeface="Segoe Script" pitchFamily="34" charset="-122"/>
+                <a:cs typeface="Segoe Script" pitchFamily="34" charset="-120"/>
+              </a:rPr>
+              <a:t>Damage them on purpose</a:t>
+            </a:r>
+            <a:endParaRPr lang="en-US" sz="1800" dirty="0"/>
+          </a:p>
+        </p:txBody>
+      </p:sp>
+      <p:sp>
+        <p:nvSpPr>
+          <p:cNvPr id="14" name="Text 12"/>
+          <p:cNvSpPr txBox="1"/>
+          <p:nvPr/>
+        </p:nvSpPr>
+        <p:spPr>
+          <a:xfrm>
+            <a:off x="4687824" y="3749040"/>
+            <a:ext cx="2813304" cy="914400"/>
+          </a:xfrm>
+          <a:prstGeom prst="rect">
+            <a:avLst/>
+          </a:prstGeom>
+          <a:noFill/>
+          <a:ln/>
+        </p:spPr>
+        <p:txBody>
+          <a:bodyPr wrap="square" lIns="0" tIns="0" rIns="0" bIns="0" rtlCol="0" anchor="t"/>
+          <a:lstStyle/>
+          <a:p>
+            <a:pPr indent="0" marL="0">
+              <a:buNone/>
+            </a:pPr>
+            <a:r>
+              <a:rPr lang="en-US" sz="1400" dirty="0">
+                <a:solidFill>
+                  <a:schemeClr val="tx2"/>
+                </a:solidFill>
+              </a:rPr>
+              <a:t>Blur, downscale, noise and JPEG compression, applied at random, the way old assets get degraded.</a:t>
+            </a:r>
+            <a:endParaRPr lang="en-US" sz="1400" dirty="0"/>
+          </a:p>
+        </p:txBody>
+      </p:sp>
+      <p:sp>
+        <p:nvSpPr>
+          <p:cNvPr id="15" name="Shape 13"/>
+          <p:cNvSpPr/>
+          <p:nvPr/>
+        </p:nvSpPr>
+        <p:spPr>
+          <a:xfrm>
+            <a:off x="7885176" y="3246120"/>
+            <a:ext cx="283464" cy="274320"/>
+          </a:xfrm>
+          <a:prstGeom prst="rightArrow">
+            <a:avLst/>
+          </a:prstGeom>
+          <a:solidFill>
+            <a:schemeClr val="accent1"/>
+          </a:solidFill>
+          <a:ln/>
+        </p:spPr>
+      </p:sp>
+      <p:sp>
+        <p:nvSpPr>
+          <p:cNvPr id="16" name="Step 3"/>
+          <p:cNvSpPr/>
+          <p:nvPr/>
+        </p:nvSpPr>
+        <p:spPr>
+          <a:xfrm>
+            <a:off x="8278368" y="2057400"/>
+            <a:ext cx="3361944" cy="2651760"/>
+          </a:xfrm>
+          <a:prstGeom prst="roundRect">
+            <a:avLst>
+              <a:gd name="adj" fmla="val 11034"/>
+            </a:avLst>
+          </a:prstGeom>
+          <a:solidFill>
+            <a:schemeClr val="bg2"/>
+          </a:solidFill>
+          <a:ln w="31750">
+            <a:solidFill>
+              <a:schemeClr val="accent2"/>
+            </a:solidFill>
+            <a:prstDash val="solid"/>
+          </a:ln>
+        </p:spPr>
+      </p:sp>
+      <p:sp>
+        <p:nvSpPr>
+          <p:cNvPr id="17" name="Shape 15"/>
+          <p:cNvSpPr/>
+          <p:nvPr/>
+        </p:nvSpPr>
+        <p:spPr>
+          <a:xfrm>
+            <a:off x="8552688" y="2331720"/>
+            <a:ext cx="457200" cy="457200"/>
+          </a:xfrm>
+          <a:prstGeom prst="ellipse">
+            <a:avLst/>
+          </a:prstGeom>
+          <a:solidFill>
+            <a:schemeClr val="accent4"/>
+          </a:solidFill>
+          <a:ln w="25400">
+            <a:solidFill>
+              <a:schemeClr val="accent2"/>
+            </a:solidFill>
+            <a:prstDash val="solid"/>
+          </a:ln>
+        </p:spPr>
+      </p:sp>
+      <p:sp>
+        <p:nvSpPr>
+          <p:cNvPr id="18" name="Text 16"/>
+          <p:cNvSpPr txBox="1"/>
+          <p:nvPr/>
+        </p:nvSpPr>
+        <p:spPr>
+          <a:xfrm>
+            <a:off x="8552688" y="2331720"/>
+            <a:ext cx="457200" cy="457200"/>
+          </a:xfrm>
+          <a:prstGeom prst="rect">
+            <a:avLst/>
+          </a:prstGeom>
+          <a:noFill/>
+          <a:ln/>
+        </p:spPr>
+        <p:txBody>
+          <a:bodyPr wrap="square" lIns="0" tIns="0" rIns="0" bIns="0" rtlCol="0" anchor="ctr"/>
+          <a:lstStyle/>
+          <a:p>
+            <a:pPr algn="ctr" indent="0" marL="0">
+              <a:buNone/>
+            </a:pPr>
+            <a:r>
+              <a:rPr lang="en-US" sz="1500" b="1" dirty="0">
+                <a:solidFill>
+                  <a:schemeClr val="bg1"/>
+                </a:solidFill>
+              </a:rPr>
+              <a:t>3</a:t>
+            </a:r>
+            <a:endParaRPr lang="en-US" sz="1500" dirty="0"/>
+          </a:p>
+        </p:txBody>
+      </p:sp>
+      <p:sp>
+        <p:nvSpPr>
+          <p:cNvPr id="19" name="Text 17"/>
+          <p:cNvSpPr txBox="1"/>
+          <p:nvPr/>
+        </p:nvSpPr>
+        <p:spPr>
+          <a:xfrm>
+            <a:off x="8552688" y="2926080"/>
+            <a:ext cx="2813304" cy="777240"/>
+          </a:xfrm>
+          <a:prstGeom prst="rect">
+            <a:avLst/>
+          </a:prstGeom>
+          <a:noFill/>
+          <a:ln/>
+        </p:spPr>
+        <p:txBody>
+          <a:bodyPr wrap="square" lIns="0" tIns="0" rIns="0" bIns="0" rtlCol="0" anchor="t"/>
+          <a:lstStyle/>
+          <a:p>
+            <a:pPr indent="0" marL="0">
+              <a:buNone/>
+            </a:pPr>
+            <a:r>
+              <a:rPr lang="en-US" sz="1800" b="1" dirty="0">
+                <a:solidFill>
+                  <a:schemeClr val="tx1"/>
+                </a:solidFill>
+                <a:latin typeface="Segoe Script" pitchFamily="34" charset="0"/>
+                <a:ea typeface="Segoe Script" pitchFamily="34" charset="-122"/>
+                <a:cs typeface="Segoe Script" pitchFamily="34" charset="-120"/>
+              </a:rPr>
+              <a:t>Learn to undo it</a:t>
+            </a:r>
+            <a:endParaRPr lang="en-US" sz="1800" dirty="0"/>
+          </a:p>
+        </p:txBody>
+      </p:sp>
+      <p:sp>
+        <p:nvSpPr>
+          <p:cNvPr id="20" name="Text 18"/>
+          <p:cNvSpPr txBox="1"/>
+          <p:nvPr/>
+        </p:nvSpPr>
+        <p:spPr>
+          <a:xfrm>
+            <a:off x="8552688" y="3749040"/>
+            <a:ext cx="2813304" cy="914400"/>
+          </a:xfrm>
+          <a:prstGeom prst="rect">
+            <a:avLst/>
+          </a:prstGeom>
+          <a:noFill/>
+          <a:ln/>
+        </p:spPr>
+        <p:txBody>
+          <a:bodyPr wrap="square" lIns="0" tIns="0" rIns="0" bIns="0" rtlCol="0" anchor="t"/>
+          <a:lstStyle/>
+          <a:p>
+            <a:pPr indent="0" marL="0">
+              <a:buNone/>
+            </a:pPr>
+            <a:r>
+              <a:rPr lang="en-US" sz="1400" dirty="0">
+                <a:solidFill>
+                  <a:schemeClr val="tx2"/>
+                </a:solidFill>
+              </a:rPr>
+              <a:t>A compact generator learns to rebuild the missing detail at 4×, sharpened with a GAN stage.</a:t>
+            </a:r>
+            <a:endParaRPr lang="en-US" sz="1400" dirty="0"/>
+          </a:p>
+        </p:txBody>
+      </p:sp>
+      <p:sp>
+        <p:nvSpPr>
+          <p:cNvPr id="21" name="Text 19"/>
+          <p:cNvSpPr txBox="1"/>
+          <p:nvPr/>
+        </p:nvSpPr>
+        <p:spPr>
+          <a:xfrm>
+            <a:off x="548640" y="5120640"/>
+            <a:ext cx="11064240" cy="822960"/>
+          </a:xfrm>
+          <a:prstGeom prst="rect">
+            <a:avLst/>
+          </a:prstGeom>
+          <a:noFill/>
+          <a:ln/>
+        </p:spPr>
+        <p:txBody>
+          <a:bodyPr wrap="square" lIns="0" tIns="0" rIns="0" bIns="0" rtlCol="0" anchor="t"/>
+          <a:lstStyle/>
+          <a:p>
+            <a:pPr indent="0" marL="0">
+              <a:buNone/>
+            </a:pPr>
+            <a:r>
+              <a:rPr lang="en-US" sz="1400" b="1" dirty="0">
+                <a:solidFill>
+                  <a:schemeClr val="tx1"/>
+                </a:solidFill>
+              </a:rPr>
+              <a:t>For engineers: </a:t>
+            </a:r>
+            <a:pPr indent="0" marL="0">
+              <a:buNone/>
+            </a:pPr>
+            <a:r>
+              <a:rPr lang="en-US" sz="1400" dirty="0">
+                <a:solidFill>
+                  <a:schemeClr val="tx2"/>
+                </a:solidFill>
+              </a:rPr>
+              <a:t>compact ESRGAN-style RRDB generator (1.1M params) trained from scratch in PyTorch: L1 stage, then VGG-perceptual + U-Net-discriminator GAN stage with EMA (Real-ESRGAN recipe), exported to ONNX. Benchmarks are in the appendix.</a:t>
+            </a:r>
+            <a:endParaRPr lang="en-US" sz="1400" dirty="0"/>
+          </a:p>
+        </p:txBody>
+      </p:sp>
+      <p:sp>
+        <p:nvSpPr>
+          <p:cNvPr id="25" name="Slide Number Placeholder 0"/>
+          <p:cNvSpPr>
+            <a:spLocks noGrp="1"/>
+          </p:cNvSpPr>
+          <p:nvPr>
+            <p:ph type="sldNum" sz="quarter" idx="4294967295"/>
+          </p:nvPr>
+        </p:nvSpPr>
+        <p:spPr>
+          <a:xfrm>
+            <a:off x="11064240" y="6400800"/>
+            <a:ext cx="576072" cy="274320"/>
+          </a:xfrm>
+          <a:prstGeom prst="rect">
+            <a:avLst/>
+          </a:prstGeom>
+          <a:extLst>
+            <a:ext uri="{C572A759-6A51-4108-AA02-DFA0A04FC94B}">
+              <ma14:wrappingTextBoxFlag xmlns:ma14="http://schemas.microsoft.com/office/mac/drawingml/2011/main" val="0"/>
+            </a:ext>
+          </a:extLst>
+        </p:spPr>
+        <p:txBody>
+          <a:bodyPr/>
+          <a:lstStyle>
+            <a:lvl1pPr>
+              <a:defRPr sz="1100">
+                <a:solidFill>
+                  <a:schemeClr val="accent5"/>
+                </a:solidFill>
+              </a:defRPr>
+            </a:lvl1pPr>
+          </a:lstStyle>
+          <a:p>
+            <a:pPr algn="r"/>
+            <a:fld id="{F7021451-1387-4CA6-816F-3879F97B5CBC}" type="slidenum">
+              <a:rPr b="0" lang="en-US"/>
+              <a:t>6</a:t>
+            </a:fld>
+            <a:endParaRPr lang="en-US"/>
+          </a:p>
+        </p:txBody>
+      </p:sp>
+    </p:spTree>
+  </p:cSld>
+  <p:clrMapOvr>
+    <a:masterClrMapping/>
+  </p:clrMapOvr>
+</p:sld>
+</file>
+
+<file path=ppt/slides/slide7.xml><?xml version="1.0" encoding="utf-8"?>
+<p:sld xmlns:a="http://schemas.openxmlformats.org/drawingml/2006/main" xmlns:r="http://schemas.openxmlformats.org/officeDocument/2006/relationships" xmlns:p="http://schemas.openxmlformats.org/presentationml/2006/main">
+  <p:cSld name="Slide 7">
+    <p:spTree>
+      <p:nvGrpSpPr>
+        <p:cNvPr id="1" name=""/>
+        <p:cNvGrpSpPr/>
+        <p:nvPr/>
+      </p:nvGrpSpPr>
+      <p:grpSpPr>
+        <a:xfrm>
+          <a:off x="0" y="0"/>
+          <a:ext cx="0" cy="0"/>
+          <a:chOff x="0" y="0"/>
+          <a:chExt cx="0" cy="0"/>
+        </a:xfrm>
+      </p:grpSpPr>
+      <p:sp>
+        <p:nvSpPr>
+          <p:cNvPr id="2" name="Text 0"/>
+          <p:cNvSpPr/>
+          <p:nvPr>
+            <p:ph idx="100" type="body" hasCustomPrompt="1"/>
+          </p:nvPr>
+        </p:nvSpPr>
+        <p:spPr>
+          <a:xfrm>
+            <a:off x="548640" y="384048"/>
+            <a:ext cx="11064240" cy="365760"/>
+          </a:xfrm>
+          <a:prstGeom prst="rect">
+            <a:avLst/>
+          </a:prstGeom>
+          <a:noFill/>
+          <a:ln/>
+        </p:spPr>
+        <p:txBody>
+          <a:bodyPr wrap="square" lIns="0" tIns="0" rIns="0" bIns="0" rtlCol="0" anchor="ctr"/>
+          <a:lstStyle/>
+          <a:p>
+            <a:pPr indent="0" marL="0">
+              <a:buNone/>
+            </a:pPr>
+            <a:r>
+              <a:rPr lang="en-US" sz="1300" b="1" spc="200" kern="0" dirty="0">
+                <a:solidFill>
+                  <a:schemeClr val="accent1"/>
+                </a:solidFill>
+                <a:latin typeface="Segoe UI" pitchFamily="34" charset="0"/>
+                <a:ea typeface="Segoe UI" pitchFamily="34" charset="-122"/>
+                <a:cs typeface="Segoe UI" pitchFamily="34" charset="-120"/>
+              </a:rPr>
+              <a:t>REAL RESULTS</a:t>
+            </a:r>
+            <a:endParaRPr lang="en-US" sz="1300" dirty="0"/>
+          </a:p>
+        </p:txBody>
+      </p:sp>
+      <p:sp>
+        <p:nvSpPr>
+          <p:cNvPr id="3" name="Text 0"/>
+          <p:cNvSpPr/>
+          <p:nvPr>
+            <p:ph idx="101" type="title" hasCustomPrompt="1"/>
+          </p:nvPr>
+        </p:nvSpPr>
+        <p:spPr>
+          <a:xfrm>
+            <a:off x="548640" y="749808"/>
+            <a:ext cx="11064240" cy="868680"/>
+          </a:xfrm>
+          <a:prstGeom prst="rect">
+            <a:avLst/>
+          </a:prstGeom>
+          <a:noFill/>
+          <a:ln/>
+        </p:spPr>
+        <p:txBody>
+          <a:bodyPr wrap="square" lIns="0" tIns="0" rIns="0" bIns="0" rtlCol="0" anchor="t"/>
+          <a:lstStyle/>
+          <a:p>
+            <a:pPr algn="l" indent="0" marL="0">
+              <a:buNone/>
+            </a:pPr>
+            <a:r>
+              <a:rPr lang="en-US" sz="3000" b="1" dirty="0">
+                <a:solidFill>
+                  <a:schemeClr val="tx1"/>
+                </a:solidFill>
+                <a:latin typeface="Segoe Script" pitchFamily="34" charset="0"/>
+                <a:ea typeface="Segoe Script" pitchFamily="34" charset="-122"/>
+                <a:cs typeface="Segoe Script" pitchFamily="34" charset="-120"/>
+              </a:rPr>
+              <a:t>Real results on textures it never saw.</a:t>
+            </a:r>
+            <a:endParaRPr lang="en-US" sz="3000" dirty="0"/>
+          </a:p>
+        </p:txBody>
+      </p:sp>
+      <p:sp>
+        <p:nvSpPr>
+          <p:cNvPr id="4" name="Text 2"/>
+          <p:cNvSpPr txBox="1"/>
+          <p:nvPr/>
+        </p:nvSpPr>
+        <p:spPr>
+          <a:xfrm>
+            <a:off x="548640" y="1508760"/>
+            <a:ext cx="11064240" cy="365760"/>
+          </a:xfrm>
+          <a:prstGeom prst="rect">
+            <a:avLst/>
+          </a:prstGeom>
+          <a:noFill/>
+          <a:ln/>
+        </p:spPr>
+        <p:txBody>
+          <a:bodyPr wrap="square" lIns="0" tIns="0" rIns="0" bIns="0" rtlCol="0" anchor="ctr"/>
+          <a:lstStyle/>
+          <a:p>
+            <a:pPr indent="0" marL="0">
+              <a:buNone/>
+            </a:pPr>
+            <a:r>
+              <a:rPr lang="en-US" sz="1400" dirty="0">
+                <a:solidFill>
+                  <a:schemeClr val="tx2"/>
+                </a:solidFill>
+              </a:rPr>
+              <a:t>Median-improvement textures, different materials, zoomed. PixelForge clears noise and JPEG blocks; detail the tiny input no longer has can't be fully recovered.</a:t>
+            </a:r>
+            <a:endParaRPr lang="en-US" sz="1400" dirty="0"/>
+          </a:p>
+        </p:txBody>
+      </p:sp>
+      <p:sp>
+        <p:nvSpPr>
+          <p:cNvPr id="5" name="Shape 3"/>
+          <p:cNvSpPr/>
+          <p:nvPr/>
+        </p:nvSpPr>
+        <p:spPr>
+          <a:xfrm>
+            <a:off x="548640" y="2011680"/>
+            <a:ext cx="11091672" cy="4206240"/>
+          </a:xfrm>
+          <a:prstGeom prst="roundRect">
+            <a:avLst>
+              <a:gd name="adj" fmla="val 6957"/>
+            </a:avLst>
+          </a:prstGeom>
+          <a:solidFill>
+            <a:srgbClr val="FFFFFF"/>
+          </a:solidFill>
+          <a:ln w="22225">
+            <a:solidFill>
+              <a:schemeClr val="accent2"/>
+            </a:solidFill>
+            <a:prstDash val="solid"/>
+          </a:ln>
+        </p:spPr>
+      </p:sp>
+      <p:pic>
+        <p:nvPicPr>
+          <p:cNvPr id="6" name="Gallery" descr="Zoomed comparisons for three textures">    </p:cNvPr>
+          <p:cNvPicPr>
+            <a:picLocks noChangeAspect="1"/>
+          </p:cNvPicPr>
+          <p:nvPr/>
+        </p:nvPicPr>
+        <p:blipFill>
+          <a:blip r:embed="rId1"/>
+          <a:stretch>
+            <a:fillRect/>
+          </a:stretch>
+        </p:blipFill>
+        <p:spPr>
+          <a:xfrm>
+            <a:off x="2741676" y="2103120"/>
+            <a:ext cx="6705600" cy="4023360"/>
+          </a:xfrm>
+          <a:prstGeom prst="rect">
+            <a:avLst/>
+          </a:prstGeom>
+        </p:spPr>
+      </p:pic>
+      <p:sp>
+        <p:nvSpPr>
+          <p:cNvPr id="25" name="Slide Number Placeholder 0"/>
+          <p:cNvSpPr>
+            <a:spLocks noGrp="1"/>
+          </p:cNvSpPr>
+          <p:nvPr>
+            <p:ph type="sldNum" sz="quarter" idx="4294967295"/>
+          </p:nvPr>
+        </p:nvSpPr>
+        <p:spPr>
+          <a:xfrm>
+            <a:off x="11064240" y="6400800"/>
+            <a:ext cx="576072" cy="274320"/>
+          </a:xfrm>
+          <a:prstGeom prst="rect">
+            <a:avLst/>
+          </a:prstGeom>
+          <a:extLst>
+            <a:ext uri="{C572A759-6A51-4108-AA02-DFA0A04FC94B}">
+              <ma14:wrappingTextBoxFlag xmlns:ma14="http://schemas.microsoft.com/office/mac/drawingml/2011/main" val="0"/>
+            </a:ext>
+          </a:extLst>
+        </p:spPr>
+        <p:txBody>
+          <a:bodyPr/>
+          <a:lstStyle>
+            <a:lvl1pPr>
+              <a:defRPr sz="1100">
+                <a:solidFill>
+                  <a:schemeClr val="accent5"/>
+                </a:solidFill>
+              </a:defRPr>
+            </a:lvl1pPr>
+          </a:lstStyle>
+          <a:p>
+            <a:pPr algn="r"/>
+            <a:fld id="{F7021451-1387-4CA6-816F-3879F97B5CBC}" type="slidenum">
+              <a:rPr b="0" lang="en-US"/>
+              <a:t>7</a:t>
+            </a:fld>
+            <a:endParaRPr lang="en-US"/>
+          </a:p>
+        </p:txBody>
+      </p:sp>
+    </p:spTree>
+  </p:cSld>
+  <p:clrMapOvr>
+    <a:masterClrMapping/>
+  </p:clrMapOvr>
+</p:sld>
+</file>
+
+<file path=ppt/slides/slide8.xml><?xml version="1.0" encoding="utf-8"?>
+<p:sld xmlns:a="http://schemas.openxmlformats.org/drawingml/2006/main" xmlns:r="http://schemas.openxmlformats.org/officeDocument/2006/relationships" xmlns:p="http://schemas.openxmlformats.org/presentationml/2006/main">
+  <p:cSld name="Slide 8">
+    <p:spTree>
+      <p:nvGrpSpPr>
+        <p:cNvPr id="1" name=""/>
+        <p:cNvGrpSpPr/>
+        <p:nvPr/>
+      </p:nvGrpSpPr>
+      <p:grpSpPr>
+        <a:xfrm>
+          <a:off x="0" y="0"/>
+          <a:ext cx="0" cy="0"/>
+          <a:chOff x="0" y="0"/>
+          <a:chExt cx="0" cy="0"/>
+        </a:xfrm>
+      </p:grpSpPr>
+      <p:sp>
+        <p:nvSpPr>
+          <p:cNvPr id="2" name="Text 0"/>
+          <p:cNvSpPr/>
+          <p:nvPr>
+            <p:ph idx="100" type="body" hasCustomPrompt="1"/>
+          </p:nvPr>
+        </p:nvSpPr>
+        <p:spPr>
+          <a:xfrm>
+            <a:off x="548640" y="384048"/>
+            <a:ext cx="11064240" cy="365760"/>
+          </a:xfrm>
+          <a:prstGeom prst="rect">
+            <a:avLst/>
+          </a:prstGeom>
+          <a:noFill/>
+          <a:ln/>
+        </p:spPr>
+        <p:txBody>
+          <a:bodyPr wrap="square" lIns="0" tIns="0" rIns="0" bIns="0" rtlCol="0" anchor="ctr"/>
+          <a:lstStyle/>
+          <a:p>
+            <a:pPr indent="0" marL="0">
+              <a:buNone/>
+            </a:pPr>
+            <a:r>
+              <a:rPr lang="en-US" sz="1300" b="1" spc="200" kern="0" dirty="0">
+                <a:solidFill>
+                  <a:schemeClr val="accent1"/>
+                </a:solidFill>
+                <a:latin typeface="Segoe UI" pitchFamily="34" charset="0"/>
+                <a:ea typeface="Segoe UI" pitchFamily="34" charset="-122"/>
+                <a:cs typeface="Segoe UI" pitchFamily="34" charset="-120"/>
+              </a:rPr>
+              <a:t>HOW WE'D WORK TOGETHER</a:t>
+            </a:r>
+            <a:endParaRPr lang="en-US" sz="1300" dirty="0"/>
+          </a:p>
+        </p:txBody>
+      </p:sp>
+      <p:sp>
+        <p:nvSpPr>
+          <p:cNvPr id="3" name="Text 0"/>
+          <p:cNvSpPr/>
+          <p:nvPr>
+            <p:ph idx="101" type="title" hasCustomPrompt="1"/>
+          </p:nvPr>
+        </p:nvSpPr>
+        <p:spPr>
+          <a:xfrm>
+            <a:off x="548640" y="749808"/>
+            <a:ext cx="11064240" cy="868680"/>
+          </a:xfrm>
+          <a:prstGeom prst="rect">
+            <a:avLst/>
+          </a:prstGeom>
+          <a:noFill/>
+          <a:ln/>
+        </p:spPr>
+        <p:txBody>
+          <a:bodyPr wrap="square" lIns="0" tIns="0" rIns="0" bIns="0" rtlCol="0" anchor="t"/>
+          <a:lstStyle/>
+          <a:p>
+            <a:pPr algn="l" indent="0" marL="0">
+              <a:buNone/>
+            </a:pPr>
+            <a:r>
+              <a:rPr lang="en-US" sz="3000" b="1" dirty="0">
+                <a:solidFill>
+                  <a:schemeClr val="tx1"/>
+                </a:solidFill>
+                <a:latin typeface="Segoe Script" pitchFamily="34" charset="0"/>
+                <a:ea typeface="Segoe Script" pitchFamily="34" charset="-122"/>
+                <a:cs typeface="Segoe Script" pitchFamily="34" charset="-120"/>
+              </a:rPr>
+              <a:t>Start with a test pack. Scale to the whole library.</a:t>
+            </a:r>
+            <a:endParaRPr lang="en-US" sz="3000" dirty="0"/>
+          </a:p>
+        </p:txBody>
+      </p:sp>
+      <p:sp>
+        <p:nvSpPr>
+          <p:cNvPr id="4" name="Work step 1"/>
+          <p:cNvSpPr/>
+          <p:nvPr/>
+        </p:nvSpPr>
+        <p:spPr>
+          <a:xfrm>
+            <a:off x="548640" y="2011680"/>
+            <a:ext cx="3483864" cy="2514600"/>
+          </a:xfrm>
+          <a:prstGeom prst="roundRect">
+            <a:avLst>
+              <a:gd name="adj" fmla="val 11636"/>
+            </a:avLst>
+          </a:prstGeom>
+          <a:solidFill>
+            <a:schemeClr val="bg2"/>
+          </a:solidFill>
+          <a:ln w="15875">
+            <a:solidFill>
+              <a:schemeClr val="accent6"/>
+            </a:solidFill>
+            <a:prstDash val="solid"/>
+          </a:ln>
+        </p:spPr>
+      </p:sp>
+      <p:sp>
+        <p:nvSpPr>
+          <p:cNvPr id="5" name="Text 3"/>
+          <p:cNvSpPr txBox="1"/>
+          <p:nvPr/>
+        </p:nvSpPr>
+        <p:spPr>
+          <a:xfrm>
+            <a:off x="868680" y="2286000"/>
+            <a:ext cx="1828800" cy="320040"/>
+          </a:xfrm>
+          <a:prstGeom prst="rect">
+            <a:avLst/>
+          </a:prstGeom>
+          <a:noFill/>
+          <a:ln/>
+        </p:spPr>
+        <p:txBody>
+          <a:bodyPr wrap="square" lIns="0" tIns="0" rIns="0" bIns="0" rtlCol="0" anchor="ctr"/>
+          <a:lstStyle/>
+          <a:p>
+            <a:pPr indent="0" marL="0">
+              <a:buNone/>
+            </a:pPr>
+            <a:r>
+              <a:rPr lang="en-US" sz="1300" b="1" spc="200" kern="0" dirty="0">
+                <a:solidFill>
+                  <a:schemeClr val="accent1"/>
+                </a:solidFill>
+              </a:rPr>
+              <a:t>STEP 1</a:t>
+            </a:r>
+            <a:endParaRPr lang="en-US" sz="1300" dirty="0"/>
+          </a:p>
+        </p:txBody>
+      </p:sp>
+      <p:sp>
+        <p:nvSpPr>
+          <p:cNvPr id="6" name="Text 4"/>
+          <p:cNvSpPr txBox="1"/>
+          <p:nvPr/>
+        </p:nvSpPr>
+        <p:spPr>
+          <a:xfrm>
+            <a:off x="868680" y="2651760"/>
+            <a:ext cx="2843784" cy="777240"/>
+          </a:xfrm>
+          <a:prstGeom prst="rect">
+            <a:avLst/>
+          </a:prstGeom>
+          <a:noFill/>
+          <a:ln/>
+        </p:spPr>
+        <p:txBody>
+          <a:bodyPr wrap="square" lIns="0" tIns="0" rIns="0" bIns="0" rtlCol="0" anchor="t"/>
+          <a:lstStyle/>
+          <a:p>
+            <a:pPr indent="0" marL="0">
+              <a:buNone/>
+            </a:pPr>
+            <a:r>
+              <a:rPr lang="en-US" sz="1800" b="1" dirty="0">
+                <a:solidFill>
+                  <a:schemeClr val="tx1"/>
+                </a:solidFill>
+                <a:latin typeface="Segoe Script" pitchFamily="34" charset="0"/>
+                <a:ea typeface="Segoe Script" pitchFamily="34" charset="-122"/>
+                <a:cs typeface="Segoe Script" pitchFamily="34" charset="-120"/>
+              </a:rPr>
+              <a:t>Send 10–20 textures</a:t>
+            </a:r>
+            <a:endParaRPr lang="en-US" sz="1800" dirty="0"/>
+          </a:p>
+        </p:txBody>
+      </p:sp>
+      <p:sp>
+        <p:nvSpPr>
+          <p:cNvPr id="7" name="Text 5"/>
+          <p:cNvSpPr txBox="1"/>
+          <p:nvPr/>
+        </p:nvSpPr>
+        <p:spPr>
+          <a:xfrm>
+            <a:off x="868680" y="3474720"/>
+            <a:ext cx="2843784" cy="960120"/>
+          </a:xfrm>
+          <a:prstGeom prst="rect">
+            <a:avLst/>
+          </a:prstGeom>
+          <a:noFill/>
+          <a:ln/>
+        </p:spPr>
+        <p:txBody>
+          <a:bodyPr wrap="square" lIns="0" tIns="0" rIns="0" bIns="0" rtlCol="0" anchor="t"/>
+          <a:lstStyle/>
+          <a:p>
+            <a:pPr indent="0" marL="0">
+              <a:buNone/>
+            </a:pPr>
+            <a:r>
+              <a:rPr lang="en-US" sz="1400" dirty="0">
+                <a:solidFill>
+                  <a:schemeClr val="tx2"/>
+                </a:solidFill>
+              </a:rPr>
+              <a:t>A representative sample of your game's textures or asset pack.</a:t>
+            </a:r>
+            <a:endParaRPr lang="en-US" sz="1400" dirty="0"/>
+          </a:p>
+        </p:txBody>
+      </p:sp>
+      <p:sp>
+        <p:nvSpPr>
+          <p:cNvPr id="8" name="Work step 2"/>
+          <p:cNvSpPr/>
+          <p:nvPr/>
+        </p:nvSpPr>
+        <p:spPr>
+          <a:xfrm>
+            <a:off x="4352544" y="2011680"/>
+            <a:ext cx="3483864" cy="2514600"/>
+          </a:xfrm>
+          <a:prstGeom prst="roundRect">
+            <a:avLst>
+              <a:gd name="adj" fmla="val 11636"/>
+            </a:avLst>
+          </a:prstGeom>
+          <a:solidFill>
+            <a:schemeClr val="bg2"/>
+          </a:solidFill>
+          <a:ln w="15875">
+            <a:solidFill>
+              <a:schemeClr val="accent6"/>
+            </a:solidFill>
+            <a:prstDash val="solid"/>
+          </a:ln>
+        </p:spPr>
+      </p:sp>
+      <p:sp>
+        <p:nvSpPr>
+          <p:cNvPr id="9" name="Text 7"/>
+          <p:cNvSpPr txBox="1"/>
+          <p:nvPr/>
+        </p:nvSpPr>
+        <p:spPr>
+          <a:xfrm>
+            <a:off x="4672584" y="2286000"/>
+            <a:ext cx="1828800" cy="320040"/>
+          </a:xfrm>
+          <a:prstGeom prst="rect">
+            <a:avLst/>
+          </a:prstGeom>
+          <a:noFill/>
+          <a:ln/>
+        </p:spPr>
+        <p:txBody>
+          <a:bodyPr wrap="square" lIns="0" tIns="0" rIns="0" bIns="0" rtlCol="0" anchor="ctr"/>
+          <a:lstStyle/>
+          <a:p>
+            <a:pPr indent="0" marL="0">
+              <a:buNone/>
+            </a:pPr>
+            <a:r>
+              <a:rPr lang="en-US" sz="1300" b="1" spc="200" kern="0" dirty="0">
+                <a:solidFill>
+                  <a:schemeClr val="accent1"/>
+                </a:solidFill>
+              </a:rPr>
+              <a:t>STEP 2</a:t>
+            </a:r>
+            <a:endParaRPr lang="en-US" sz="1300" dirty="0"/>
+          </a:p>
+        </p:txBody>
+      </p:sp>
+      <p:sp>
+        <p:nvSpPr>
+          <p:cNvPr id="10" name="Text 8"/>
+          <p:cNvSpPr txBox="1"/>
+          <p:nvPr/>
+        </p:nvSpPr>
+        <p:spPr>
+          <a:xfrm>
+            <a:off x="4672584" y="2651760"/>
+            <a:ext cx="2843784" cy="777240"/>
+          </a:xfrm>
+          <a:prstGeom prst="rect">
+            <a:avLst/>
+          </a:prstGeom>
+          <a:noFill/>
+          <a:ln/>
+        </p:spPr>
+        <p:txBody>
+          <a:bodyPr wrap="square" lIns="0" tIns="0" rIns="0" bIns="0" rtlCol="0" anchor="t"/>
+          <a:lstStyle/>
+          <a:p>
+            <a:pPr indent="0" marL="0">
+              <a:buNone/>
+            </a:pPr>
+            <a:r>
+              <a:rPr lang="en-US" sz="1800" b="1" dirty="0">
+                <a:solidFill>
+                  <a:schemeClr val="tx1"/>
+                </a:solidFill>
+                <a:latin typeface="Segoe Script" pitchFamily="34" charset="0"/>
+                <a:ea typeface="Segoe Script" pitchFamily="34" charset="-122"/>
+                <a:cs typeface="Segoe Script" pitchFamily="34" charset="-120"/>
+              </a:rPr>
+              <a:t>Test pack back</a:t>
+            </a:r>
+            <a:endParaRPr lang="en-US" sz="1800" dirty="0"/>
+          </a:p>
+        </p:txBody>
+      </p:sp>
+      <p:sp>
+        <p:nvSpPr>
+          <p:cNvPr id="11" name="Text 9"/>
+          <p:cNvSpPr txBox="1"/>
+          <p:nvPr/>
+        </p:nvSpPr>
+        <p:spPr>
+          <a:xfrm>
+            <a:off x="4672584" y="3474720"/>
+            <a:ext cx="2843784" cy="960120"/>
+          </a:xfrm>
+          <a:prstGeom prst="rect">
+            <a:avLst/>
+          </a:prstGeom>
+          <a:noFill/>
+          <a:ln/>
+        </p:spPr>
+        <p:txBody>
+          <a:bodyPr wrap="square" lIns="0" tIns="0" rIns="0" bIns="0" rtlCol="0" anchor="t"/>
+          <a:lstStyle/>
+          <a:p>
+            <a:pPr indent="0" marL="0">
+              <a:buNone/>
+            </a:pPr>
+            <a:r>
+              <a:rPr lang="en-US" sz="1400" dirty="0">
+                <a:solidFill>
+                  <a:schemeClr val="tx2"/>
+                </a:solidFill>
+              </a:rPr>
+              <a:t>I upscale them, optionally fine-tune on your art style, and send before/after comparisons.</a:t>
+            </a:r>
+            <a:endParaRPr lang="en-US" sz="1400" dirty="0"/>
+          </a:p>
+        </p:txBody>
+      </p:sp>
+      <p:sp>
+        <p:nvSpPr>
+          <p:cNvPr id="12" name="Work step 3"/>
+          <p:cNvSpPr/>
+          <p:nvPr/>
+        </p:nvSpPr>
+        <p:spPr>
+          <a:xfrm>
+            <a:off x="8156448" y="2011680"/>
+            <a:ext cx="3483864" cy="2514600"/>
+          </a:xfrm>
+          <a:prstGeom prst="roundRect">
+            <a:avLst>
+              <a:gd name="adj" fmla="val 11636"/>
+            </a:avLst>
+          </a:prstGeom>
+          <a:solidFill>
+            <a:schemeClr val="bg2"/>
+          </a:solidFill>
+          <a:ln w="15875">
+            <a:solidFill>
+              <a:schemeClr val="accent6"/>
+            </a:solidFill>
+            <a:prstDash val="solid"/>
+          </a:ln>
+        </p:spPr>
+      </p:sp>
+      <p:sp>
+        <p:nvSpPr>
+          <p:cNvPr id="13" name="Text 11"/>
+          <p:cNvSpPr txBox="1"/>
+          <p:nvPr/>
+        </p:nvSpPr>
+        <p:spPr>
+          <a:xfrm>
+            <a:off x="8476488" y="2286000"/>
+            <a:ext cx="1828800" cy="320040"/>
+          </a:xfrm>
+          <a:prstGeom prst="rect">
+            <a:avLst/>
+          </a:prstGeom>
+          <a:noFill/>
+          <a:ln/>
+        </p:spPr>
+        <p:txBody>
+          <a:bodyPr wrap="square" lIns="0" tIns="0" rIns="0" bIns="0" rtlCol="0" anchor="ctr"/>
+          <a:lstStyle/>
+          <a:p>
+            <a:pPr indent="0" marL="0">
+              <a:buNone/>
+            </a:pPr>
+            <a:r>
+              <a:rPr lang="en-US" sz="1300" b="1" spc="200" kern="0" dirty="0">
+                <a:solidFill>
+                  <a:schemeClr val="accent1"/>
+                </a:solidFill>
+              </a:rPr>
+              <a:t>STEP 3</a:t>
+            </a:r>
+            <a:endParaRPr lang="en-US" sz="1300" dirty="0"/>
+          </a:p>
+        </p:txBody>
+      </p:sp>
+      <p:sp>
+        <p:nvSpPr>
+          <p:cNvPr id="14" name="Text 12"/>
+          <p:cNvSpPr txBox="1"/>
+          <p:nvPr/>
+        </p:nvSpPr>
+        <p:spPr>
+          <a:xfrm>
+            <a:off x="8476488" y="2651760"/>
+            <a:ext cx="2843784" cy="777240"/>
+          </a:xfrm>
+          <a:prstGeom prst="rect">
+            <a:avLst/>
+          </a:prstGeom>
+          <a:noFill/>
+          <a:ln/>
+        </p:spPr>
+        <p:txBody>
+          <a:bodyPr wrap="square" lIns="0" tIns="0" rIns="0" bIns="0" rtlCol="0" anchor="t"/>
+          <a:lstStyle/>
+          <a:p>
+            <a:pPr indent="0" marL="0">
+              <a:buNone/>
+            </a:pPr>
+            <a:r>
+              <a:rPr lang="en-US" sz="1800" b="1" dirty="0">
+                <a:solidFill>
+                  <a:schemeClr val="tx1"/>
+                </a:solidFill>
+                <a:latin typeface="Segoe Script" pitchFamily="34" charset="0"/>
+                <a:ea typeface="Segoe Script" pitchFamily="34" charset="-122"/>
+                <a:cs typeface="Segoe Script" pitchFamily="34" charset="-120"/>
+              </a:rPr>
+              <a:t>Batch the library</a:t>
+            </a:r>
+            <a:endParaRPr lang="en-US" sz="1800" dirty="0"/>
+          </a:p>
+        </p:txBody>
+      </p:sp>
+      <p:sp>
+        <p:nvSpPr>
+          <p:cNvPr id="15" name="Text 13"/>
+          <p:cNvSpPr txBox="1"/>
+          <p:nvPr/>
+        </p:nvSpPr>
+        <p:spPr>
+          <a:xfrm>
+            <a:off x="8476488" y="3474720"/>
+            <a:ext cx="2843784" cy="960120"/>
+          </a:xfrm>
+          <a:prstGeom prst="rect">
+            <a:avLst/>
+          </a:prstGeom>
+          <a:noFill/>
+          <a:ln/>
+        </p:spPr>
+        <p:txBody>
+          <a:bodyPr wrap="square" lIns="0" tIns="0" rIns="0" bIns="0" rtlCol="0" anchor="t"/>
+          <a:lstStyle/>
+          <a:p>
+            <a:pPr indent="0" marL="0">
+              <a:buNone/>
+            </a:pPr>
+            <a:r>
+              <a:rPr lang="en-US" sz="1400" dirty="0">
+                <a:solidFill>
+                  <a:schemeClr val="tx2"/>
+                </a:solidFill>
+              </a:rPr>
+              <a:t>Folder in, folder out, file names kept, ready to drop into your mod or engine.</a:t>
+            </a:r>
+            <a:endParaRPr lang="en-US" sz="1400" dirty="0"/>
+          </a:p>
+        </p:txBody>
+      </p:sp>
+      <p:sp>
+        <p:nvSpPr>
+          <p:cNvPr id="16" name="What you get"/>
+          <p:cNvSpPr/>
+          <p:nvPr/>
+        </p:nvSpPr>
+        <p:spPr>
+          <a:xfrm>
+            <a:off x="548640" y="4800600"/>
+            <a:ext cx="11091672" cy="1325880"/>
+          </a:xfrm>
+          <a:prstGeom prst="roundRect">
+            <a:avLst>
+              <a:gd name="adj" fmla="val 22069"/>
+            </a:avLst>
+          </a:prstGeom>
+          <a:solidFill>
+            <a:schemeClr val="bg2"/>
+          </a:solidFill>
+          <a:ln w="15875">
+            <a:solidFill>
+              <a:schemeClr val="accent6"/>
+            </a:solidFill>
+            <a:prstDash val="solid"/>
+          </a:ln>
+        </p:spPr>
+      </p:sp>
+      <p:sp>
+        <p:nvSpPr>
+          <p:cNvPr id="17" name="Text 15"/>
+          <p:cNvSpPr txBox="1"/>
+          <p:nvPr/>
+        </p:nvSpPr>
+        <p:spPr>
+          <a:xfrm>
+            <a:off x="868680" y="4937760"/>
+            <a:ext cx="10424160" cy="1051560"/>
+          </a:xfrm>
+          <a:prstGeom prst="rect">
+            <a:avLst/>
+          </a:prstGeom>
+          <a:noFill/>
+          <a:ln/>
+        </p:spPr>
+        <p:txBody>
+          <a:bodyPr wrap="square" lIns="0" tIns="0" rIns="0" bIns="0" rtlCol="0" anchor="ctr"/>
+          <a:lstStyle/>
+          <a:p>
+            <a:pPr indent="0" marL="0">
+              <a:buNone/>
+            </a:pPr>
+            <a:r>
+              <a:rPr lang="en-US" sz="1600" b="1" dirty="0">
+                <a:solidFill>
+                  <a:schemeClr val="tx1"/>
+                </a:solidFill>
+              </a:rPr>
+              <a:t>What you get:  </a:t>
+            </a:r>
+            <a:pPr indent="0" marL="0">
+              <a:buNone/>
+            </a:pPr>
+            <a:r>
+              <a:rPr lang="en-US" sz="1600" dirty="0">
+                <a:solidFill>
+                  <a:schemeClr val="tx2"/>
+                </a:solidFill>
+              </a:rPr>
+              <a:t>the HD texture set · a batch tool you can rerun on new assets · optional model fine-tuned on your art style · before/after report</a:t>
+            </a:r>
+            <a:endParaRPr lang="en-US" sz="1600" dirty="0"/>
+          </a:p>
+        </p:txBody>
+      </p:sp>
+      <p:sp>
+        <p:nvSpPr>
+          <p:cNvPr id="25" name="Slide Number Placeholder 0"/>
+          <p:cNvSpPr>
+            <a:spLocks noGrp="1"/>
+          </p:cNvSpPr>
+          <p:nvPr>
+            <p:ph type="sldNum" sz="quarter" idx="4294967295"/>
+          </p:nvPr>
+        </p:nvSpPr>
+        <p:spPr>
+          <a:xfrm>
+            <a:off x="11064240" y="6400800"/>
+            <a:ext cx="576072" cy="274320"/>
+          </a:xfrm>
+          <a:prstGeom prst="rect">
+            <a:avLst/>
+          </a:prstGeom>
+          <a:extLst>
+            <a:ext uri="{C572A759-6A51-4108-AA02-DFA0A04FC94B}">
+              <ma14:wrappingTextBoxFlag xmlns:ma14="http://schemas.microsoft.com/office/mac/drawingml/2011/main" val="0"/>
+            </a:ext>
+          </a:extLst>
+        </p:spPr>
+        <p:txBody>
+          <a:bodyPr/>
+          <a:lstStyle>
+            <a:lvl1pPr>
+              <a:defRPr sz="1100">
+                <a:solidFill>
+                  <a:schemeClr val="accent5"/>
+                </a:solidFill>
+              </a:defRPr>
+            </a:lvl1pPr>
+          </a:lstStyle>
+          <a:p>
+            <a:pPr algn="r"/>
+            <a:fld id="{F7021451-1387-4CA6-816F-3879F97B5CBC}" type="slidenum">
+              <a:rPr b="0" lang="en-US"/>
+              <a:t>8</a:t>
+            </a:fld>
+            <a:endParaRPr lang="en-US"/>
+          </a:p>
+        </p:txBody>
+      </p:sp>
+    </p:spTree>
+  </p:cSld>
+  <p:clrMapOvr>
+    <a:masterClrMapping/>
+  </p:clrMapOvr>
+</p:sld>
+</file>
+
+<file path=ppt/slides/slide9.xml><?xml version="1.0" encoding="utf-8"?>
+<p:sld xmlns:a="http://schemas.openxmlformats.org/drawingml/2006/main" xmlns:r="http://schemas.openxmlformats.org/officeDocument/2006/relationships" xmlns:p="http://schemas.openxmlformats.org/presentationml/2006/main">
+  <p:cSld name="Slide 9">
+    <p:spTree>
+      <p:nvGrpSpPr>
+        <p:cNvPr id="1" name=""/>
+        <p:cNvGrpSpPr/>
+        <p:nvPr/>
+      </p:nvGrpSpPr>
+      <p:grpSpPr>
+        <a:xfrm>
+          <a:off x="0" y="0"/>
+          <a:ext cx="0" cy="0"/>
+          <a:chOff x="0" y="0"/>
+          <a:chExt cx="0" cy="0"/>
+        </a:xfrm>
+      </p:grpSpPr>
+      <p:sp>
+        <p:nvSpPr>
+          <p:cNvPr id="2" name="Text 0"/>
+          <p:cNvSpPr txBox="1"/>
+          <p:nvPr/>
+        </p:nvSpPr>
+        <p:spPr>
+          <a:xfrm>
+            <a:off x="548640" y="822960"/>
+            <a:ext cx="5486400" cy="365760"/>
+          </a:xfrm>
+          <a:prstGeom prst="rect">
+            <a:avLst/>
+          </a:prstGeom>
+          <a:noFill/>
+          <a:ln/>
+        </p:spPr>
+        <p:txBody>
+          <a:bodyPr wrap="square" lIns="0" tIns="0" rIns="0" bIns="0" rtlCol="0" anchor="ctr"/>
+          <a:lstStyle/>
+          <a:p>
+            <a:pPr indent="0" marL="0">
+              <a:buNone/>
+            </a:pPr>
+            <a:r>
+              <a:rPr lang="en-US" sz="1400" b="1" spc="200" kern="0" dirty="0">
+                <a:solidFill>
+                  <a:schemeClr val="accent1"/>
+                </a:solidFill>
+                <a:latin typeface="Segoe UI" pitchFamily="34" charset="0"/>
+                <a:ea typeface="Segoe UI" pitchFamily="34" charset="-122"/>
+                <a:cs typeface="Segoe UI" pitchFamily="34" charset="-120"/>
+              </a:rPr>
+              <a:t>NEXT STEP</a:t>
+            </a:r>
+            <a:endParaRPr lang="en-US" sz="1400" dirty="0"/>
+          </a:p>
+        </p:txBody>
+      </p:sp>
+      <p:sp>
+        <p:nvSpPr>
+          <p:cNvPr id="3" name="Text 1"/>
+          <p:cNvSpPr txBox="1"/>
+          <p:nvPr/>
+        </p:nvSpPr>
+        <p:spPr>
+          <a:xfrm>
+            <a:off x="548640" y="1234440"/>
+            <a:ext cx="11064240" cy="1737360"/>
+          </a:xfrm>
+          <a:prstGeom prst="rect">
+            <a:avLst/>
+          </a:prstGeom>
+          <a:noFill/>
+          <a:ln/>
+        </p:spPr>
+        <p:txBody>
+          <a:bodyPr wrap="square" lIns="0" tIns="0" rIns="0" bIns="0" rtlCol="0" anchor="t"/>
+          <a:lstStyle/>
+          <a:p>
+            <a:pPr indent="0" marL="0">
+              <a:buNone/>
+            </a:pPr>
+            <a:r>
+              <a:rPr lang="en-US" sz="4200" b="1" dirty="0">
+                <a:solidFill>
+                  <a:schemeClr val="tx1"/>
+                </a:solidFill>
+                <a:latin typeface="Segoe Script" pitchFamily="34" charset="0"/>
+                <a:ea typeface="Segoe Script" pitchFamily="34" charset="-122"/>
+                <a:cs typeface="Segoe Script" pitchFamily="34" charset="-120"/>
+              </a:rPr>
+              <a:t>Use the engine on your mod today,</a:t>
+            </a:r>
+            <a:endParaRPr lang="en-US" sz="4200" dirty="0"/>
+          </a:p>
+          <a:p>
+            <a:pPr indent="0" marL="0">
+              <a:buNone/>
+            </a:pPr>
+            <a:r>
+              <a:rPr lang="en-US" sz="4200" b="1" dirty="0">
+                <a:solidFill>
+                  <a:schemeClr val="accent1"/>
+                </a:solidFill>
+                <a:latin typeface="Segoe Script" pitchFamily="34" charset="0"/>
+                <a:ea typeface="Segoe Script" pitchFamily="34" charset="-122"/>
+                <a:cs typeface="Segoe Script" pitchFamily="34" charset="-120"/>
+              </a:rPr>
+              <a:t>or send me 10 textures to try.</a:t>
+            </a:r>
+            <a:endParaRPr lang="en-US" sz="4200" dirty="0"/>
+          </a:p>
+        </p:txBody>
+      </p:sp>
+      <p:sp>
+        <p:nvSpPr>
+          <p:cNvPr id="4" name="Shape 2"/>
+          <p:cNvSpPr/>
+          <p:nvPr/>
+        </p:nvSpPr>
+        <p:spPr>
+          <a:xfrm>
+            <a:off x="548640" y="3246120"/>
+            <a:ext cx="2651760" cy="2651760"/>
+          </a:xfrm>
+          <a:prstGeom prst="roundRect">
+            <a:avLst>
+              <a:gd name="adj" fmla="val 11034"/>
+            </a:avLst>
+          </a:prstGeom>
+          <a:solidFill>
+            <a:srgbClr val="FFFFFF"/>
+          </a:solidFill>
+          <a:ln w="22225">
+            <a:solidFill>
+              <a:schemeClr val="accent2"/>
+            </a:solidFill>
+            <a:prstDash val="solid"/>
+          </a:ln>
+        </p:spPr>
+      </p:sp>
+      <p:pic>
+        <p:nvPicPr>
+          <p:cNvPr id="5" name="QR code" descr="QR code to the live demo">    </p:cNvPr>
+          <p:cNvPicPr>
+            <a:picLocks noChangeAspect="1"/>
+          </p:cNvPicPr>
+          <p:nvPr/>
+        </p:nvPicPr>
+        <p:blipFill>
+          <a:blip r:embed="rId1"/>
+          <a:stretch>
+            <a:fillRect/>
+          </a:stretch>
+        </p:blipFill>
+        <p:spPr>
+          <a:xfrm>
+            <a:off x="685800" y="3383280"/>
+            <a:ext cx="2377440" cy="2377440"/>
+          </a:xfrm>
+          <a:prstGeom prst="rect">
+            <a:avLst/>
+          </a:prstGeom>
+        </p:spPr>
+      </p:pic>
+      <p:sp>
+        <p:nvSpPr>
+          <p:cNvPr id="6" name="Text 3"/>
+          <p:cNvSpPr txBox="1"/>
+          <p:nvPr/>
+        </p:nvSpPr>
+        <p:spPr>
+          <a:xfrm>
+            <a:off x="3657600" y="3246120"/>
+            <a:ext cx="7863840" cy="2651760"/>
+          </a:xfrm>
+          <a:prstGeom prst="rect">
+            <a:avLst/>
+          </a:prstGeom>
+          <a:noFill/>
+          <a:ln/>
+        </p:spPr>
+        <p:txBody>
+          <a:bodyPr wrap="square" lIns="0" tIns="0" rIns="0" bIns="0" rtlCol="0" anchor="t"/>
+          <a:lstStyle/>
+          <a:p>
+            <a:pPr indent="0" marL="0">
+              <a:buNone/>
+            </a:pPr>
+            <a:r>
+              <a:rPr lang="en-US" sz="1800" b="1" dirty="0">
+                <a:solidFill>
+                  <a:schemeClr val="tx1"/>
+                </a:solidFill>
+              </a:rPr>
+              <a:t>Try the live demo</a:t>
+            </a:r>
+            <a:endParaRPr lang="en-US" sz="1800" dirty="0"/>
+          </a:p>
+          <a:p>
+            <a:pPr indent="0" marL="0">
+              <a:buNone/>
+            </a:pPr>
+            <a:r>
+              <a:rPr lang="en-US" sz="1800" u="sng" dirty="0">
+                <a:solidFill>
+                  <a:schemeClr val="accent1"/>
+                </a:solidFill>
+                <a:hlinkClick r:id="rId2" invalidUrl="" action="" tgtFrame="" tooltip="" history="1" highlightClick="0" endSnd="0">
+                  <a:extLst>
+                    <a:ext uri="{A12FA001-AC4F-418D-AE19-62706E023703}">
+                      <ahyp:hlinkClr xmlns:ahyp="http://schemas.microsoft.com/office/drawing/2018/hyperlinkcolor" val="tx"/>
+                    </a:ext>
+                  </a:extLst>
+                </a:hlinkClick>
+              </a:rPr>
+              <a:t>priyanshu-singh-git.github.io/pixelforge/</a:t>
+            </a:r>
+            <a:endParaRPr lang="en-US" sz="1800" dirty="0"/>
+          </a:p>
+          <a:p>
+            <a:pPr indent="0" marL="0">
+              <a:buNone/>
+            </a:pPr>
+            <a:r>
+              <a:rPr lang="en-US" sz="600" dirty="0">
+                <a:solidFill>
+                  <a:srgbClr val="000000"/>
+                </a:solidFill>
+              </a:rPr>
+              <a:t> </a:t>
+            </a:r>
+            <a:endParaRPr lang="en-US" sz="1800" dirty="0"/>
+          </a:p>
+          <a:p>
+            <a:pPr indent="0" marL="0">
+              <a:buNone/>
+            </a:pPr>
+            <a:r>
+              <a:rPr lang="en-US" sz="1800" b="1" dirty="0">
+                <a:solidFill>
+                  <a:schemeClr val="tx1"/>
+                </a:solidFill>
+              </a:rPr>
+              <a:t>Engine code, CLI and benchmark</a:t>
+            </a:r>
+            <a:endParaRPr lang="en-US" sz="1800" dirty="0"/>
+          </a:p>
+          <a:p>
+            <a:pPr indent="0" marL="0">
+              <a:buNone/>
+            </a:pPr>
+            <a:r>
+              <a:rPr lang="en-US" sz="1800" u="sng" dirty="0">
+                <a:solidFill>
+                  <a:schemeClr val="accent1"/>
+                </a:solidFill>
+                <a:hlinkClick r:id="rId3" invalidUrl="" action="" tgtFrame="" tooltip="" history="1" highlightClick="0" endSnd="0">
+                  <a:extLst>
+                    <a:ext uri="{A12FA001-AC4F-418D-AE19-62706E023703}">
+                      <ahyp:hlinkClr xmlns:ahyp="http://schemas.microsoft.com/office/drawing/2018/hyperlinkcolor" val="tx"/>
+                    </a:ext>
+                  </a:extLst>
+                </a:hlinkClick>
+              </a:rPr>
+              <a:t>github.com/Priyanshu-Singh-git/pixelforge</a:t>
+            </a:r>
+            <a:endParaRPr lang="en-US" sz="1800" dirty="0"/>
+          </a:p>
+        </p:txBody>
+      </p:sp>
+      <p:sp>
+        <p:nvSpPr>
+          <p:cNvPr id="7" name="Text 4"/>
+          <p:cNvSpPr txBox="1"/>
+          <p:nvPr/>
+        </p:nvSpPr>
+        <p:spPr>
+          <a:xfrm>
+            <a:off x="548640" y="6172200"/>
+            <a:ext cx="11064240" cy="365760"/>
+          </a:xfrm>
+          <a:prstGeom prst="rect">
+            <a:avLst/>
+          </a:prstGeom>
+          <a:noFill/>
+          <a:ln/>
+        </p:spPr>
+        <p:txBody>
+          <a:bodyPr wrap="square" lIns="0" tIns="0" rIns="0" bIns="0" rtlCol="0" anchor="ctr"/>
+          <a:lstStyle/>
+          <a:p>
+            <a:pPr indent="0" marL="0">
+              <a:buNone/>
+            </a:pPr>
+            <a:r>
+              <a:rPr lang="en-US" sz="1200" dirty="0">
+                <a:solidFill>
+                  <a:schemeClr val="accent5"/>
+                </a:solidFill>
+              </a:rPr>
+              <a:t>Priyanshu Singh · Freelance AI / ML Engineer · Trained on Poly Haven CC0 textures. Commercial use of the code needs a licence; see the repo.</a:t>
+            </a:r>
+            <a:endParaRPr lang="en-US" sz="1200" dirty="0"/>
           </a:p>
         </p:txBody>
       </p:sp>
